--- a/_supplementary/tpp2/figures.pptx
+++ b/_supplementary/tpp2/figures.pptx
@@ -5,14 +5,15 @@
     <p:sldMasterId id="2147483660" r:id="rId1"/>
   </p:sldMasterIdLst>
   <p:notesMasterIdLst>
-    <p:notesMasterId r:id="rId7"/>
+    <p:notesMasterId r:id="rId8"/>
   </p:notesMasterIdLst>
   <p:sldIdLst>
     <p:sldId id="256" r:id="rId2"/>
     <p:sldId id="258" r:id="rId3"/>
     <p:sldId id="259" r:id="rId4"/>
-    <p:sldId id="260" r:id="rId5"/>
-    <p:sldId id="257" r:id="rId6"/>
+    <p:sldId id="257" r:id="rId5"/>
+    <p:sldId id="260" r:id="rId6"/>
+    <p:sldId id="261" r:id="rId7"/>
   </p:sldIdLst>
   <p:sldSz cx="13631863" cy="6858000"/>
   <p:notesSz cx="6858000" cy="9144000"/>
@@ -217,7 +218,7 @@
           <a:p>
             <a:fld id="{D0914005-DA0A-5444-A8D3-D79A1AEC42B5}" type="datetimeFigureOut">
               <a:rPr lang="en-DE" smtClean="0"/>
-              <a:t>27.06.21</a:t>
+              <a:t>23.07.21</a:t>
             </a:fld>
             <a:endParaRPr lang="en-DE"/>
           </a:p>
@@ -817,7 +818,7 @@
           <a:p>
             <a:fld id="{C0755909-49FB-D34C-A671-A404CA229B02}" type="slidenum">
               <a:rPr lang="en-DE" smtClean="0"/>
-              <a:t>5</a:t>
+              <a:t>4</a:t>
             </a:fld>
             <a:endParaRPr lang="en-DE"/>
           </a:p>
@@ -967,7 +968,7 @@
           <a:p>
             <a:fld id="{A31F8A59-2D92-E74A-BC27-7AE09B0A5DC4}" type="datetimeFigureOut">
               <a:rPr lang="en-DE" smtClean="0"/>
-              <a:t>27.06.21</a:t>
+              <a:t>23.07.21</a:t>
             </a:fld>
             <a:endParaRPr lang="en-DE"/>
           </a:p>
@@ -1137,7 +1138,7 @@
           <a:p>
             <a:fld id="{A31F8A59-2D92-E74A-BC27-7AE09B0A5DC4}" type="datetimeFigureOut">
               <a:rPr lang="en-DE" smtClean="0"/>
-              <a:t>27.06.21</a:t>
+              <a:t>23.07.21</a:t>
             </a:fld>
             <a:endParaRPr lang="en-DE"/>
           </a:p>
@@ -1317,7 +1318,7 @@
           <a:p>
             <a:fld id="{A31F8A59-2D92-E74A-BC27-7AE09B0A5DC4}" type="datetimeFigureOut">
               <a:rPr lang="en-DE" smtClean="0"/>
-              <a:t>27.06.21</a:t>
+              <a:t>23.07.21</a:t>
             </a:fld>
             <a:endParaRPr lang="en-DE"/>
           </a:p>
@@ -1487,7 +1488,7 @@
           <a:p>
             <a:fld id="{A31F8A59-2D92-E74A-BC27-7AE09B0A5DC4}" type="datetimeFigureOut">
               <a:rPr lang="en-DE" smtClean="0"/>
-              <a:t>27.06.21</a:t>
+              <a:t>23.07.21</a:t>
             </a:fld>
             <a:endParaRPr lang="en-DE"/>
           </a:p>
@@ -1733,7 +1734,7 @@
           <a:p>
             <a:fld id="{A31F8A59-2D92-E74A-BC27-7AE09B0A5DC4}" type="datetimeFigureOut">
               <a:rPr lang="en-DE" smtClean="0"/>
-              <a:t>27.06.21</a:t>
+              <a:t>23.07.21</a:t>
             </a:fld>
             <a:endParaRPr lang="en-DE"/>
           </a:p>
@@ -1965,7 +1966,7 @@
           <a:p>
             <a:fld id="{A31F8A59-2D92-E74A-BC27-7AE09B0A5DC4}" type="datetimeFigureOut">
               <a:rPr lang="en-DE" smtClean="0"/>
-              <a:t>27.06.21</a:t>
+              <a:t>23.07.21</a:t>
             </a:fld>
             <a:endParaRPr lang="en-DE"/>
           </a:p>
@@ -2332,7 +2333,7 @@
           <a:p>
             <a:fld id="{A31F8A59-2D92-E74A-BC27-7AE09B0A5DC4}" type="datetimeFigureOut">
               <a:rPr lang="en-DE" smtClean="0"/>
-              <a:t>27.06.21</a:t>
+              <a:t>23.07.21</a:t>
             </a:fld>
             <a:endParaRPr lang="en-DE"/>
           </a:p>
@@ -2450,7 +2451,7 @@
           <a:p>
             <a:fld id="{A31F8A59-2D92-E74A-BC27-7AE09B0A5DC4}" type="datetimeFigureOut">
               <a:rPr lang="en-DE" smtClean="0"/>
-              <a:t>27.06.21</a:t>
+              <a:t>23.07.21</a:t>
             </a:fld>
             <a:endParaRPr lang="en-DE"/>
           </a:p>
@@ -2545,7 +2546,7 @@
           <a:p>
             <a:fld id="{A31F8A59-2D92-E74A-BC27-7AE09B0A5DC4}" type="datetimeFigureOut">
               <a:rPr lang="en-DE" smtClean="0"/>
-              <a:t>27.06.21</a:t>
+              <a:t>23.07.21</a:t>
             </a:fld>
             <a:endParaRPr lang="en-DE"/>
           </a:p>
@@ -2822,7 +2823,7 @@
           <a:p>
             <a:fld id="{A31F8A59-2D92-E74A-BC27-7AE09B0A5DC4}" type="datetimeFigureOut">
               <a:rPr lang="en-DE" smtClean="0"/>
-              <a:t>27.06.21</a:t>
+              <a:t>23.07.21</a:t>
             </a:fld>
             <a:endParaRPr lang="en-DE"/>
           </a:p>
@@ -3079,7 +3080,7 @@
           <a:p>
             <a:fld id="{A31F8A59-2D92-E74A-BC27-7AE09B0A5DC4}" type="datetimeFigureOut">
               <a:rPr lang="en-DE" smtClean="0"/>
-              <a:t>27.06.21</a:t>
+              <a:t>23.07.21</a:t>
             </a:fld>
             <a:endParaRPr lang="en-DE"/>
           </a:p>
@@ -3292,7 +3293,7 @@
           <a:p>
             <a:fld id="{A31F8A59-2D92-E74A-BC27-7AE09B0A5DC4}" type="datetimeFigureOut">
               <a:rPr lang="en-DE" smtClean="0"/>
-              <a:t>27.06.21</a:t>
+              <a:t>23.07.21</a:t>
             </a:fld>
             <a:endParaRPr lang="en-DE"/>
           </a:p>
@@ -13289,8 +13290,8 @@
           </a:scene3d>
         </p:spPr>
       </p:pic>
-      <mc:AlternateContent xmlns:mc="http://schemas.openxmlformats.org/markup-compatibility/2006">
-        <mc:Choice xmlns:a14="http://schemas.microsoft.com/office/drawing/2010/main" Requires="a14">
+      <mc:AlternateContent xmlns:mc="http://schemas.openxmlformats.org/markup-compatibility/2006" xmlns:a14="http://schemas.microsoft.com/office/drawing/2010/main">
+        <mc:Choice Requires="a14">
           <p:graphicFrame>
             <p:nvGraphicFramePr>
               <p:cNvPr id="20" name="Table 19">
@@ -13848,7 +13849,7 @@
             </a:graphic>
           </p:graphicFrame>
         </mc:Choice>
-        <mc:Fallback>
+        <mc:Fallback xmlns="">
           <p:graphicFrame>
             <p:nvGraphicFramePr>
               <p:cNvPr id="20" name="Table 19">
@@ -14242,8 +14243,8 @@
           </a:fontRef>
         </p:style>
       </p:cxnSp>
-      <mc:AlternateContent xmlns:mc="http://schemas.openxmlformats.org/markup-compatibility/2006">
-        <mc:Choice xmlns:a14="http://schemas.microsoft.com/office/drawing/2010/main" Requires="a14">
+      <mc:AlternateContent xmlns:mc="http://schemas.openxmlformats.org/markup-compatibility/2006" xmlns:a14="http://schemas.microsoft.com/office/drawing/2010/main">
+        <mc:Choice Requires="a14">
           <p:sp>
             <p:nvSpPr>
               <p:cNvPr id="50" name="TextBox 49">
@@ -14336,7 +14337,7 @@
             </p:txBody>
           </p:sp>
         </mc:Choice>
-        <mc:Fallback>
+        <mc:Fallback xmlns="">
           <p:sp>
             <p:nvSpPr>
               <p:cNvPr id="50" name="TextBox 49">
@@ -14492,6 +14493,2907 @@
 </file>
 
 <file path=ppt/slides/slide4.xml><?xml version="1.0" encoding="utf-8"?>
+<p:sld xmlns:a="http://schemas.openxmlformats.org/drawingml/2006/main" xmlns:r="http://schemas.openxmlformats.org/officeDocument/2006/relationships" xmlns:p="http://schemas.openxmlformats.org/presentationml/2006/main">
+  <p:cSld>
+    <p:spTree>
+      <p:nvGrpSpPr>
+        <p:cNvPr id="1" name=""/>
+        <p:cNvGrpSpPr/>
+        <p:nvPr/>
+      </p:nvGrpSpPr>
+      <p:grpSpPr>
+        <a:xfrm>
+          <a:off x="0" y="0"/>
+          <a:ext cx="0" cy="0"/>
+          <a:chOff x="0" y="0"/>
+          <a:chExt cx="0" cy="0"/>
+        </a:xfrm>
+      </p:grpSpPr>
+      <p:sp>
+        <p:nvSpPr>
+          <p:cNvPr id="17" name="TextBox 16">
+            <a:extLst>
+              <a:ext uri="{FF2B5EF4-FFF2-40B4-BE49-F238E27FC236}">
+                <a16:creationId xmlns:a16="http://schemas.microsoft.com/office/drawing/2014/main" id="{1BFBA5A7-7285-F349-95B6-C53F70118BCA}"/>
+              </a:ext>
+            </a:extLst>
+          </p:cNvPr>
+          <p:cNvSpPr txBox="1"/>
+          <p:nvPr/>
+        </p:nvSpPr>
+        <p:spPr>
+          <a:xfrm>
+            <a:off x="8072224" y="1631555"/>
+            <a:ext cx="1659429" cy="461665"/>
+          </a:xfrm>
+          <a:prstGeom prst="rect">
+            <a:avLst/>
+          </a:prstGeom>
+          <a:noFill/>
+        </p:spPr>
+        <p:txBody>
+          <a:bodyPr wrap="none" rtlCol="0">
+            <a:spAutoFit/>
+          </a:bodyPr>
+          <a:lstStyle/>
+          <a:p>
+            <a:r>
+              <a:rPr lang="en-DE" sz="2400" dirty="0">
+                <a:latin typeface="Monaco" pitchFamily="2" charset="77"/>
+                <a:ea typeface="Menlo" panose="020B0609030804020204" pitchFamily="49" charset="0"/>
+                <a:cs typeface="Menlo" panose="020B0609030804020204" pitchFamily="49" charset="0"/>
+              </a:rPr>
+              <a:t>log_surv</a:t>
+            </a:r>
+          </a:p>
+        </p:txBody>
+      </p:sp>
+      <p:graphicFrame>
+        <p:nvGraphicFramePr>
+          <p:cNvPr id="18" name="Table 4">
+            <a:extLst>
+              <a:ext uri="{FF2B5EF4-FFF2-40B4-BE49-F238E27FC236}">
+                <a16:creationId xmlns:a16="http://schemas.microsoft.com/office/drawing/2014/main" id="{27A5CE71-9866-D043-8FE7-EA60B183B15D}"/>
+              </a:ext>
+            </a:extLst>
+          </p:cNvPr>
+          <p:cNvGraphicFramePr>
+            <a:graphicFrameLocks noGrp="1"/>
+          </p:cNvGraphicFramePr>
+          <p:nvPr>
+            <p:extLst>
+              <p:ext uri="{D42A27DB-BD31-4B8C-83A1-F6EECF244321}">
+                <p14:modId xmlns:p14="http://schemas.microsoft.com/office/powerpoint/2010/main" val="3340910911"/>
+              </p:ext>
+            </p:extLst>
+          </p:nvPr>
+        </p:nvGraphicFramePr>
+        <p:xfrm>
+          <a:off x="7254409" y="2351742"/>
+          <a:ext cx="3295060" cy="1861890"/>
+        </p:xfrm>
+        <a:graphic>
+          <a:graphicData uri="http://schemas.openxmlformats.org/drawingml/2006/table">
+            <a:tbl>
+              <a:tblPr firstRow="1" bandRow="1">
+                <a:tableStyleId>{2D5ABB26-0587-4C30-8999-92F81FD0307C}</a:tableStyleId>
+              </a:tblPr>
+              <a:tblGrid>
+                <a:gridCol w="659012">
+                  <a:extLst>
+                    <a:ext uri="{9D8B030D-6E8A-4147-A177-3AD203B41FA5}">
+                      <a16:colId xmlns:a16="http://schemas.microsoft.com/office/drawing/2014/main" val="3350277845"/>
+                    </a:ext>
+                  </a:extLst>
+                </a:gridCol>
+                <a:gridCol w="659012">
+                  <a:extLst>
+                    <a:ext uri="{9D8B030D-6E8A-4147-A177-3AD203B41FA5}">
+                      <a16:colId xmlns:a16="http://schemas.microsoft.com/office/drawing/2014/main" val="427396348"/>
+                    </a:ext>
+                  </a:extLst>
+                </a:gridCol>
+                <a:gridCol w="659012">
+                  <a:extLst>
+                    <a:ext uri="{9D8B030D-6E8A-4147-A177-3AD203B41FA5}">
+                      <a16:colId xmlns:a16="http://schemas.microsoft.com/office/drawing/2014/main" val="1158632962"/>
+                    </a:ext>
+                  </a:extLst>
+                </a:gridCol>
+                <a:gridCol w="659012">
+                  <a:extLst>
+                    <a:ext uri="{9D8B030D-6E8A-4147-A177-3AD203B41FA5}">
+                      <a16:colId xmlns:a16="http://schemas.microsoft.com/office/drawing/2014/main" val="2417830556"/>
+                    </a:ext>
+                  </a:extLst>
+                </a:gridCol>
+                <a:gridCol w="659012">
+                  <a:extLst>
+                    <a:ext uri="{9D8B030D-6E8A-4147-A177-3AD203B41FA5}">
+                      <a16:colId xmlns:a16="http://schemas.microsoft.com/office/drawing/2014/main" val="324716847"/>
+                    </a:ext>
+                  </a:extLst>
+                </a:gridCol>
+              </a:tblGrid>
+              <a:tr h="620630">
+                <a:tc>
+                  <a:txBody>
+                    <a:bodyPr/>
+                    <a:lstStyle/>
+                    <a:p>
+                      <a:pPr algn="l"/>
+                      <a:endParaRPr lang="en-DE" sz="2000" dirty="0"/>
+                    </a:p>
+                  </a:txBody>
+                  <a:tcPr marL="153032" marR="153032" marT="76516" marB="76516">
+                    <a:lnL w="38100" cap="flat" cmpd="sng" algn="ctr">
+                      <a:solidFill>
+                        <a:schemeClr val="tx1">
+                          <a:lumMod val="65000"/>
+                          <a:lumOff val="35000"/>
+                        </a:schemeClr>
+                      </a:solidFill>
+                      <a:prstDash val="solid"/>
+                      <a:round/>
+                      <a:headEnd type="none" w="med" len="med"/>
+                      <a:tailEnd type="none" w="med" len="med"/>
+                    </a:lnL>
+                    <a:lnR w="38100" cap="flat" cmpd="sng" algn="ctr">
+                      <a:solidFill>
+                        <a:schemeClr val="tx1">
+                          <a:lumMod val="65000"/>
+                          <a:lumOff val="35000"/>
+                        </a:schemeClr>
+                      </a:solidFill>
+                      <a:prstDash val="solid"/>
+                      <a:round/>
+                      <a:headEnd type="none" w="med" len="med"/>
+                      <a:tailEnd type="none" w="med" len="med"/>
+                    </a:lnR>
+                    <a:lnT w="38100" cap="flat" cmpd="sng" algn="ctr">
+                      <a:solidFill>
+                        <a:schemeClr val="tx1">
+                          <a:lumMod val="65000"/>
+                          <a:lumOff val="35000"/>
+                        </a:schemeClr>
+                      </a:solidFill>
+                      <a:prstDash val="solid"/>
+                      <a:round/>
+                      <a:headEnd type="none" w="med" len="med"/>
+                      <a:tailEnd type="none" w="med" len="med"/>
+                    </a:lnT>
+                    <a:lnB w="38100" cap="flat" cmpd="sng" algn="ctr">
+                      <a:solidFill>
+                        <a:schemeClr val="tx1">
+                          <a:lumMod val="65000"/>
+                          <a:lumOff val="35000"/>
+                        </a:schemeClr>
+                      </a:solidFill>
+                      <a:prstDash val="solid"/>
+                      <a:round/>
+                      <a:headEnd type="none" w="med" len="med"/>
+                      <a:tailEnd type="none" w="med" len="med"/>
+                    </a:lnB>
+                  </a:tcPr>
+                </a:tc>
+                <a:tc>
+                  <a:txBody>
+                    <a:bodyPr/>
+                    <a:lstStyle/>
+                    <a:p>
+                      <a:pPr algn="l"/>
+                      <a:endParaRPr lang="en-DE" sz="2000" dirty="0"/>
+                    </a:p>
+                  </a:txBody>
+                  <a:tcPr marL="153032" marR="153032" marT="76516" marB="76516">
+                    <a:lnL w="38100" cap="flat" cmpd="sng" algn="ctr">
+                      <a:solidFill>
+                        <a:schemeClr val="tx1">
+                          <a:lumMod val="65000"/>
+                          <a:lumOff val="35000"/>
+                        </a:schemeClr>
+                      </a:solidFill>
+                      <a:prstDash val="solid"/>
+                      <a:round/>
+                      <a:headEnd type="none" w="med" len="med"/>
+                      <a:tailEnd type="none" w="med" len="med"/>
+                    </a:lnL>
+                    <a:lnR w="38100" cap="flat" cmpd="sng" algn="ctr">
+                      <a:solidFill>
+                        <a:schemeClr val="tx1">
+                          <a:lumMod val="65000"/>
+                          <a:lumOff val="35000"/>
+                        </a:schemeClr>
+                      </a:solidFill>
+                      <a:prstDash val="solid"/>
+                      <a:round/>
+                      <a:headEnd type="none" w="med" len="med"/>
+                      <a:tailEnd type="none" w="med" len="med"/>
+                    </a:lnR>
+                    <a:lnT w="38100" cap="flat" cmpd="sng" algn="ctr">
+                      <a:solidFill>
+                        <a:schemeClr val="tx1">
+                          <a:lumMod val="65000"/>
+                          <a:lumOff val="35000"/>
+                        </a:schemeClr>
+                      </a:solidFill>
+                      <a:prstDash val="solid"/>
+                      <a:round/>
+                      <a:headEnd type="none" w="med" len="med"/>
+                      <a:tailEnd type="none" w="med" len="med"/>
+                    </a:lnT>
+                    <a:lnB w="38100" cap="flat" cmpd="sng" algn="ctr">
+                      <a:solidFill>
+                        <a:schemeClr val="tx1">
+                          <a:lumMod val="65000"/>
+                          <a:lumOff val="35000"/>
+                        </a:schemeClr>
+                      </a:solidFill>
+                      <a:prstDash val="solid"/>
+                      <a:round/>
+                      <a:headEnd type="none" w="med" len="med"/>
+                      <a:tailEnd type="none" w="med" len="med"/>
+                    </a:lnB>
+                  </a:tcPr>
+                </a:tc>
+                <a:tc>
+                  <a:txBody>
+                    <a:bodyPr/>
+                    <a:lstStyle/>
+                    <a:p>
+                      <a:pPr algn="l"/>
+                      <a:endParaRPr lang="en-DE" sz="2000" dirty="0"/>
+                    </a:p>
+                  </a:txBody>
+                  <a:tcPr marL="153032" marR="153032" marT="76516" marB="76516">
+                    <a:lnL w="38100" cap="flat" cmpd="sng" algn="ctr">
+                      <a:solidFill>
+                        <a:schemeClr val="tx1">
+                          <a:lumMod val="65000"/>
+                          <a:lumOff val="35000"/>
+                        </a:schemeClr>
+                      </a:solidFill>
+                      <a:prstDash val="solid"/>
+                      <a:round/>
+                      <a:headEnd type="none" w="med" len="med"/>
+                      <a:tailEnd type="none" w="med" len="med"/>
+                    </a:lnL>
+                    <a:lnR w="38100" cap="flat" cmpd="sng" algn="ctr">
+                      <a:solidFill>
+                        <a:schemeClr val="tx1">
+                          <a:lumMod val="65000"/>
+                          <a:lumOff val="35000"/>
+                        </a:schemeClr>
+                      </a:solidFill>
+                      <a:prstDash val="solid"/>
+                      <a:round/>
+                      <a:headEnd type="none" w="med" len="med"/>
+                      <a:tailEnd type="none" w="med" len="med"/>
+                    </a:lnR>
+                    <a:lnT w="38100" cap="flat" cmpd="sng" algn="ctr">
+                      <a:solidFill>
+                        <a:schemeClr val="tx1">
+                          <a:lumMod val="65000"/>
+                          <a:lumOff val="35000"/>
+                        </a:schemeClr>
+                      </a:solidFill>
+                      <a:prstDash val="solid"/>
+                      <a:round/>
+                      <a:headEnd type="none" w="med" len="med"/>
+                      <a:tailEnd type="none" w="med" len="med"/>
+                    </a:lnT>
+                    <a:lnB w="38100" cap="flat" cmpd="sng" algn="ctr">
+                      <a:solidFill>
+                        <a:schemeClr val="tx1">
+                          <a:lumMod val="65000"/>
+                          <a:lumOff val="35000"/>
+                        </a:schemeClr>
+                      </a:solidFill>
+                      <a:prstDash val="solid"/>
+                      <a:round/>
+                      <a:headEnd type="none" w="med" len="med"/>
+                      <a:tailEnd type="none" w="med" len="med"/>
+                    </a:lnB>
+                    <a:solidFill>
+                      <a:schemeClr val="accent2">
+                        <a:lumMod val="60000"/>
+                        <a:lumOff val="40000"/>
+                      </a:schemeClr>
+                    </a:solidFill>
+                  </a:tcPr>
+                </a:tc>
+                <a:tc>
+                  <a:txBody>
+                    <a:bodyPr/>
+                    <a:lstStyle/>
+                    <a:p>
+                      <a:pPr algn="l"/>
+                      <a:endParaRPr lang="en-DE" sz="2000" dirty="0"/>
+                    </a:p>
+                  </a:txBody>
+                  <a:tcPr marL="153032" marR="153032" marT="76516" marB="76516" anchor="ctr">
+                    <a:lnL w="38100" cap="flat" cmpd="sng" algn="ctr">
+                      <a:solidFill>
+                        <a:schemeClr val="tx1">
+                          <a:lumMod val="65000"/>
+                          <a:lumOff val="35000"/>
+                        </a:schemeClr>
+                      </a:solidFill>
+                      <a:prstDash val="solid"/>
+                      <a:round/>
+                      <a:headEnd type="none" w="med" len="med"/>
+                      <a:tailEnd type="none" w="med" len="med"/>
+                    </a:lnL>
+                    <a:lnR w="38100" cap="flat" cmpd="sng" algn="ctr">
+                      <a:solidFill>
+                        <a:schemeClr val="tx1">
+                          <a:lumMod val="65000"/>
+                          <a:lumOff val="35000"/>
+                        </a:schemeClr>
+                      </a:solidFill>
+                      <a:prstDash val="solid"/>
+                      <a:round/>
+                      <a:headEnd type="none" w="med" len="med"/>
+                      <a:tailEnd type="none" w="med" len="med"/>
+                    </a:lnR>
+                    <a:lnT w="38100" cap="flat" cmpd="sng" algn="ctr">
+                      <a:solidFill>
+                        <a:schemeClr val="tx1">
+                          <a:lumMod val="65000"/>
+                          <a:lumOff val="35000"/>
+                        </a:schemeClr>
+                      </a:solidFill>
+                      <a:prstDash val="solid"/>
+                      <a:round/>
+                      <a:headEnd type="none" w="med" len="med"/>
+                      <a:tailEnd type="none" w="med" len="med"/>
+                    </a:lnT>
+                    <a:lnB w="38100" cap="flat" cmpd="sng" algn="ctr">
+                      <a:solidFill>
+                        <a:schemeClr val="tx1">
+                          <a:lumMod val="65000"/>
+                          <a:lumOff val="35000"/>
+                        </a:schemeClr>
+                      </a:solidFill>
+                      <a:prstDash val="solid"/>
+                      <a:round/>
+                      <a:headEnd type="none" w="med" len="med"/>
+                      <a:tailEnd type="none" w="med" len="med"/>
+                    </a:lnB>
+                  </a:tcPr>
+                </a:tc>
+                <a:tc>
+                  <a:txBody>
+                    <a:bodyPr/>
+                    <a:lstStyle/>
+                    <a:p>
+                      <a:pPr algn="l"/>
+                      <a:endParaRPr lang="en-DE" sz="2000" dirty="0"/>
+                    </a:p>
+                  </a:txBody>
+                  <a:tcPr marL="153032" marR="153032" marT="76516" marB="76516" anchor="ctr">
+                    <a:lnL w="38100" cap="flat" cmpd="sng" algn="ctr">
+                      <a:solidFill>
+                        <a:schemeClr val="tx1">
+                          <a:lumMod val="65000"/>
+                          <a:lumOff val="35000"/>
+                        </a:schemeClr>
+                      </a:solidFill>
+                      <a:prstDash val="solid"/>
+                      <a:round/>
+                      <a:headEnd type="none" w="med" len="med"/>
+                      <a:tailEnd type="none" w="med" len="med"/>
+                    </a:lnL>
+                    <a:lnR w="38100" cap="flat" cmpd="sng" algn="ctr">
+                      <a:solidFill>
+                        <a:schemeClr val="tx1">
+                          <a:lumMod val="65000"/>
+                          <a:lumOff val="35000"/>
+                        </a:schemeClr>
+                      </a:solidFill>
+                      <a:prstDash val="solid"/>
+                      <a:round/>
+                      <a:headEnd type="none" w="med" len="med"/>
+                      <a:tailEnd type="none" w="med" len="med"/>
+                    </a:lnR>
+                    <a:lnT w="38100" cap="flat" cmpd="sng" algn="ctr">
+                      <a:solidFill>
+                        <a:schemeClr val="tx1">
+                          <a:lumMod val="65000"/>
+                          <a:lumOff val="35000"/>
+                        </a:schemeClr>
+                      </a:solidFill>
+                      <a:prstDash val="solid"/>
+                      <a:round/>
+                      <a:headEnd type="none" w="med" len="med"/>
+                      <a:tailEnd type="none" w="med" len="med"/>
+                    </a:lnT>
+                    <a:lnB w="38100" cap="flat" cmpd="sng" algn="ctr">
+                      <a:solidFill>
+                        <a:schemeClr val="tx1">
+                          <a:lumMod val="65000"/>
+                          <a:lumOff val="35000"/>
+                        </a:schemeClr>
+                      </a:solidFill>
+                      <a:prstDash val="solid"/>
+                      <a:round/>
+                      <a:headEnd type="none" w="med" len="med"/>
+                      <a:tailEnd type="none" w="med" len="med"/>
+                    </a:lnB>
+                  </a:tcPr>
+                </a:tc>
+                <a:extLst>
+                  <a:ext uri="{0D108BD9-81ED-4DB2-BD59-A6C34878D82A}">
+                    <a16:rowId xmlns:a16="http://schemas.microsoft.com/office/drawing/2014/main" val="2976503498"/>
+                  </a:ext>
+                </a:extLst>
+              </a:tr>
+              <a:tr h="620630">
+                <a:tc>
+                  <a:txBody>
+                    <a:bodyPr/>
+                    <a:lstStyle/>
+                    <a:p>
+                      <a:pPr algn="l"/>
+                      <a:endParaRPr lang="en-DE" sz="2000" dirty="0"/>
+                    </a:p>
+                  </a:txBody>
+                  <a:tcPr marL="153032" marR="153032" marT="76516" marB="76516">
+                    <a:lnL w="38100" cap="flat" cmpd="sng" algn="ctr">
+                      <a:solidFill>
+                        <a:schemeClr val="tx1">
+                          <a:lumMod val="65000"/>
+                          <a:lumOff val="35000"/>
+                        </a:schemeClr>
+                      </a:solidFill>
+                      <a:prstDash val="solid"/>
+                      <a:round/>
+                      <a:headEnd type="none" w="med" len="med"/>
+                      <a:tailEnd type="none" w="med" len="med"/>
+                    </a:lnL>
+                    <a:lnR w="38100" cap="flat" cmpd="sng" algn="ctr">
+                      <a:solidFill>
+                        <a:schemeClr val="tx1">
+                          <a:lumMod val="65000"/>
+                          <a:lumOff val="35000"/>
+                        </a:schemeClr>
+                      </a:solidFill>
+                      <a:prstDash val="solid"/>
+                      <a:round/>
+                      <a:headEnd type="none" w="med" len="med"/>
+                      <a:tailEnd type="none" w="med" len="med"/>
+                    </a:lnR>
+                    <a:lnT w="38100" cap="flat" cmpd="sng" algn="ctr">
+                      <a:solidFill>
+                        <a:schemeClr val="tx1">
+                          <a:lumMod val="65000"/>
+                          <a:lumOff val="35000"/>
+                        </a:schemeClr>
+                      </a:solidFill>
+                      <a:prstDash val="solid"/>
+                      <a:round/>
+                      <a:headEnd type="none" w="med" len="med"/>
+                      <a:tailEnd type="none" w="med" len="med"/>
+                    </a:lnT>
+                    <a:lnB w="38100" cap="flat" cmpd="sng" algn="ctr">
+                      <a:solidFill>
+                        <a:schemeClr val="tx1">
+                          <a:lumMod val="65000"/>
+                          <a:lumOff val="35000"/>
+                        </a:schemeClr>
+                      </a:solidFill>
+                      <a:prstDash val="solid"/>
+                      <a:round/>
+                      <a:headEnd type="none" w="med" len="med"/>
+                      <a:tailEnd type="none" w="med" len="med"/>
+                    </a:lnB>
+                  </a:tcPr>
+                </a:tc>
+                <a:tc>
+                  <a:txBody>
+                    <a:bodyPr/>
+                    <a:lstStyle/>
+                    <a:p>
+                      <a:pPr algn="l"/>
+                      <a:endParaRPr lang="en-DE" sz="2000" dirty="0"/>
+                    </a:p>
+                  </a:txBody>
+                  <a:tcPr marL="153032" marR="153032" marT="76516" marB="76516">
+                    <a:lnL w="38100" cap="flat" cmpd="sng" algn="ctr">
+                      <a:solidFill>
+                        <a:schemeClr val="tx1">
+                          <a:lumMod val="65000"/>
+                          <a:lumOff val="35000"/>
+                        </a:schemeClr>
+                      </a:solidFill>
+                      <a:prstDash val="solid"/>
+                      <a:round/>
+                      <a:headEnd type="none" w="med" len="med"/>
+                      <a:tailEnd type="none" w="med" len="med"/>
+                    </a:lnL>
+                    <a:lnR w="38100" cap="flat" cmpd="sng" algn="ctr">
+                      <a:solidFill>
+                        <a:schemeClr val="tx1">
+                          <a:lumMod val="65000"/>
+                          <a:lumOff val="35000"/>
+                        </a:schemeClr>
+                      </a:solidFill>
+                      <a:prstDash val="solid"/>
+                      <a:round/>
+                      <a:headEnd type="none" w="med" len="med"/>
+                      <a:tailEnd type="none" w="med" len="med"/>
+                    </a:lnR>
+                    <a:lnT w="38100" cap="flat" cmpd="sng" algn="ctr">
+                      <a:solidFill>
+                        <a:schemeClr val="tx1">
+                          <a:lumMod val="65000"/>
+                          <a:lumOff val="35000"/>
+                        </a:schemeClr>
+                      </a:solidFill>
+                      <a:prstDash val="solid"/>
+                      <a:round/>
+                      <a:headEnd type="none" w="med" len="med"/>
+                      <a:tailEnd type="none" w="med" len="med"/>
+                    </a:lnT>
+                    <a:lnB w="38100" cap="flat" cmpd="sng" algn="ctr">
+                      <a:solidFill>
+                        <a:schemeClr val="tx1">
+                          <a:lumMod val="65000"/>
+                          <a:lumOff val="35000"/>
+                        </a:schemeClr>
+                      </a:solidFill>
+                      <a:prstDash val="solid"/>
+                      <a:round/>
+                      <a:headEnd type="none" w="med" len="med"/>
+                      <a:tailEnd type="none" w="med" len="med"/>
+                    </a:lnB>
+                  </a:tcPr>
+                </a:tc>
+                <a:tc>
+                  <a:txBody>
+                    <a:bodyPr/>
+                    <a:lstStyle/>
+                    <a:p>
+                      <a:pPr algn="l"/>
+                      <a:endParaRPr lang="en-DE" sz="2000" dirty="0"/>
+                    </a:p>
+                  </a:txBody>
+                  <a:tcPr marL="153032" marR="153032" marT="76516" marB="76516">
+                    <a:lnL w="38100" cap="flat" cmpd="sng" algn="ctr">
+                      <a:solidFill>
+                        <a:schemeClr val="tx1">
+                          <a:lumMod val="65000"/>
+                          <a:lumOff val="35000"/>
+                        </a:schemeClr>
+                      </a:solidFill>
+                      <a:prstDash val="solid"/>
+                      <a:round/>
+                      <a:headEnd type="none" w="med" len="med"/>
+                      <a:tailEnd type="none" w="med" len="med"/>
+                    </a:lnL>
+                    <a:lnR w="38100" cap="flat" cmpd="sng" algn="ctr">
+                      <a:solidFill>
+                        <a:schemeClr val="tx1">
+                          <a:lumMod val="65000"/>
+                          <a:lumOff val="35000"/>
+                        </a:schemeClr>
+                      </a:solidFill>
+                      <a:prstDash val="solid"/>
+                      <a:round/>
+                      <a:headEnd type="none" w="med" len="med"/>
+                      <a:tailEnd type="none" w="med" len="med"/>
+                    </a:lnR>
+                    <a:lnT w="38100" cap="flat" cmpd="sng" algn="ctr">
+                      <a:solidFill>
+                        <a:schemeClr val="tx1">
+                          <a:lumMod val="65000"/>
+                          <a:lumOff val="35000"/>
+                        </a:schemeClr>
+                      </a:solidFill>
+                      <a:prstDash val="solid"/>
+                      <a:round/>
+                      <a:headEnd type="none" w="med" len="med"/>
+                      <a:tailEnd type="none" w="med" len="med"/>
+                    </a:lnT>
+                    <a:lnB w="38100" cap="flat" cmpd="sng" algn="ctr">
+                      <a:solidFill>
+                        <a:schemeClr val="tx1">
+                          <a:lumMod val="65000"/>
+                          <a:lumOff val="35000"/>
+                        </a:schemeClr>
+                      </a:solidFill>
+                      <a:prstDash val="solid"/>
+                      <a:round/>
+                      <a:headEnd type="none" w="med" len="med"/>
+                      <a:tailEnd type="none" w="med" len="med"/>
+                    </a:lnB>
+                  </a:tcPr>
+                </a:tc>
+                <a:tc>
+                  <a:txBody>
+                    <a:bodyPr/>
+                    <a:lstStyle/>
+                    <a:p>
+                      <a:pPr algn="l"/>
+                      <a:endParaRPr lang="en-DE" sz="2000" dirty="0"/>
+                    </a:p>
+                  </a:txBody>
+                  <a:tcPr marL="153032" marR="153032" marT="76516" marB="76516">
+                    <a:lnL w="38100" cap="flat" cmpd="sng" algn="ctr">
+                      <a:solidFill>
+                        <a:schemeClr val="tx1">
+                          <a:lumMod val="65000"/>
+                          <a:lumOff val="35000"/>
+                        </a:schemeClr>
+                      </a:solidFill>
+                      <a:prstDash val="solid"/>
+                      <a:round/>
+                      <a:headEnd type="none" w="med" len="med"/>
+                      <a:tailEnd type="none" w="med" len="med"/>
+                    </a:lnL>
+                    <a:lnR w="38100" cap="flat" cmpd="sng" algn="ctr">
+                      <a:solidFill>
+                        <a:schemeClr val="tx1">
+                          <a:lumMod val="65000"/>
+                          <a:lumOff val="35000"/>
+                        </a:schemeClr>
+                      </a:solidFill>
+                      <a:prstDash val="solid"/>
+                      <a:round/>
+                      <a:headEnd type="none" w="med" len="med"/>
+                      <a:tailEnd type="none" w="med" len="med"/>
+                    </a:lnR>
+                    <a:lnT w="38100" cap="flat" cmpd="sng" algn="ctr">
+                      <a:solidFill>
+                        <a:schemeClr val="tx1">
+                          <a:lumMod val="65000"/>
+                          <a:lumOff val="35000"/>
+                        </a:schemeClr>
+                      </a:solidFill>
+                      <a:prstDash val="solid"/>
+                      <a:round/>
+                      <a:headEnd type="none" w="med" len="med"/>
+                      <a:tailEnd type="none" w="med" len="med"/>
+                    </a:lnT>
+                    <a:lnB w="38100" cap="flat" cmpd="sng" algn="ctr">
+                      <a:solidFill>
+                        <a:schemeClr val="tx1">
+                          <a:lumMod val="65000"/>
+                          <a:lumOff val="35000"/>
+                        </a:schemeClr>
+                      </a:solidFill>
+                      <a:prstDash val="solid"/>
+                      <a:round/>
+                      <a:headEnd type="none" w="med" len="med"/>
+                      <a:tailEnd type="none" w="med" len="med"/>
+                    </a:lnB>
+                  </a:tcPr>
+                </a:tc>
+                <a:tc>
+                  <a:txBody>
+                    <a:bodyPr/>
+                    <a:lstStyle/>
+                    <a:p>
+                      <a:pPr algn="l"/>
+                      <a:endParaRPr lang="en-DE" sz="2000" dirty="0"/>
+                    </a:p>
+                  </a:txBody>
+                  <a:tcPr marL="153032" marR="153032" marT="76516" marB="76516">
+                    <a:lnL w="38100" cap="flat" cmpd="sng" algn="ctr">
+                      <a:solidFill>
+                        <a:schemeClr val="tx1">
+                          <a:lumMod val="65000"/>
+                          <a:lumOff val="35000"/>
+                        </a:schemeClr>
+                      </a:solidFill>
+                      <a:prstDash val="solid"/>
+                      <a:round/>
+                      <a:headEnd type="none" w="med" len="med"/>
+                      <a:tailEnd type="none" w="med" len="med"/>
+                    </a:lnL>
+                    <a:lnR w="38100" cap="flat" cmpd="sng" algn="ctr">
+                      <a:solidFill>
+                        <a:schemeClr val="tx1">
+                          <a:lumMod val="65000"/>
+                          <a:lumOff val="35000"/>
+                        </a:schemeClr>
+                      </a:solidFill>
+                      <a:prstDash val="solid"/>
+                      <a:round/>
+                      <a:headEnd type="none" w="med" len="med"/>
+                      <a:tailEnd type="none" w="med" len="med"/>
+                    </a:lnR>
+                    <a:lnT w="38100" cap="flat" cmpd="sng" algn="ctr">
+                      <a:solidFill>
+                        <a:schemeClr val="tx1">
+                          <a:lumMod val="65000"/>
+                          <a:lumOff val="35000"/>
+                        </a:schemeClr>
+                      </a:solidFill>
+                      <a:prstDash val="solid"/>
+                      <a:round/>
+                      <a:headEnd type="none" w="med" len="med"/>
+                      <a:tailEnd type="none" w="med" len="med"/>
+                    </a:lnT>
+                    <a:lnB w="38100" cap="flat" cmpd="sng" algn="ctr">
+                      <a:solidFill>
+                        <a:schemeClr val="tx1">
+                          <a:lumMod val="65000"/>
+                          <a:lumOff val="35000"/>
+                        </a:schemeClr>
+                      </a:solidFill>
+                      <a:prstDash val="solid"/>
+                      <a:round/>
+                      <a:headEnd type="none" w="med" len="med"/>
+                      <a:tailEnd type="none" w="med" len="med"/>
+                    </a:lnB>
+                    <a:solidFill>
+                      <a:schemeClr val="accent2">
+                        <a:lumMod val="60000"/>
+                        <a:lumOff val="40000"/>
+                      </a:schemeClr>
+                    </a:solidFill>
+                  </a:tcPr>
+                </a:tc>
+                <a:extLst>
+                  <a:ext uri="{0D108BD9-81ED-4DB2-BD59-A6C34878D82A}">
+                    <a16:rowId xmlns:a16="http://schemas.microsoft.com/office/drawing/2014/main" val="3711746142"/>
+                  </a:ext>
+                </a:extLst>
+              </a:tr>
+              <a:tr h="620630">
+                <a:tc>
+                  <a:txBody>
+                    <a:bodyPr/>
+                    <a:lstStyle/>
+                    <a:p>
+                      <a:pPr algn="l"/>
+                      <a:endParaRPr lang="en-DE" sz="2000" dirty="0"/>
+                    </a:p>
+                  </a:txBody>
+                  <a:tcPr marL="153032" marR="153032" marT="76516" marB="76516">
+                    <a:lnL w="38100" cap="flat" cmpd="sng" algn="ctr">
+                      <a:solidFill>
+                        <a:schemeClr val="tx1">
+                          <a:lumMod val="65000"/>
+                          <a:lumOff val="35000"/>
+                        </a:schemeClr>
+                      </a:solidFill>
+                      <a:prstDash val="solid"/>
+                      <a:round/>
+                      <a:headEnd type="none" w="med" len="med"/>
+                      <a:tailEnd type="none" w="med" len="med"/>
+                    </a:lnL>
+                    <a:lnR w="38100" cap="flat" cmpd="sng" algn="ctr">
+                      <a:solidFill>
+                        <a:schemeClr val="tx1">
+                          <a:lumMod val="65000"/>
+                          <a:lumOff val="35000"/>
+                        </a:schemeClr>
+                      </a:solidFill>
+                      <a:prstDash val="solid"/>
+                      <a:round/>
+                      <a:headEnd type="none" w="med" len="med"/>
+                      <a:tailEnd type="none" w="med" len="med"/>
+                    </a:lnR>
+                    <a:lnT w="38100" cap="flat" cmpd="sng" algn="ctr">
+                      <a:solidFill>
+                        <a:schemeClr val="tx1">
+                          <a:lumMod val="65000"/>
+                          <a:lumOff val="35000"/>
+                        </a:schemeClr>
+                      </a:solidFill>
+                      <a:prstDash val="solid"/>
+                      <a:round/>
+                      <a:headEnd type="none" w="med" len="med"/>
+                      <a:tailEnd type="none" w="med" len="med"/>
+                    </a:lnT>
+                    <a:lnB w="38100" cap="flat" cmpd="sng" algn="ctr">
+                      <a:solidFill>
+                        <a:schemeClr val="tx1">
+                          <a:lumMod val="65000"/>
+                          <a:lumOff val="35000"/>
+                        </a:schemeClr>
+                      </a:solidFill>
+                      <a:prstDash val="solid"/>
+                      <a:round/>
+                      <a:headEnd type="none" w="med" len="med"/>
+                      <a:tailEnd type="none" w="med" len="med"/>
+                    </a:lnB>
+                  </a:tcPr>
+                </a:tc>
+                <a:tc>
+                  <a:txBody>
+                    <a:bodyPr/>
+                    <a:lstStyle/>
+                    <a:p>
+                      <a:pPr algn="l"/>
+                      <a:endParaRPr lang="en-DE" sz="2000" dirty="0"/>
+                    </a:p>
+                  </a:txBody>
+                  <a:tcPr marL="153032" marR="153032" marT="76516" marB="76516">
+                    <a:lnL w="38100" cap="flat" cmpd="sng" algn="ctr">
+                      <a:solidFill>
+                        <a:schemeClr val="tx1">
+                          <a:lumMod val="65000"/>
+                          <a:lumOff val="35000"/>
+                        </a:schemeClr>
+                      </a:solidFill>
+                      <a:prstDash val="solid"/>
+                      <a:round/>
+                      <a:headEnd type="none" w="med" len="med"/>
+                      <a:tailEnd type="none" w="med" len="med"/>
+                    </a:lnL>
+                    <a:lnR w="38100" cap="flat" cmpd="sng" algn="ctr">
+                      <a:solidFill>
+                        <a:schemeClr val="tx1">
+                          <a:lumMod val="65000"/>
+                          <a:lumOff val="35000"/>
+                        </a:schemeClr>
+                      </a:solidFill>
+                      <a:prstDash val="solid"/>
+                      <a:round/>
+                      <a:headEnd type="none" w="med" len="med"/>
+                      <a:tailEnd type="none" w="med" len="med"/>
+                    </a:lnR>
+                    <a:lnT w="38100" cap="flat" cmpd="sng" algn="ctr">
+                      <a:solidFill>
+                        <a:schemeClr val="tx1">
+                          <a:lumMod val="65000"/>
+                          <a:lumOff val="35000"/>
+                        </a:schemeClr>
+                      </a:solidFill>
+                      <a:prstDash val="solid"/>
+                      <a:round/>
+                      <a:headEnd type="none" w="med" len="med"/>
+                      <a:tailEnd type="none" w="med" len="med"/>
+                    </a:lnT>
+                    <a:lnB w="38100" cap="flat" cmpd="sng" algn="ctr">
+                      <a:solidFill>
+                        <a:schemeClr val="tx1">
+                          <a:lumMod val="65000"/>
+                          <a:lumOff val="35000"/>
+                        </a:schemeClr>
+                      </a:solidFill>
+                      <a:prstDash val="solid"/>
+                      <a:round/>
+                      <a:headEnd type="none" w="med" len="med"/>
+                      <a:tailEnd type="none" w="med" len="med"/>
+                    </a:lnB>
+                  </a:tcPr>
+                </a:tc>
+                <a:tc>
+                  <a:txBody>
+                    <a:bodyPr/>
+                    <a:lstStyle/>
+                    <a:p>
+                      <a:pPr algn="l"/>
+                      <a:endParaRPr lang="en-DE" sz="2000" dirty="0"/>
+                    </a:p>
+                  </a:txBody>
+                  <a:tcPr marL="153032" marR="153032" marT="76516" marB="76516">
+                    <a:lnL w="38100" cap="flat" cmpd="sng" algn="ctr">
+                      <a:solidFill>
+                        <a:schemeClr val="tx1">
+                          <a:lumMod val="65000"/>
+                          <a:lumOff val="35000"/>
+                        </a:schemeClr>
+                      </a:solidFill>
+                      <a:prstDash val="solid"/>
+                      <a:round/>
+                      <a:headEnd type="none" w="med" len="med"/>
+                      <a:tailEnd type="none" w="med" len="med"/>
+                    </a:lnL>
+                    <a:lnR w="38100" cap="flat" cmpd="sng" algn="ctr">
+                      <a:solidFill>
+                        <a:schemeClr val="tx1">
+                          <a:lumMod val="65000"/>
+                          <a:lumOff val="35000"/>
+                        </a:schemeClr>
+                      </a:solidFill>
+                      <a:prstDash val="solid"/>
+                      <a:round/>
+                      <a:headEnd type="none" w="med" len="med"/>
+                      <a:tailEnd type="none" w="med" len="med"/>
+                    </a:lnR>
+                    <a:lnT w="38100" cap="flat" cmpd="sng" algn="ctr">
+                      <a:solidFill>
+                        <a:schemeClr val="tx1">
+                          <a:lumMod val="65000"/>
+                          <a:lumOff val="35000"/>
+                        </a:schemeClr>
+                      </a:solidFill>
+                      <a:prstDash val="solid"/>
+                      <a:round/>
+                      <a:headEnd type="none" w="med" len="med"/>
+                      <a:tailEnd type="none" w="med" len="med"/>
+                    </a:lnT>
+                    <a:lnB w="38100" cap="flat" cmpd="sng" algn="ctr">
+                      <a:solidFill>
+                        <a:schemeClr val="tx1">
+                          <a:lumMod val="65000"/>
+                          <a:lumOff val="35000"/>
+                        </a:schemeClr>
+                      </a:solidFill>
+                      <a:prstDash val="solid"/>
+                      <a:round/>
+                      <a:headEnd type="none" w="med" len="med"/>
+                      <a:tailEnd type="none" w="med" len="med"/>
+                    </a:lnB>
+                  </a:tcPr>
+                </a:tc>
+                <a:tc>
+                  <a:txBody>
+                    <a:bodyPr/>
+                    <a:lstStyle/>
+                    <a:p>
+                      <a:pPr algn="l"/>
+                      <a:endParaRPr lang="en-DE" sz="2000" dirty="0"/>
+                    </a:p>
+                  </a:txBody>
+                  <a:tcPr marL="153032" marR="153032" marT="76516" marB="76516">
+                    <a:lnL w="38100" cap="flat" cmpd="sng" algn="ctr">
+                      <a:solidFill>
+                        <a:schemeClr val="tx1">
+                          <a:lumMod val="65000"/>
+                          <a:lumOff val="35000"/>
+                        </a:schemeClr>
+                      </a:solidFill>
+                      <a:prstDash val="solid"/>
+                      <a:round/>
+                      <a:headEnd type="none" w="med" len="med"/>
+                      <a:tailEnd type="none" w="med" len="med"/>
+                    </a:lnL>
+                    <a:lnR w="38100" cap="flat" cmpd="sng" algn="ctr">
+                      <a:solidFill>
+                        <a:schemeClr val="tx1">
+                          <a:lumMod val="65000"/>
+                          <a:lumOff val="35000"/>
+                        </a:schemeClr>
+                      </a:solidFill>
+                      <a:prstDash val="solid"/>
+                      <a:round/>
+                      <a:headEnd type="none" w="med" len="med"/>
+                      <a:tailEnd type="none" w="med" len="med"/>
+                    </a:lnR>
+                    <a:lnT w="38100" cap="flat" cmpd="sng" algn="ctr">
+                      <a:solidFill>
+                        <a:schemeClr val="tx1">
+                          <a:lumMod val="65000"/>
+                          <a:lumOff val="35000"/>
+                        </a:schemeClr>
+                      </a:solidFill>
+                      <a:prstDash val="solid"/>
+                      <a:round/>
+                      <a:headEnd type="none" w="med" len="med"/>
+                      <a:tailEnd type="none" w="med" len="med"/>
+                    </a:lnT>
+                    <a:lnB w="38100" cap="flat" cmpd="sng" algn="ctr">
+                      <a:solidFill>
+                        <a:schemeClr val="tx1">
+                          <a:lumMod val="65000"/>
+                          <a:lumOff val="35000"/>
+                        </a:schemeClr>
+                      </a:solidFill>
+                      <a:prstDash val="solid"/>
+                      <a:round/>
+                      <a:headEnd type="none" w="med" len="med"/>
+                      <a:tailEnd type="none" w="med" len="med"/>
+                    </a:lnB>
+                    <a:solidFill>
+                      <a:schemeClr val="accent2">
+                        <a:lumMod val="60000"/>
+                        <a:lumOff val="40000"/>
+                      </a:schemeClr>
+                    </a:solidFill>
+                  </a:tcPr>
+                </a:tc>
+                <a:tc>
+                  <a:txBody>
+                    <a:bodyPr/>
+                    <a:lstStyle/>
+                    <a:p>
+                      <a:pPr algn="l"/>
+                      <a:endParaRPr lang="en-DE" sz="2000" dirty="0"/>
+                    </a:p>
+                  </a:txBody>
+                  <a:tcPr marL="153032" marR="153032" marT="76516" marB="76516" anchor="ctr">
+                    <a:lnL w="38100" cap="flat" cmpd="sng" algn="ctr">
+                      <a:solidFill>
+                        <a:schemeClr val="tx1">
+                          <a:lumMod val="65000"/>
+                          <a:lumOff val="35000"/>
+                        </a:schemeClr>
+                      </a:solidFill>
+                      <a:prstDash val="solid"/>
+                      <a:round/>
+                      <a:headEnd type="none" w="med" len="med"/>
+                      <a:tailEnd type="none" w="med" len="med"/>
+                    </a:lnL>
+                    <a:lnR w="38100" cap="flat" cmpd="sng" algn="ctr">
+                      <a:solidFill>
+                        <a:schemeClr val="tx1">
+                          <a:lumMod val="65000"/>
+                          <a:lumOff val="35000"/>
+                        </a:schemeClr>
+                      </a:solidFill>
+                      <a:prstDash val="solid"/>
+                      <a:round/>
+                      <a:headEnd type="none" w="med" len="med"/>
+                      <a:tailEnd type="none" w="med" len="med"/>
+                    </a:lnR>
+                    <a:lnT w="38100" cap="flat" cmpd="sng" algn="ctr">
+                      <a:solidFill>
+                        <a:schemeClr val="tx1">
+                          <a:lumMod val="65000"/>
+                          <a:lumOff val="35000"/>
+                        </a:schemeClr>
+                      </a:solidFill>
+                      <a:prstDash val="solid"/>
+                      <a:round/>
+                      <a:headEnd type="none" w="med" len="med"/>
+                      <a:tailEnd type="none" w="med" len="med"/>
+                    </a:lnT>
+                    <a:lnB w="38100" cap="flat" cmpd="sng" algn="ctr">
+                      <a:solidFill>
+                        <a:schemeClr val="tx1">
+                          <a:lumMod val="65000"/>
+                          <a:lumOff val="35000"/>
+                        </a:schemeClr>
+                      </a:solidFill>
+                      <a:prstDash val="solid"/>
+                      <a:round/>
+                      <a:headEnd type="none" w="med" len="med"/>
+                      <a:tailEnd type="none" w="med" len="med"/>
+                    </a:lnB>
+                  </a:tcPr>
+                </a:tc>
+                <a:extLst>
+                  <a:ext uri="{0D108BD9-81ED-4DB2-BD59-A6C34878D82A}">
+                    <a16:rowId xmlns:a16="http://schemas.microsoft.com/office/drawing/2014/main" val="1090502963"/>
+                  </a:ext>
+                </a:extLst>
+              </a:tr>
+            </a:tbl>
+          </a:graphicData>
+        </a:graphic>
+      </p:graphicFrame>
+      <p:sp>
+        <p:nvSpPr>
+          <p:cNvPr id="19" name="TextBox 18">
+            <a:extLst>
+              <a:ext uri="{FF2B5EF4-FFF2-40B4-BE49-F238E27FC236}">
+                <a16:creationId xmlns:a16="http://schemas.microsoft.com/office/drawing/2014/main" id="{70115193-E3A5-F048-86F8-3B8C841075E1}"/>
+              </a:ext>
+            </a:extLst>
+          </p:cNvPr>
+          <p:cNvSpPr txBox="1"/>
+          <p:nvPr/>
+        </p:nvSpPr>
+        <p:spPr>
+          <a:xfrm>
+            <a:off x="3715570" y="1631555"/>
+            <a:ext cx="1475084" cy="461665"/>
+          </a:xfrm>
+          <a:prstGeom prst="rect">
+            <a:avLst/>
+          </a:prstGeom>
+          <a:noFill/>
+        </p:spPr>
+        <p:txBody>
+          <a:bodyPr wrap="none" rtlCol="0">
+            <a:spAutoFit/>
+          </a:bodyPr>
+          <a:lstStyle/>
+          <a:p>
+            <a:r>
+              <a:rPr lang="en-DE" sz="2400" dirty="0">
+                <a:latin typeface="Monaco" pitchFamily="2" charset="77"/>
+                <a:ea typeface="Menlo" panose="020B0609030804020204" pitchFamily="49" charset="0"/>
+                <a:cs typeface="Menlo" panose="020B0609030804020204" pitchFamily="49" charset="0"/>
+              </a:rPr>
+              <a:t>log_pdf</a:t>
+            </a:r>
+          </a:p>
+        </p:txBody>
+      </p:sp>
+      <p:graphicFrame>
+        <p:nvGraphicFramePr>
+          <p:cNvPr id="21" name="Table 4">
+            <a:extLst>
+              <a:ext uri="{FF2B5EF4-FFF2-40B4-BE49-F238E27FC236}">
+                <a16:creationId xmlns:a16="http://schemas.microsoft.com/office/drawing/2014/main" id="{6EB6ADCD-8B59-4C48-86E7-314C721F5DCB}"/>
+              </a:ext>
+            </a:extLst>
+          </p:cNvPr>
+          <p:cNvGraphicFramePr>
+            <a:graphicFrameLocks noGrp="1"/>
+          </p:cNvGraphicFramePr>
+          <p:nvPr>
+            <p:extLst>
+              <p:ext uri="{D42A27DB-BD31-4B8C-83A1-F6EECF244321}">
+                <p14:modId xmlns:p14="http://schemas.microsoft.com/office/powerpoint/2010/main" val="4187090387"/>
+              </p:ext>
+            </p:extLst>
+          </p:nvPr>
+        </p:nvGraphicFramePr>
+        <p:xfrm>
+          <a:off x="2810499" y="2351742"/>
+          <a:ext cx="3295060" cy="1861890"/>
+        </p:xfrm>
+        <a:graphic>
+          <a:graphicData uri="http://schemas.openxmlformats.org/drawingml/2006/table">
+            <a:tbl>
+              <a:tblPr firstRow="1" bandRow="1">
+                <a:tableStyleId>{2D5ABB26-0587-4C30-8999-92F81FD0307C}</a:tableStyleId>
+              </a:tblPr>
+              <a:tblGrid>
+                <a:gridCol w="659012">
+                  <a:extLst>
+                    <a:ext uri="{9D8B030D-6E8A-4147-A177-3AD203B41FA5}">
+                      <a16:colId xmlns:a16="http://schemas.microsoft.com/office/drawing/2014/main" val="3350277845"/>
+                    </a:ext>
+                  </a:extLst>
+                </a:gridCol>
+                <a:gridCol w="659012">
+                  <a:extLst>
+                    <a:ext uri="{9D8B030D-6E8A-4147-A177-3AD203B41FA5}">
+                      <a16:colId xmlns:a16="http://schemas.microsoft.com/office/drawing/2014/main" val="427396348"/>
+                    </a:ext>
+                  </a:extLst>
+                </a:gridCol>
+                <a:gridCol w="659012">
+                  <a:extLst>
+                    <a:ext uri="{9D8B030D-6E8A-4147-A177-3AD203B41FA5}">
+                      <a16:colId xmlns:a16="http://schemas.microsoft.com/office/drawing/2014/main" val="1158632962"/>
+                    </a:ext>
+                  </a:extLst>
+                </a:gridCol>
+                <a:gridCol w="659012">
+                  <a:extLst>
+                    <a:ext uri="{9D8B030D-6E8A-4147-A177-3AD203B41FA5}">
+                      <a16:colId xmlns:a16="http://schemas.microsoft.com/office/drawing/2014/main" val="2417830556"/>
+                    </a:ext>
+                  </a:extLst>
+                </a:gridCol>
+                <a:gridCol w="659012">
+                  <a:extLst>
+                    <a:ext uri="{9D8B030D-6E8A-4147-A177-3AD203B41FA5}">
+                      <a16:colId xmlns:a16="http://schemas.microsoft.com/office/drawing/2014/main" val="324716847"/>
+                    </a:ext>
+                  </a:extLst>
+                </a:gridCol>
+              </a:tblGrid>
+              <a:tr h="620630">
+                <a:tc>
+                  <a:txBody>
+                    <a:bodyPr/>
+                    <a:lstStyle/>
+                    <a:p>
+                      <a:pPr algn="l"/>
+                      <a:endParaRPr lang="en-DE" sz="2000" dirty="0"/>
+                    </a:p>
+                  </a:txBody>
+                  <a:tcPr marL="153032" marR="153032" marT="76516" marB="76516">
+                    <a:lnL w="38100" cap="flat" cmpd="sng" algn="ctr">
+                      <a:solidFill>
+                        <a:schemeClr val="tx1">
+                          <a:lumMod val="65000"/>
+                          <a:lumOff val="35000"/>
+                        </a:schemeClr>
+                      </a:solidFill>
+                      <a:prstDash val="solid"/>
+                      <a:round/>
+                      <a:headEnd type="none" w="med" len="med"/>
+                      <a:tailEnd type="none" w="med" len="med"/>
+                    </a:lnL>
+                    <a:lnR w="38100" cap="flat" cmpd="sng" algn="ctr">
+                      <a:solidFill>
+                        <a:schemeClr val="tx1">
+                          <a:lumMod val="65000"/>
+                          <a:lumOff val="35000"/>
+                        </a:schemeClr>
+                      </a:solidFill>
+                      <a:prstDash val="solid"/>
+                      <a:round/>
+                      <a:headEnd type="none" w="med" len="med"/>
+                      <a:tailEnd type="none" w="med" len="med"/>
+                    </a:lnR>
+                    <a:lnT w="38100" cap="flat" cmpd="sng" algn="ctr">
+                      <a:solidFill>
+                        <a:schemeClr val="tx1">
+                          <a:lumMod val="65000"/>
+                          <a:lumOff val="35000"/>
+                        </a:schemeClr>
+                      </a:solidFill>
+                      <a:prstDash val="solid"/>
+                      <a:round/>
+                      <a:headEnd type="none" w="med" len="med"/>
+                      <a:tailEnd type="none" w="med" len="med"/>
+                    </a:lnT>
+                    <a:lnB w="38100" cap="flat" cmpd="sng" algn="ctr">
+                      <a:solidFill>
+                        <a:schemeClr val="tx1">
+                          <a:lumMod val="65000"/>
+                          <a:lumOff val="35000"/>
+                        </a:schemeClr>
+                      </a:solidFill>
+                      <a:prstDash val="solid"/>
+                      <a:round/>
+                      <a:headEnd type="none" w="med" len="med"/>
+                      <a:tailEnd type="none" w="med" len="med"/>
+                    </a:lnB>
+                    <a:solidFill>
+                      <a:schemeClr val="accent2">
+                        <a:lumMod val="60000"/>
+                        <a:lumOff val="40000"/>
+                      </a:schemeClr>
+                    </a:solidFill>
+                  </a:tcPr>
+                </a:tc>
+                <a:tc>
+                  <a:txBody>
+                    <a:bodyPr/>
+                    <a:lstStyle/>
+                    <a:p>
+                      <a:pPr algn="l"/>
+                      <a:endParaRPr lang="en-DE" sz="2000" dirty="0"/>
+                    </a:p>
+                  </a:txBody>
+                  <a:tcPr marL="153032" marR="153032" marT="76516" marB="76516">
+                    <a:lnL w="38100" cap="flat" cmpd="sng" algn="ctr">
+                      <a:solidFill>
+                        <a:schemeClr val="tx1">
+                          <a:lumMod val="65000"/>
+                          <a:lumOff val="35000"/>
+                        </a:schemeClr>
+                      </a:solidFill>
+                      <a:prstDash val="solid"/>
+                      <a:round/>
+                      <a:headEnd type="none" w="med" len="med"/>
+                      <a:tailEnd type="none" w="med" len="med"/>
+                    </a:lnL>
+                    <a:lnR w="38100" cap="flat" cmpd="sng" algn="ctr">
+                      <a:solidFill>
+                        <a:schemeClr val="tx1">
+                          <a:lumMod val="65000"/>
+                          <a:lumOff val="35000"/>
+                        </a:schemeClr>
+                      </a:solidFill>
+                      <a:prstDash val="solid"/>
+                      <a:round/>
+                      <a:headEnd type="none" w="med" len="med"/>
+                      <a:tailEnd type="none" w="med" len="med"/>
+                    </a:lnR>
+                    <a:lnT w="38100" cap="flat" cmpd="sng" algn="ctr">
+                      <a:solidFill>
+                        <a:schemeClr val="tx1">
+                          <a:lumMod val="65000"/>
+                          <a:lumOff val="35000"/>
+                        </a:schemeClr>
+                      </a:solidFill>
+                      <a:prstDash val="solid"/>
+                      <a:round/>
+                      <a:headEnd type="none" w="med" len="med"/>
+                      <a:tailEnd type="none" w="med" len="med"/>
+                    </a:lnT>
+                    <a:lnB w="38100" cap="flat" cmpd="sng" algn="ctr">
+                      <a:solidFill>
+                        <a:schemeClr val="tx1">
+                          <a:lumMod val="65000"/>
+                          <a:lumOff val="35000"/>
+                        </a:schemeClr>
+                      </a:solidFill>
+                      <a:prstDash val="solid"/>
+                      <a:round/>
+                      <a:headEnd type="none" w="med" len="med"/>
+                      <a:tailEnd type="none" w="med" len="med"/>
+                    </a:lnB>
+                    <a:solidFill>
+                      <a:schemeClr val="accent2">
+                        <a:lumMod val="60000"/>
+                        <a:lumOff val="40000"/>
+                      </a:schemeClr>
+                    </a:solidFill>
+                  </a:tcPr>
+                </a:tc>
+                <a:tc>
+                  <a:txBody>
+                    <a:bodyPr/>
+                    <a:lstStyle/>
+                    <a:p>
+                      <a:pPr algn="l"/>
+                      <a:endParaRPr lang="en-DE" sz="2000" dirty="0"/>
+                    </a:p>
+                  </a:txBody>
+                  <a:tcPr marL="153032" marR="153032" marT="76516" marB="76516">
+                    <a:lnL w="38100" cap="flat" cmpd="sng" algn="ctr">
+                      <a:solidFill>
+                        <a:schemeClr val="tx1">
+                          <a:lumMod val="65000"/>
+                          <a:lumOff val="35000"/>
+                        </a:schemeClr>
+                      </a:solidFill>
+                      <a:prstDash val="solid"/>
+                      <a:round/>
+                      <a:headEnd type="none" w="med" len="med"/>
+                      <a:tailEnd type="none" w="med" len="med"/>
+                    </a:lnL>
+                    <a:lnR w="38100" cap="flat" cmpd="sng" algn="ctr">
+                      <a:solidFill>
+                        <a:schemeClr val="tx1">
+                          <a:lumMod val="65000"/>
+                          <a:lumOff val="35000"/>
+                        </a:schemeClr>
+                      </a:solidFill>
+                      <a:prstDash val="solid"/>
+                      <a:round/>
+                      <a:headEnd type="none" w="med" len="med"/>
+                      <a:tailEnd type="none" w="med" len="med"/>
+                    </a:lnR>
+                    <a:lnT w="38100" cap="flat" cmpd="sng" algn="ctr">
+                      <a:solidFill>
+                        <a:schemeClr val="tx1">
+                          <a:lumMod val="65000"/>
+                          <a:lumOff val="35000"/>
+                        </a:schemeClr>
+                      </a:solidFill>
+                      <a:prstDash val="solid"/>
+                      <a:round/>
+                      <a:headEnd type="none" w="med" len="med"/>
+                      <a:tailEnd type="none" w="med" len="med"/>
+                    </a:lnT>
+                    <a:lnB w="38100" cap="flat" cmpd="sng" algn="ctr">
+                      <a:solidFill>
+                        <a:schemeClr val="tx1">
+                          <a:lumMod val="65000"/>
+                          <a:lumOff val="35000"/>
+                        </a:schemeClr>
+                      </a:solidFill>
+                      <a:prstDash val="solid"/>
+                      <a:round/>
+                      <a:headEnd type="none" w="med" len="med"/>
+                      <a:tailEnd type="none" w="med" len="med"/>
+                    </a:lnB>
+                  </a:tcPr>
+                </a:tc>
+                <a:tc>
+                  <a:txBody>
+                    <a:bodyPr/>
+                    <a:lstStyle/>
+                    <a:p>
+                      <a:pPr algn="l"/>
+                      <a:endParaRPr lang="en-DE" sz="2000" dirty="0"/>
+                    </a:p>
+                  </a:txBody>
+                  <a:tcPr marL="153032" marR="153032" marT="76516" marB="76516" anchor="ctr">
+                    <a:lnL w="38100" cap="flat" cmpd="sng" algn="ctr">
+                      <a:solidFill>
+                        <a:schemeClr val="tx1">
+                          <a:lumMod val="65000"/>
+                          <a:lumOff val="35000"/>
+                        </a:schemeClr>
+                      </a:solidFill>
+                      <a:prstDash val="solid"/>
+                      <a:round/>
+                      <a:headEnd type="none" w="med" len="med"/>
+                      <a:tailEnd type="none" w="med" len="med"/>
+                    </a:lnL>
+                    <a:lnR w="38100" cap="flat" cmpd="sng" algn="ctr">
+                      <a:solidFill>
+                        <a:schemeClr val="tx1">
+                          <a:lumMod val="65000"/>
+                          <a:lumOff val="35000"/>
+                        </a:schemeClr>
+                      </a:solidFill>
+                      <a:prstDash val="solid"/>
+                      <a:round/>
+                      <a:headEnd type="none" w="med" len="med"/>
+                      <a:tailEnd type="none" w="med" len="med"/>
+                    </a:lnR>
+                    <a:lnT w="38100" cap="flat" cmpd="sng" algn="ctr">
+                      <a:solidFill>
+                        <a:schemeClr val="tx1">
+                          <a:lumMod val="65000"/>
+                          <a:lumOff val="35000"/>
+                        </a:schemeClr>
+                      </a:solidFill>
+                      <a:prstDash val="solid"/>
+                      <a:round/>
+                      <a:headEnd type="none" w="med" len="med"/>
+                      <a:tailEnd type="none" w="med" len="med"/>
+                    </a:lnT>
+                    <a:lnB w="38100" cap="flat" cmpd="sng" algn="ctr">
+                      <a:solidFill>
+                        <a:schemeClr val="tx1">
+                          <a:lumMod val="65000"/>
+                          <a:lumOff val="35000"/>
+                        </a:schemeClr>
+                      </a:solidFill>
+                      <a:prstDash val="solid"/>
+                      <a:round/>
+                      <a:headEnd type="none" w="med" len="med"/>
+                      <a:tailEnd type="none" w="med" len="med"/>
+                    </a:lnB>
+                  </a:tcPr>
+                </a:tc>
+                <a:tc>
+                  <a:txBody>
+                    <a:bodyPr/>
+                    <a:lstStyle/>
+                    <a:p>
+                      <a:pPr algn="l"/>
+                      <a:endParaRPr lang="en-DE" sz="2000" dirty="0"/>
+                    </a:p>
+                  </a:txBody>
+                  <a:tcPr marL="153032" marR="153032" marT="76516" marB="76516" anchor="ctr">
+                    <a:lnL w="38100" cap="flat" cmpd="sng" algn="ctr">
+                      <a:solidFill>
+                        <a:schemeClr val="tx1">
+                          <a:lumMod val="65000"/>
+                          <a:lumOff val="35000"/>
+                        </a:schemeClr>
+                      </a:solidFill>
+                      <a:prstDash val="solid"/>
+                      <a:round/>
+                      <a:headEnd type="none" w="med" len="med"/>
+                      <a:tailEnd type="none" w="med" len="med"/>
+                    </a:lnL>
+                    <a:lnR w="38100" cap="flat" cmpd="sng" algn="ctr">
+                      <a:solidFill>
+                        <a:schemeClr val="tx1">
+                          <a:lumMod val="65000"/>
+                          <a:lumOff val="35000"/>
+                        </a:schemeClr>
+                      </a:solidFill>
+                      <a:prstDash val="solid"/>
+                      <a:round/>
+                      <a:headEnd type="none" w="med" len="med"/>
+                      <a:tailEnd type="none" w="med" len="med"/>
+                    </a:lnR>
+                    <a:lnT w="38100" cap="flat" cmpd="sng" algn="ctr">
+                      <a:solidFill>
+                        <a:schemeClr val="tx1">
+                          <a:lumMod val="65000"/>
+                          <a:lumOff val="35000"/>
+                        </a:schemeClr>
+                      </a:solidFill>
+                      <a:prstDash val="solid"/>
+                      <a:round/>
+                      <a:headEnd type="none" w="med" len="med"/>
+                      <a:tailEnd type="none" w="med" len="med"/>
+                    </a:lnT>
+                    <a:lnB w="38100" cap="flat" cmpd="sng" algn="ctr">
+                      <a:solidFill>
+                        <a:schemeClr val="tx1">
+                          <a:lumMod val="65000"/>
+                          <a:lumOff val="35000"/>
+                        </a:schemeClr>
+                      </a:solidFill>
+                      <a:prstDash val="solid"/>
+                      <a:round/>
+                      <a:headEnd type="none" w="med" len="med"/>
+                      <a:tailEnd type="none" w="med" len="med"/>
+                    </a:lnB>
+                  </a:tcPr>
+                </a:tc>
+                <a:extLst>
+                  <a:ext uri="{0D108BD9-81ED-4DB2-BD59-A6C34878D82A}">
+                    <a16:rowId xmlns:a16="http://schemas.microsoft.com/office/drawing/2014/main" val="2976503498"/>
+                  </a:ext>
+                </a:extLst>
+              </a:tr>
+              <a:tr h="620630">
+                <a:tc>
+                  <a:txBody>
+                    <a:bodyPr/>
+                    <a:lstStyle/>
+                    <a:p>
+                      <a:pPr algn="l"/>
+                      <a:endParaRPr lang="en-DE" sz="2000" dirty="0"/>
+                    </a:p>
+                  </a:txBody>
+                  <a:tcPr marL="153032" marR="153032" marT="76516" marB="76516">
+                    <a:lnL w="38100" cap="flat" cmpd="sng" algn="ctr">
+                      <a:solidFill>
+                        <a:schemeClr val="tx1">
+                          <a:lumMod val="65000"/>
+                          <a:lumOff val="35000"/>
+                        </a:schemeClr>
+                      </a:solidFill>
+                      <a:prstDash val="solid"/>
+                      <a:round/>
+                      <a:headEnd type="none" w="med" len="med"/>
+                      <a:tailEnd type="none" w="med" len="med"/>
+                    </a:lnL>
+                    <a:lnR w="38100" cap="flat" cmpd="sng" algn="ctr">
+                      <a:solidFill>
+                        <a:schemeClr val="tx1">
+                          <a:lumMod val="65000"/>
+                          <a:lumOff val="35000"/>
+                        </a:schemeClr>
+                      </a:solidFill>
+                      <a:prstDash val="solid"/>
+                      <a:round/>
+                      <a:headEnd type="none" w="med" len="med"/>
+                      <a:tailEnd type="none" w="med" len="med"/>
+                    </a:lnR>
+                    <a:lnT w="38100" cap="flat" cmpd="sng" algn="ctr">
+                      <a:solidFill>
+                        <a:schemeClr val="tx1">
+                          <a:lumMod val="65000"/>
+                          <a:lumOff val="35000"/>
+                        </a:schemeClr>
+                      </a:solidFill>
+                      <a:prstDash val="solid"/>
+                      <a:round/>
+                      <a:headEnd type="none" w="med" len="med"/>
+                      <a:tailEnd type="none" w="med" len="med"/>
+                    </a:lnT>
+                    <a:lnB w="38100" cap="flat" cmpd="sng" algn="ctr">
+                      <a:solidFill>
+                        <a:schemeClr val="tx1">
+                          <a:lumMod val="65000"/>
+                          <a:lumOff val="35000"/>
+                        </a:schemeClr>
+                      </a:solidFill>
+                      <a:prstDash val="solid"/>
+                      <a:round/>
+                      <a:headEnd type="none" w="med" len="med"/>
+                      <a:tailEnd type="none" w="med" len="med"/>
+                    </a:lnB>
+                    <a:solidFill>
+                      <a:schemeClr val="accent2">
+                        <a:lumMod val="60000"/>
+                        <a:lumOff val="40000"/>
+                      </a:schemeClr>
+                    </a:solidFill>
+                  </a:tcPr>
+                </a:tc>
+                <a:tc>
+                  <a:txBody>
+                    <a:bodyPr/>
+                    <a:lstStyle/>
+                    <a:p>
+                      <a:pPr algn="l"/>
+                      <a:endParaRPr lang="en-DE" sz="2000" dirty="0"/>
+                    </a:p>
+                  </a:txBody>
+                  <a:tcPr marL="153032" marR="153032" marT="76516" marB="76516">
+                    <a:lnL w="38100" cap="flat" cmpd="sng" algn="ctr">
+                      <a:solidFill>
+                        <a:schemeClr val="tx1">
+                          <a:lumMod val="65000"/>
+                          <a:lumOff val="35000"/>
+                        </a:schemeClr>
+                      </a:solidFill>
+                      <a:prstDash val="solid"/>
+                      <a:round/>
+                      <a:headEnd type="none" w="med" len="med"/>
+                      <a:tailEnd type="none" w="med" len="med"/>
+                    </a:lnL>
+                    <a:lnR w="38100" cap="flat" cmpd="sng" algn="ctr">
+                      <a:solidFill>
+                        <a:schemeClr val="tx1">
+                          <a:lumMod val="65000"/>
+                          <a:lumOff val="35000"/>
+                        </a:schemeClr>
+                      </a:solidFill>
+                      <a:prstDash val="solid"/>
+                      <a:round/>
+                      <a:headEnd type="none" w="med" len="med"/>
+                      <a:tailEnd type="none" w="med" len="med"/>
+                    </a:lnR>
+                    <a:lnT w="38100" cap="flat" cmpd="sng" algn="ctr">
+                      <a:solidFill>
+                        <a:schemeClr val="tx1">
+                          <a:lumMod val="65000"/>
+                          <a:lumOff val="35000"/>
+                        </a:schemeClr>
+                      </a:solidFill>
+                      <a:prstDash val="solid"/>
+                      <a:round/>
+                      <a:headEnd type="none" w="med" len="med"/>
+                      <a:tailEnd type="none" w="med" len="med"/>
+                    </a:lnT>
+                    <a:lnB w="38100" cap="flat" cmpd="sng" algn="ctr">
+                      <a:solidFill>
+                        <a:schemeClr val="tx1">
+                          <a:lumMod val="65000"/>
+                          <a:lumOff val="35000"/>
+                        </a:schemeClr>
+                      </a:solidFill>
+                      <a:prstDash val="solid"/>
+                      <a:round/>
+                      <a:headEnd type="none" w="med" len="med"/>
+                      <a:tailEnd type="none" w="med" len="med"/>
+                    </a:lnB>
+                    <a:solidFill>
+                      <a:schemeClr val="accent2">
+                        <a:lumMod val="60000"/>
+                        <a:lumOff val="40000"/>
+                      </a:schemeClr>
+                    </a:solidFill>
+                  </a:tcPr>
+                </a:tc>
+                <a:tc>
+                  <a:txBody>
+                    <a:bodyPr/>
+                    <a:lstStyle/>
+                    <a:p>
+                      <a:pPr algn="l"/>
+                      <a:endParaRPr lang="en-DE" sz="2000" dirty="0"/>
+                    </a:p>
+                  </a:txBody>
+                  <a:tcPr marL="153032" marR="153032" marT="76516" marB="76516">
+                    <a:lnL w="38100" cap="flat" cmpd="sng" algn="ctr">
+                      <a:solidFill>
+                        <a:schemeClr val="tx1">
+                          <a:lumMod val="65000"/>
+                          <a:lumOff val="35000"/>
+                        </a:schemeClr>
+                      </a:solidFill>
+                      <a:prstDash val="solid"/>
+                      <a:round/>
+                      <a:headEnd type="none" w="med" len="med"/>
+                      <a:tailEnd type="none" w="med" len="med"/>
+                    </a:lnL>
+                    <a:lnR w="38100" cap="flat" cmpd="sng" algn="ctr">
+                      <a:solidFill>
+                        <a:schemeClr val="tx1">
+                          <a:lumMod val="65000"/>
+                          <a:lumOff val="35000"/>
+                        </a:schemeClr>
+                      </a:solidFill>
+                      <a:prstDash val="solid"/>
+                      <a:round/>
+                      <a:headEnd type="none" w="med" len="med"/>
+                      <a:tailEnd type="none" w="med" len="med"/>
+                    </a:lnR>
+                    <a:lnT w="38100" cap="flat" cmpd="sng" algn="ctr">
+                      <a:solidFill>
+                        <a:schemeClr val="tx1">
+                          <a:lumMod val="65000"/>
+                          <a:lumOff val="35000"/>
+                        </a:schemeClr>
+                      </a:solidFill>
+                      <a:prstDash val="solid"/>
+                      <a:round/>
+                      <a:headEnd type="none" w="med" len="med"/>
+                      <a:tailEnd type="none" w="med" len="med"/>
+                    </a:lnT>
+                    <a:lnB w="38100" cap="flat" cmpd="sng" algn="ctr">
+                      <a:solidFill>
+                        <a:schemeClr val="tx1">
+                          <a:lumMod val="65000"/>
+                          <a:lumOff val="35000"/>
+                        </a:schemeClr>
+                      </a:solidFill>
+                      <a:prstDash val="solid"/>
+                      <a:round/>
+                      <a:headEnd type="none" w="med" len="med"/>
+                      <a:tailEnd type="none" w="med" len="med"/>
+                    </a:lnB>
+                    <a:solidFill>
+                      <a:schemeClr val="accent2">
+                        <a:lumMod val="60000"/>
+                        <a:lumOff val="40000"/>
+                      </a:schemeClr>
+                    </a:solidFill>
+                  </a:tcPr>
+                </a:tc>
+                <a:tc>
+                  <a:txBody>
+                    <a:bodyPr/>
+                    <a:lstStyle/>
+                    <a:p>
+                      <a:pPr algn="l"/>
+                      <a:endParaRPr lang="en-DE" sz="2000" dirty="0"/>
+                    </a:p>
+                  </a:txBody>
+                  <a:tcPr marL="153032" marR="153032" marT="76516" marB="76516">
+                    <a:lnL w="38100" cap="flat" cmpd="sng" algn="ctr">
+                      <a:solidFill>
+                        <a:schemeClr val="tx1">
+                          <a:lumMod val="65000"/>
+                          <a:lumOff val="35000"/>
+                        </a:schemeClr>
+                      </a:solidFill>
+                      <a:prstDash val="solid"/>
+                      <a:round/>
+                      <a:headEnd type="none" w="med" len="med"/>
+                      <a:tailEnd type="none" w="med" len="med"/>
+                    </a:lnL>
+                    <a:lnR w="38100" cap="flat" cmpd="sng" algn="ctr">
+                      <a:solidFill>
+                        <a:schemeClr val="tx1">
+                          <a:lumMod val="65000"/>
+                          <a:lumOff val="35000"/>
+                        </a:schemeClr>
+                      </a:solidFill>
+                      <a:prstDash val="solid"/>
+                      <a:round/>
+                      <a:headEnd type="none" w="med" len="med"/>
+                      <a:tailEnd type="none" w="med" len="med"/>
+                    </a:lnR>
+                    <a:lnT w="38100" cap="flat" cmpd="sng" algn="ctr">
+                      <a:solidFill>
+                        <a:schemeClr val="tx1">
+                          <a:lumMod val="65000"/>
+                          <a:lumOff val="35000"/>
+                        </a:schemeClr>
+                      </a:solidFill>
+                      <a:prstDash val="solid"/>
+                      <a:round/>
+                      <a:headEnd type="none" w="med" len="med"/>
+                      <a:tailEnd type="none" w="med" len="med"/>
+                    </a:lnT>
+                    <a:lnB w="38100" cap="flat" cmpd="sng" algn="ctr">
+                      <a:solidFill>
+                        <a:schemeClr val="tx1">
+                          <a:lumMod val="65000"/>
+                          <a:lumOff val="35000"/>
+                        </a:schemeClr>
+                      </a:solidFill>
+                      <a:prstDash val="solid"/>
+                      <a:round/>
+                      <a:headEnd type="none" w="med" len="med"/>
+                      <a:tailEnd type="none" w="med" len="med"/>
+                    </a:lnB>
+                    <a:solidFill>
+                      <a:schemeClr val="accent2">
+                        <a:lumMod val="60000"/>
+                        <a:lumOff val="40000"/>
+                      </a:schemeClr>
+                    </a:solidFill>
+                  </a:tcPr>
+                </a:tc>
+                <a:tc>
+                  <a:txBody>
+                    <a:bodyPr/>
+                    <a:lstStyle/>
+                    <a:p>
+                      <a:pPr algn="l"/>
+                      <a:endParaRPr lang="en-DE" sz="2000" dirty="0"/>
+                    </a:p>
+                  </a:txBody>
+                  <a:tcPr marL="153032" marR="153032" marT="76516" marB="76516">
+                    <a:lnL w="38100" cap="flat" cmpd="sng" algn="ctr">
+                      <a:solidFill>
+                        <a:schemeClr val="tx1">
+                          <a:lumMod val="65000"/>
+                          <a:lumOff val="35000"/>
+                        </a:schemeClr>
+                      </a:solidFill>
+                      <a:prstDash val="solid"/>
+                      <a:round/>
+                      <a:headEnd type="none" w="med" len="med"/>
+                      <a:tailEnd type="none" w="med" len="med"/>
+                    </a:lnL>
+                    <a:lnR w="38100" cap="flat" cmpd="sng" algn="ctr">
+                      <a:solidFill>
+                        <a:schemeClr val="tx1">
+                          <a:lumMod val="65000"/>
+                          <a:lumOff val="35000"/>
+                        </a:schemeClr>
+                      </a:solidFill>
+                      <a:prstDash val="solid"/>
+                      <a:round/>
+                      <a:headEnd type="none" w="med" len="med"/>
+                      <a:tailEnd type="none" w="med" len="med"/>
+                    </a:lnR>
+                    <a:lnT w="38100" cap="flat" cmpd="sng" algn="ctr">
+                      <a:solidFill>
+                        <a:schemeClr val="tx1">
+                          <a:lumMod val="65000"/>
+                          <a:lumOff val="35000"/>
+                        </a:schemeClr>
+                      </a:solidFill>
+                      <a:prstDash val="solid"/>
+                      <a:round/>
+                      <a:headEnd type="none" w="med" len="med"/>
+                      <a:tailEnd type="none" w="med" len="med"/>
+                    </a:lnT>
+                    <a:lnB w="38100" cap="flat" cmpd="sng" algn="ctr">
+                      <a:solidFill>
+                        <a:schemeClr val="tx1">
+                          <a:lumMod val="65000"/>
+                          <a:lumOff val="35000"/>
+                        </a:schemeClr>
+                      </a:solidFill>
+                      <a:prstDash val="solid"/>
+                      <a:round/>
+                      <a:headEnd type="none" w="med" len="med"/>
+                      <a:tailEnd type="none" w="med" len="med"/>
+                    </a:lnB>
+                  </a:tcPr>
+                </a:tc>
+                <a:extLst>
+                  <a:ext uri="{0D108BD9-81ED-4DB2-BD59-A6C34878D82A}">
+                    <a16:rowId xmlns:a16="http://schemas.microsoft.com/office/drawing/2014/main" val="3711746142"/>
+                  </a:ext>
+                </a:extLst>
+              </a:tr>
+              <a:tr h="620630">
+                <a:tc>
+                  <a:txBody>
+                    <a:bodyPr/>
+                    <a:lstStyle/>
+                    <a:p>
+                      <a:pPr algn="l"/>
+                      <a:endParaRPr lang="en-DE" sz="2000" dirty="0"/>
+                    </a:p>
+                  </a:txBody>
+                  <a:tcPr marL="153032" marR="153032" marT="76516" marB="76516">
+                    <a:lnL w="38100" cap="flat" cmpd="sng" algn="ctr">
+                      <a:solidFill>
+                        <a:schemeClr val="tx1">
+                          <a:lumMod val="65000"/>
+                          <a:lumOff val="35000"/>
+                        </a:schemeClr>
+                      </a:solidFill>
+                      <a:prstDash val="solid"/>
+                      <a:round/>
+                      <a:headEnd type="none" w="med" len="med"/>
+                      <a:tailEnd type="none" w="med" len="med"/>
+                    </a:lnL>
+                    <a:lnR w="38100" cap="flat" cmpd="sng" algn="ctr">
+                      <a:solidFill>
+                        <a:schemeClr val="tx1">
+                          <a:lumMod val="65000"/>
+                          <a:lumOff val="35000"/>
+                        </a:schemeClr>
+                      </a:solidFill>
+                      <a:prstDash val="solid"/>
+                      <a:round/>
+                      <a:headEnd type="none" w="med" len="med"/>
+                      <a:tailEnd type="none" w="med" len="med"/>
+                    </a:lnR>
+                    <a:lnT w="38100" cap="flat" cmpd="sng" algn="ctr">
+                      <a:solidFill>
+                        <a:schemeClr val="tx1">
+                          <a:lumMod val="65000"/>
+                          <a:lumOff val="35000"/>
+                        </a:schemeClr>
+                      </a:solidFill>
+                      <a:prstDash val="solid"/>
+                      <a:round/>
+                      <a:headEnd type="none" w="med" len="med"/>
+                      <a:tailEnd type="none" w="med" len="med"/>
+                    </a:lnT>
+                    <a:lnB w="38100" cap="flat" cmpd="sng" algn="ctr">
+                      <a:solidFill>
+                        <a:schemeClr val="tx1">
+                          <a:lumMod val="65000"/>
+                          <a:lumOff val="35000"/>
+                        </a:schemeClr>
+                      </a:solidFill>
+                      <a:prstDash val="solid"/>
+                      <a:round/>
+                      <a:headEnd type="none" w="med" len="med"/>
+                      <a:tailEnd type="none" w="med" len="med"/>
+                    </a:lnB>
+                    <a:solidFill>
+                      <a:schemeClr val="accent2">
+                        <a:lumMod val="60000"/>
+                        <a:lumOff val="40000"/>
+                      </a:schemeClr>
+                    </a:solidFill>
+                  </a:tcPr>
+                </a:tc>
+                <a:tc>
+                  <a:txBody>
+                    <a:bodyPr/>
+                    <a:lstStyle/>
+                    <a:p>
+                      <a:pPr algn="l"/>
+                      <a:endParaRPr lang="en-DE" sz="2000" dirty="0"/>
+                    </a:p>
+                  </a:txBody>
+                  <a:tcPr marL="153032" marR="153032" marT="76516" marB="76516">
+                    <a:lnL w="38100" cap="flat" cmpd="sng" algn="ctr">
+                      <a:solidFill>
+                        <a:schemeClr val="tx1">
+                          <a:lumMod val="65000"/>
+                          <a:lumOff val="35000"/>
+                        </a:schemeClr>
+                      </a:solidFill>
+                      <a:prstDash val="solid"/>
+                      <a:round/>
+                      <a:headEnd type="none" w="med" len="med"/>
+                      <a:tailEnd type="none" w="med" len="med"/>
+                    </a:lnL>
+                    <a:lnR w="38100" cap="flat" cmpd="sng" algn="ctr">
+                      <a:solidFill>
+                        <a:schemeClr val="tx1">
+                          <a:lumMod val="65000"/>
+                          <a:lumOff val="35000"/>
+                        </a:schemeClr>
+                      </a:solidFill>
+                      <a:prstDash val="solid"/>
+                      <a:round/>
+                      <a:headEnd type="none" w="med" len="med"/>
+                      <a:tailEnd type="none" w="med" len="med"/>
+                    </a:lnR>
+                    <a:lnT w="38100" cap="flat" cmpd="sng" algn="ctr">
+                      <a:solidFill>
+                        <a:schemeClr val="tx1">
+                          <a:lumMod val="65000"/>
+                          <a:lumOff val="35000"/>
+                        </a:schemeClr>
+                      </a:solidFill>
+                      <a:prstDash val="solid"/>
+                      <a:round/>
+                      <a:headEnd type="none" w="med" len="med"/>
+                      <a:tailEnd type="none" w="med" len="med"/>
+                    </a:lnT>
+                    <a:lnB w="38100" cap="flat" cmpd="sng" algn="ctr">
+                      <a:solidFill>
+                        <a:schemeClr val="tx1">
+                          <a:lumMod val="65000"/>
+                          <a:lumOff val="35000"/>
+                        </a:schemeClr>
+                      </a:solidFill>
+                      <a:prstDash val="solid"/>
+                      <a:round/>
+                      <a:headEnd type="none" w="med" len="med"/>
+                      <a:tailEnd type="none" w="med" len="med"/>
+                    </a:lnB>
+                    <a:solidFill>
+                      <a:schemeClr val="accent2">
+                        <a:lumMod val="60000"/>
+                        <a:lumOff val="40000"/>
+                      </a:schemeClr>
+                    </a:solidFill>
+                  </a:tcPr>
+                </a:tc>
+                <a:tc>
+                  <a:txBody>
+                    <a:bodyPr/>
+                    <a:lstStyle/>
+                    <a:p>
+                      <a:pPr algn="l"/>
+                      <a:endParaRPr lang="en-DE" sz="2000" dirty="0"/>
+                    </a:p>
+                  </a:txBody>
+                  <a:tcPr marL="153032" marR="153032" marT="76516" marB="76516">
+                    <a:lnL w="38100" cap="flat" cmpd="sng" algn="ctr">
+                      <a:solidFill>
+                        <a:schemeClr val="tx1">
+                          <a:lumMod val="65000"/>
+                          <a:lumOff val="35000"/>
+                        </a:schemeClr>
+                      </a:solidFill>
+                      <a:prstDash val="solid"/>
+                      <a:round/>
+                      <a:headEnd type="none" w="med" len="med"/>
+                      <a:tailEnd type="none" w="med" len="med"/>
+                    </a:lnL>
+                    <a:lnR w="38100" cap="flat" cmpd="sng" algn="ctr">
+                      <a:solidFill>
+                        <a:schemeClr val="tx1">
+                          <a:lumMod val="65000"/>
+                          <a:lumOff val="35000"/>
+                        </a:schemeClr>
+                      </a:solidFill>
+                      <a:prstDash val="solid"/>
+                      <a:round/>
+                      <a:headEnd type="none" w="med" len="med"/>
+                      <a:tailEnd type="none" w="med" len="med"/>
+                    </a:lnR>
+                    <a:lnT w="38100" cap="flat" cmpd="sng" algn="ctr">
+                      <a:solidFill>
+                        <a:schemeClr val="tx1">
+                          <a:lumMod val="65000"/>
+                          <a:lumOff val="35000"/>
+                        </a:schemeClr>
+                      </a:solidFill>
+                      <a:prstDash val="solid"/>
+                      <a:round/>
+                      <a:headEnd type="none" w="med" len="med"/>
+                      <a:tailEnd type="none" w="med" len="med"/>
+                    </a:lnT>
+                    <a:lnB w="38100" cap="flat" cmpd="sng" algn="ctr">
+                      <a:solidFill>
+                        <a:schemeClr val="tx1">
+                          <a:lumMod val="65000"/>
+                          <a:lumOff val="35000"/>
+                        </a:schemeClr>
+                      </a:solidFill>
+                      <a:prstDash val="solid"/>
+                      <a:round/>
+                      <a:headEnd type="none" w="med" len="med"/>
+                      <a:tailEnd type="none" w="med" len="med"/>
+                    </a:lnB>
+                    <a:solidFill>
+                      <a:schemeClr val="accent2">
+                        <a:lumMod val="60000"/>
+                        <a:lumOff val="40000"/>
+                      </a:schemeClr>
+                    </a:solidFill>
+                  </a:tcPr>
+                </a:tc>
+                <a:tc>
+                  <a:txBody>
+                    <a:bodyPr/>
+                    <a:lstStyle/>
+                    <a:p>
+                      <a:pPr algn="l"/>
+                      <a:endParaRPr lang="en-DE" sz="2000" dirty="0"/>
+                    </a:p>
+                  </a:txBody>
+                  <a:tcPr marL="153032" marR="153032" marT="76516" marB="76516">
+                    <a:lnL w="38100" cap="flat" cmpd="sng" algn="ctr">
+                      <a:solidFill>
+                        <a:schemeClr val="tx1">
+                          <a:lumMod val="65000"/>
+                          <a:lumOff val="35000"/>
+                        </a:schemeClr>
+                      </a:solidFill>
+                      <a:prstDash val="solid"/>
+                      <a:round/>
+                      <a:headEnd type="none" w="med" len="med"/>
+                      <a:tailEnd type="none" w="med" len="med"/>
+                    </a:lnL>
+                    <a:lnR w="38100" cap="flat" cmpd="sng" algn="ctr">
+                      <a:solidFill>
+                        <a:schemeClr val="tx1">
+                          <a:lumMod val="65000"/>
+                          <a:lumOff val="35000"/>
+                        </a:schemeClr>
+                      </a:solidFill>
+                      <a:prstDash val="solid"/>
+                      <a:round/>
+                      <a:headEnd type="none" w="med" len="med"/>
+                      <a:tailEnd type="none" w="med" len="med"/>
+                    </a:lnR>
+                    <a:lnT w="38100" cap="flat" cmpd="sng" algn="ctr">
+                      <a:solidFill>
+                        <a:schemeClr val="tx1">
+                          <a:lumMod val="65000"/>
+                          <a:lumOff val="35000"/>
+                        </a:schemeClr>
+                      </a:solidFill>
+                      <a:prstDash val="solid"/>
+                      <a:round/>
+                      <a:headEnd type="none" w="med" len="med"/>
+                      <a:tailEnd type="none" w="med" len="med"/>
+                    </a:lnT>
+                    <a:lnB w="38100" cap="flat" cmpd="sng" algn="ctr">
+                      <a:solidFill>
+                        <a:schemeClr val="tx1">
+                          <a:lumMod val="65000"/>
+                          <a:lumOff val="35000"/>
+                        </a:schemeClr>
+                      </a:solidFill>
+                      <a:prstDash val="solid"/>
+                      <a:round/>
+                      <a:headEnd type="none" w="med" len="med"/>
+                      <a:tailEnd type="none" w="med" len="med"/>
+                    </a:lnB>
+                  </a:tcPr>
+                </a:tc>
+                <a:tc>
+                  <a:txBody>
+                    <a:bodyPr/>
+                    <a:lstStyle/>
+                    <a:p>
+                      <a:pPr algn="l"/>
+                      <a:endParaRPr lang="en-DE" sz="2000" dirty="0"/>
+                    </a:p>
+                  </a:txBody>
+                  <a:tcPr marL="153032" marR="153032" marT="76516" marB="76516" anchor="ctr">
+                    <a:lnL w="38100" cap="flat" cmpd="sng" algn="ctr">
+                      <a:solidFill>
+                        <a:schemeClr val="tx1">
+                          <a:lumMod val="65000"/>
+                          <a:lumOff val="35000"/>
+                        </a:schemeClr>
+                      </a:solidFill>
+                      <a:prstDash val="solid"/>
+                      <a:round/>
+                      <a:headEnd type="none" w="med" len="med"/>
+                      <a:tailEnd type="none" w="med" len="med"/>
+                    </a:lnL>
+                    <a:lnR w="38100" cap="flat" cmpd="sng" algn="ctr">
+                      <a:solidFill>
+                        <a:schemeClr val="tx1">
+                          <a:lumMod val="65000"/>
+                          <a:lumOff val="35000"/>
+                        </a:schemeClr>
+                      </a:solidFill>
+                      <a:prstDash val="solid"/>
+                      <a:round/>
+                      <a:headEnd type="none" w="med" len="med"/>
+                      <a:tailEnd type="none" w="med" len="med"/>
+                    </a:lnR>
+                    <a:lnT w="38100" cap="flat" cmpd="sng" algn="ctr">
+                      <a:solidFill>
+                        <a:schemeClr val="tx1">
+                          <a:lumMod val="65000"/>
+                          <a:lumOff val="35000"/>
+                        </a:schemeClr>
+                      </a:solidFill>
+                      <a:prstDash val="solid"/>
+                      <a:round/>
+                      <a:headEnd type="none" w="med" len="med"/>
+                      <a:tailEnd type="none" w="med" len="med"/>
+                    </a:lnT>
+                    <a:lnB w="38100" cap="flat" cmpd="sng" algn="ctr">
+                      <a:solidFill>
+                        <a:schemeClr val="tx1">
+                          <a:lumMod val="65000"/>
+                          <a:lumOff val="35000"/>
+                        </a:schemeClr>
+                      </a:solidFill>
+                      <a:prstDash val="solid"/>
+                      <a:round/>
+                      <a:headEnd type="none" w="med" len="med"/>
+                      <a:tailEnd type="none" w="med" len="med"/>
+                    </a:lnB>
+                  </a:tcPr>
+                </a:tc>
+                <a:extLst>
+                  <a:ext uri="{0D108BD9-81ED-4DB2-BD59-A6C34878D82A}">
+                    <a16:rowId xmlns:a16="http://schemas.microsoft.com/office/drawing/2014/main" val="1090502963"/>
+                  </a:ext>
+                </a:extLst>
+              </a:tr>
+            </a:tbl>
+          </a:graphicData>
+        </a:graphic>
+      </p:graphicFrame>
+      <p:graphicFrame>
+        <p:nvGraphicFramePr>
+          <p:cNvPr id="22" name="Table 4">
+            <a:extLst>
+              <a:ext uri="{FF2B5EF4-FFF2-40B4-BE49-F238E27FC236}">
+                <a16:creationId xmlns:a16="http://schemas.microsoft.com/office/drawing/2014/main" id="{145A5774-2ACA-A749-95D5-A03E674ECED8}"/>
+              </a:ext>
+            </a:extLst>
+          </p:cNvPr>
+          <p:cNvGraphicFramePr>
+            <a:graphicFrameLocks noGrp="1"/>
+          </p:cNvGraphicFramePr>
+          <p:nvPr>
+            <p:extLst>
+              <p:ext uri="{D42A27DB-BD31-4B8C-83A1-F6EECF244321}">
+                <p14:modId xmlns:p14="http://schemas.microsoft.com/office/powerpoint/2010/main" val="3727397017"/>
+              </p:ext>
+            </p:extLst>
+          </p:nvPr>
+        </p:nvGraphicFramePr>
+        <p:xfrm>
+          <a:off x="864529" y="2351742"/>
+          <a:ext cx="659012" cy="1861890"/>
+        </p:xfrm>
+        <a:graphic>
+          <a:graphicData uri="http://schemas.openxmlformats.org/drawingml/2006/table">
+            <a:tbl>
+              <a:tblPr firstRow="1" bandRow="1">
+                <a:tableStyleId>{2D5ABB26-0587-4C30-8999-92F81FD0307C}</a:tableStyleId>
+              </a:tblPr>
+              <a:tblGrid>
+                <a:gridCol w="659012">
+                  <a:extLst>
+                    <a:ext uri="{9D8B030D-6E8A-4147-A177-3AD203B41FA5}">
+                      <a16:colId xmlns:a16="http://schemas.microsoft.com/office/drawing/2014/main" val="3350277845"/>
+                    </a:ext>
+                  </a:extLst>
+                </a:gridCol>
+              </a:tblGrid>
+              <a:tr h="620630">
+                <a:tc>
+                  <a:txBody>
+                    <a:bodyPr/>
+                    <a:lstStyle/>
+                    <a:p>
+                      <a:pPr algn="ctr"/>
+                      <a:r>
+                        <a:rPr lang="en-DE" sz="2400" dirty="0">
+                          <a:latin typeface="Monaco" pitchFamily="2" charset="77"/>
+                          <a:ea typeface="Menlo" panose="020B0609030804020204" pitchFamily="49" charset="0"/>
+                          <a:cs typeface="Menlo" panose="020B0609030804020204" pitchFamily="49" charset="0"/>
+                        </a:rPr>
+                        <a:t>2</a:t>
+                      </a:r>
+                    </a:p>
+                  </a:txBody>
+                  <a:tcPr marL="153032" marR="153032" marT="76516" marB="76516" anchor="ctr">
+                    <a:lnL w="38100" cap="flat" cmpd="sng" algn="ctr">
+                      <a:solidFill>
+                        <a:schemeClr val="tx1">
+                          <a:lumMod val="65000"/>
+                          <a:lumOff val="35000"/>
+                        </a:schemeClr>
+                      </a:solidFill>
+                      <a:prstDash val="solid"/>
+                      <a:round/>
+                      <a:headEnd type="none" w="med" len="med"/>
+                      <a:tailEnd type="none" w="med" len="med"/>
+                    </a:lnL>
+                    <a:lnR w="38100" cap="flat" cmpd="sng" algn="ctr">
+                      <a:solidFill>
+                        <a:schemeClr val="tx1">
+                          <a:lumMod val="65000"/>
+                          <a:lumOff val="35000"/>
+                        </a:schemeClr>
+                      </a:solidFill>
+                      <a:prstDash val="solid"/>
+                      <a:round/>
+                      <a:headEnd type="none" w="med" len="med"/>
+                      <a:tailEnd type="none" w="med" len="med"/>
+                    </a:lnR>
+                    <a:lnT w="38100" cap="flat" cmpd="sng" algn="ctr">
+                      <a:solidFill>
+                        <a:schemeClr val="tx1">
+                          <a:lumMod val="65000"/>
+                          <a:lumOff val="35000"/>
+                        </a:schemeClr>
+                      </a:solidFill>
+                      <a:prstDash val="solid"/>
+                      <a:round/>
+                      <a:headEnd type="none" w="med" len="med"/>
+                      <a:tailEnd type="none" w="med" len="med"/>
+                    </a:lnT>
+                    <a:lnB w="38100" cap="flat" cmpd="sng" algn="ctr">
+                      <a:solidFill>
+                        <a:schemeClr val="tx1">
+                          <a:lumMod val="65000"/>
+                          <a:lumOff val="35000"/>
+                        </a:schemeClr>
+                      </a:solidFill>
+                      <a:prstDash val="solid"/>
+                      <a:round/>
+                      <a:headEnd type="none" w="med" len="med"/>
+                      <a:tailEnd type="none" w="med" len="med"/>
+                    </a:lnB>
+                    <a:noFill/>
+                  </a:tcPr>
+                </a:tc>
+                <a:extLst>
+                  <a:ext uri="{0D108BD9-81ED-4DB2-BD59-A6C34878D82A}">
+                    <a16:rowId xmlns:a16="http://schemas.microsoft.com/office/drawing/2014/main" val="2976503498"/>
+                  </a:ext>
+                </a:extLst>
+              </a:tr>
+              <a:tr h="620630">
+                <a:tc>
+                  <a:txBody>
+                    <a:bodyPr/>
+                    <a:lstStyle/>
+                    <a:p>
+                      <a:pPr algn="ctr"/>
+                      <a:r>
+                        <a:rPr lang="en-DE" sz="2400" dirty="0">
+                          <a:latin typeface="Monaco" pitchFamily="2" charset="77"/>
+                        </a:rPr>
+                        <a:t>4</a:t>
+                      </a:r>
+                    </a:p>
+                  </a:txBody>
+                  <a:tcPr marL="153032" marR="153032" marT="76516" marB="76516" anchor="ctr">
+                    <a:lnL w="38100" cap="flat" cmpd="sng" algn="ctr">
+                      <a:solidFill>
+                        <a:schemeClr val="tx1">
+                          <a:lumMod val="65000"/>
+                          <a:lumOff val="35000"/>
+                        </a:schemeClr>
+                      </a:solidFill>
+                      <a:prstDash val="solid"/>
+                      <a:round/>
+                      <a:headEnd type="none" w="med" len="med"/>
+                      <a:tailEnd type="none" w="med" len="med"/>
+                    </a:lnL>
+                    <a:lnR w="38100" cap="flat" cmpd="sng" algn="ctr">
+                      <a:solidFill>
+                        <a:schemeClr val="tx1">
+                          <a:lumMod val="65000"/>
+                          <a:lumOff val="35000"/>
+                        </a:schemeClr>
+                      </a:solidFill>
+                      <a:prstDash val="solid"/>
+                      <a:round/>
+                      <a:headEnd type="none" w="med" len="med"/>
+                      <a:tailEnd type="none" w="med" len="med"/>
+                    </a:lnR>
+                    <a:lnT w="38100" cap="flat" cmpd="sng" algn="ctr">
+                      <a:solidFill>
+                        <a:schemeClr val="tx1">
+                          <a:lumMod val="65000"/>
+                          <a:lumOff val="35000"/>
+                        </a:schemeClr>
+                      </a:solidFill>
+                      <a:prstDash val="solid"/>
+                      <a:round/>
+                      <a:headEnd type="none" w="med" len="med"/>
+                      <a:tailEnd type="none" w="med" len="med"/>
+                    </a:lnT>
+                    <a:lnB w="38100" cap="flat" cmpd="sng" algn="ctr">
+                      <a:solidFill>
+                        <a:schemeClr val="tx1">
+                          <a:lumMod val="65000"/>
+                          <a:lumOff val="35000"/>
+                        </a:schemeClr>
+                      </a:solidFill>
+                      <a:prstDash val="solid"/>
+                      <a:round/>
+                      <a:headEnd type="none" w="med" len="med"/>
+                      <a:tailEnd type="none" w="med" len="med"/>
+                    </a:lnB>
+                    <a:noFill/>
+                  </a:tcPr>
+                </a:tc>
+                <a:extLst>
+                  <a:ext uri="{0D108BD9-81ED-4DB2-BD59-A6C34878D82A}">
+                    <a16:rowId xmlns:a16="http://schemas.microsoft.com/office/drawing/2014/main" val="3711746142"/>
+                  </a:ext>
+                </a:extLst>
+              </a:tr>
+              <a:tr h="620630">
+                <a:tc>
+                  <a:txBody>
+                    <a:bodyPr/>
+                    <a:lstStyle/>
+                    <a:p>
+                      <a:pPr algn="ctr"/>
+                      <a:r>
+                        <a:rPr lang="en-DE" sz="2400" dirty="0">
+                          <a:latin typeface="Monaco" pitchFamily="2" charset="77"/>
+                        </a:rPr>
+                        <a:t>3</a:t>
+                      </a:r>
+                    </a:p>
+                  </a:txBody>
+                  <a:tcPr marL="153032" marR="153032" marT="76516" marB="76516" anchor="ctr">
+                    <a:lnL w="38100" cap="flat" cmpd="sng" algn="ctr">
+                      <a:solidFill>
+                        <a:schemeClr val="tx1">
+                          <a:lumMod val="65000"/>
+                          <a:lumOff val="35000"/>
+                        </a:schemeClr>
+                      </a:solidFill>
+                      <a:prstDash val="solid"/>
+                      <a:round/>
+                      <a:headEnd type="none" w="med" len="med"/>
+                      <a:tailEnd type="none" w="med" len="med"/>
+                    </a:lnL>
+                    <a:lnR w="38100" cap="flat" cmpd="sng" algn="ctr">
+                      <a:solidFill>
+                        <a:schemeClr val="tx1">
+                          <a:lumMod val="65000"/>
+                          <a:lumOff val="35000"/>
+                        </a:schemeClr>
+                      </a:solidFill>
+                      <a:prstDash val="solid"/>
+                      <a:round/>
+                      <a:headEnd type="none" w="med" len="med"/>
+                      <a:tailEnd type="none" w="med" len="med"/>
+                    </a:lnR>
+                    <a:lnT w="38100" cap="flat" cmpd="sng" algn="ctr">
+                      <a:solidFill>
+                        <a:schemeClr val="tx1">
+                          <a:lumMod val="65000"/>
+                          <a:lumOff val="35000"/>
+                        </a:schemeClr>
+                      </a:solidFill>
+                      <a:prstDash val="solid"/>
+                      <a:round/>
+                      <a:headEnd type="none" w="med" len="med"/>
+                      <a:tailEnd type="none" w="med" len="med"/>
+                    </a:lnT>
+                    <a:lnB w="38100" cap="flat" cmpd="sng" algn="ctr">
+                      <a:solidFill>
+                        <a:schemeClr val="tx1">
+                          <a:lumMod val="65000"/>
+                          <a:lumOff val="35000"/>
+                        </a:schemeClr>
+                      </a:solidFill>
+                      <a:prstDash val="solid"/>
+                      <a:round/>
+                      <a:headEnd type="none" w="med" len="med"/>
+                      <a:tailEnd type="none" w="med" len="med"/>
+                    </a:lnB>
+                    <a:noFill/>
+                  </a:tcPr>
+                </a:tc>
+                <a:extLst>
+                  <a:ext uri="{0D108BD9-81ED-4DB2-BD59-A6C34878D82A}">
+                    <a16:rowId xmlns:a16="http://schemas.microsoft.com/office/drawing/2014/main" val="1090502963"/>
+                  </a:ext>
+                </a:extLst>
+              </a:tr>
+            </a:tbl>
+          </a:graphicData>
+        </a:graphic>
+      </p:graphicFrame>
+      <p:sp>
+        <p:nvSpPr>
+          <p:cNvPr id="23" name="TextBox 22">
+            <a:extLst>
+              <a:ext uri="{FF2B5EF4-FFF2-40B4-BE49-F238E27FC236}">
+                <a16:creationId xmlns:a16="http://schemas.microsoft.com/office/drawing/2014/main" id="{438CBEA5-EAFB-E34F-AB46-1890993E79D0}"/>
+              </a:ext>
+            </a:extLst>
+          </p:cNvPr>
+          <p:cNvSpPr txBox="1"/>
+          <p:nvPr/>
+        </p:nvSpPr>
+        <p:spPr>
+          <a:xfrm>
+            <a:off x="78986" y="1631556"/>
+            <a:ext cx="2230098" cy="461665"/>
+          </a:xfrm>
+          <a:prstGeom prst="rect">
+            <a:avLst/>
+          </a:prstGeom>
+          <a:noFill/>
+        </p:spPr>
+        <p:txBody>
+          <a:bodyPr wrap="none" rtlCol="0">
+            <a:spAutoFit/>
+          </a:bodyPr>
+          <a:lstStyle/>
+          <a:p>
+            <a:r>
+              <a:rPr lang="en-DE" sz="2400" dirty="0">
+                <a:latin typeface="Monaco" pitchFamily="2" charset="77"/>
+                <a:ea typeface="Menlo" panose="020B0609030804020204" pitchFamily="49" charset="0"/>
+                <a:cs typeface="Menlo" panose="020B0609030804020204" pitchFamily="49" charset="0"/>
+              </a:rPr>
+              <a:t>seq_lengths</a:t>
+            </a:r>
+          </a:p>
+        </p:txBody>
+      </p:sp>
+      <p:graphicFrame>
+        <p:nvGraphicFramePr>
+          <p:cNvPr id="24" name="Table 4">
+            <a:extLst>
+              <a:ext uri="{FF2B5EF4-FFF2-40B4-BE49-F238E27FC236}">
+                <a16:creationId xmlns:a16="http://schemas.microsoft.com/office/drawing/2014/main" id="{BE78D417-A27C-CC47-97CC-AC241F9FD329}"/>
+              </a:ext>
+            </a:extLst>
+          </p:cNvPr>
+          <p:cNvGraphicFramePr>
+            <a:graphicFrameLocks noGrp="1"/>
+          </p:cNvGraphicFramePr>
+          <p:nvPr>
+            <p:extLst>
+              <p:ext uri="{D42A27DB-BD31-4B8C-83A1-F6EECF244321}">
+                <p14:modId xmlns:p14="http://schemas.microsoft.com/office/powerpoint/2010/main" val="3202738367"/>
+              </p:ext>
+            </p:extLst>
+          </p:nvPr>
+        </p:nvGraphicFramePr>
+        <p:xfrm>
+          <a:off x="12108322" y="2351742"/>
+          <a:ext cx="659012" cy="1861890"/>
+        </p:xfrm>
+        <a:graphic>
+          <a:graphicData uri="http://schemas.openxmlformats.org/drawingml/2006/table">
+            <a:tbl>
+              <a:tblPr firstRow="1" bandRow="1">
+                <a:tableStyleId>{2D5ABB26-0587-4C30-8999-92F81FD0307C}</a:tableStyleId>
+              </a:tblPr>
+              <a:tblGrid>
+                <a:gridCol w="659012">
+                  <a:extLst>
+                    <a:ext uri="{9D8B030D-6E8A-4147-A177-3AD203B41FA5}">
+                      <a16:colId xmlns:a16="http://schemas.microsoft.com/office/drawing/2014/main" val="3350277845"/>
+                    </a:ext>
+                  </a:extLst>
+                </a:gridCol>
+              </a:tblGrid>
+              <a:tr h="620630">
+                <a:tc>
+                  <a:txBody>
+                    <a:bodyPr/>
+                    <a:lstStyle/>
+                    <a:p>
+                      <a:pPr algn="r"/>
+                      <a:endParaRPr lang="en-DE" sz="2400" dirty="0">
+                        <a:latin typeface="Monaco" pitchFamily="2" charset="77"/>
+                        <a:ea typeface="Menlo" panose="020B0609030804020204" pitchFamily="49" charset="0"/>
+                        <a:cs typeface="Menlo" panose="020B0609030804020204" pitchFamily="49" charset="0"/>
+                      </a:endParaRPr>
+                    </a:p>
+                  </a:txBody>
+                  <a:tcPr marL="153032" marR="153032" marT="76516" marB="76516" anchor="ctr">
+                    <a:lnL w="38100" cap="flat" cmpd="sng" algn="ctr">
+                      <a:solidFill>
+                        <a:schemeClr val="tx1">
+                          <a:lumMod val="65000"/>
+                          <a:lumOff val="35000"/>
+                        </a:schemeClr>
+                      </a:solidFill>
+                      <a:prstDash val="solid"/>
+                      <a:round/>
+                      <a:headEnd type="none" w="med" len="med"/>
+                      <a:tailEnd type="none" w="med" len="med"/>
+                    </a:lnL>
+                    <a:lnR w="38100" cap="flat" cmpd="sng" algn="ctr">
+                      <a:solidFill>
+                        <a:schemeClr val="tx1">
+                          <a:lumMod val="65000"/>
+                          <a:lumOff val="35000"/>
+                        </a:schemeClr>
+                      </a:solidFill>
+                      <a:prstDash val="solid"/>
+                      <a:round/>
+                      <a:headEnd type="none" w="med" len="med"/>
+                      <a:tailEnd type="none" w="med" len="med"/>
+                    </a:lnR>
+                    <a:lnT w="38100" cap="flat" cmpd="sng" algn="ctr">
+                      <a:solidFill>
+                        <a:schemeClr val="tx1">
+                          <a:lumMod val="65000"/>
+                          <a:lumOff val="35000"/>
+                        </a:schemeClr>
+                      </a:solidFill>
+                      <a:prstDash val="solid"/>
+                      <a:round/>
+                      <a:headEnd type="none" w="med" len="med"/>
+                      <a:tailEnd type="none" w="med" len="med"/>
+                    </a:lnT>
+                    <a:lnB w="38100" cap="flat" cmpd="sng" algn="ctr">
+                      <a:solidFill>
+                        <a:schemeClr val="tx1">
+                          <a:lumMod val="65000"/>
+                          <a:lumOff val="35000"/>
+                        </a:schemeClr>
+                      </a:solidFill>
+                      <a:prstDash val="solid"/>
+                      <a:round/>
+                      <a:headEnd type="none" w="med" len="med"/>
+                      <a:tailEnd type="none" w="med" len="med"/>
+                    </a:lnB>
+                    <a:solidFill>
+                      <a:schemeClr val="accent1">
+                        <a:lumMod val="40000"/>
+                        <a:lumOff val="60000"/>
+                      </a:schemeClr>
+                    </a:solidFill>
+                  </a:tcPr>
+                </a:tc>
+                <a:extLst>
+                  <a:ext uri="{0D108BD9-81ED-4DB2-BD59-A6C34878D82A}">
+                    <a16:rowId xmlns:a16="http://schemas.microsoft.com/office/drawing/2014/main" val="2976503498"/>
+                  </a:ext>
+                </a:extLst>
+              </a:tr>
+              <a:tr h="620630">
+                <a:tc>
+                  <a:txBody>
+                    <a:bodyPr/>
+                    <a:lstStyle/>
+                    <a:p>
+                      <a:pPr algn="r"/>
+                      <a:endParaRPr lang="en-DE" sz="2400" dirty="0">
+                        <a:latin typeface="Monaco" pitchFamily="2" charset="77"/>
+                      </a:endParaRPr>
+                    </a:p>
+                  </a:txBody>
+                  <a:tcPr marL="153032" marR="153032" marT="76516" marB="76516" anchor="ctr">
+                    <a:lnL w="38100" cap="flat" cmpd="sng" algn="ctr">
+                      <a:solidFill>
+                        <a:schemeClr val="tx1">
+                          <a:lumMod val="65000"/>
+                          <a:lumOff val="35000"/>
+                        </a:schemeClr>
+                      </a:solidFill>
+                      <a:prstDash val="solid"/>
+                      <a:round/>
+                      <a:headEnd type="none" w="med" len="med"/>
+                      <a:tailEnd type="none" w="med" len="med"/>
+                    </a:lnL>
+                    <a:lnR w="38100" cap="flat" cmpd="sng" algn="ctr">
+                      <a:solidFill>
+                        <a:schemeClr val="tx1">
+                          <a:lumMod val="65000"/>
+                          <a:lumOff val="35000"/>
+                        </a:schemeClr>
+                      </a:solidFill>
+                      <a:prstDash val="solid"/>
+                      <a:round/>
+                      <a:headEnd type="none" w="med" len="med"/>
+                      <a:tailEnd type="none" w="med" len="med"/>
+                    </a:lnR>
+                    <a:lnT w="38100" cap="flat" cmpd="sng" algn="ctr">
+                      <a:solidFill>
+                        <a:schemeClr val="tx1">
+                          <a:lumMod val="65000"/>
+                          <a:lumOff val="35000"/>
+                        </a:schemeClr>
+                      </a:solidFill>
+                      <a:prstDash val="solid"/>
+                      <a:round/>
+                      <a:headEnd type="none" w="med" len="med"/>
+                      <a:tailEnd type="none" w="med" len="med"/>
+                    </a:lnT>
+                    <a:lnB w="38100" cap="flat" cmpd="sng" algn="ctr">
+                      <a:solidFill>
+                        <a:schemeClr val="tx1">
+                          <a:lumMod val="65000"/>
+                          <a:lumOff val="35000"/>
+                        </a:schemeClr>
+                      </a:solidFill>
+                      <a:prstDash val="solid"/>
+                      <a:round/>
+                      <a:headEnd type="none" w="med" len="med"/>
+                      <a:tailEnd type="none" w="med" len="med"/>
+                    </a:lnB>
+                    <a:solidFill>
+                      <a:schemeClr val="accent1">
+                        <a:lumMod val="40000"/>
+                        <a:lumOff val="60000"/>
+                      </a:schemeClr>
+                    </a:solidFill>
+                  </a:tcPr>
+                </a:tc>
+                <a:extLst>
+                  <a:ext uri="{0D108BD9-81ED-4DB2-BD59-A6C34878D82A}">
+                    <a16:rowId xmlns:a16="http://schemas.microsoft.com/office/drawing/2014/main" val="3711746142"/>
+                  </a:ext>
+                </a:extLst>
+              </a:tr>
+              <a:tr h="620630">
+                <a:tc>
+                  <a:txBody>
+                    <a:bodyPr/>
+                    <a:lstStyle/>
+                    <a:p>
+                      <a:pPr algn="r"/>
+                      <a:endParaRPr lang="en-DE" sz="2400" dirty="0">
+                        <a:latin typeface="Monaco" pitchFamily="2" charset="77"/>
+                      </a:endParaRPr>
+                    </a:p>
+                  </a:txBody>
+                  <a:tcPr marL="153032" marR="153032" marT="76516" marB="76516" anchor="ctr">
+                    <a:lnL w="38100" cap="flat" cmpd="sng" algn="ctr">
+                      <a:solidFill>
+                        <a:schemeClr val="tx1">
+                          <a:lumMod val="65000"/>
+                          <a:lumOff val="35000"/>
+                        </a:schemeClr>
+                      </a:solidFill>
+                      <a:prstDash val="solid"/>
+                      <a:round/>
+                      <a:headEnd type="none" w="med" len="med"/>
+                      <a:tailEnd type="none" w="med" len="med"/>
+                    </a:lnL>
+                    <a:lnR w="38100" cap="flat" cmpd="sng" algn="ctr">
+                      <a:solidFill>
+                        <a:schemeClr val="tx1">
+                          <a:lumMod val="65000"/>
+                          <a:lumOff val="35000"/>
+                        </a:schemeClr>
+                      </a:solidFill>
+                      <a:prstDash val="solid"/>
+                      <a:round/>
+                      <a:headEnd type="none" w="med" len="med"/>
+                      <a:tailEnd type="none" w="med" len="med"/>
+                    </a:lnR>
+                    <a:lnT w="38100" cap="flat" cmpd="sng" algn="ctr">
+                      <a:solidFill>
+                        <a:schemeClr val="tx1">
+                          <a:lumMod val="65000"/>
+                          <a:lumOff val="35000"/>
+                        </a:schemeClr>
+                      </a:solidFill>
+                      <a:prstDash val="solid"/>
+                      <a:round/>
+                      <a:headEnd type="none" w="med" len="med"/>
+                      <a:tailEnd type="none" w="med" len="med"/>
+                    </a:lnT>
+                    <a:lnB w="38100" cap="flat" cmpd="sng" algn="ctr">
+                      <a:solidFill>
+                        <a:schemeClr val="tx1">
+                          <a:lumMod val="65000"/>
+                          <a:lumOff val="35000"/>
+                        </a:schemeClr>
+                      </a:solidFill>
+                      <a:prstDash val="solid"/>
+                      <a:round/>
+                      <a:headEnd type="none" w="med" len="med"/>
+                      <a:tailEnd type="none" w="med" len="med"/>
+                    </a:lnB>
+                    <a:solidFill>
+                      <a:schemeClr val="accent1">
+                        <a:lumMod val="40000"/>
+                        <a:lumOff val="60000"/>
+                      </a:schemeClr>
+                    </a:solidFill>
+                  </a:tcPr>
+                </a:tc>
+                <a:extLst>
+                  <a:ext uri="{0D108BD9-81ED-4DB2-BD59-A6C34878D82A}">
+                    <a16:rowId xmlns:a16="http://schemas.microsoft.com/office/drawing/2014/main" val="1090502963"/>
+                  </a:ext>
+                </a:extLst>
+              </a:tr>
+            </a:tbl>
+          </a:graphicData>
+        </a:graphic>
+      </p:graphicFrame>
+      <p:sp>
+        <p:nvSpPr>
+          <p:cNvPr id="25" name="TextBox 24">
+            <a:extLst>
+              <a:ext uri="{FF2B5EF4-FFF2-40B4-BE49-F238E27FC236}">
+                <a16:creationId xmlns:a16="http://schemas.microsoft.com/office/drawing/2014/main" id="{CA319C8F-16C0-934F-8158-C44C0BB48AA7}"/>
+              </a:ext>
+            </a:extLst>
+          </p:cNvPr>
+          <p:cNvSpPr txBox="1"/>
+          <p:nvPr/>
+        </p:nvSpPr>
+        <p:spPr>
+          <a:xfrm>
+            <a:off x="11610877" y="1631556"/>
+            <a:ext cx="1659429" cy="461665"/>
+          </a:xfrm>
+          <a:prstGeom prst="rect">
+            <a:avLst/>
+          </a:prstGeom>
+          <a:noFill/>
+        </p:spPr>
+        <p:txBody>
+          <a:bodyPr wrap="none" rtlCol="0">
+            <a:spAutoFit/>
+          </a:bodyPr>
+          <a:lstStyle/>
+          <a:p>
+            <a:r>
+              <a:rPr lang="en-DE" sz="2400" dirty="0">
+                <a:latin typeface="Monaco" pitchFamily="2" charset="77"/>
+                <a:ea typeface="Menlo" panose="020B0609030804020204" pitchFamily="49" charset="0"/>
+                <a:cs typeface="Menlo" panose="020B0609030804020204" pitchFamily="49" charset="0"/>
+              </a:rPr>
+              <a:t>log_like</a:t>
+            </a:r>
+          </a:p>
+        </p:txBody>
+      </p:sp>
+      <p:sp>
+        <p:nvSpPr>
+          <p:cNvPr id="5" name="Right Arrow 4">
+            <a:extLst>
+              <a:ext uri="{FF2B5EF4-FFF2-40B4-BE49-F238E27FC236}">
+                <a16:creationId xmlns:a16="http://schemas.microsoft.com/office/drawing/2014/main" id="{E60C064E-E73D-7248-99DC-DA03856F3781}"/>
+              </a:ext>
+            </a:extLst>
+          </p:cNvPr>
+          <p:cNvSpPr/>
+          <p:nvPr/>
+        </p:nvSpPr>
+        <p:spPr>
+          <a:xfrm>
+            <a:off x="11053504" y="3009718"/>
+            <a:ext cx="534355" cy="540000"/>
+          </a:xfrm>
+          <a:prstGeom prst="rightArrow">
+            <a:avLst>
+              <a:gd name="adj1" fmla="val 40183"/>
+              <a:gd name="adj2" fmla="val 50000"/>
+            </a:avLst>
+          </a:prstGeom>
+          <a:solidFill>
+            <a:schemeClr val="accent2">
+              <a:lumMod val="60000"/>
+              <a:lumOff val="40000"/>
+            </a:schemeClr>
+          </a:solidFill>
+          <a:ln w="38100">
+            <a:solidFill>
+              <a:schemeClr val="tx1">
+                <a:lumMod val="65000"/>
+                <a:lumOff val="35000"/>
+              </a:schemeClr>
+            </a:solidFill>
+          </a:ln>
+        </p:spPr>
+        <p:style>
+          <a:lnRef idx="2">
+            <a:schemeClr val="accent1">
+              <a:shade val="50000"/>
+            </a:schemeClr>
+          </a:lnRef>
+          <a:fillRef idx="1">
+            <a:schemeClr val="accent1"/>
+          </a:fillRef>
+          <a:effectRef idx="0">
+            <a:schemeClr val="accent1"/>
+          </a:effectRef>
+          <a:fontRef idx="minor">
+            <a:schemeClr val="lt1"/>
+          </a:fontRef>
+        </p:style>
+        <p:txBody>
+          <a:bodyPr rtlCol="0" anchor="ctr"/>
+          <a:lstStyle/>
+          <a:p>
+            <a:pPr algn="ctr"/>
+            <a:endParaRPr lang="en-DE"/>
+          </a:p>
+        </p:txBody>
+      </p:sp>
+      <p:sp>
+        <p:nvSpPr>
+          <p:cNvPr id="26" name="Cross 25">
+            <a:extLst>
+              <a:ext uri="{FF2B5EF4-FFF2-40B4-BE49-F238E27FC236}">
+                <a16:creationId xmlns:a16="http://schemas.microsoft.com/office/drawing/2014/main" id="{2A4E6F41-F8E6-2A43-AFE2-1095F4D8A1AA}"/>
+              </a:ext>
+            </a:extLst>
+          </p:cNvPr>
+          <p:cNvSpPr/>
+          <p:nvPr/>
+        </p:nvSpPr>
+        <p:spPr>
+          <a:xfrm>
+            <a:off x="6409984" y="3012687"/>
+            <a:ext cx="540000" cy="540000"/>
+          </a:xfrm>
+          <a:prstGeom prst="plus">
+            <a:avLst>
+              <a:gd name="adj" fmla="val 33715"/>
+            </a:avLst>
+          </a:prstGeom>
+          <a:solidFill>
+            <a:schemeClr val="accent2">
+              <a:lumMod val="60000"/>
+              <a:lumOff val="40000"/>
+            </a:schemeClr>
+          </a:solidFill>
+          <a:ln w="38100">
+            <a:solidFill>
+              <a:schemeClr val="tx1">
+                <a:lumMod val="65000"/>
+                <a:lumOff val="35000"/>
+              </a:schemeClr>
+            </a:solidFill>
+          </a:ln>
+        </p:spPr>
+        <p:style>
+          <a:lnRef idx="2">
+            <a:schemeClr val="accent1">
+              <a:shade val="50000"/>
+            </a:schemeClr>
+          </a:lnRef>
+          <a:fillRef idx="1">
+            <a:schemeClr val="accent1"/>
+          </a:fillRef>
+          <a:effectRef idx="0">
+            <a:schemeClr val="accent1"/>
+          </a:effectRef>
+          <a:fontRef idx="minor">
+            <a:schemeClr val="lt1"/>
+          </a:fontRef>
+        </p:style>
+        <p:txBody>
+          <a:bodyPr rtlCol="0" anchor="ctr"/>
+          <a:lstStyle/>
+          <a:p>
+            <a:pPr algn="ctr"/>
+            <a:endParaRPr lang="en-DE"/>
+          </a:p>
+        </p:txBody>
+      </p:sp>
+    </p:spTree>
+    <p:extLst>
+      <p:ext uri="{BB962C8B-B14F-4D97-AF65-F5344CB8AC3E}">
+        <p14:creationId xmlns:p14="http://schemas.microsoft.com/office/powerpoint/2010/main" val="3631316184"/>
+      </p:ext>
+    </p:extLst>
+  </p:cSld>
+  <p:clrMapOvr>
+    <a:masterClrMapping/>
+  </p:clrMapOvr>
+</p:sld>
+</file>
+
+<file path=ppt/slides/slide5.xml><?xml version="1.0" encoding="utf-8"?>
 <p:sld xmlns:a="http://schemas.openxmlformats.org/drawingml/2006/main" xmlns:r="http://schemas.openxmlformats.org/officeDocument/2006/relationships" xmlns:p="http://schemas.openxmlformats.org/presentationml/2006/main">
   <p:cSld>
     <p:spTree>
@@ -14834,8 +17736,8 @@
           </a:fontRef>
         </p:style>
       </p:cxnSp>
-      <mc:AlternateContent xmlns:mc="http://schemas.openxmlformats.org/markup-compatibility/2006">
-        <mc:Choice xmlns:a14="http://schemas.microsoft.com/office/drawing/2010/main" Requires="a14">
+      <mc:AlternateContent xmlns:mc="http://schemas.openxmlformats.org/markup-compatibility/2006" xmlns:a14="http://schemas.microsoft.com/office/drawing/2010/main">
+        <mc:Choice Requires="a14">
           <p:sp>
             <p:nvSpPr>
               <p:cNvPr id="10" name="TextBox 9">
@@ -14904,7 +17806,7 @@
             </p:txBody>
           </p:sp>
         </mc:Choice>
-        <mc:Fallback>
+        <mc:Fallback xmlns="">
           <p:sp>
             <p:nvSpPr>
               <p:cNvPr id="10" name="TextBox 9">
@@ -14949,8 +17851,8 @@
           </p:sp>
         </mc:Fallback>
       </mc:AlternateContent>
-      <mc:AlternateContent xmlns:mc="http://schemas.openxmlformats.org/markup-compatibility/2006">
-        <mc:Choice xmlns:a14="http://schemas.microsoft.com/office/drawing/2010/main" Requires="a14">
+      <mc:AlternateContent xmlns:mc="http://schemas.openxmlformats.org/markup-compatibility/2006" xmlns:a14="http://schemas.microsoft.com/office/drawing/2010/main">
+        <mc:Choice Requires="a14">
           <p:sp>
             <p:nvSpPr>
               <p:cNvPr id="47" name="TextBox 46">
@@ -15019,7 +17921,7 @@
             </p:txBody>
           </p:sp>
         </mc:Choice>
-        <mc:Fallback>
+        <mc:Fallback xmlns="">
           <p:sp>
             <p:nvSpPr>
               <p:cNvPr id="47" name="TextBox 46">
@@ -15064,8 +17966,8 @@
           </p:sp>
         </mc:Fallback>
       </mc:AlternateContent>
-      <mc:AlternateContent xmlns:mc="http://schemas.openxmlformats.org/markup-compatibility/2006">
-        <mc:Choice xmlns:a14="http://schemas.microsoft.com/office/drawing/2010/main" Requires="a14">
+      <mc:AlternateContent xmlns:mc="http://schemas.openxmlformats.org/markup-compatibility/2006" xmlns:a14="http://schemas.microsoft.com/office/drawing/2010/main">
+        <mc:Choice Requires="a14">
           <p:sp>
             <p:nvSpPr>
               <p:cNvPr id="49" name="TextBox 48">
@@ -15134,7 +18036,7 @@
             </p:txBody>
           </p:sp>
         </mc:Choice>
-        <mc:Fallback>
+        <mc:Fallback xmlns="">
           <p:sp>
             <p:nvSpPr>
               <p:cNvPr id="49" name="TextBox 48">
@@ -15268,8 +18170,8 @@
           </a:fontRef>
         </p:style>
       </p:cxnSp>
-      <mc:AlternateContent xmlns:mc="http://schemas.openxmlformats.org/markup-compatibility/2006">
-        <mc:Choice xmlns:a14="http://schemas.microsoft.com/office/drawing/2010/main" Requires="a14">
+      <mc:AlternateContent xmlns:mc="http://schemas.openxmlformats.org/markup-compatibility/2006" xmlns:a14="http://schemas.microsoft.com/office/drawing/2010/main">
+        <mc:Choice Requires="a14">
           <p:sp>
             <p:nvSpPr>
               <p:cNvPr id="63" name="TextBox 62">
@@ -15344,7 +18246,7 @@
             </p:txBody>
           </p:sp>
         </mc:Choice>
-        <mc:Fallback>
+        <mc:Fallback xmlns="">
           <p:sp>
             <p:nvSpPr>
               <p:cNvPr id="63" name="TextBox 62">
@@ -15389,8 +18291,8 @@
           </p:sp>
         </mc:Fallback>
       </mc:AlternateContent>
-      <mc:AlternateContent xmlns:mc="http://schemas.openxmlformats.org/markup-compatibility/2006">
-        <mc:Choice xmlns:a14="http://schemas.microsoft.com/office/drawing/2010/main" Requires="a14">
+      <mc:AlternateContent xmlns:mc="http://schemas.openxmlformats.org/markup-compatibility/2006" xmlns:a14="http://schemas.microsoft.com/office/drawing/2010/main">
+        <mc:Choice Requires="a14">
           <p:sp>
             <p:nvSpPr>
               <p:cNvPr id="64" name="TextBox 63"/>
@@ -15434,7 +18336,7 @@
             </p:txBody>
           </p:sp>
         </mc:Choice>
-        <mc:Fallback>
+        <mc:Fallback xmlns="">
           <p:sp>
             <p:nvSpPr>
               <p:cNvPr id="64" name="TextBox 63"/>
@@ -16729,8 +19631,8 @@
           </a:graphicData>
         </a:graphic>
       </p:graphicFrame>
-      <mc:AlternateContent xmlns:mc="http://schemas.openxmlformats.org/markup-compatibility/2006">
-        <mc:Choice xmlns:a14="http://schemas.microsoft.com/office/drawing/2010/main" Requires="a14">
+      <mc:AlternateContent xmlns:mc="http://schemas.openxmlformats.org/markup-compatibility/2006" xmlns:a14="http://schemas.microsoft.com/office/drawing/2010/main">
+        <mc:Choice Requires="a14">
           <p:sp>
             <p:nvSpPr>
               <p:cNvPr id="72" name="TextBox 71">
@@ -16975,7 +19877,7 @@
             </p:txBody>
           </p:sp>
         </mc:Choice>
-        <mc:Fallback>
+        <mc:Fallback xmlns="">
           <p:sp>
             <p:nvSpPr>
               <p:cNvPr id="72" name="TextBox 71">
@@ -17233,8 +20135,8 @@
           </a:graphicData>
         </a:graphic>
       </p:graphicFrame>
-      <mc:AlternateContent xmlns:mc="http://schemas.openxmlformats.org/markup-compatibility/2006">
-        <mc:Choice xmlns:a14="http://schemas.microsoft.com/office/drawing/2010/main" Requires="a14">
+      <mc:AlternateContent xmlns:mc="http://schemas.openxmlformats.org/markup-compatibility/2006" xmlns:a14="http://schemas.microsoft.com/office/drawing/2010/main">
+        <mc:Choice Requires="a14">
           <p:sp>
             <p:nvSpPr>
               <p:cNvPr id="74" name="TextBox 73">
@@ -17303,7 +20205,7 @@
             </p:txBody>
           </p:sp>
         </mc:Choice>
-        <mc:Fallback>
+        <mc:Fallback xmlns="">
           <p:sp>
             <p:nvSpPr>
               <p:cNvPr id="74" name="TextBox 73">
@@ -17348,8 +20250,8 @@
           </p:sp>
         </mc:Fallback>
       </mc:AlternateContent>
-      <mc:AlternateContent xmlns:mc="http://schemas.openxmlformats.org/markup-compatibility/2006">
-        <mc:Choice xmlns:a14="http://schemas.microsoft.com/office/drawing/2010/main" Requires="a14">
+      <mc:AlternateContent xmlns:mc="http://schemas.openxmlformats.org/markup-compatibility/2006" xmlns:a14="http://schemas.microsoft.com/office/drawing/2010/main">
+        <mc:Choice Requires="a14">
           <p:sp>
             <p:nvSpPr>
               <p:cNvPr id="21" name="Rectangle 20">
@@ -17554,7 +20456,7 @@
             </p:txBody>
           </p:sp>
         </mc:Choice>
-        <mc:Fallback>
+        <mc:Fallback xmlns="">
           <p:sp>
             <p:nvSpPr>
               <p:cNvPr id="21" name="Rectangle 20">
@@ -17687,8 +20589,8 @@
           </a:fontRef>
         </p:style>
       </p:cxnSp>
-      <mc:AlternateContent xmlns:mc="http://schemas.openxmlformats.org/markup-compatibility/2006">
-        <mc:Choice xmlns:a14="http://schemas.microsoft.com/office/drawing/2010/main" Requires="a14">
+      <mc:AlternateContent xmlns:mc="http://schemas.openxmlformats.org/markup-compatibility/2006" xmlns:a14="http://schemas.microsoft.com/office/drawing/2010/main">
+        <mc:Choice Requires="a14">
           <p:sp>
             <p:nvSpPr>
               <p:cNvPr id="78" name="TextBox 77">
@@ -17757,7 +20659,7 @@
             </p:txBody>
           </p:sp>
         </mc:Choice>
-        <mc:Fallback>
+        <mc:Fallback xmlns="">
           <p:sp>
             <p:nvSpPr>
               <p:cNvPr id="78" name="TextBox 77">
@@ -17802,8 +20704,8 @@
           </p:sp>
         </mc:Fallback>
       </mc:AlternateContent>
-      <mc:AlternateContent xmlns:mc="http://schemas.openxmlformats.org/markup-compatibility/2006">
-        <mc:Choice xmlns:a14="http://schemas.microsoft.com/office/drawing/2010/main" Requires="a14">
+      <mc:AlternateContent xmlns:mc="http://schemas.openxmlformats.org/markup-compatibility/2006" xmlns:a14="http://schemas.microsoft.com/office/drawing/2010/main">
+        <mc:Choice Requires="a14">
           <p:sp>
             <p:nvSpPr>
               <p:cNvPr id="79" name="TextBox 78">
@@ -17872,7 +20774,7 @@
             </p:txBody>
           </p:sp>
         </mc:Choice>
-        <mc:Fallback>
+        <mc:Fallback xmlns="">
           <p:sp>
             <p:nvSpPr>
               <p:cNvPr id="79" name="TextBox 78">
@@ -17917,8 +20819,8 @@
           </p:sp>
         </mc:Fallback>
       </mc:AlternateContent>
-      <mc:AlternateContent xmlns:mc="http://schemas.openxmlformats.org/markup-compatibility/2006">
-        <mc:Choice xmlns:a14="http://schemas.microsoft.com/office/drawing/2010/main" Requires="a14">
+      <mc:AlternateContent xmlns:mc="http://schemas.openxmlformats.org/markup-compatibility/2006" xmlns:a14="http://schemas.microsoft.com/office/drawing/2010/main">
+        <mc:Choice Requires="a14">
           <p:sp>
             <p:nvSpPr>
               <p:cNvPr id="80" name="TextBox 79">
@@ -17993,7 +20895,7 @@
             </p:txBody>
           </p:sp>
         </mc:Choice>
-        <mc:Fallback>
+        <mc:Fallback xmlns="">
           <p:sp>
             <p:nvSpPr>
               <p:cNvPr id="80" name="TextBox 79">
@@ -18038,8 +20940,8 @@
           </p:sp>
         </mc:Fallback>
       </mc:AlternateContent>
-      <mc:AlternateContent xmlns:mc="http://schemas.openxmlformats.org/markup-compatibility/2006">
-        <mc:Choice xmlns:a14="http://schemas.microsoft.com/office/drawing/2010/main" Requires="a14">
+      <mc:AlternateContent xmlns:mc="http://schemas.openxmlformats.org/markup-compatibility/2006" xmlns:a14="http://schemas.microsoft.com/office/drawing/2010/main">
+        <mc:Choice Requires="a14">
           <p:sp>
             <p:nvSpPr>
               <p:cNvPr id="81" name="TextBox 80">
@@ -18089,7 +20991,7 @@
             </p:txBody>
           </p:sp>
         </mc:Choice>
-        <mc:Fallback>
+        <mc:Fallback xmlns="">
           <p:sp>
             <p:nvSpPr>
               <p:cNvPr id="81" name="TextBox 80">
@@ -18134,8 +21036,8 @@
           </p:sp>
         </mc:Fallback>
       </mc:AlternateContent>
-      <mc:AlternateContent xmlns:mc="http://schemas.openxmlformats.org/markup-compatibility/2006">
-        <mc:Choice xmlns:a14="http://schemas.microsoft.com/office/drawing/2010/main" Requires="a14">
+      <mc:AlternateContent xmlns:mc="http://schemas.openxmlformats.org/markup-compatibility/2006" xmlns:a14="http://schemas.microsoft.com/office/drawing/2010/main">
+        <mc:Choice Requires="a14">
           <p:sp>
             <p:nvSpPr>
               <p:cNvPr id="82" name="TextBox 81">
@@ -18185,7 +21087,7 @@
             </p:txBody>
           </p:sp>
         </mc:Choice>
-        <mc:Fallback>
+        <mc:Fallback xmlns="">
           <p:sp>
             <p:nvSpPr>
               <p:cNvPr id="82" name="TextBox 81">
@@ -18281,7 +21183,7 @@
 </p:sld>
 </file>
 
-<file path=ppt/slides/slide5.xml><?xml version="1.0" encoding="utf-8"?>
+<file path=ppt/slides/slide6.xml><?xml version="1.0" encoding="utf-8"?>
 <p:sld xmlns:a="http://schemas.openxmlformats.org/drawingml/2006/main" xmlns:r="http://schemas.openxmlformats.org/officeDocument/2006/relationships" xmlns:p="http://schemas.openxmlformats.org/presentationml/2006/main">
   <p:cSld>
     <p:spTree>
@@ -18300,2786 +21202,142 @@
       </p:grpSpPr>
       <p:sp>
         <p:nvSpPr>
-          <p:cNvPr id="17" name="TextBox 16">
-            <a:extLst>
-              <a:ext uri="{FF2B5EF4-FFF2-40B4-BE49-F238E27FC236}">
-                <a16:creationId xmlns:a16="http://schemas.microsoft.com/office/drawing/2014/main" id="{1BFBA5A7-7285-F349-95B6-C53F70118BCA}"/>
-              </a:ext>
-            </a:extLst>
-          </p:cNvPr>
-          <p:cNvSpPr txBox="1"/>
-          <p:nvPr/>
-        </p:nvSpPr>
-        <p:spPr>
-          <a:xfrm>
-            <a:off x="8072224" y="1631555"/>
-            <a:ext cx="1659429" cy="461665"/>
-          </a:xfrm>
-          <a:prstGeom prst="rect">
-            <a:avLst/>
-          </a:prstGeom>
-          <a:noFill/>
-        </p:spPr>
-        <p:txBody>
-          <a:bodyPr wrap="none" rtlCol="0">
-            <a:spAutoFit/>
-          </a:bodyPr>
-          <a:lstStyle/>
-          <a:p>
-            <a:r>
-              <a:rPr lang="en-DE" sz="2400" dirty="0">
-                <a:latin typeface="Monaco" pitchFamily="2" charset="77"/>
-                <a:ea typeface="Menlo" panose="020B0609030804020204" pitchFamily="49" charset="0"/>
-                <a:cs typeface="Menlo" panose="020B0609030804020204" pitchFamily="49" charset="0"/>
-              </a:rPr>
-              <a:t>log_surv</a:t>
-            </a:r>
-          </a:p>
-        </p:txBody>
-      </p:sp>
-      <p:graphicFrame>
-        <p:nvGraphicFramePr>
-          <p:cNvPr id="18" name="Table 4">
-            <a:extLst>
-              <a:ext uri="{FF2B5EF4-FFF2-40B4-BE49-F238E27FC236}">
-                <a16:creationId xmlns:a16="http://schemas.microsoft.com/office/drawing/2014/main" id="{27A5CE71-9866-D043-8FE7-EA60B183B15D}"/>
-              </a:ext>
-            </a:extLst>
-          </p:cNvPr>
-          <p:cNvGraphicFramePr>
-            <a:graphicFrameLocks noGrp="1"/>
-          </p:cNvGraphicFramePr>
-          <p:nvPr>
-            <p:extLst>
-              <p:ext uri="{D42A27DB-BD31-4B8C-83A1-F6EECF244321}">
-                <p14:modId xmlns:p14="http://schemas.microsoft.com/office/powerpoint/2010/main" val="3340910911"/>
-              </p:ext>
-            </p:extLst>
-          </p:nvPr>
-        </p:nvGraphicFramePr>
-        <p:xfrm>
-          <a:off x="7254409" y="2351742"/>
-          <a:ext cx="3295060" cy="1861890"/>
-        </p:xfrm>
-        <a:graphic>
-          <a:graphicData uri="http://schemas.openxmlformats.org/drawingml/2006/table">
-            <a:tbl>
-              <a:tblPr firstRow="1" bandRow="1">
-                <a:tableStyleId>{2D5ABB26-0587-4C30-8999-92F81FD0307C}</a:tableStyleId>
-              </a:tblPr>
-              <a:tblGrid>
-                <a:gridCol w="659012">
-                  <a:extLst>
-                    <a:ext uri="{9D8B030D-6E8A-4147-A177-3AD203B41FA5}">
-                      <a16:colId xmlns:a16="http://schemas.microsoft.com/office/drawing/2014/main" val="3350277845"/>
-                    </a:ext>
-                  </a:extLst>
-                </a:gridCol>
-                <a:gridCol w="659012">
-                  <a:extLst>
-                    <a:ext uri="{9D8B030D-6E8A-4147-A177-3AD203B41FA5}">
-                      <a16:colId xmlns:a16="http://schemas.microsoft.com/office/drawing/2014/main" val="427396348"/>
-                    </a:ext>
-                  </a:extLst>
-                </a:gridCol>
-                <a:gridCol w="659012">
-                  <a:extLst>
-                    <a:ext uri="{9D8B030D-6E8A-4147-A177-3AD203B41FA5}">
-                      <a16:colId xmlns:a16="http://schemas.microsoft.com/office/drawing/2014/main" val="1158632962"/>
-                    </a:ext>
-                  </a:extLst>
-                </a:gridCol>
-                <a:gridCol w="659012">
-                  <a:extLst>
-                    <a:ext uri="{9D8B030D-6E8A-4147-A177-3AD203B41FA5}">
-                      <a16:colId xmlns:a16="http://schemas.microsoft.com/office/drawing/2014/main" val="2417830556"/>
-                    </a:ext>
-                  </a:extLst>
-                </a:gridCol>
-                <a:gridCol w="659012">
-                  <a:extLst>
-                    <a:ext uri="{9D8B030D-6E8A-4147-A177-3AD203B41FA5}">
-                      <a16:colId xmlns:a16="http://schemas.microsoft.com/office/drawing/2014/main" val="324716847"/>
-                    </a:ext>
-                  </a:extLst>
-                </a:gridCol>
-              </a:tblGrid>
-              <a:tr h="620630">
-                <a:tc>
-                  <a:txBody>
-                    <a:bodyPr/>
-                    <a:lstStyle/>
-                    <a:p>
-                      <a:pPr algn="l"/>
-                      <a:endParaRPr lang="en-DE" sz="2000" dirty="0"/>
-                    </a:p>
-                  </a:txBody>
-                  <a:tcPr marL="153032" marR="153032" marT="76516" marB="76516">
-                    <a:lnL w="38100" cap="flat" cmpd="sng" algn="ctr">
-                      <a:solidFill>
-                        <a:schemeClr val="tx1">
-                          <a:lumMod val="65000"/>
-                          <a:lumOff val="35000"/>
-                        </a:schemeClr>
-                      </a:solidFill>
-                      <a:prstDash val="solid"/>
-                      <a:round/>
-                      <a:headEnd type="none" w="med" len="med"/>
-                      <a:tailEnd type="none" w="med" len="med"/>
-                    </a:lnL>
-                    <a:lnR w="38100" cap="flat" cmpd="sng" algn="ctr">
-                      <a:solidFill>
-                        <a:schemeClr val="tx1">
-                          <a:lumMod val="65000"/>
-                          <a:lumOff val="35000"/>
-                        </a:schemeClr>
-                      </a:solidFill>
-                      <a:prstDash val="solid"/>
-                      <a:round/>
-                      <a:headEnd type="none" w="med" len="med"/>
-                      <a:tailEnd type="none" w="med" len="med"/>
-                    </a:lnR>
-                    <a:lnT w="38100" cap="flat" cmpd="sng" algn="ctr">
-                      <a:solidFill>
-                        <a:schemeClr val="tx1">
-                          <a:lumMod val="65000"/>
-                          <a:lumOff val="35000"/>
-                        </a:schemeClr>
-                      </a:solidFill>
-                      <a:prstDash val="solid"/>
-                      <a:round/>
-                      <a:headEnd type="none" w="med" len="med"/>
-                      <a:tailEnd type="none" w="med" len="med"/>
-                    </a:lnT>
-                    <a:lnB w="38100" cap="flat" cmpd="sng" algn="ctr">
-                      <a:solidFill>
-                        <a:schemeClr val="tx1">
-                          <a:lumMod val="65000"/>
-                          <a:lumOff val="35000"/>
-                        </a:schemeClr>
-                      </a:solidFill>
-                      <a:prstDash val="solid"/>
-                      <a:round/>
-                      <a:headEnd type="none" w="med" len="med"/>
-                      <a:tailEnd type="none" w="med" len="med"/>
-                    </a:lnB>
-                  </a:tcPr>
-                </a:tc>
-                <a:tc>
-                  <a:txBody>
-                    <a:bodyPr/>
-                    <a:lstStyle/>
-                    <a:p>
-                      <a:pPr algn="l"/>
-                      <a:endParaRPr lang="en-DE" sz="2000" dirty="0"/>
-                    </a:p>
-                  </a:txBody>
-                  <a:tcPr marL="153032" marR="153032" marT="76516" marB="76516">
-                    <a:lnL w="38100" cap="flat" cmpd="sng" algn="ctr">
-                      <a:solidFill>
-                        <a:schemeClr val="tx1">
-                          <a:lumMod val="65000"/>
-                          <a:lumOff val="35000"/>
-                        </a:schemeClr>
-                      </a:solidFill>
-                      <a:prstDash val="solid"/>
-                      <a:round/>
-                      <a:headEnd type="none" w="med" len="med"/>
-                      <a:tailEnd type="none" w="med" len="med"/>
-                    </a:lnL>
-                    <a:lnR w="38100" cap="flat" cmpd="sng" algn="ctr">
-                      <a:solidFill>
-                        <a:schemeClr val="tx1">
-                          <a:lumMod val="65000"/>
-                          <a:lumOff val="35000"/>
-                        </a:schemeClr>
-                      </a:solidFill>
-                      <a:prstDash val="solid"/>
-                      <a:round/>
-                      <a:headEnd type="none" w="med" len="med"/>
-                      <a:tailEnd type="none" w="med" len="med"/>
-                    </a:lnR>
-                    <a:lnT w="38100" cap="flat" cmpd="sng" algn="ctr">
-                      <a:solidFill>
-                        <a:schemeClr val="tx1">
-                          <a:lumMod val="65000"/>
-                          <a:lumOff val="35000"/>
-                        </a:schemeClr>
-                      </a:solidFill>
-                      <a:prstDash val="solid"/>
-                      <a:round/>
-                      <a:headEnd type="none" w="med" len="med"/>
-                      <a:tailEnd type="none" w="med" len="med"/>
-                    </a:lnT>
-                    <a:lnB w="38100" cap="flat" cmpd="sng" algn="ctr">
-                      <a:solidFill>
-                        <a:schemeClr val="tx1">
-                          <a:lumMod val="65000"/>
-                          <a:lumOff val="35000"/>
-                        </a:schemeClr>
-                      </a:solidFill>
-                      <a:prstDash val="solid"/>
-                      <a:round/>
-                      <a:headEnd type="none" w="med" len="med"/>
-                      <a:tailEnd type="none" w="med" len="med"/>
-                    </a:lnB>
-                  </a:tcPr>
-                </a:tc>
-                <a:tc>
-                  <a:txBody>
-                    <a:bodyPr/>
-                    <a:lstStyle/>
-                    <a:p>
-                      <a:pPr algn="l"/>
-                      <a:endParaRPr lang="en-DE" sz="2000" dirty="0"/>
-                    </a:p>
-                  </a:txBody>
-                  <a:tcPr marL="153032" marR="153032" marT="76516" marB="76516">
-                    <a:lnL w="38100" cap="flat" cmpd="sng" algn="ctr">
-                      <a:solidFill>
-                        <a:schemeClr val="tx1">
-                          <a:lumMod val="65000"/>
-                          <a:lumOff val="35000"/>
-                        </a:schemeClr>
-                      </a:solidFill>
-                      <a:prstDash val="solid"/>
-                      <a:round/>
-                      <a:headEnd type="none" w="med" len="med"/>
-                      <a:tailEnd type="none" w="med" len="med"/>
-                    </a:lnL>
-                    <a:lnR w="38100" cap="flat" cmpd="sng" algn="ctr">
-                      <a:solidFill>
-                        <a:schemeClr val="tx1">
-                          <a:lumMod val="65000"/>
-                          <a:lumOff val="35000"/>
-                        </a:schemeClr>
-                      </a:solidFill>
-                      <a:prstDash val="solid"/>
-                      <a:round/>
-                      <a:headEnd type="none" w="med" len="med"/>
-                      <a:tailEnd type="none" w="med" len="med"/>
-                    </a:lnR>
-                    <a:lnT w="38100" cap="flat" cmpd="sng" algn="ctr">
-                      <a:solidFill>
-                        <a:schemeClr val="tx1">
-                          <a:lumMod val="65000"/>
-                          <a:lumOff val="35000"/>
-                        </a:schemeClr>
-                      </a:solidFill>
-                      <a:prstDash val="solid"/>
-                      <a:round/>
-                      <a:headEnd type="none" w="med" len="med"/>
-                      <a:tailEnd type="none" w="med" len="med"/>
-                    </a:lnT>
-                    <a:lnB w="38100" cap="flat" cmpd="sng" algn="ctr">
-                      <a:solidFill>
-                        <a:schemeClr val="tx1">
-                          <a:lumMod val="65000"/>
-                          <a:lumOff val="35000"/>
-                        </a:schemeClr>
-                      </a:solidFill>
-                      <a:prstDash val="solid"/>
-                      <a:round/>
-                      <a:headEnd type="none" w="med" len="med"/>
-                      <a:tailEnd type="none" w="med" len="med"/>
-                    </a:lnB>
-                    <a:solidFill>
-                      <a:schemeClr val="accent2">
-                        <a:lumMod val="60000"/>
-                        <a:lumOff val="40000"/>
-                      </a:schemeClr>
-                    </a:solidFill>
-                  </a:tcPr>
-                </a:tc>
-                <a:tc>
-                  <a:txBody>
-                    <a:bodyPr/>
-                    <a:lstStyle/>
-                    <a:p>
-                      <a:pPr algn="l"/>
-                      <a:endParaRPr lang="en-DE" sz="2000" dirty="0"/>
-                    </a:p>
-                  </a:txBody>
-                  <a:tcPr marL="153032" marR="153032" marT="76516" marB="76516" anchor="ctr">
-                    <a:lnL w="38100" cap="flat" cmpd="sng" algn="ctr">
-                      <a:solidFill>
-                        <a:schemeClr val="tx1">
-                          <a:lumMod val="65000"/>
-                          <a:lumOff val="35000"/>
-                        </a:schemeClr>
-                      </a:solidFill>
-                      <a:prstDash val="solid"/>
-                      <a:round/>
-                      <a:headEnd type="none" w="med" len="med"/>
-                      <a:tailEnd type="none" w="med" len="med"/>
-                    </a:lnL>
-                    <a:lnR w="38100" cap="flat" cmpd="sng" algn="ctr">
-                      <a:solidFill>
-                        <a:schemeClr val="tx1">
-                          <a:lumMod val="65000"/>
-                          <a:lumOff val="35000"/>
-                        </a:schemeClr>
-                      </a:solidFill>
-                      <a:prstDash val="solid"/>
-                      <a:round/>
-                      <a:headEnd type="none" w="med" len="med"/>
-                      <a:tailEnd type="none" w="med" len="med"/>
-                    </a:lnR>
-                    <a:lnT w="38100" cap="flat" cmpd="sng" algn="ctr">
-                      <a:solidFill>
-                        <a:schemeClr val="tx1">
-                          <a:lumMod val="65000"/>
-                          <a:lumOff val="35000"/>
-                        </a:schemeClr>
-                      </a:solidFill>
-                      <a:prstDash val="solid"/>
-                      <a:round/>
-                      <a:headEnd type="none" w="med" len="med"/>
-                      <a:tailEnd type="none" w="med" len="med"/>
-                    </a:lnT>
-                    <a:lnB w="38100" cap="flat" cmpd="sng" algn="ctr">
-                      <a:solidFill>
-                        <a:schemeClr val="tx1">
-                          <a:lumMod val="65000"/>
-                          <a:lumOff val="35000"/>
-                        </a:schemeClr>
-                      </a:solidFill>
-                      <a:prstDash val="solid"/>
-                      <a:round/>
-                      <a:headEnd type="none" w="med" len="med"/>
-                      <a:tailEnd type="none" w="med" len="med"/>
-                    </a:lnB>
-                  </a:tcPr>
-                </a:tc>
-                <a:tc>
-                  <a:txBody>
-                    <a:bodyPr/>
-                    <a:lstStyle/>
-                    <a:p>
-                      <a:pPr algn="l"/>
-                      <a:endParaRPr lang="en-DE" sz="2000" dirty="0"/>
-                    </a:p>
-                  </a:txBody>
-                  <a:tcPr marL="153032" marR="153032" marT="76516" marB="76516" anchor="ctr">
-                    <a:lnL w="38100" cap="flat" cmpd="sng" algn="ctr">
-                      <a:solidFill>
-                        <a:schemeClr val="tx1">
-                          <a:lumMod val="65000"/>
-                          <a:lumOff val="35000"/>
-                        </a:schemeClr>
-                      </a:solidFill>
-                      <a:prstDash val="solid"/>
-                      <a:round/>
-                      <a:headEnd type="none" w="med" len="med"/>
-                      <a:tailEnd type="none" w="med" len="med"/>
-                    </a:lnL>
-                    <a:lnR w="38100" cap="flat" cmpd="sng" algn="ctr">
-                      <a:solidFill>
-                        <a:schemeClr val="tx1">
-                          <a:lumMod val="65000"/>
-                          <a:lumOff val="35000"/>
-                        </a:schemeClr>
-                      </a:solidFill>
-                      <a:prstDash val="solid"/>
-                      <a:round/>
-                      <a:headEnd type="none" w="med" len="med"/>
-                      <a:tailEnd type="none" w="med" len="med"/>
-                    </a:lnR>
-                    <a:lnT w="38100" cap="flat" cmpd="sng" algn="ctr">
-                      <a:solidFill>
-                        <a:schemeClr val="tx1">
-                          <a:lumMod val="65000"/>
-                          <a:lumOff val="35000"/>
-                        </a:schemeClr>
-                      </a:solidFill>
-                      <a:prstDash val="solid"/>
-                      <a:round/>
-                      <a:headEnd type="none" w="med" len="med"/>
-                      <a:tailEnd type="none" w="med" len="med"/>
-                    </a:lnT>
-                    <a:lnB w="38100" cap="flat" cmpd="sng" algn="ctr">
-                      <a:solidFill>
-                        <a:schemeClr val="tx1">
-                          <a:lumMod val="65000"/>
-                          <a:lumOff val="35000"/>
-                        </a:schemeClr>
-                      </a:solidFill>
-                      <a:prstDash val="solid"/>
-                      <a:round/>
-                      <a:headEnd type="none" w="med" len="med"/>
-                      <a:tailEnd type="none" w="med" len="med"/>
-                    </a:lnB>
-                  </a:tcPr>
-                </a:tc>
-                <a:extLst>
-                  <a:ext uri="{0D108BD9-81ED-4DB2-BD59-A6C34878D82A}">
-                    <a16:rowId xmlns:a16="http://schemas.microsoft.com/office/drawing/2014/main" val="2976503498"/>
-                  </a:ext>
-                </a:extLst>
-              </a:tr>
-              <a:tr h="620630">
-                <a:tc>
-                  <a:txBody>
-                    <a:bodyPr/>
-                    <a:lstStyle/>
-                    <a:p>
-                      <a:pPr algn="l"/>
-                      <a:endParaRPr lang="en-DE" sz="2000" dirty="0"/>
-                    </a:p>
-                  </a:txBody>
-                  <a:tcPr marL="153032" marR="153032" marT="76516" marB="76516">
-                    <a:lnL w="38100" cap="flat" cmpd="sng" algn="ctr">
-                      <a:solidFill>
-                        <a:schemeClr val="tx1">
-                          <a:lumMod val="65000"/>
-                          <a:lumOff val="35000"/>
-                        </a:schemeClr>
-                      </a:solidFill>
-                      <a:prstDash val="solid"/>
-                      <a:round/>
-                      <a:headEnd type="none" w="med" len="med"/>
-                      <a:tailEnd type="none" w="med" len="med"/>
-                    </a:lnL>
-                    <a:lnR w="38100" cap="flat" cmpd="sng" algn="ctr">
-                      <a:solidFill>
-                        <a:schemeClr val="tx1">
-                          <a:lumMod val="65000"/>
-                          <a:lumOff val="35000"/>
-                        </a:schemeClr>
-                      </a:solidFill>
-                      <a:prstDash val="solid"/>
-                      <a:round/>
-                      <a:headEnd type="none" w="med" len="med"/>
-                      <a:tailEnd type="none" w="med" len="med"/>
-                    </a:lnR>
-                    <a:lnT w="38100" cap="flat" cmpd="sng" algn="ctr">
-                      <a:solidFill>
-                        <a:schemeClr val="tx1">
-                          <a:lumMod val="65000"/>
-                          <a:lumOff val="35000"/>
-                        </a:schemeClr>
-                      </a:solidFill>
-                      <a:prstDash val="solid"/>
-                      <a:round/>
-                      <a:headEnd type="none" w="med" len="med"/>
-                      <a:tailEnd type="none" w="med" len="med"/>
-                    </a:lnT>
-                    <a:lnB w="38100" cap="flat" cmpd="sng" algn="ctr">
-                      <a:solidFill>
-                        <a:schemeClr val="tx1">
-                          <a:lumMod val="65000"/>
-                          <a:lumOff val="35000"/>
-                        </a:schemeClr>
-                      </a:solidFill>
-                      <a:prstDash val="solid"/>
-                      <a:round/>
-                      <a:headEnd type="none" w="med" len="med"/>
-                      <a:tailEnd type="none" w="med" len="med"/>
-                    </a:lnB>
-                  </a:tcPr>
-                </a:tc>
-                <a:tc>
-                  <a:txBody>
-                    <a:bodyPr/>
-                    <a:lstStyle/>
-                    <a:p>
-                      <a:pPr algn="l"/>
-                      <a:endParaRPr lang="en-DE" sz="2000" dirty="0"/>
-                    </a:p>
-                  </a:txBody>
-                  <a:tcPr marL="153032" marR="153032" marT="76516" marB="76516">
-                    <a:lnL w="38100" cap="flat" cmpd="sng" algn="ctr">
-                      <a:solidFill>
-                        <a:schemeClr val="tx1">
-                          <a:lumMod val="65000"/>
-                          <a:lumOff val="35000"/>
-                        </a:schemeClr>
-                      </a:solidFill>
-                      <a:prstDash val="solid"/>
-                      <a:round/>
-                      <a:headEnd type="none" w="med" len="med"/>
-                      <a:tailEnd type="none" w="med" len="med"/>
-                    </a:lnL>
-                    <a:lnR w="38100" cap="flat" cmpd="sng" algn="ctr">
-                      <a:solidFill>
-                        <a:schemeClr val="tx1">
-                          <a:lumMod val="65000"/>
-                          <a:lumOff val="35000"/>
-                        </a:schemeClr>
-                      </a:solidFill>
-                      <a:prstDash val="solid"/>
-                      <a:round/>
-                      <a:headEnd type="none" w="med" len="med"/>
-                      <a:tailEnd type="none" w="med" len="med"/>
-                    </a:lnR>
-                    <a:lnT w="38100" cap="flat" cmpd="sng" algn="ctr">
-                      <a:solidFill>
-                        <a:schemeClr val="tx1">
-                          <a:lumMod val="65000"/>
-                          <a:lumOff val="35000"/>
-                        </a:schemeClr>
-                      </a:solidFill>
-                      <a:prstDash val="solid"/>
-                      <a:round/>
-                      <a:headEnd type="none" w="med" len="med"/>
-                      <a:tailEnd type="none" w="med" len="med"/>
-                    </a:lnT>
-                    <a:lnB w="38100" cap="flat" cmpd="sng" algn="ctr">
-                      <a:solidFill>
-                        <a:schemeClr val="tx1">
-                          <a:lumMod val="65000"/>
-                          <a:lumOff val="35000"/>
-                        </a:schemeClr>
-                      </a:solidFill>
-                      <a:prstDash val="solid"/>
-                      <a:round/>
-                      <a:headEnd type="none" w="med" len="med"/>
-                      <a:tailEnd type="none" w="med" len="med"/>
-                    </a:lnB>
-                  </a:tcPr>
-                </a:tc>
-                <a:tc>
-                  <a:txBody>
-                    <a:bodyPr/>
-                    <a:lstStyle/>
-                    <a:p>
-                      <a:pPr algn="l"/>
-                      <a:endParaRPr lang="en-DE" sz="2000" dirty="0"/>
-                    </a:p>
-                  </a:txBody>
-                  <a:tcPr marL="153032" marR="153032" marT="76516" marB="76516">
-                    <a:lnL w="38100" cap="flat" cmpd="sng" algn="ctr">
-                      <a:solidFill>
-                        <a:schemeClr val="tx1">
-                          <a:lumMod val="65000"/>
-                          <a:lumOff val="35000"/>
-                        </a:schemeClr>
-                      </a:solidFill>
-                      <a:prstDash val="solid"/>
-                      <a:round/>
-                      <a:headEnd type="none" w="med" len="med"/>
-                      <a:tailEnd type="none" w="med" len="med"/>
-                    </a:lnL>
-                    <a:lnR w="38100" cap="flat" cmpd="sng" algn="ctr">
-                      <a:solidFill>
-                        <a:schemeClr val="tx1">
-                          <a:lumMod val="65000"/>
-                          <a:lumOff val="35000"/>
-                        </a:schemeClr>
-                      </a:solidFill>
-                      <a:prstDash val="solid"/>
-                      <a:round/>
-                      <a:headEnd type="none" w="med" len="med"/>
-                      <a:tailEnd type="none" w="med" len="med"/>
-                    </a:lnR>
-                    <a:lnT w="38100" cap="flat" cmpd="sng" algn="ctr">
-                      <a:solidFill>
-                        <a:schemeClr val="tx1">
-                          <a:lumMod val="65000"/>
-                          <a:lumOff val="35000"/>
-                        </a:schemeClr>
-                      </a:solidFill>
-                      <a:prstDash val="solid"/>
-                      <a:round/>
-                      <a:headEnd type="none" w="med" len="med"/>
-                      <a:tailEnd type="none" w="med" len="med"/>
-                    </a:lnT>
-                    <a:lnB w="38100" cap="flat" cmpd="sng" algn="ctr">
-                      <a:solidFill>
-                        <a:schemeClr val="tx1">
-                          <a:lumMod val="65000"/>
-                          <a:lumOff val="35000"/>
-                        </a:schemeClr>
-                      </a:solidFill>
-                      <a:prstDash val="solid"/>
-                      <a:round/>
-                      <a:headEnd type="none" w="med" len="med"/>
-                      <a:tailEnd type="none" w="med" len="med"/>
-                    </a:lnB>
-                  </a:tcPr>
-                </a:tc>
-                <a:tc>
-                  <a:txBody>
-                    <a:bodyPr/>
-                    <a:lstStyle/>
-                    <a:p>
-                      <a:pPr algn="l"/>
-                      <a:endParaRPr lang="en-DE" sz="2000" dirty="0"/>
-                    </a:p>
-                  </a:txBody>
-                  <a:tcPr marL="153032" marR="153032" marT="76516" marB="76516">
-                    <a:lnL w="38100" cap="flat" cmpd="sng" algn="ctr">
-                      <a:solidFill>
-                        <a:schemeClr val="tx1">
-                          <a:lumMod val="65000"/>
-                          <a:lumOff val="35000"/>
-                        </a:schemeClr>
-                      </a:solidFill>
-                      <a:prstDash val="solid"/>
-                      <a:round/>
-                      <a:headEnd type="none" w="med" len="med"/>
-                      <a:tailEnd type="none" w="med" len="med"/>
-                    </a:lnL>
-                    <a:lnR w="38100" cap="flat" cmpd="sng" algn="ctr">
-                      <a:solidFill>
-                        <a:schemeClr val="tx1">
-                          <a:lumMod val="65000"/>
-                          <a:lumOff val="35000"/>
-                        </a:schemeClr>
-                      </a:solidFill>
-                      <a:prstDash val="solid"/>
-                      <a:round/>
-                      <a:headEnd type="none" w="med" len="med"/>
-                      <a:tailEnd type="none" w="med" len="med"/>
-                    </a:lnR>
-                    <a:lnT w="38100" cap="flat" cmpd="sng" algn="ctr">
-                      <a:solidFill>
-                        <a:schemeClr val="tx1">
-                          <a:lumMod val="65000"/>
-                          <a:lumOff val="35000"/>
-                        </a:schemeClr>
-                      </a:solidFill>
-                      <a:prstDash val="solid"/>
-                      <a:round/>
-                      <a:headEnd type="none" w="med" len="med"/>
-                      <a:tailEnd type="none" w="med" len="med"/>
-                    </a:lnT>
-                    <a:lnB w="38100" cap="flat" cmpd="sng" algn="ctr">
-                      <a:solidFill>
-                        <a:schemeClr val="tx1">
-                          <a:lumMod val="65000"/>
-                          <a:lumOff val="35000"/>
-                        </a:schemeClr>
-                      </a:solidFill>
-                      <a:prstDash val="solid"/>
-                      <a:round/>
-                      <a:headEnd type="none" w="med" len="med"/>
-                      <a:tailEnd type="none" w="med" len="med"/>
-                    </a:lnB>
-                  </a:tcPr>
-                </a:tc>
-                <a:tc>
-                  <a:txBody>
-                    <a:bodyPr/>
-                    <a:lstStyle/>
-                    <a:p>
-                      <a:pPr algn="l"/>
-                      <a:endParaRPr lang="en-DE" sz="2000" dirty="0"/>
-                    </a:p>
-                  </a:txBody>
-                  <a:tcPr marL="153032" marR="153032" marT="76516" marB="76516">
-                    <a:lnL w="38100" cap="flat" cmpd="sng" algn="ctr">
-                      <a:solidFill>
-                        <a:schemeClr val="tx1">
-                          <a:lumMod val="65000"/>
-                          <a:lumOff val="35000"/>
-                        </a:schemeClr>
-                      </a:solidFill>
-                      <a:prstDash val="solid"/>
-                      <a:round/>
-                      <a:headEnd type="none" w="med" len="med"/>
-                      <a:tailEnd type="none" w="med" len="med"/>
-                    </a:lnL>
-                    <a:lnR w="38100" cap="flat" cmpd="sng" algn="ctr">
-                      <a:solidFill>
-                        <a:schemeClr val="tx1">
-                          <a:lumMod val="65000"/>
-                          <a:lumOff val="35000"/>
-                        </a:schemeClr>
-                      </a:solidFill>
-                      <a:prstDash val="solid"/>
-                      <a:round/>
-                      <a:headEnd type="none" w="med" len="med"/>
-                      <a:tailEnd type="none" w="med" len="med"/>
-                    </a:lnR>
-                    <a:lnT w="38100" cap="flat" cmpd="sng" algn="ctr">
-                      <a:solidFill>
-                        <a:schemeClr val="tx1">
-                          <a:lumMod val="65000"/>
-                          <a:lumOff val="35000"/>
-                        </a:schemeClr>
-                      </a:solidFill>
-                      <a:prstDash val="solid"/>
-                      <a:round/>
-                      <a:headEnd type="none" w="med" len="med"/>
-                      <a:tailEnd type="none" w="med" len="med"/>
-                    </a:lnT>
-                    <a:lnB w="38100" cap="flat" cmpd="sng" algn="ctr">
-                      <a:solidFill>
-                        <a:schemeClr val="tx1">
-                          <a:lumMod val="65000"/>
-                          <a:lumOff val="35000"/>
-                        </a:schemeClr>
-                      </a:solidFill>
-                      <a:prstDash val="solid"/>
-                      <a:round/>
-                      <a:headEnd type="none" w="med" len="med"/>
-                      <a:tailEnd type="none" w="med" len="med"/>
-                    </a:lnB>
-                    <a:solidFill>
-                      <a:schemeClr val="accent2">
-                        <a:lumMod val="60000"/>
-                        <a:lumOff val="40000"/>
-                      </a:schemeClr>
-                    </a:solidFill>
-                  </a:tcPr>
-                </a:tc>
-                <a:extLst>
-                  <a:ext uri="{0D108BD9-81ED-4DB2-BD59-A6C34878D82A}">
-                    <a16:rowId xmlns:a16="http://schemas.microsoft.com/office/drawing/2014/main" val="3711746142"/>
-                  </a:ext>
-                </a:extLst>
-              </a:tr>
-              <a:tr h="620630">
-                <a:tc>
-                  <a:txBody>
-                    <a:bodyPr/>
-                    <a:lstStyle/>
-                    <a:p>
-                      <a:pPr algn="l"/>
-                      <a:endParaRPr lang="en-DE" sz="2000" dirty="0"/>
-                    </a:p>
-                  </a:txBody>
-                  <a:tcPr marL="153032" marR="153032" marT="76516" marB="76516">
-                    <a:lnL w="38100" cap="flat" cmpd="sng" algn="ctr">
-                      <a:solidFill>
-                        <a:schemeClr val="tx1">
-                          <a:lumMod val="65000"/>
-                          <a:lumOff val="35000"/>
-                        </a:schemeClr>
-                      </a:solidFill>
-                      <a:prstDash val="solid"/>
-                      <a:round/>
-                      <a:headEnd type="none" w="med" len="med"/>
-                      <a:tailEnd type="none" w="med" len="med"/>
-                    </a:lnL>
-                    <a:lnR w="38100" cap="flat" cmpd="sng" algn="ctr">
-                      <a:solidFill>
-                        <a:schemeClr val="tx1">
-                          <a:lumMod val="65000"/>
-                          <a:lumOff val="35000"/>
-                        </a:schemeClr>
-                      </a:solidFill>
-                      <a:prstDash val="solid"/>
-                      <a:round/>
-                      <a:headEnd type="none" w="med" len="med"/>
-                      <a:tailEnd type="none" w="med" len="med"/>
-                    </a:lnR>
-                    <a:lnT w="38100" cap="flat" cmpd="sng" algn="ctr">
-                      <a:solidFill>
-                        <a:schemeClr val="tx1">
-                          <a:lumMod val="65000"/>
-                          <a:lumOff val="35000"/>
-                        </a:schemeClr>
-                      </a:solidFill>
-                      <a:prstDash val="solid"/>
-                      <a:round/>
-                      <a:headEnd type="none" w="med" len="med"/>
-                      <a:tailEnd type="none" w="med" len="med"/>
-                    </a:lnT>
-                    <a:lnB w="38100" cap="flat" cmpd="sng" algn="ctr">
-                      <a:solidFill>
-                        <a:schemeClr val="tx1">
-                          <a:lumMod val="65000"/>
-                          <a:lumOff val="35000"/>
-                        </a:schemeClr>
-                      </a:solidFill>
-                      <a:prstDash val="solid"/>
-                      <a:round/>
-                      <a:headEnd type="none" w="med" len="med"/>
-                      <a:tailEnd type="none" w="med" len="med"/>
-                    </a:lnB>
-                  </a:tcPr>
-                </a:tc>
-                <a:tc>
-                  <a:txBody>
-                    <a:bodyPr/>
-                    <a:lstStyle/>
-                    <a:p>
-                      <a:pPr algn="l"/>
-                      <a:endParaRPr lang="en-DE" sz="2000" dirty="0"/>
-                    </a:p>
-                  </a:txBody>
-                  <a:tcPr marL="153032" marR="153032" marT="76516" marB="76516">
-                    <a:lnL w="38100" cap="flat" cmpd="sng" algn="ctr">
-                      <a:solidFill>
-                        <a:schemeClr val="tx1">
-                          <a:lumMod val="65000"/>
-                          <a:lumOff val="35000"/>
-                        </a:schemeClr>
-                      </a:solidFill>
-                      <a:prstDash val="solid"/>
-                      <a:round/>
-                      <a:headEnd type="none" w="med" len="med"/>
-                      <a:tailEnd type="none" w="med" len="med"/>
-                    </a:lnL>
-                    <a:lnR w="38100" cap="flat" cmpd="sng" algn="ctr">
-                      <a:solidFill>
-                        <a:schemeClr val="tx1">
-                          <a:lumMod val="65000"/>
-                          <a:lumOff val="35000"/>
-                        </a:schemeClr>
-                      </a:solidFill>
-                      <a:prstDash val="solid"/>
-                      <a:round/>
-                      <a:headEnd type="none" w="med" len="med"/>
-                      <a:tailEnd type="none" w="med" len="med"/>
-                    </a:lnR>
-                    <a:lnT w="38100" cap="flat" cmpd="sng" algn="ctr">
-                      <a:solidFill>
-                        <a:schemeClr val="tx1">
-                          <a:lumMod val="65000"/>
-                          <a:lumOff val="35000"/>
-                        </a:schemeClr>
-                      </a:solidFill>
-                      <a:prstDash val="solid"/>
-                      <a:round/>
-                      <a:headEnd type="none" w="med" len="med"/>
-                      <a:tailEnd type="none" w="med" len="med"/>
-                    </a:lnT>
-                    <a:lnB w="38100" cap="flat" cmpd="sng" algn="ctr">
-                      <a:solidFill>
-                        <a:schemeClr val="tx1">
-                          <a:lumMod val="65000"/>
-                          <a:lumOff val="35000"/>
-                        </a:schemeClr>
-                      </a:solidFill>
-                      <a:prstDash val="solid"/>
-                      <a:round/>
-                      <a:headEnd type="none" w="med" len="med"/>
-                      <a:tailEnd type="none" w="med" len="med"/>
-                    </a:lnB>
-                  </a:tcPr>
-                </a:tc>
-                <a:tc>
-                  <a:txBody>
-                    <a:bodyPr/>
-                    <a:lstStyle/>
-                    <a:p>
-                      <a:pPr algn="l"/>
-                      <a:endParaRPr lang="en-DE" sz="2000" dirty="0"/>
-                    </a:p>
-                  </a:txBody>
-                  <a:tcPr marL="153032" marR="153032" marT="76516" marB="76516">
-                    <a:lnL w="38100" cap="flat" cmpd="sng" algn="ctr">
-                      <a:solidFill>
-                        <a:schemeClr val="tx1">
-                          <a:lumMod val="65000"/>
-                          <a:lumOff val="35000"/>
-                        </a:schemeClr>
-                      </a:solidFill>
-                      <a:prstDash val="solid"/>
-                      <a:round/>
-                      <a:headEnd type="none" w="med" len="med"/>
-                      <a:tailEnd type="none" w="med" len="med"/>
-                    </a:lnL>
-                    <a:lnR w="38100" cap="flat" cmpd="sng" algn="ctr">
-                      <a:solidFill>
-                        <a:schemeClr val="tx1">
-                          <a:lumMod val="65000"/>
-                          <a:lumOff val="35000"/>
-                        </a:schemeClr>
-                      </a:solidFill>
-                      <a:prstDash val="solid"/>
-                      <a:round/>
-                      <a:headEnd type="none" w="med" len="med"/>
-                      <a:tailEnd type="none" w="med" len="med"/>
-                    </a:lnR>
-                    <a:lnT w="38100" cap="flat" cmpd="sng" algn="ctr">
-                      <a:solidFill>
-                        <a:schemeClr val="tx1">
-                          <a:lumMod val="65000"/>
-                          <a:lumOff val="35000"/>
-                        </a:schemeClr>
-                      </a:solidFill>
-                      <a:prstDash val="solid"/>
-                      <a:round/>
-                      <a:headEnd type="none" w="med" len="med"/>
-                      <a:tailEnd type="none" w="med" len="med"/>
-                    </a:lnT>
-                    <a:lnB w="38100" cap="flat" cmpd="sng" algn="ctr">
-                      <a:solidFill>
-                        <a:schemeClr val="tx1">
-                          <a:lumMod val="65000"/>
-                          <a:lumOff val="35000"/>
-                        </a:schemeClr>
-                      </a:solidFill>
-                      <a:prstDash val="solid"/>
-                      <a:round/>
-                      <a:headEnd type="none" w="med" len="med"/>
-                      <a:tailEnd type="none" w="med" len="med"/>
-                    </a:lnB>
-                  </a:tcPr>
-                </a:tc>
-                <a:tc>
-                  <a:txBody>
-                    <a:bodyPr/>
-                    <a:lstStyle/>
-                    <a:p>
-                      <a:pPr algn="l"/>
-                      <a:endParaRPr lang="en-DE" sz="2000" dirty="0"/>
-                    </a:p>
-                  </a:txBody>
-                  <a:tcPr marL="153032" marR="153032" marT="76516" marB="76516">
-                    <a:lnL w="38100" cap="flat" cmpd="sng" algn="ctr">
-                      <a:solidFill>
-                        <a:schemeClr val="tx1">
-                          <a:lumMod val="65000"/>
-                          <a:lumOff val="35000"/>
-                        </a:schemeClr>
-                      </a:solidFill>
-                      <a:prstDash val="solid"/>
-                      <a:round/>
-                      <a:headEnd type="none" w="med" len="med"/>
-                      <a:tailEnd type="none" w="med" len="med"/>
-                    </a:lnL>
-                    <a:lnR w="38100" cap="flat" cmpd="sng" algn="ctr">
-                      <a:solidFill>
-                        <a:schemeClr val="tx1">
-                          <a:lumMod val="65000"/>
-                          <a:lumOff val="35000"/>
-                        </a:schemeClr>
-                      </a:solidFill>
-                      <a:prstDash val="solid"/>
-                      <a:round/>
-                      <a:headEnd type="none" w="med" len="med"/>
-                      <a:tailEnd type="none" w="med" len="med"/>
-                    </a:lnR>
-                    <a:lnT w="38100" cap="flat" cmpd="sng" algn="ctr">
-                      <a:solidFill>
-                        <a:schemeClr val="tx1">
-                          <a:lumMod val="65000"/>
-                          <a:lumOff val="35000"/>
-                        </a:schemeClr>
-                      </a:solidFill>
-                      <a:prstDash val="solid"/>
-                      <a:round/>
-                      <a:headEnd type="none" w="med" len="med"/>
-                      <a:tailEnd type="none" w="med" len="med"/>
-                    </a:lnT>
-                    <a:lnB w="38100" cap="flat" cmpd="sng" algn="ctr">
-                      <a:solidFill>
-                        <a:schemeClr val="tx1">
-                          <a:lumMod val="65000"/>
-                          <a:lumOff val="35000"/>
-                        </a:schemeClr>
-                      </a:solidFill>
-                      <a:prstDash val="solid"/>
-                      <a:round/>
-                      <a:headEnd type="none" w="med" len="med"/>
-                      <a:tailEnd type="none" w="med" len="med"/>
-                    </a:lnB>
-                    <a:solidFill>
-                      <a:schemeClr val="accent2">
-                        <a:lumMod val="60000"/>
-                        <a:lumOff val="40000"/>
-                      </a:schemeClr>
-                    </a:solidFill>
-                  </a:tcPr>
-                </a:tc>
-                <a:tc>
-                  <a:txBody>
-                    <a:bodyPr/>
-                    <a:lstStyle/>
-                    <a:p>
-                      <a:pPr algn="l"/>
-                      <a:endParaRPr lang="en-DE" sz="2000" dirty="0"/>
-                    </a:p>
-                  </a:txBody>
-                  <a:tcPr marL="153032" marR="153032" marT="76516" marB="76516" anchor="ctr">
-                    <a:lnL w="38100" cap="flat" cmpd="sng" algn="ctr">
-                      <a:solidFill>
-                        <a:schemeClr val="tx1">
-                          <a:lumMod val="65000"/>
-                          <a:lumOff val="35000"/>
-                        </a:schemeClr>
-                      </a:solidFill>
-                      <a:prstDash val="solid"/>
-                      <a:round/>
-                      <a:headEnd type="none" w="med" len="med"/>
-                      <a:tailEnd type="none" w="med" len="med"/>
-                    </a:lnL>
-                    <a:lnR w="38100" cap="flat" cmpd="sng" algn="ctr">
-                      <a:solidFill>
-                        <a:schemeClr val="tx1">
-                          <a:lumMod val="65000"/>
-                          <a:lumOff val="35000"/>
-                        </a:schemeClr>
-                      </a:solidFill>
-                      <a:prstDash val="solid"/>
-                      <a:round/>
-                      <a:headEnd type="none" w="med" len="med"/>
-                      <a:tailEnd type="none" w="med" len="med"/>
-                    </a:lnR>
-                    <a:lnT w="38100" cap="flat" cmpd="sng" algn="ctr">
-                      <a:solidFill>
-                        <a:schemeClr val="tx1">
-                          <a:lumMod val="65000"/>
-                          <a:lumOff val="35000"/>
-                        </a:schemeClr>
-                      </a:solidFill>
-                      <a:prstDash val="solid"/>
-                      <a:round/>
-                      <a:headEnd type="none" w="med" len="med"/>
-                      <a:tailEnd type="none" w="med" len="med"/>
-                    </a:lnT>
-                    <a:lnB w="38100" cap="flat" cmpd="sng" algn="ctr">
-                      <a:solidFill>
-                        <a:schemeClr val="tx1">
-                          <a:lumMod val="65000"/>
-                          <a:lumOff val="35000"/>
-                        </a:schemeClr>
-                      </a:solidFill>
-                      <a:prstDash val="solid"/>
-                      <a:round/>
-                      <a:headEnd type="none" w="med" len="med"/>
-                      <a:tailEnd type="none" w="med" len="med"/>
-                    </a:lnB>
-                  </a:tcPr>
-                </a:tc>
-                <a:extLst>
-                  <a:ext uri="{0D108BD9-81ED-4DB2-BD59-A6C34878D82A}">
-                    <a16:rowId xmlns:a16="http://schemas.microsoft.com/office/drawing/2014/main" val="1090502963"/>
-                  </a:ext>
-                </a:extLst>
-              </a:tr>
-            </a:tbl>
-          </a:graphicData>
-        </a:graphic>
-      </p:graphicFrame>
-      <p:sp>
-        <p:nvSpPr>
-          <p:cNvPr id="19" name="TextBox 18">
-            <a:extLst>
-              <a:ext uri="{FF2B5EF4-FFF2-40B4-BE49-F238E27FC236}">
-                <a16:creationId xmlns:a16="http://schemas.microsoft.com/office/drawing/2014/main" id="{70115193-E3A5-F048-86F8-3B8C841075E1}"/>
-              </a:ext>
-            </a:extLst>
-          </p:cNvPr>
-          <p:cNvSpPr txBox="1"/>
-          <p:nvPr/>
-        </p:nvSpPr>
-        <p:spPr>
-          <a:xfrm>
-            <a:off x="3715570" y="1631555"/>
-            <a:ext cx="1475084" cy="461665"/>
-          </a:xfrm>
-          <a:prstGeom prst="rect">
-            <a:avLst/>
-          </a:prstGeom>
-          <a:noFill/>
-        </p:spPr>
-        <p:txBody>
-          <a:bodyPr wrap="none" rtlCol="0">
-            <a:spAutoFit/>
-          </a:bodyPr>
-          <a:lstStyle/>
-          <a:p>
-            <a:r>
-              <a:rPr lang="en-DE" sz="2400" dirty="0">
-                <a:latin typeface="Monaco" pitchFamily="2" charset="77"/>
-                <a:ea typeface="Menlo" panose="020B0609030804020204" pitchFamily="49" charset="0"/>
-                <a:cs typeface="Menlo" panose="020B0609030804020204" pitchFamily="49" charset="0"/>
-              </a:rPr>
-              <a:t>log_pdf</a:t>
-            </a:r>
-          </a:p>
-        </p:txBody>
-      </p:sp>
-      <p:graphicFrame>
-        <p:nvGraphicFramePr>
-          <p:cNvPr id="21" name="Table 4">
-            <a:extLst>
-              <a:ext uri="{FF2B5EF4-FFF2-40B4-BE49-F238E27FC236}">
-                <a16:creationId xmlns:a16="http://schemas.microsoft.com/office/drawing/2014/main" id="{6EB6ADCD-8B59-4C48-86E7-314C721F5DCB}"/>
-              </a:ext>
-            </a:extLst>
-          </p:cNvPr>
-          <p:cNvGraphicFramePr>
-            <a:graphicFrameLocks noGrp="1"/>
-          </p:cNvGraphicFramePr>
-          <p:nvPr>
-            <p:extLst>
-              <p:ext uri="{D42A27DB-BD31-4B8C-83A1-F6EECF244321}">
-                <p14:modId xmlns:p14="http://schemas.microsoft.com/office/powerpoint/2010/main" val="4187090387"/>
-              </p:ext>
-            </p:extLst>
-          </p:nvPr>
-        </p:nvGraphicFramePr>
-        <p:xfrm>
-          <a:off x="2810499" y="2351742"/>
-          <a:ext cx="3295060" cy="1861890"/>
-        </p:xfrm>
-        <a:graphic>
-          <a:graphicData uri="http://schemas.openxmlformats.org/drawingml/2006/table">
-            <a:tbl>
-              <a:tblPr firstRow="1" bandRow="1">
-                <a:tableStyleId>{2D5ABB26-0587-4C30-8999-92F81FD0307C}</a:tableStyleId>
-              </a:tblPr>
-              <a:tblGrid>
-                <a:gridCol w="659012">
-                  <a:extLst>
-                    <a:ext uri="{9D8B030D-6E8A-4147-A177-3AD203B41FA5}">
-                      <a16:colId xmlns:a16="http://schemas.microsoft.com/office/drawing/2014/main" val="3350277845"/>
-                    </a:ext>
-                  </a:extLst>
-                </a:gridCol>
-                <a:gridCol w="659012">
-                  <a:extLst>
-                    <a:ext uri="{9D8B030D-6E8A-4147-A177-3AD203B41FA5}">
-                      <a16:colId xmlns:a16="http://schemas.microsoft.com/office/drawing/2014/main" val="427396348"/>
-                    </a:ext>
-                  </a:extLst>
-                </a:gridCol>
-                <a:gridCol w="659012">
-                  <a:extLst>
-                    <a:ext uri="{9D8B030D-6E8A-4147-A177-3AD203B41FA5}">
-                      <a16:colId xmlns:a16="http://schemas.microsoft.com/office/drawing/2014/main" val="1158632962"/>
-                    </a:ext>
-                  </a:extLst>
-                </a:gridCol>
-                <a:gridCol w="659012">
-                  <a:extLst>
-                    <a:ext uri="{9D8B030D-6E8A-4147-A177-3AD203B41FA5}">
-                      <a16:colId xmlns:a16="http://schemas.microsoft.com/office/drawing/2014/main" val="2417830556"/>
-                    </a:ext>
-                  </a:extLst>
-                </a:gridCol>
-                <a:gridCol w="659012">
-                  <a:extLst>
-                    <a:ext uri="{9D8B030D-6E8A-4147-A177-3AD203B41FA5}">
-                      <a16:colId xmlns:a16="http://schemas.microsoft.com/office/drawing/2014/main" val="324716847"/>
-                    </a:ext>
-                  </a:extLst>
-                </a:gridCol>
-              </a:tblGrid>
-              <a:tr h="620630">
-                <a:tc>
-                  <a:txBody>
-                    <a:bodyPr/>
-                    <a:lstStyle/>
-                    <a:p>
-                      <a:pPr algn="l"/>
-                      <a:endParaRPr lang="en-DE" sz="2000" dirty="0"/>
-                    </a:p>
-                  </a:txBody>
-                  <a:tcPr marL="153032" marR="153032" marT="76516" marB="76516">
-                    <a:lnL w="38100" cap="flat" cmpd="sng" algn="ctr">
-                      <a:solidFill>
-                        <a:schemeClr val="tx1">
-                          <a:lumMod val="65000"/>
-                          <a:lumOff val="35000"/>
-                        </a:schemeClr>
-                      </a:solidFill>
-                      <a:prstDash val="solid"/>
-                      <a:round/>
-                      <a:headEnd type="none" w="med" len="med"/>
-                      <a:tailEnd type="none" w="med" len="med"/>
-                    </a:lnL>
-                    <a:lnR w="38100" cap="flat" cmpd="sng" algn="ctr">
-                      <a:solidFill>
-                        <a:schemeClr val="tx1">
-                          <a:lumMod val="65000"/>
-                          <a:lumOff val="35000"/>
-                        </a:schemeClr>
-                      </a:solidFill>
-                      <a:prstDash val="solid"/>
-                      <a:round/>
-                      <a:headEnd type="none" w="med" len="med"/>
-                      <a:tailEnd type="none" w="med" len="med"/>
-                    </a:lnR>
-                    <a:lnT w="38100" cap="flat" cmpd="sng" algn="ctr">
-                      <a:solidFill>
-                        <a:schemeClr val="tx1">
-                          <a:lumMod val="65000"/>
-                          <a:lumOff val="35000"/>
-                        </a:schemeClr>
-                      </a:solidFill>
-                      <a:prstDash val="solid"/>
-                      <a:round/>
-                      <a:headEnd type="none" w="med" len="med"/>
-                      <a:tailEnd type="none" w="med" len="med"/>
-                    </a:lnT>
-                    <a:lnB w="38100" cap="flat" cmpd="sng" algn="ctr">
-                      <a:solidFill>
-                        <a:schemeClr val="tx1">
-                          <a:lumMod val="65000"/>
-                          <a:lumOff val="35000"/>
-                        </a:schemeClr>
-                      </a:solidFill>
-                      <a:prstDash val="solid"/>
-                      <a:round/>
-                      <a:headEnd type="none" w="med" len="med"/>
-                      <a:tailEnd type="none" w="med" len="med"/>
-                    </a:lnB>
-                    <a:solidFill>
-                      <a:schemeClr val="accent2">
-                        <a:lumMod val="60000"/>
-                        <a:lumOff val="40000"/>
-                      </a:schemeClr>
-                    </a:solidFill>
-                  </a:tcPr>
-                </a:tc>
-                <a:tc>
-                  <a:txBody>
-                    <a:bodyPr/>
-                    <a:lstStyle/>
-                    <a:p>
-                      <a:pPr algn="l"/>
-                      <a:endParaRPr lang="en-DE" sz="2000" dirty="0"/>
-                    </a:p>
-                  </a:txBody>
-                  <a:tcPr marL="153032" marR="153032" marT="76516" marB="76516">
-                    <a:lnL w="38100" cap="flat" cmpd="sng" algn="ctr">
-                      <a:solidFill>
-                        <a:schemeClr val="tx1">
-                          <a:lumMod val="65000"/>
-                          <a:lumOff val="35000"/>
-                        </a:schemeClr>
-                      </a:solidFill>
-                      <a:prstDash val="solid"/>
-                      <a:round/>
-                      <a:headEnd type="none" w="med" len="med"/>
-                      <a:tailEnd type="none" w="med" len="med"/>
-                    </a:lnL>
-                    <a:lnR w="38100" cap="flat" cmpd="sng" algn="ctr">
-                      <a:solidFill>
-                        <a:schemeClr val="tx1">
-                          <a:lumMod val="65000"/>
-                          <a:lumOff val="35000"/>
-                        </a:schemeClr>
-                      </a:solidFill>
-                      <a:prstDash val="solid"/>
-                      <a:round/>
-                      <a:headEnd type="none" w="med" len="med"/>
-                      <a:tailEnd type="none" w="med" len="med"/>
-                    </a:lnR>
-                    <a:lnT w="38100" cap="flat" cmpd="sng" algn="ctr">
-                      <a:solidFill>
-                        <a:schemeClr val="tx1">
-                          <a:lumMod val="65000"/>
-                          <a:lumOff val="35000"/>
-                        </a:schemeClr>
-                      </a:solidFill>
-                      <a:prstDash val="solid"/>
-                      <a:round/>
-                      <a:headEnd type="none" w="med" len="med"/>
-                      <a:tailEnd type="none" w="med" len="med"/>
-                    </a:lnT>
-                    <a:lnB w="38100" cap="flat" cmpd="sng" algn="ctr">
-                      <a:solidFill>
-                        <a:schemeClr val="tx1">
-                          <a:lumMod val="65000"/>
-                          <a:lumOff val="35000"/>
-                        </a:schemeClr>
-                      </a:solidFill>
-                      <a:prstDash val="solid"/>
-                      <a:round/>
-                      <a:headEnd type="none" w="med" len="med"/>
-                      <a:tailEnd type="none" w="med" len="med"/>
-                    </a:lnB>
-                    <a:solidFill>
-                      <a:schemeClr val="accent2">
-                        <a:lumMod val="60000"/>
-                        <a:lumOff val="40000"/>
-                      </a:schemeClr>
-                    </a:solidFill>
-                  </a:tcPr>
-                </a:tc>
-                <a:tc>
-                  <a:txBody>
-                    <a:bodyPr/>
-                    <a:lstStyle/>
-                    <a:p>
-                      <a:pPr algn="l"/>
-                      <a:endParaRPr lang="en-DE" sz="2000" dirty="0"/>
-                    </a:p>
-                  </a:txBody>
-                  <a:tcPr marL="153032" marR="153032" marT="76516" marB="76516">
-                    <a:lnL w="38100" cap="flat" cmpd="sng" algn="ctr">
-                      <a:solidFill>
-                        <a:schemeClr val="tx1">
-                          <a:lumMod val="65000"/>
-                          <a:lumOff val="35000"/>
-                        </a:schemeClr>
-                      </a:solidFill>
-                      <a:prstDash val="solid"/>
-                      <a:round/>
-                      <a:headEnd type="none" w="med" len="med"/>
-                      <a:tailEnd type="none" w="med" len="med"/>
-                    </a:lnL>
-                    <a:lnR w="38100" cap="flat" cmpd="sng" algn="ctr">
-                      <a:solidFill>
-                        <a:schemeClr val="tx1">
-                          <a:lumMod val="65000"/>
-                          <a:lumOff val="35000"/>
-                        </a:schemeClr>
-                      </a:solidFill>
-                      <a:prstDash val="solid"/>
-                      <a:round/>
-                      <a:headEnd type="none" w="med" len="med"/>
-                      <a:tailEnd type="none" w="med" len="med"/>
-                    </a:lnR>
-                    <a:lnT w="38100" cap="flat" cmpd="sng" algn="ctr">
-                      <a:solidFill>
-                        <a:schemeClr val="tx1">
-                          <a:lumMod val="65000"/>
-                          <a:lumOff val="35000"/>
-                        </a:schemeClr>
-                      </a:solidFill>
-                      <a:prstDash val="solid"/>
-                      <a:round/>
-                      <a:headEnd type="none" w="med" len="med"/>
-                      <a:tailEnd type="none" w="med" len="med"/>
-                    </a:lnT>
-                    <a:lnB w="38100" cap="flat" cmpd="sng" algn="ctr">
-                      <a:solidFill>
-                        <a:schemeClr val="tx1">
-                          <a:lumMod val="65000"/>
-                          <a:lumOff val="35000"/>
-                        </a:schemeClr>
-                      </a:solidFill>
-                      <a:prstDash val="solid"/>
-                      <a:round/>
-                      <a:headEnd type="none" w="med" len="med"/>
-                      <a:tailEnd type="none" w="med" len="med"/>
-                    </a:lnB>
-                  </a:tcPr>
-                </a:tc>
-                <a:tc>
-                  <a:txBody>
-                    <a:bodyPr/>
-                    <a:lstStyle/>
-                    <a:p>
-                      <a:pPr algn="l"/>
-                      <a:endParaRPr lang="en-DE" sz="2000" dirty="0"/>
-                    </a:p>
-                  </a:txBody>
-                  <a:tcPr marL="153032" marR="153032" marT="76516" marB="76516" anchor="ctr">
-                    <a:lnL w="38100" cap="flat" cmpd="sng" algn="ctr">
-                      <a:solidFill>
-                        <a:schemeClr val="tx1">
-                          <a:lumMod val="65000"/>
-                          <a:lumOff val="35000"/>
-                        </a:schemeClr>
-                      </a:solidFill>
-                      <a:prstDash val="solid"/>
-                      <a:round/>
-                      <a:headEnd type="none" w="med" len="med"/>
-                      <a:tailEnd type="none" w="med" len="med"/>
-                    </a:lnL>
-                    <a:lnR w="38100" cap="flat" cmpd="sng" algn="ctr">
-                      <a:solidFill>
-                        <a:schemeClr val="tx1">
-                          <a:lumMod val="65000"/>
-                          <a:lumOff val="35000"/>
-                        </a:schemeClr>
-                      </a:solidFill>
-                      <a:prstDash val="solid"/>
-                      <a:round/>
-                      <a:headEnd type="none" w="med" len="med"/>
-                      <a:tailEnd type="none" w="med" len="med"/>
-                    </a:lnR>
-                    <a:lnT w="38100" cap="flat" cmpd="sng" algn="ctr">
-                      <a:solidFill>
-                        <a:schemeClr val="tx1">
-                          <a:lumMod val="65000"/>
-                          <a:lumOff val="35000"/>
-                        </a:schemeClr>
-                      </a:solidFill>
-                      <a:prstDash val="solid"/>
-                      <a:round/>
-                      <a:headEnd type="none" w="med" len="med"/>
-                      <a:tailEnd type="none" w="med" len="med"/>
-                    </a:lnT>
-                    <a:lnB w="38100" cap="flat" cmpd="sng" algn="ctr">
-                      <a:solidFill>
-                        <a:schemeClr val="tx1">
-                          <a:lumMod val="65000"/>
-                          <a:lumOff val="35000"/>
-                        </a:schemeClr>
-                      </a:solidFill>
-                      <a:prstDash val="solid"/>
-                      <a:round/>
-                      <a:headEnd type="none" w="med" len="med"/>
-                      <a:tailEnd type="none" w="med" len="med"/>
-                    </a:lnB>
-                  </a:tcPr>
-                </a:tc>
-                <a:tc>
-                  <a:txBody>
-                    <a:bodyPr/>
-                    <a:lstStyle/>
-                    <a:p>
-                      <a:pPr algn="l"/>
-                      <a:endParaRPr lang="en-DE" sz="2000" dirty="0"/>
-                    </a:p>
-                  </a:txBody>
-                  <a:tcPr marL="153032" marR="153032" marT="76516" marB="76516" anchor="ctr">
-                    <a:lnL w="38100" cap="flat" cmpd="sng" algn="ctr">
-                      <a:solidFill>
-                        <a:schemeClr val="tx1">
-                          <a:lumMod val="65000"/>
-                          <a:lumOff val="35000"/>
-                        </a:schemeClr>
-                      </a:solidFill>
-                      <a:prstDash val="solid"/>
-                      <a:round/>
-                      <a:headEnd type="none" w="med" len="med"/>
-                      <a:tailEnd type="none" w="med" len="med"/>
-                    </a:lnL>
-                    <a:lnR w="38100" cap="flat" cmpd="sng" algn="ctr">
-                      <a:solidFill>
-                        <a:schemeClr val="tx1">
-                          <a:lumMod val="65000"/>
-                          <a:lumOff val="35000"/>
-                        </a:schemeClr>
-                      </a:solidFill>
-                      <a:prstDash val="solid"/>
-                      <a:round/>
-                      <a:headEnd type="none" w="med" len="med"/>
-                      <a:tailEnd type="none" w="med" len="med"/>
-                    </a:lnR>
-                    <a:lnT w="38100" cap="flat" cmpd="sng" algn="ctr">
-                      <a:solidFill>
-                        <a:schemeClr val="tx1">
-                          <a:lumMod val="65000"/>
-                          <a:lumOff val="35000"/>
-                        </a:schemeClr>
-                      </a:solidFill>
-                      <a:prstDash val="solid"/>
-                      <a:round/>
-                      <a:headEnd type="none" w="med" len="med"/>
-                      <a:tailEnd type="none" w="med" len="med"/>
-                    </a:lnT>
-                    <a:lnB w="38100" cap="flat" cmpd="sng" algn="ctr">
-                      <a:solidFill>
-                        <a:schemeClr val="tx1">
-                          <a:lumMod val="65000"/>
-                          <a:lumOff val="35000"/>
-                        </a:schemeClr>
-                      </a:solidFill>
-                      <a:prstDash val="solid"/>
-                      <a:round/>
-                      <a:headEnd type="none" w="med" len="med"/>
-                      <a:tailEnd type="none" w="med" len="med"/>
-                    </a:lnB>
-                  </a:tcPr>
-                </a:tc>
-                <a:extLst>
-                  <a:ext uri="{0D108BD9-81ED-4DB2-BD59-A6C34878D82A}">
-                    <a16:rowId xmlns:a16="http://schemas.microsoft.com/office/drawing/2014/main" val="2976503498"/>
-                  </a:ext>
-                </a:extLst>
-              </a:tr>
-              <a:tr h="620630">
-                <a:tc>
-                  <a:txBody>
-                    <a:bodyPr/>
-                    <a:lstStyle/>
-                    <a:p>
-                      <a:pPr algn="l"/>
-                      <a:endParaRPr lang="en-DE" sz="2000" dirty="0"/>
-                    </a:p>
-                  </a:txBody>
-                  <a:tcPr marL="153032" marR="153032" marT="76516" marB="76516">
-                    <a:lnL w="38100" cap="flat" cmpd="sng" algn="ctr">
-                      <a:solidFill>
-                        <a:schemeClr val="tx1">
-                          <a:lumMod val="65000"/>
-                          <a:lumOff val="35000"/>
-                        </a:schemeClr>
-                      </a:solidFill>
-                      <a:prstDash val="solid"/>
-                      <a:round/>
-                      <a:headEnd type="none" w="med" len="med"/>
-                      <a:tailEnd type="none" w="med" len="med"/>
-                    </a:lnL>
-                    <a:lnR w="38100" cap="flat" cmpd="sng" algn="ctr">
-                      <a:solidFill>
-                        <a:schemeClr val="tx1">
-                          <a:lumMod val="65000"/>
-                          <a:lumOff val="35000"/>
-                        </a:schemeClr>
-                      </a:solidFill>
-                      <a:prstDash val="solid"/>
-                      <a:round/>
-                      <a:headEnd type="none" w="med" len="med"/>
-                      <a:tailEnd type="none" w="med" len="med"/>
-                    </a:lnR>
-                    <a:lnT w="38100" cap="flat" cmpd="sng" algn="ctr">
-                      <a:solidFill>
-                        <a:schemeClr val="tx1">
-                          <a:lumMod val="65000"/>
-                          <a:lumOff val="35000"/>
-                        </a:schemeClr>
-                      </a:solidFill>
-                      <a:prstDash val="solid"/>
-                      <a:round/>
-                      <a:headEnd type="none" w="med" len="med"/>
-                      <a:tailEnd type="none" w="med" len="med"/>
-                    </a:lnT>
-                    <a:lnB w="38100" cap="flat" cmpd="sng" algn="ctr">
-                      <a:solidFill>
-                        <a:schemeClr val="tx1">
-                          <a:lumMod val="65000"/>
-                          <a:lumOff val="35000"/>
-                        </a:schemeClr>
-                      </a:solidFill>
-                      <a:prstDash val="solid"/>
-                      <a:round/>
-                      <a:headEnd type="none" w="med" len="med"/>
-                      <a:tailEnd type="none" w="med" len="med"/>
-                    </a:lnB>
-                    <a:solidFill>
-                      <a:schemeClr val="accent2">
-                        <a:lumMod val="60000"/>
-                        <a:lumOff val="40000"/>
-                      </a:schemeClr>
-                    </a:solidFill>
-                  </a:tcPr>
-                </a:tc>
-                <a:tc>
-                  <a:txBody>
-                    <a:bodyPr/>
-                    <a:lstStyle/>
-                    <a:p>
-                      <a:pPr algn="l"/>
-                      <a:endParaRPr lang="en-DE" sz="2000" dirty="0"/>
-                    </a:p>
-                  </a:txBody>
-                  <a:tcPr marL="153032" marR="153032" marT="76516" marB="76516">
-                    <a:lnL w="38100" cap="flat" cmpd="sng" algn="ctr">
-                      <a:solidFill>
-                        <a:schemeClr val="tx1">
-                          <a:lumMod val="65000"/>
-                          <a:lumOff val="35000"/>
-                        </a:schemeClr>
-                      </a:solidFill>
-                      <a:prstDash val="solid"/>
-                      <a:round/>
-                      <a:headEnd type="none" w="med" len="med"/>
-                      <a:tailEnd type="none" w="med" len="med"/>
-                    </a:lnL>
-                    <a:lnR w="38100" cap="flat" cmpd="sng" algn="ctr">
-                      <a:solidFill>
-                        <a:schemeClr val="tx1">
-                          <a:lumMod val="65000"/>
-                          <a:lumOff val="35000"/>
-                        </a:schemeClr>
-                      </a:solidFill>
-                      <a:prstDash val="solid"/>
-                      <a:round/>
-                      <a:headEnd type="none" w="med" len="med"/>
-                      <a:tailEnd type="none" w="med" len="med"/>
-                    </a:lnR>
-                    <a:lnT w="38100" cap="flat" cmpd="sng" algn="ctr">
-                      <a:solidFill>
-                        <a:schemeClr val="tx1">
-                          <a:lumMod val="65000"/>
-                          <a:lumOff val="35000"/>
-                        </a:schemeClr>
-                      </a:solidFill>
-                      <a:prstDash val="solid"/>
-                      <a:round/>
-                      <a:headEnd type="none" w="med" len="med"/>
-                      <a:tailEnd type="none" w="med" len="med"/>
-                    </a:lnT>
-                    <a:lnB w="38100" cap="flat" cmpd="sng" algn="ctr">
-                      <a:solidFill>
-                        <a:schemeClr val="tx1">
-                          <a:lumMod val="65000"/>
-                          <a:lumOff val="35000"/>
-                        </a:schemeClr>
-                      </a:solidFill>
-                      <a:prstDash val="solid"/>
-                      <a:round/>
-                      <a:headEnd type="none" w="med" len="med"/>
-                      <a:tailEnd type="none" w="med" len="med"/>
-                    </a:lnB>
-                    <a:solidFill>
-                      <a:schemeClr val="accent2">
-                        <a:lumMod val="60000"/>
-                        <a:lumOff val="40000"/>
-                      </a:schemeClr>
-                    </a:solidFill>
-                  </a:tcPr>
-                </a:tc>
-                <a:tc>
-                  <a:txBody>
-                    <a:bodyPr/>
-                    <a:lstStyle/>
-                    <a:p>
-                      <a:pPr algn="l"/>
-                      <a:endParaRPr lang="en-DE" sz="2000" dirty="0"/>
-                    </a:p>
-                  </a:txBody>
-                  <a:tcPr marL="153032" marR="153032" marT="76516" marB="76516">
-                    <a:lnL w="38100" cap="flat" cmpd="sng" algn="ctr">
-                      <a:solidFill>
-                        <a:schemeClr val="tx1">
-                          <a:lumMod val="65000"/>
-                          <a:lumOff val="35000"/>
-                        </a:schemeClr>
-                      </a:solidFill>
-                      <a:prstDash val="solid"/>
-                      <a:round/>
-                      <a:headEnd type="none" w="med" len="med"/>
-                      <a:tailEnd type="none" w="med" len="med"/>
-                    </a:lnL>
-                    <a:lnR w="38100" cap="flat" cmpd="sng" algn="ctr">
-                      <a:solidFill>
-                        <a:schemeClr val="tx1">
-                          <a:lumMod val="65000"/>
-                          <a:lumOff val="35000"/>
-                        </a:schemeClr>
-                      </a:solidFill>
-                      <a:prstDash val="solid"/>
-                      <a:round/>
-                      <a:headEnd type="none" w="med" len="med"/>
-                      <a:tailEnd type="none" w="med" len="med"/>
-                    </a:lnR>
-                    <a:lnT w="38100" cap="flat" cmpd="sng" algn="ctr">
-                      <a:solidFill>
-                        <a:schemeClr val="tx1">
-                          <a:lumMod val="65000"/>
-                          <a:lumOff val="35000"/>
-                        </a:schemeClr>
-                      </a:solidFill>
-                      <a:prstDash val="solid"/>
-                      <a:round/>
-                      <a:headEnd type="none" w="med" len="med"/>
-                      <a:tailEnd type="none" w="med" len="med"/>
-                    </a:lnT>
-                    <a:lnB w="38100" cap="flat" cmpd="sng" algn="ctr">
-                      <a:solidFill>
-                        <a:schemeClr val="tx1">
-                          <a:lumMod val="65000"/>
-                          <a:lumOff val="35000"/>
-                        </a:schemeClr>
-                      </a:solidFill>
-                      <a:prstDash val="solid"/>
-                      <a:round/>
-                      <a:headEnd type="none" w="med" len="med"/>
-                      <a:tailEnd type="none" w="med" len="med"/>
-                    </a:lnB>
-                    <a:solidFill>
-                      <a:schemeClr val="accent2">
-                        <a:lumMod val="60000"/>
-                        <a:lumOff val="40000"/>
-                      </a:schemeClr>
-                    </a:solidFill>
-                  </a:tcPr>
-                </a:tc>
-                <a:tc>
-                  <a:txBody>
-                    <a:bodyPr/>
-                    <a:lstStyle/>
-                    <a:p>
-                      <a:pPr algn="l"/>
-                      <a:endParaRPr lang="en-DE" sz="2000" dirty="0"/>
-                    </a:p>
-                  </a:txBody>
-                  <a:tcPr marL="153032" marR="153032" marT="76516" marB="76516">
-                    <a:lnL w="38100" cap="flat" cmpd="sng" algn="ctr">
-                      <a:solidFill>
-                        <a:schemeClr val="tx1">
-                          <a:lumMod val="65000"/>
-                          <a:lumOff val="35000"/>
-                        </a:schemeClr>
-                      </a:solidFill>
-                      <a:prstDash val="solid"/>
-                      <a:round/>
-                      <a:headEnd type="none" w="med" len="med"/>
-                      <a:tailEnd type="none" w="med" len="med"/>
-                    </a:lnL>
-                    <a:lnR w="38100" cap="flat" cmpd="sng" algn="ctr">
-                      <a:solidFill>
-                        <a:schemeClr val="tx1">
-                          <a:lumMod val="65000"/>
-                          <a:lumOff val="35000"/>
-                        </a:schemeClr>
-                      </a:solidFill>
-                      <a:prstDash val="solid"/>
-                      <a:round/>
-                      <a:headEnd type="none" w="med" len="med"/>
-                      <a:tailEnd type="none" w="med" len="med"/>
-                    </a:lnR>
-                    <a:lnT w="38100" cap="flat" cmpd="sng" algn="ctr">
-                      <a:solidFill>
-                        <a:schemeClr val="tx1">
-                          <a:lumMod val="65000"/>
-                          <a:lumOff val="35000"/>
-                        </a:schemeClr>
-                      </a:solidFill>
-                      <a:prstDash val="solid"/>
-                      <a:round/>
-                      <a:headEnd type="none" w="med" len="med"/>
-                      <a:tailEnd type="none" w="med" len="med"/>
-                    </a:lnT>
-                    <a:lnB w="38100" cap="flat" cmpd="sng" algn="ctr">
-                      <a:solidFill>
-                        <a:schemeClr val="tx1">
-                          <a:lumMod val="65000"/>
-                          <a:lumOff val="35000"/>
-                        </a:schemeClr>
-                      </a:solidFill>
-                      <a:prstDash val="solid"/>
-                      <a:round/>
-                      <a:headEnd type="none" w="med" len="med"/>
-                      <a:tailEnd type="none" w="med" len="med"/>
-                    </a:lnB>
-                    <a:solidFill>
-                      <a:schemeClr val="accent2">
-                        <a:lumMod val="60000"/>
-                        <a:lumOff val="40000"/>
-                      </a:schemeClr>
-                    </a:solidFill>
-                  </a:tcPr>
-                </a:tc>
-                <a:tc>
-                  <a:txBody>
-                    <a:bodyPr/>
-                    <a:lstStyle/>
-                    <a:p>
-                      <a:pPr algn="l"/>
-                      <a:endParaRPr lang="en-DE" sz="2000" dirty="0"/>
-                    </a:p>
-                  </a:txBody>
-                  <a:tcPr marL="153032" marR="153032" marT="76516" marB="76516">
-                    <a:lnL w="38100" cap="flat" cmpd="sng" algn="ctr">
-                      <a:solidFill>
-                        <a:schemeClr val="tx1">
-                          <a:lumMod val="65000"/>
-                          <a:lumOff val="35000"/>
-                        </a:schemeClr>
-                      </a:solidFill>
-                      <a:prstDash val="solid"/>
-                      <a:round/>
-                      <a:headEnd type="none" w="med" len="med"/>
-                      <a:tailEnd type="none" w="med" len="med"/>
-                    </a:lnL>
-                    <a:lnR w="38100" cap="flat" cmpd="sng" algn="ctr">
-                      <a:solidFill>
-                        <a:schemeClr val="tx1">
-                          <a:lumMod val="65000"/>
-                          <a:lumOff val="35000"/>
-                        </a:schemeClr>
-                      </a:solidFill>
-                      <a:prstDash val="solid"/>
-                      <a:round/>
-                      <a:headEnd type="none" w="med" len="med"/>
-                      <a:tailEnd type="none" w="med" len="med"/>
-                    </a:lnR>
-                    <a:lnT w="38100" cap="flat" cmpd="sng" algn="ctr">
-                      <a:solidFill>
-                        <a:schemeClr val="tx1">
-                          <a:lumMod val="65000"/>
-                          <a:lumOff val="35000"/>
-                        </a:schemeClr>
-                      </a:solidFill>
-                      <a:prstDash val="solid"/>
-                      <a:round/>
-                      <a:headEnd type="none" w="med" len="med"/>
-                      <a:tailEnd type="none" w="med" len="med"/>
-                    </a:lnT>
-                    <a:lnB w="38100" cap="flat" cmpd="sng" algn="ctr">
-                      <a:solidFill>
-                        <a:schemeClr val="tx1">
-                          <a:lumMod val="65000"/>
-                          <a:lumOff val="35000"/>
-                        </a:schemeClr>
-                      </a:solidFill>
-                      <a:prstDash val="solid"/>
-                      <a:round/>
-                      <a:headEnd type="none" w="med" len="med"/>
-                      <a:tailEnd type="none" w="med" len="med"/>
-                    </a:lnB>
-                  </a:tcPr>
-                </a:tc>
-                <a:extLst>
-                  <a:ext uri="{0D108BD9-81ED-4DB2-BD59-A6C34878D82A}">
-                    <a16:rowId xmlns:a16="http://schemas.microsoft.com/office/drawing/2014/main" val="3711746142"/>
-                  </a:ext>
-                </a:extLst>
-              </a:tr>
-              <a:tr h="620630">
-                <a:tc>
-                  <a:txBody>
-                    <a:bodyPr/>
-                    <a:lstStyle/>
-                    <a:p>
-                      <a:pPr algn="l"/>
-                      <a:endParaRPr lang="en-DE" sz="2000" dirty="0"/>
-                    </a:p>
-                  </a:txBody>
-                  <a:tcPr marL="153032" marR="153032" marT="76516" marB="76516">
-                    <a:lnL w="38100" cap="flat" cmpd="sng" algn="ctr">
-                      <a:solidFill>
-                        <a:schemeClr val="tx1">
-                          <a:lumMod val="65000"/>
-                          <a:lumOff val="35000"/>
-                        </a:schemeClr>
-                      </a:solidFill>
-                      <a:prstDash val="solid"/>
-                      <a:round/>
-                      <a:headEnd type="none" w="med" len="med"/>
-                      <a:tailEnd type="none" w="med" len="med"/>
-                    </a:lnL>
-                    <a:lnR w="38100" cap="flat" cmpd="sng" algn="ctr">
-                      <a:solidFill>
-                        <a:schemeClr val="tx1">
-                          <a:lumMod val="65000"/>
-                          <a:lumOff val="35000"/>
-                        </a:schemeClr>
-                      </a:solidFill>
-                      <a:prstDash val="solid"/>
-                      <a:round/>
-                      <a:headEnd type="none" w="med" len="med"/>
-                      <a:tailEnd type="none" w="med" len="med"/>
-                    </a:lnR>
-                    <a:lnT w="38100" cap="flat" cmpd="sng" algn="ctr">
-                      <a:solidFill>
-                        <a:schemeClr val="tx1">
-                          <a:lumMod val="65000"/>
-                          <a:lumOff val="35000"/>
-                        </a:schemeClr>
-                      </a:solidFill>
-                      <a:prstDash val="solid"/>
-                      <a:round/>
-                      <a:headEnd type="none" w="med" len="med"/>
-                      <a:tailEnd type="none" w="med" len="med"/>
-                    </a:lnT>
-                    <a:lnB w="38100" cap="flat" cmpd="sng" algn="ctr">
-                      <a:solidFill>
-                        <a:schemeClr val="tx1">
-                          <a:lumMod val="65000"/>
-                          <a:lumOff val="35000"/>
-                        </a:schemeClr>
-                      </a:solidFill>
-                      <a:prstDash val="solid"/>
-                      <a:round/>
-                      <a:headEnd type="none" w="med" len="med"/>
-                      <a:tailEnd type="none" w="med" len="med"/>
-                    </a:lnB>
-                    <a:solidFill>
-                      <a:schemeClr val="accent2">
-                        <a:lumMod val="60000"/>
-                        <a:lumOff val="40000"/>
-                      </a:schemeClr>
-                    </a:solidFill>
-                  </a:tcPr>
-                </a:tc>
-                <a:tc>
-                  <a:txBody>
-                    <a:bodyPr/>
-                    <a:lstStyle/>
-                    <a:p>
-                      <a:pPr algn="l"/>
-                      <a:endParaRPr lang="en-DE" sz="2000" dirty="0"/>
-                    </a:p>
-                  </a:txBody>
-                  <a:tcPr marL="153032" marR="153032" marT="76516" marB="76516">
-                    <a:lnL w="38100" cap="flat" cmpd="sng" algn="ctr">
-                      <a:solidFill>
-                        <a:schemeClr val="tx1">
-                          <a:lumMod val="65000"/>
-                          <a:lumOff val="35000"/>
-                        </a:schemeClr>
-                      </a:solidFill>
-                      <a:prstDash val="solid"/>
-                      <a:round/>
-                      <a:headEnd type="none" w="med" len="med"/>
-                      <a:tailEnd type="none" w="med" len="med"/>
-                    </a:lnL>
-                    <a:lnR w="38100" cap="flat" cmpd="sng" algn="ctr">
-                      <a:solidFill>
-                        <a:schemeClr val="tx1">
-                          <a:lumMod val="65000"/>
-                          <a:lumOff val="35000"/>
-                        </a:schemeClr>
-                      </a:solidFill>
-                      <a:prstDash val="solid"/>
-                      <a:round/>
-                      <a:headEnd type="none" w="med" len="med"/>
-                      <a:tailEnd type="none" w="med" len="med"/>
-                    </a:lnR>
-                    <a:lnT w="38100" cap="flat" cmpd="sng" algn="ctr">
-                      <a:solidFill>
-                        <a:schemeClr val="tx1">
-                          <a:lumMod val="65000"/>
-                          <a:lumOff val="35000"/>
-                        </a:schemeClr>
-                      </a:solidFill>
-                      <a:prstDash val="solid"/>
-                      <a:round/>
-                      <a:headEnd type="none" w="med" len="med"/>
-                      <a:tailEnd type="none" w="med" len="med"/>
-                    </a:lnT>
-                    <a:lnB w="38100" cap="flat" cmpd="sng" algn="ctr">
-                      <a:solidFill>
-                        <a:schemeClr val="tx1">
-                          <a:lumMod val="65000"/>
-                          <a:lumOff val="35000"/>
-                        </a:schemeClr>
-                      </a:solidFill>
-                      <a:prstDash val="solid"/>
-                      <a:round/>
-                      <a:headEnd type="none" w="med" len="med"/>
-                      <a:tailEnd type="none" w="med" len="med"/>
-                    </a:lnB>
-                    <a:solidFill>
-                      <a:schemeClr val="accent2">
-                        <a:lumMod val="60000"/>
-                        <a:lumOff val="40000"/>
-                      </a:schemeClr>
-                    </a:solidFill>
-                  </a:tcPr>
-                </a:tc>
-                <a:tc>
-                  <a:txBody>
-                    <a:bodyPr/>
-                    <a:lstStyle/>
-                    <a:p>
-                      <a:pPr algn="l"/>
-                      <a:endParaRPr lang="en-DE" sz="2000" dirty="0"/>
-                    </a:p>
-                  </a:txBody>
-                  <a:tcPr marL="153032" marR="153032" marT="76516" marB="76516">
-                    <a:lnL w="38100" cap="flat" cmpd="sng" algn="ctr">
-                      <a:solidFill>
-                        <a:schemeClr val="tx1">
-                          <a:lumMod val="65000"/>
-                          <a:lumOff val="35000"/>
-                        </a:schemeClr>
-                      </a:solidFill>
-                      <a:prstDash val="solid"/>
-                      <a:round/>
-                      <a:headEnd type="none" w="med" len="med"/>
-                      <a:tailEnd type="none" w="med" len="med"/>
-                    </a:lnL>
-                    <a:lnR w="38100" cap="flat" cmpd="sng" algn="ctr">
-                      <a:solidFill>
-                        <a:schemeClr val="tx1">
-                          <a:lumMod val="65000"/>
-                          <a:lumOff val="35000"/>
-                        </a:schemeClr>
-                      </a:solidFill>
-                      <a:prstDash val="solid"/>
-                      <a:round/>
-                      <a:headEnd type="none" w="med" len="med"/>
-                      <a:tailEnd type="none" w="med" len="med"/>
-                    </a:lnR>
-                    <a:lnT w="38100" cap="flat" cmpd="sng" algn="ctr">
-                      <a:solidFill>
-                        <a:schemeClr val="tx1">
-                          <a:lumMod val="65000"/>
-                          <a:lumOff val="35000"/>
-                        </a:schemeClr>
-                      </a:solidFill>
-                      <a:prstDash val="solid"/>
-                      <a:round/>
-                      <a:headEnd type="none" w="med" len="med"/>
-                      <a:tailEnd type="none" w="med" len="med"/>
-                    </a:lnT>
-                    <a:lnB w="38100" cap="flat" cmpd="sng" algn="ctr">
-                      <a:solidFill>
-                        <a:schemeClr val="tx1">
-                          <a:lumMod val="65000"/>
-                          <a:lumOff val="35000"/>
-                        </a:schemeClr>
-                      </a:solidFill>
-                      <a:prstDash val="solid"/>
-                      <a:round/>
-                      <a:headEnd type="none" w="med" len="med"/>
-                      <a:tailEnd type="none" w="med" len="med"/>
-                    </a:lnB>
-                    <a:solidFill>
-                      <a:schemeClr val="accent2">
-                        <a:lumMod val="60000"/>
-                        <a:lumOff val="40000"/>
-                      </a:schemeClr>
-                    </a:solidFill>
-                  </a:tcPr>
-                </a:tc>
-                <a:tc>
-                  <a:txBody>
-                    <a:bodyPr/>
-                    <a:lstStyle/>
-                    <a:p>
-                      <a:pPr algn="l"/>
-                      <a:endParaRPr lang="en-DE" sz="2000" dirty="0"/>
-                    </a:p>
-                  </a:txBody>
-                  <a:tcPr marL="153032" marR="153032" marT="76516" marB="76516">
-                    <a:lnL w="38100" cap="flat" cmpd="sng" algn="ctr">
-                      <a:solidFill>
-                        <a:schemeClr val="tx1">
-                          <a:lumMod val="65000"/>
-                          <a:lumOff val="35000"/>
-                        </a:schemeClr>
-                      </a:solidFill>
-                      <a:prstDash val="solid"/>
-                      <a:round/>
-                      <a:headEnd type="none" w="med" len="med"/>
-                      <a:tailEnd type="none" w="med" len="med"/>
-                    </a:lnL>
-                    <a:lnR w="38100" cap="flat" cmpd="sng" algn="ctr">
-                      <a:solidFill>
-                        <a:schemeClr val="tx1">
-                          <a:lumMod val="65000"/>
-                          <a:lumOff val="35000"/>
-                        </a:schemeClr>
-                      </a:solidFill>
-                      <a:prstDash val="solid"/>
-                      <a:round/>
-                      <a:headEnd type="none" w="med" len="med"/>
-                      <a:tailEnd type="none" w="med" len="med"/>
-                    </a:lnR>
-                    <a:lnT w="38100" cap="flat" cmpd="sng" algn="ctr">
-                      <a:solidFill>
-                        <a:schemeClr val="tx1">
-                          <a:lumMod val="65000"/>
-                          <a:lumOff val="35000"/>
-                        </a:schemeClr>
-                      </a:solidFill>
-                      <a:prstDash val="solid"/>
-                      <a:round/>
-                      <a:headEnd type="none" w="med" len="med"/>
-                      <a:tailEnd type="none" w="med" len="med"/>
-                    </a:lnT>
-                    <a:lnB w="38100" cap="flat" cmpd="sng" algn="ctr">
-                      <a:solidFill>
-                        <a:schemeClr val="tx1">
-                          <a:lumMod val="65000"/>
-                          <a:lumOff val="35000"/>
-                        </a:schemeClr>
-                      </a:solidFill>
-                      <a:prstDash val="solid"/>
-                      <a:round/>
-                      <a:headEnd type="none" w="med" len="med"/>
-                      <a:tailEnd type="none" w="med" len="med"/>
-                    </a:lnB>
-                  </a:tcPr>
-                </a:tc>
-                <a:tc>
-                  <a:txBody>
-                    <a:bodyPr/>
-                    <a:lstStyle/>
-                    <a:p>
-                      <a:pPr algn="l"/>
-                      <a:endParaRPr lang="en-DE" sz="2000" dirty="0"/>
-                    </a:p>
-                  </a:txBody>
-                  <a:tcPr marL="153032" marR="153032" marT="76516" marB="76516" anchor="ctr">
-                    <a:lnL w="38100" cap="flat" cmpd="sng" algn="ctr">
-                      <a:solidFill>
-                        <a:schemeClr val="tx1">
-                          <a:lumMod val="65000"/>
-                          <a:lumOff val="35000"/>
-                        </a:schemeClr>
-                      </a:solidFill>
-                      <a:prstDash val="solid"/>
-                      <a:round/>
-                      <a:headEnd type="none" w="med" len="med"/>
-                      <a:tailEnd type="none" w="med" len="med"/>
-                    </a:lnL>
-                    <a:lnR w="38100" cap="flat" cmpd="sng" algn="ctr">
-                      <a:solidFill>
-                        <a:schemeClr val="tx1">
-                          <a:lumMod val="65000"/>
-                          <a:lumOff val="35000"/>
-                        </a:schemeClr>
-                      </a:solidFill>
-                      <a:prstDash val="solid"/>
-                      <a:round/>
-                      <a:headEnd type="none" w="med" len="med"/>
-                      <a:tailEnd type="none" w="med" len="med"/>
-                    </a:lnR>
-                    <a:lnT w="38100" cap="flat" cmpd="sng" algn="ctr">
-                      <a:solidFill>
-                        <a:schemeClr val="tx1">
-                          <a:lumMod val="65000"/>
-                          <a:lumOff val="35000"/>
-                        </a:schemeClr>
-                      </a:solidFill>
-                      <a:prstDash val="solid"/>
-                      <a:round/>
-                      <a:headEnd type="none" w="med" len="med"/>
-                      <a:tailEnd type="none" w="med" len="med"/>
-                    </a:lnT>
-                    <a:lnB w="38100" cap="flat" cmpd="sng" algn="ctr">
-                      <a:solidFill>
-                        <a:schemeClr val="tx1">
-                          <a:lumMod val="65000"/>
-                          <a:lumOff val="35000"/>
-                        </a:schemeClr>
-                      </a:solidFill>
-                      <a:prstDash val="solid"/>
-                      <a:round/>
-                      <a:headEnd type="none" w="med" len="med"/>
-                      <a:tailEnd type="none" w="med" len="med"/>
-                    </a:lnB>
-                  </a:tcPr>
-                </a:tc>
-                <a:extLst>
-                  <a:ext uri="{0D108BD9-81ED-4DB2-BD59-A6C34878D82A}">
-                    <a16:rowId xmlns:a16="http://schemas.microsoft.com/office/drawing/2014/main" val="1090502963"/>
-                  </a:ext>
-                </a:extLst>
-              </a:tr>
-            </a:tbl>
-          </a:graphicData>
-        </a:graphic>
-      </p:graphicFrame>
-      <p:graphicFrame>
-        <p:nvGraphicFramePr>
-          <p:cNvPr id="22" name="Table 4">
-            <a:extLst>
-              <a:ext uri="{FF2B5EF4-FFF2-40B4-BE49-F238E27FC236}">
-                <a16:creationId xmlns:a16="http://schemas.microsoft.com/office/drawing/2014/main" id="{145A5774-2ACA-A749-95D5-A03E674ECED8}"/>
-              </a:ext>
-            </a:extLst>
-          </p:cNvPr>
-          <p:cNvGraphicFramePr>
-            <a:graphicFrameLocks noGrp="1"/>
-          </p:cNvGraphicFramePr>
-          <p:nvPr>
-            <p:extLst>
-              <p:ext uri="{D42A27DB-BD31-4B8C-83A1-F6EECF244321}">
-                <p14:modId xmlns:p14="http://schemas.microsoft.com/office/powerpoint/2010/main" val="3727397017"/>
-              </p:ext>
-            </p:extLst>
-          </p:nvPr>
-        </p:nvGraphicFramePr>
-        <p:xfrm>
-          <a:off x="864529" y="2351742"/>
-          <a:ext cx="659012" cy="1861890"/>
-        </p:xfrm>
-        <a:graphic>
-          <a:graphicData uri="http://schemas.openxmlformats.org/drawingml/2006/table">
-            <a:tbl>
-              <a:tblPr firstRow="1" bandRow="1">
-                <a:tableStyleId>{2D5ABB26-0587-4C30-8999-92F81FD0307C}</a:tableStyleId>
-              </a:tblPr>
-              <a:tblGrid>
-                <a:gridCol w="659012">
-                  <a:extLst>
-                    <a:ext uri="{9D8B030D-6E8A-4147-A177-3AD203B41FA5}">
-                      <a16:colId xmlns:a16="http://schemas.microsoft.com/office/drawing/2014/main" val="3350277845"/>
-                    </a:ext>
-                  </a:extLst>
-                </a:gridCol>
-              </a:tblGrid>
-              <a:tr h="620630">
-                <a:tc>
-                  <a:txBody>
-                    <a:bodyPr/>
-                    <a:lstStyle/>
-                    <a:p>
-                      <a:pPr algn="ctr"/>
-                      <a:r>
-                        <a:rPr lang="en-DE" sz="2400" dirty="0">
-                          <a:latin typeface="Monaco" pitchFamily="2" charset="77"/>
-                          <a:ea typeface="Menlo" panose="020B0609030804020204" pitchFamily="49" charset="0"/>
-                          <a:cs typeface="Menlo" panose="020B0609030804020204" pitchFamily="49" charset="0"/>
-                        </a:rPr>
-                        <a:t>2</a:t>
-                      </a:r>
-                    </a:p>
-                  </a:txBody>
-                  <a:tcPr marL="153032" marR="153032" marT="76516" marB="76516" anchor="ctr">
-                    <a:lnL w="38100" cap="flat" cmpd="sng" algn="ctr">
-                      <a:solidFill>
-                        <a:schemeClr val="tx1">
-                          <a:lumMod val="65000"/>
-                          <a:lumOff val="35000"/>
-                        </a:schemeClr>
-                      </a:solidFill>
-                      <a:prstDash val="solid"/>
-                      <a:round/>
-                      <a:headEnd type="none" w="med" len="med"/>
-                      <a:tailEnd type="none" w="med" len="med"/>
-                    </a:lnL>
-                    <a:lnR w="38100" cap="flat" cmpd="sng" algn="ctr">
-                      <a:solidFill>
-                        <a:schemeClr val="tx1">
-                          <a:lumMod val="65000"/>
-                          <a:lumOff val="35000"/>
-                        </a:schemeClr>
-                      </a:solidFill>
-                      <a:prstDash val="solid"/>
-                      <a:round/>
-                      <a:headEnd type="none" w="med" len="med"/>
-                      <a:tailEnd type="none" w="med" len="med"/>
-                    </a:lnR>
-                    <a:lnT w="38100" cap="flat" cmpd="sng" algn="ctr">
-                      <a:solidFill>
-                        <a:schemeClr val="tx1">
-                          <a:lumMod val="65000"/>
-                          <a:lumOff val="35000"/>
-                        </a:schemeClr>
-                      </a:solidFill>
-                      <a:prstDash val="solid"/>
-                      <a:round/>
-                      <a:headEnd type="none" w="med" len="med"/>
-                      <a:tailEnd type="none" w="med" len="med"/>
-                    </a:lnT>
-                    <a:lnB w="38100" cap="flat" cmpd="sng" algn="ctr">
-                      <a:solidFill>
-                        <a:schemeClr val="tx1">
-                          <a:lumMod val="65000"/>
-                          <a:lumOff val="35000"/>
-                        </a:schemeClr>
-                      </a:solidFill>
-                      <a:prstDash val="solid"/>
-                      <a:round/>
-                      <a:headEnd type="none" w="med" len="med"/>
-                      <a:tailEnd type="none" w="med" len="med"/>
-                    </a:lnB>
-                    <a:noFill/>
-                  </a:tcPr>
-                </a:tc>
-                <a:extLst>
-                  <a:ext uri="{0D108BD9-81ED-4DB2-BD59-A6C34878D82A}">
-                    <a16:rowId xmlns:a16="http://schemas.microsoft.com/office/drawing/2014/main" val="2976503498"/>
-                  </a:ext>
-                </a:extLst>
-              </a:tr>
-              <a:tr h="620630">
-                <a:tc>
-                  <a:txBody>
-                    <a:bodyPr/>
-                    <a:lstStyle/>
-                    <a:p>
-                      <a:pPr algn="ctr"/>
-                      <a:r>
-                        <a:rPr lang="en-DE" sz="2400" dirty="0">
-                          <a:latin typeface="Monaco" pitchFamily="2" charset="77"/>
-                        </a:rPr>
-                        <a:t>4</a:t>
-                      </a:r>
-                    </a:p>
-                  </a:txBody>
-                  <a:tcPr marL="153032" marR="153032" marT="76516" marB="76516" anchor="ctr">
-                    <a:lnL w="38100" cap="flat" cmpd="sng" algn="ctr">
-                      <a:solidFill>
-                        <a:schemeClr val="tx1">
-                          <a:lumMod val="65000"/>
-                          <a:lumOff val="35000"/>
-                        </a:schemeClr>
-                      </a:solidFill>
-                      <a:prstDash val="solid"/>
-                      <a:round/>
-                      <a:headEnd type="none" w="med" len="med"/>
-                      <a:tailEnd type="none" w="med" len="med"/>
-                    </a:lnL>
-                    <a:lnR w="38100" cap="flat" cmpd="sng" algn="ctr">
-                      <a:solidFill>
-                        <a:schemeClr val="tx1">
-                          <a:lumMod val="65000"/>
-                          <a:lumOff val="35000"/>
-                        </a:schemeClr>
-                      </a:solidFill>
-                      <a:prstDash val="solid"/>
-                      <a:round/>
-                      <a:headEnd type="none" w="med" len="med"/>
-                      <a:tailEnd type="none" w="med" len="med"/>
-                    </a:lnR>
-                    <a:lnT w="38100" cap="flat" cmpd="sng" algn="ctr">
-                      <a:solidFill>
-                        <a:schemeClr val="tx1">
-                          <a:lumMod val="65000"/>
-                          <a:lumOff val="35000"/>
-                        </a:schemeClr>
-                      </a:solidFill>
-                      <a:prstDash val="solid"/>
-                      <a:round/>
-                      <a:headEnd type="none" w="med" len="med"/>
-                      <a:tailEnd type="none" w="med" len="med"/>
-                    </a:lnT>
-                    <a:lnB w="38100" cap="flat" cmpd="sng" algn="ctr">
-                      <a:solidFill>
-                        <a:schemeClr val="tx1">
-                          <a:lumMod val="65000"/>
-                          <a:lumOff val="35000"/>
-                        </a:schemeClr>
-                      </a:solidFill>
-                      <a:prstDash val="solid"/>
-                      <a:round/>
-                      <a:headEnd type="none" w="med" len="med"/>
-                      <a:tailEnd type="none" w="med" len="med"/>
-                    </a:lnB>
-                    <a:noFill/>
-                  </a:tcPr>
-                </a:tc>
-                <a:extLst>
-                  <a:ext uri="{0D108BD9-81ED-4DB2-BD59-A6C34878D82A}">
-                    <a16:rowId xmlns:a16="http://schemas.microsoft.com/office/drawing/2014/main" val="3711746142"/>
-                  </a:ext>
-                </a:extLst>
-              </a:tr>
-              <a:tr h="620630">
-                <a:tc>
-                  <a:txBody>
-                    <a:bodyPr/>
-                    <a:lstStyle/>
-                    <a:p>
-                      <a:pPr algn="ctr"/>
-                      <a:r>
-                        <a:rPr lang="en-DE" sz="2400" dirty="0">
-                          <a:latin typeface="Monaco" pitchFamily="2" charset="77"/>
-                        </a:rPr>
-                        <a:t>3</a:t>
-                      </a:r>
-                    </a:p>
-                  </a:txBody>
-                  <a:tcPr marL="153032" marR="153032" marT="76516" marB="76516" anchor="ctr">
-                    <a:lnL w="38100" cap="flat" cmpd="sng" algn="ctr">
-                      <a:solidFill>
-                        <a:schemeClr val="tx1">
-                          <a:lumMod val="65000"/>
-                          <a:lumOff val="35000"/>
-                        </a:schemeClr>
-                      </a:solidFill>
-                      <a:prstDash val="solid"/>
-                      <a:round/>
-                      <a:headEnd type="none" w="med" len="med"/>
-                      <a:tailEnd type="none" w="med" len="med"/>
-                    </a:lnL>
-                    <a:lnR w="38100" cap="flat" cmpd="sng" algn="ctr">
-                      <a:solidFill>
-                        <a:schemeClr val="tx1">
-                          <a:lumMod val="65000"/>
-                          <a:lumOff val="35000"/>
-                        </a:schemeClr>
-                      </a:solidFill>
-                      <a:prstDash val="solid"/>
-                      <a:round/>
-                      <a:headEnd type="none" w="med" len="med"/>
-                      <a:tailEnd type="none" w="med" len="med"/>
-                    </a:lnR>
-                    <a:lnT w="38100" cap="flat" cmpd="sng" algn="ctr">
-                      <a:solidFill>
-                        <a:schemeClr val="tx1">
-                          <a:lumMod val="65000"/>
-                          <a:lumOff val="35000"/>
-                        </a:schemeClr>
-                      </a:solidFill>
-                      <a:prstDash val="solid"/>
-                      <a:round/>
-                      <a:headEnd type="none" w="med" len="med"/>
-                      <a:tailEnd type="none" w="med" len="med"/>
-                    </a:lnT>
-                    <a:lnB w="38100" cap="flat" cmpd="sng" algn="ctr">
-                      <a:solidFill>
-                        <a:schemeClr val="tx1">
-                          <a:lumMod val="65000"/>
-                          <a:lumOff val="35000"/>
-                        </a:schemeClr>
-                      </a:solidFill>
-                      <a:prstDash val="solid"/>
-                      <a:round/>
-                      <a:headEnd type="none" w="med" len="med"/>
-                      <a:tailEnd type="none" w="med" len="med"/>
-                    </a:lnB>
-                    <a:noFill/>
-                  </a:tcPr>
-                </a:tc>
-                <a:extLst>
-                  <a:ext uri="{0D108BD9-81ED-4DB2-BD59-A6C34878D82A}">
-                    <a16:rowId xmlns:a16="http://schemas.microsoft.com/office/drawing/2014/main" val="1090502963"/>
-                  </a:ext>
-                </a:extLst>
-              </a:tr>
-            </a:tbl>
-          </a:graphicData>
-        </a:graphic>
-      </p:graphicFrame>
-      <p:sp>
-        <p:nvSpPr>
-          <p:cNvPr id="23" name="TextBox 22">
-            <a:extLst>
-              <a:ext uri="{FF2B5EF4-FFF2-40B4-BE49-F238E27FC236}">
-                <a16:creationId xmlns:a16="http://schemas.microsoft.com/office/drawing/2014/main" id="{438CBEA5-EAFB-E34F-AB46-1890993E79D0}"/>
-              </a:ext>
-            </a:extLst>
-          </p:cNvPr>
-          <p:cNvSpPr txBox="1"/>
-          <p:nvPr/>
-        </p:nvSpPr>
-        <p:spPr>
-          <a:xfrm>
-            <a:off x="78986" y="1631556"/>
-            <a:ext cx="2230098" cy="461665"/>
-          </a:xfrm>
-          <a:prstGeom prst="rect">
-            <a:avLst/>
-          </a:prstGeom>
-          <a:noFill/>
-        </p:spPr>
-        <p:txBody>
-          <a:bodyPr wrap="none" rtlCol="0">
-            <a:spAutoFit/>
-          </a:bodyPr>
-          <a:lstStyle/>
-          <a:p>
-            <a:r>
-              <a:rPr lang="en-DE" sz="2400" dirty="0">
-                <a:latin typeface="Monaco" pitchFamily="2" charset="77"/>
-                <a:ea typeface="Menlo" panose="020B0609030804020204" pitchFamily="49" charset="0"/>
-                <a:cs typeface="Menlo" panose="020B0609030804020204" pitchFamily="49" charset="0"/>
-              </a:rPr>
-              <a:t>seq_lengths</a:t>
-            </a:r>
-          </a:p>
-        </p:txBody>
-      </p:sp>
-      <p:graphicFrame>
-        <p:nvGraphicFramePr>
-          <p:cNvPr id="24" name="Table 4">
-            <a:extLst>
-              <a:ext uri="{FF2B5EF4-FFF2-40B4-BE49-F238E27FC236}">
-                <a16:creationId xmlns:a16="http://schemas.microsoft.com/office/drawing/2014/main" id="{BE78D417-A27C-CC47-97CC-AC241F9FD329}"/>
-              </a:ext>
-            </a:extLst>
-          </p:cNvPr>
-          <p:cNvGraphicFramePr>
-            <a:graphicFrameLocks noGrp="1"/>
-          </p:cNvGraphicFramePr>
-          <p:nvPr>
-            <p:extLst>
-              <p:ext uri="{D42A27DB-BD31-4B8C-83A1-F6EECF244321}">
-                <p14:modId xmlns:p14="http://schemas.microsoft.com/office/powerpoint/2010/main" val="3202738367"/>
-              </p:ext>
-            </p:extLst>
-          </p:nvPr>
-        </p:nvGraphicFramePr>
-        <p:xfrm>
-          <a:off x="12108322" y="2351742"/>
-          <a:ext cx="659012" cy="1861890"/>
-        </p:xfrm>
-        <a:graphic>
-          <a:graphicData uri="http://schemas.openxmlformats.org/drawingml/2006/table">
-            <a:tbl>
-              <a:tblPr firstRow="1" bandRow="1">
-                <a:tableStyleId>{2D5ABB26-0587-4C30-8999-92F81FD0307C}</a:tableStyleId>
-              </a:tblPr>
-              <a:tblGrid>
-                <a:gridCol w="659012">
-                  <a:extLst>
-                    <a:ext uri="{9D8B030D-6E8A-4147-A177-3AD203B41FA5}">
-                      <a16:colId xmlns:a16="http://schemas.microsoft.com/office/drawing/2014/main" val="3350277845"/>
-                    </a:ext>
-                  </a:extLst>
-                </a:gridCol>
-              </a:tblGrid>
-              <a:tr h="620630">
-                <a:tc>
-                  <a:txBody>
-                    <a:bodyPr/>
-                    <a:lstStyle/>
-                    <a:p>
-                      <a:pPr algn="r"/>
-                      <a:endParaRPr lang="en-DE" sz="2400" dirty="0">
-                        <a:latin typeface="Monaco" pitchFamily="2" charset="77"/>
-                        <a:ea typeface="Menlo" panose="020B0609030804020204" pitchFamily="49" charset="0"/>
-                        <a:cs typeface="Menlo" panose="020B0609030804020204" pitchFamily="49" charset="0"/>
-                      </a:endParaRPr>
-                    </a:p>
-                  </a:txBody>
-                  <a:tcPr marL="153032" marR="153032" marT="76516" marB="76516" anchor="ctr">
-                    <a:lnL w="38100" cap="flat" cmpd="sng" algn="ctr">
-                      <a:solidFill>
-                        <a:schemeClr val="tx1">
-                          <a:lumMod val="65000"/>
-                          <a:lumOff val="35000"/>
-                        </a:schemeClr>
-                      </a:solidFill>
-                      <a:prstDash val="solid"/>
-                      <a:round/>
-                      <a:headEnd type="none" w="med" len="med"/>
-                      <a:tailEnd type="none" w="med" len="med"/>
-                    </a:lnL>
-                    <a:lnR w="38100" cap="flat" cmpd="sng" algn="ctr">
-                      <a:solidFill>
-                        <a:schemeClr val="tx1">
-                          <a:lumMod val="65000"/>
-                          <a:lumOff val="35000"/>
-                        </a:schemeClr>
-                      </a:solidFill>
-                      <a:prstDash val="solid"/>
-                      <a:round/>
-                      <a:headEnd type="none" w="med" len="med"/>
-                      <a:tailEnd type="none" w="med" len="med"/>
-                    </a:lnR>
-                    <a:lnT w="38100" cap="flat" cmpd="sng" algn="ctr">
-                      <a:solidFill>
-                        <a:schemeClr val="tx1">
-                          <a:lumMod val="65000"/>
-                          <a:lumOff val="35000"/>
-                        </a:schemeClr>
-                      </a:solidFill>
-                      <a:prstDash val="solid"/>
-                      <a:round/>
-                      <a:headEnd type="none" w="med" len="med"/>
-                      <a:tailEnd type="none" w="med" len="med"/>
-                    </a:lnT>
-                    <a:lnB w="38100" cap="flat" cmpd="sng" algn="ctr">
-                      <a:solidFill>
-                        <a:schemeClr val="tx1">
-                          <a:lumMod val="65000"/>
-                          <a:lumOff val="35000"/>
-                        </a:schemeClr>
-                      </a:solidFill>
-                      <a:prstDash val="solid"/>
-                      <a:round/>
-                      <a:headEnd type="none" w="med" len="med"/>
-                      <a:tailEnd type="none" w="med" len="med"/>
-                    </a:lnB>
-                    <a:solidFill>
-                      <a:schemeClr val="accent1">
-                        <a:lumMod val="40000"/>
-                        <a:lumOff val="60000"/>
-                      </a:schemeClr>
-                    </a:solidFill>
-                  </a:tcPr>
-                </a:tc>
-                <a:extLst>
-                  <a:ext uri="{0D108BD9-81ED-4DB2-BD59-A6C34878D82A}">
-                    <a16:rowId xmlns:a16="http://schemas.microsoft.com/office/drawing/2014/main" val="2976503498"/>
-                  </a:ext>
-                </a:extLst>
-              </a:tr>
-              <a:tr h="620630">
-                <a:tc>
-                  <a:txBody>
-                    <a:bodyPr/>
-                    <a:lstStyle/>
-                    <a:p>
-                      <a:pPr algn="r"/>
-                      <a:endParaRPr lang="en-DE" sz="2400" dirty="0">
-                        <a:latin typeface="Monaco" pitchFamily="2" charset="77"/>
-                      </a:endParaRPr>
-                    </a:p>
-                  </a:txBody>
-                  <a:tcPr marL="153032" marR="153032" marT="76516" marB="76516" anchor="ctr">
-                    <a:lnL w="38100" cap="flat" cmpd="sng" algn="ctr">
-                      <a:solidFill>
-                        <a:schemeClr val="tx1">
-                          <a:lumMod val="65000"/>
-                          <a:lumOff val="35000"/>
-                        </a:schemeClr>
-                      </a:solidFill>
-                      <a:prstDash val="solid"/>
-                      <a:round/>
-                      <a:headEnd type="none" w="med" len="med"/>
-                      <a:tailEnd type="none" w="med" len="med"/>
-                    </a:lnL>
-                    <a:lnR w="38100" cap="flat" cmpd="sng" algn="ctr">
-                      <a:solidFill>
-                        <a:schemeClr val="tx1">
-                          <a:lumMod val="65000"/>
-                          <a:lumOff val="35000"/>
-                        </a:schemeClr>
-                      </a:solidFill>
-                      <a:prstDash val="solid"/>
-                      <a:round/>
-                      <a:headEnd type="none" w="med" len="med"/>
-                      <a:tailEnd type="none" w="med" len="med"/>
-                    </a:lnR>
-                    <a:lnT w="38100" cap="flat" cmpd="sng" algn="ctr">
-                      <a:solidFill>
-                        <a:schemeClr val="tx1">
-                          <a:lumMod val="65000"/>
-                          <a:lumOff val="35000"/>
-                        </a:schemeClr>
-                      </a:solidFill>
-                      <a:prstDash val="solid"/>
-                      <a:round/>
-                      <a:headEnd type="none" w="med" len="med"/>
-                      <a:tailEnd type="none" w="med" len="med"/>
-                    </a:lnT>
-                    <a:lnB w="38100" cap="flat" cmpd="sng" algn="ctr">
-                      <a:solidFill>
-                        <a:schemeClr val="tx1">
-                          <a:lumMod val="65000"/>
-                          <a:lumOff val="35000"/>
-                        </a:schemeClr>
-                      </a:solidFill>
-                      <a:prstDash val="solid"/>
-                      <a:round/>
-                      <a:headEnd type="none" w="med" len="med"/>
-                      <a:tailEnd type="none" w="med" len="med"/>
-                    </a:lnB>
-                    <a:solidFill>
-                      <a:schemeClr val="accent1">
-                        <a:lumMod val="40000"/>
-                        <a:lumOff val="60000"/>
-                      </a:schemeClr>
-                    </a:solidFill>
-                  </a:tcPr>
-                </a:tc>
-                <a:extLst>
-                  <a:ext uri="{0D108BD9-81ED-4DB2-BD59-A6C34878D82A}">
-                    <a16:rowId xmlns:a16="http://schemas.microsoft.com/office/drawing/2014/main" val="3711746142"/>
-                  </a:ext>
-                </a:extLst>
-              </a:tr>
-              <a:tr h="620630">
-                <a:tc>
-                  <a:txBody>
-                    <a:bodyPr/>
-                    <a:lstStyle/>
-                    <a:p>
-                      <a:pPr algn="r"/>
-                      <a:endParaRPr lang="en-DE" sz="2400" dirty="0">
-                        <a:latin typeface="Monaco" pitchFamily="2" charset="77"/>
-                      </a:endParaRPr>
-                    </a:p>
-                  </a:txBody>
-                  <a:tcPr marL="153032" marR="153032" marT="76516" marB="76516" anchor="ctr">
-                    <a:lnL w="38100" cap="flat" cmpd="sng" algn="ctr">
-                      <a:solidFill>
-                        <a:schemeClr val="tx1">
-                          <a:lumMod val="65000"/>
-                          <a:lumOff val="35000"/>
-                        </a:schemeClr>
-                      </a:solidFill>
-                      <a:prstDash val="solid"/>
-                      <a:round/>
-                      <a:headEnd type="none" w="med" len="med"/>
-                      <a:tailEnd type="none" w="med" len="med"/>
-                    </a:lnL>
-                    <a:lnR w="38100" cap="flat" cmpd="sng" algn="ctr">
-                      <a:solidFill>
-                        <a:schemeClr val="tx1">
-                          <a:lumMod val="65000"/>
-                          <a:lumOff val="35000"/>
-                        </a:schemeClr>
-                      </a:solidFill>
-                      <a:prstDash val="solid"/>
-                      <a:round/>
-                      <a:headEnd type="none" w="med" len="med"/>
-                      <a:tailEnd type="none" w="med" len="med"/>
-                    </a:lnR>
-                    <a:lnT w="38100" cap="flat" cmpd="sng" algn="ctr">
-                      <a:solidFill>
-                        <a:schemeClr val="tx1">
-                          <a:lumMod val="65000"/>
-                          <a:lumOff val="35000"/>
-                        </a:schemeClr>
-                      </a:solidFill>
-                      <a:prstDash val="solid"/>
-                      <a:round/>
-                      <a:headEnd type="none" w="med" len="med"/>
-                      <a:tailEnd type="none" w="med" len="med"/>
-                    </a:lnT>
-                    <a:lnB w="38100" cap="flat" cmpd="sng" algn="ctr">
-                      <a:solidFill>
-                        <a:schemeClr val="tx1">
-                          <a:lumMod val="65000"/>
-                          <a:lumOff val="35000"/>
-                        </a:schemeClr>
-                      </a:solidFill>
-                      <a:prstDash val="solid"/>
-                      <a:round/>
-                      <a:headEnd type="none" w="med" len="med"/>
-                      <a:tailEnd type="none" w="med" len="med"/>
-                    </a:lnB>
-                    <a:solidFill>
-                      <a:schemeClr val="accent1">
-                        <a:lumMod val="40000"/>
-                        <a:lumOff val="60000"/>
-                      </a:schemeClr>
-                    </a:solidFill>
-                  </a:tcPr>
-                </a:tc>
-                <a:extLst>
-                  <a:ext uri="{0D108BD9-81ED-4DB2-BD59-A6C34878D82A}">
-                    <a16:rowId xmlns:a16="http://schemas.microsoft.com/office/drawing/2014/main" val="1090502963"/>
-                  </a:ext>
-                </a:extLst>
-              </a:tr>
-            </a:tbl>
-          </a:graphicData>
-        </a:graphic>
-      </p:graphicFrame>
-      <p:sp>
-        <p:nvSpPr>
-          <p:cNvPr id="25" name="TextBox 24">
-            <a:extLst>
-              <a:ext uri="{FF2B5EF4-FFF2-40B4-BE49-F238E27FC236}">
-                <a16:creationId xmlns:a16="http://schemas.microsoft.com/office/drawing/2014/main" id="{CA319C8F-16C0-934F-8158-C44C0BB48AA7}"/>
-              </a:ext>
-            </a:extLst>
-          </p:cNvPr>
-          <p:cNvSpPr txBox="1"/>
-          <p:nvPr/>
-        </p:nvSpPr>
-        <p:spPr>
-          <a:xfrm>
-            <a:off x="11610877" y="1631556"/>
-            <a:ext cx="1659429" cy="461665"/>
-          </a:xfrm>
-          <a:prstGeom prst="rect">
-            <a:avLst/>
-          </a:prstGeom>
-          <a:noFill/>
-        </p:spPr>
-        <p:txBody>
-          <a:bodyPr wrap="none" rtlCol="0">
-            <a:spAutoFit/>
-          </a:bodyPr>
-          <a:lstStyle/>
-          <a:p>
-            <a:r>
-              <a:rPr lang="en-DE" sz="2400" dirty="0">
-                <a:latin typeface="Monaco" pitchFamily="2" charset="77"/>
-                <a:ea typeface="Menlo" panose="020B0609030804020204" pitchFamily="49" charset="0"/>
-                <a:cs typeface="Menlo" panose="020B0609030804020204" pitchFamily="49" charset="0"/>
-              </a:rPr>
-              <a:t>log_like</a:t>
-            </a:r>
-          </a:p>
-        </p:txBody>
-      </p:sp>
-      <p:sp>
-        <p:nvSpPr>
-          <p:cNvPr id="5" name="Right Arrow 4">
-            <a:extLst>
-              <a:ext uri="{FF2B5EF4-FFF2-40B4-BE49-F238E27FC236}">
-                <a16:creationId xmlns:a16="http://schemas.microsoft.com/office/drawing/2014/main" id="{E60C064E-E73D-7248-99DC-DA03856F3781}"/>
-              </a:ext>
-            </a:extLst>
-          </p:cNvPr>
+          <p:cNvPr id="84" name="Freeform 83"/>
           <p:cNvSpPr/>
           <p:nvPr/>
         </p:nvSpPr>
         <p:spPr>
           <a:xfrm>
-            <a:off x="11053504" y="3009718"/>
-            <a:ext cx="534355" cy="540000"/>
+            <a:off x="6835773" y="1308350"/>
+            <a:ext cx="2649492" cy="880245"/>
           </a:xfrm>
-          <a:prstGeom prst="rightArrow">
-            <a:avLst>
-              <a:gd name="adj1" fmla="val 40183"/>
-              <a:gd name="adj2" fmla="val 50000"/>
-            </a:avLst>
-          </a:prstGeom>
-          <a:solidFill>
-            <a:schemeClr val="accent2">
-              <a:lumMod val="60000"/>
-              <a:lumOff val="40000"/>
-            </a:schemeClr>
-          </a:solidFill>
-          <a:ln w="38100">
+          <a:custGeom>
+            <a:avLst/>
+            <a:gdLst>
+              <a:gd name="connsiteX0" fmla="*/ 0 w 1149531"/>
+              <a:gd name="connsiteY0" fmla="*/ 692353 h 693436"/>
+              <a:gd name="connsiteX1" fmla="*/ 261257 w 1149531"/>
+              <a:gd name="connsiteY1" fmla="*/ 583495 h 693436"/>
+              <a:gd name="connsiteX2" fmla="*/ 404948 w 1149531"/>
+              <a:gd name="connsiteY2" fmla="*/ 21 h 693436"/>
+              <a:gd name="connsiteX3" fmla="*/ 618308 w 1149531"/>
+              <a:gd name="connsiteY3" fmla="*/ 561724 h 693436"/>
+              <a:gd name="connsiteX4" fmla="*/ 1149531 w 1149531"/>
+              <a:gd name="connsiteY4" fmla="*/ 687998 h 693436"/>
+              <a:gd name="connsiteX0" fmla="*/ 0 w 1149531"/>
+              <a:gd name="connsiteY0" fmla="*/ 692333 h 692684"/>
+              <a:gd name="connsiteX1" fmla="*/ 173976 w 1149531"/>
+              <a:gd name="connsiteY1" fmla="*/ 562536 h 692684"/>
+              <a:gd name="connsiteX2" fmla="*/ 404948 w 1149531"/>
+              <a:gd name="connsiteY2" fmla="*/ 1 h 692684"/>
+              <a:gd name="connsiteX3" fmla="*/ 618308 w 1149531"/>
+              <a:gd name="connsiteY3" fmla="*/ 561704 h 692684"/>
+              <a:gd name="connsiteX4" fmla="*/ 1149531 w 1149531"/>
+              <a:gd name="connsiteY4" fmla="*/ 687978 h 692684"/>
+              <a:gd name="connsiteX0" fmla="*/ 0 w 1149531"/>
+              <a:gd name="connsiteY0" fmla="*/ 685353 h 685689"/>
+              <a:gd name="connsiteX1" fmla="*/ 173976 w 1149531"/>
+              <a:gd name="connsiteY1" fmla="*/ 555556 h 685689"/>
+              <a:gd name="connsiteX2" fmla="*/ 365275 w 1149531"/>
+              <a:gd name="connsiteY2" fmla="*/ 1 h 685689"/>
+              <a:gd name="connsiteX3" fmla="*/ 618308 w 1149531"/>
+              <a:gd name="connsiteY3" fmla="*/ 554724 h 685689"/>
+              <a:gd name="connsiteX4" fmla="*/ 1149531 w 1149531"/>
+              <a:gd name="connsiteY4" fmla="*/ 680998 h 685689"/>
+              <a:gd name="connsiteX0" fmla="*/ 0 w 1149531"/>
+              <a:gd name="connsiteY0" fmla="*/ 685437 h 685562"/>
+              <a:gd name="connsiteX1" fmla="*/ 142238 w 1149531"/>
+              <a:gd name="connsiteY1" fmla="*/ 513762 h 685562"/>
+              <a:gd name="connsiteX2" fmla="*/ 365275 w 1149531"/>
+              <a:gd name="connsiteY2" fmla="*/ 85 h 685562"/>
+              <a:gd name="connsiteX3" fmla="*/ 618308 w 1149531"/>
+              <a:gd name="connsiteY3" fmla="*/ 554808 h 685562"/>
+              <a:gd name="connsiteX4" fmla="*/ 1149531 w 1149531"/>
+              <a:gd name="connsiteY4" fmla="*/ 681082 h 685562"/>
+              <a:gd name="connsiteX0" fmla="*/ 0 w 1149531"/>
+              <a:gd name="connsiteY0" fmla="*/ 594721 h 594822"/>
+              <a:gd name="connsiteX1" fmla="*/ 142238 w 1149531"/>
+              <a:gd name="connsiteY1" fmla="*/ 423046 h 594822"/>
+              <a:gd name="connsiteX2" fmla="*/ 329570 w 1149531"/>
+              <a:gd name="connsiteY2" fmla="*/ 105 h 594822"/>
+              <a:gd name="connsiteX3" fmla="*/ 618308 w 1149531"/>
+              <a:gd name="connsiteY3" fmla="*/ 464092 h 594822"/>
+              <a:gd name="connsiteX4" fmla="*/ 1149531 w 1149531"/>
+              <a:gd name="connsiteY4" fmla="*/ 590366 h 594822"/>
+              <a:gd name="connsiteX0" fmla="*/ 0 w 1149531"/>
+              <a:gd name="connsiteY0" fmla="*/ 671480 h 671600"/>
+              <a:gd name="connsiteX1" fmla="*/ 142238 w 1149531"/>
+              <a:gd name="connsiteY1" fmla="*/ 499805 h 671600"/>
+              <a:gd name="connsiteX2" fmla="*/ 333537 w 1149531"/>
+              <a:gd name="connsiteY2" fmla="*/ 87 h 671600"/>
+              <a:gd name="connsiteX3" fmla="*/ 618308 w 1149531"/>
+              <a:gd name="connsiteY3" fmla="*/ 540851 h 671600"/>
+              <a:gd name="connsiteX4" fmla="*/ 1149531 w 1149531"/>
+              <a:gd name="connsiteY4" fmla="*/ 667125 h 671600"/>
+              <a:gd name="connsiteX0" fmla="*/ 0 w 1149531"/>
+              <a:gd name="connsiteY0" fmla="*/ 671512 h 671903"/>
+              <a:gd name="connsiteX1" fmla="*/ 142238 w 1149531"/>
+              <a:gd name="connsiteY1" fmla="*/ 499837 h 671903"/>
+              <a:gd name="connsiteX2" fmla="*/ 333537 w 1149531"/>
+              <a:gd name="connsiteY2" fmla="*/ 119 h 671903"/>
+              <a:gd name="connsiteX3" fmla="*/ 562766 w 1149531"/>
+              <a:gd name="connsiteY3" fmla="*/ 547863 h 671903"/>
+              <a:gd name="connsiteX4" fmla="*/ 1149531 w 1149531"/>
+              <a:gd name="connsiteY4" fmla="*/ 667157 h 671903"/>
+            </a:gdLst>
+            <a:ahLst/>
+            <a:cxnLst>
+              <a:cxn ang="0">
+                <a:pos x="connsiteX0" y="connsiteY0"/>
+              </a:cxn>
+              <a:cxn ang="0">
+                <a:pos x="connsiteX1" y="connsiteY1"/>
+              </a:cxn>
+              <a:cxn ang="0">
+                <a:pos x="connsiteX2" y="connsiteY2"/>
+              </a:cxn>
+              <a:cxn ang="0">
+                <a:pos x="connsiteX3" y="connsiteY3"/>
+              </a:cxn>
+              <a:cxn ang="0">
+                <a:pos x="connsiteX4" y="connsiteY4"/>
+              </a:cxn>
+            </a:cxnLst>
+            <a:rect l="l" t="t" r="r" b="b"/>
+            <a:pathLst>
+              <a:path w="1149531" h="671903">
+                <a:moveTo>
+                  <a:pt x="0" y="671512"/>
+                </a:moveTo>
+                <a:cubicBezTo>
+                  <a:pt x="96883" y="674777"/>
+                  <a:pt x="86649" y="611736"/>
+                  <a:pt x="142238" y="499837"/>
+                </a:cubicBezTo>
+                <a:cubicBezTo>
+                  <a:pt x="197828" y="387938"/>
+                  <a:pt x="263449" y="-7885"/>
+                  <a:pt x="333537" y="119"/>
+                </a:cubicBezTo>
+                <a:cubicBezTo>
+                  <a:pt x="403625" y="8123"/>
+                  <a:pt x="438669" y="433200"/>
+                  <a:pt x="562766" y="547863"/>
+                </a:cubicBezTo>
+                <a:cubicBezTo>
+                  <a:pt x="686863" y="662526"/>
+                  <a:pt x="1028337" y="683123"/>
+                  <a:pt x="1149531" y="667157"/>
+                </a:cubicBezTo>
+              </a:path>
+            </a:pathLst>
+          </a:custGeom>
+          <a:noFill/>
+          <a:ln w="25400">
             <a:solidFill>
-              <a:schemeClr val="tx1">
-                <a:lumMod val="65000"/>
-                <a:lumOff val="35000"/>
-              </a:schemeClr>
+              <a:schemeClr val="accent2"/>
             </a:solidFill>
+            <a:prstDash val="sysDash"/>
           </a:ln>
         </p:spPr>
         <p:style>
@@ -21103,61 +21361,553 @@
           <a:lstStyle/>
           <a:p>
             <a:pPr algn="ctr"/>
-            <a:endParaRPr lang="en-DE"/>
+            <a:endParaRPr lang="en-US" dirty="0"/>
           </a:p>
         </p:txBody>
       </p:sp>
-      <p:sp>
-        <p:nvSpPr>
-          <p:cNvPr id="26" name="Cross 25">
+      <p:cxnSp>
+        <p:nvCxnSpPr>
+          <p:cNvPr id="18" name="Straight Arrow Connector 17">
             <a:extLst>
               <a:ext uri="{FF2B5EF4-FFF2-40B4-BE49-F238E27FC236}">
-                <a16:creationId xmlns:a16="http://schemas.microsoft.com/office/drawing/2014/main" id="{2A4E6F41-F8E6-2A43-AFE2-1095F4D8A1AA}"/>
+                <a16:creationId xmlns:a16="http://schemas.microsoft.com/office/drawing/2014/main" id="{ED6039D8-AFA9-4640-892B-A84A6518FD28}"/>
               </a:ext>
             </a:extLst>
           </p:cNvPr>
+          <p:cNvCxnSpPr>
+            <a:cxnSpLocks/>
+          </p:cNvCxnSpPr>
+          <p:nvPr/>
+        </p:nvCxnSpPr>
+        <p:spPr>
+          <a:xfrm>
+            <a:off x="3567635" y="2201556"/>
+            <a:ext cx="6818811" cy="0"/>
+          </a:xfrm>
+          <a:prstGeom prst="straightConnector1">
+            <a:avLst/>
+          </a:prstGeom>
+          <a:solidFill>
+            <a:schemeClr val="tx1"/>
+          </a:solidFill>
+          <a:ln w="19050">
+            <a:tailEnd type="triangle" w="lg" len="lg"/>
+          </a:ln>
+        </p:spPr>
+        <p:style>
+          <a:lnRef idx="1">
+            <a:schemeClr val="dk1"/>
+          </a:lnRef>
+          <a:fillRef idx="0">
+            <a:schemeClr val="dk1"/>
+          </a:fillRef>
+          <a:effectRef idx="0">
+            <a:schemeClr val="dk1"/>
+          </a:effectRef>
+          <a:fontRef idx="minor">
+            <a:schemeClr val="tx1"/>
+          </a:fontRef>
+        </p:style>
+      </p:cxnSp>
+      <p:cxnSp>
+        <p:nvCxnSpPr>
+          <p:cNvPr id="6" name="Straight Connector 5">
+            <a:extLst>
+              <a:ext uri="{FF2B5EF4-FFF2-40B4-BE49-F238E27FC236}">
+                <a16:creationId xmlns:a16="http://schemas.microsoft.com/office/drawing/2014/main" id="{77189093-87AB-4586-B636-0A4B0CC47003}"/>
+              </a:ext>
+            </a:extLst>
+          </p:cNvPr>
+          <p:cNvCxnSpPr>
+            <a:cxnSpLocks/>
+          </p:cNvCxnSpPr>
+          <p:nvPr/>
+        </p:nvCxnSpPr>
+        <p:spPr>
+          <a:xfrm>
+            <a:off x="6842803" y="2201556"/>
+            <a:ext cx="0" cy="90054"/>
+          </a:xfrm>
+          <a:prstGeom prst="line">
+            <a:avLst/>
+          </a:prstGeom>
+          <a:ln w="19050"/>
+        </p:spPr>
+        <p:style>
+          <a:lnRef idx="1">
+            <a:schemeClr val="dk1"/>
+          </a:lnRef>
+          <a:fillRef idx="0">
+            <a:schemeClr val="dk1"/>
+          </a:fillRef>
+          <a:effectRef idx="0">
+            <a:schemeClr val="dk1"/>
+          </a:effectRef>
+          <a:fontRef idx="minor">
+            <a:schemeClr val="tx1"/>
+          </a:fontRef>
+        </p:style>
+      </p:cxnSp>
+      <p:cxnSp>
+        <p:nvCxnSpPr>
+          <p:cNvPr id="8" name="Straight Connector 7">
+            <a:extLst>
+              <a:ext uri="{FF2B5EF4-FFF2-40B4-BE49-F238E27FC236}">
+                <a16:creationId xmlns:a16="http://schemas.microsoft.com/office/drawing/2014/main" id="{44516FCF-FB1C-4E4B-A37F-742044B989FD}"/>
+              </a:ext>
+            </a:extLst>
+          </p:cNvPr>
+          <p:cNvCxnSpPr>
+            <a:cxnSpLocks/>
+          </p:cNvCxnSpPr>
+          <p:nvPr/>
+        </p:nvCxnSpPr>
+        <p:spPr>
+          <a:xfrm>
+            <a:off x="5470537" y="2209616"/>
+            <a:ext cx="0" cy="90054"/>
+          </a:xfrm>
+          <a:prstGeom prst="line">
+            <a:avLst/>
+          </a:prstGeom>
+          <a:ln w="19050"/>
+        </p:spPr>
+        <p:style>
+          <a:lnRef idx="1">
+            <a:schemeClr val="dk1"/>
+          </a:lnRef>
+          <a:fillRef idx="0">
+            <a:schemeClr val="dk1"/>
+          </a:fillRef>
+          <a:effectRef idx="0">
+            <a:schemeClr val="dk1"/>
+          </a:effectRef>
+          <a:fontRef idx="minor">
+            <a:schemeClr val="tx1"/>
+          </a:fontRef>
+        </p:style>
+      </p:cxnSp>
+      <p:cxnSp>
+        <p:nvCxnSpPr>
+          <p:cNvPr id="9" name="Straight Connector 8">
+            <a:extLst>
+              <a:ext uri="{FF2B5EF4-FFF2-40B4-BE49-F238E27FC236}">
+                <a16:creationId xmlns:a16="http://schemas.microsoft.com/office/drawing/2014/main" id="{A52BBB51-764C-4A0D-A657-AE37AC887809}"/>
+              </a:ext>
+            </a:extLst>
+          </p:cNvPr>
+          <p:cNvCxnSpPr>
+            <a:cxnSpLocks/>
+          </p:cNvCxnSpPr>
+          <p:nvPr/>
+        </p:nvCxnSpPr>
+        <p:spPr>
+          <a:xfrm>
+            <a:off x="4400334" y="2201556"/>
+            <a:ext cx="0" cy="90054"/>
+          </a:xfrm>
+          <a:prstGeom prst="line">
+            <a:avLst/>
+          </a:prstGeom>
+          <a:ln w="19050"/>
+        </p:spPr>
+        <p:style>
+          <a:lnRef idx="1">
+            <a:schemeClr val="dk1"/>
+          </a:lnRef>
+          <a:fillRef idx="0">
+            <a:schemeClr val="dk1"/>
+          </a:fillRef>
+          <a:effectRef idx="0">
+            <a:schemeClr val="dk1"/>
+          </a:effectRef>
+          <a:fontRef idx="minor">
+            <a:schemeClr val="tx1"/>
+          </a:fontRef>
+        </p:style>
+      </p:cxnSp>
+      <mc:AlternateContent xmlns:mc="http://schemas.openxmlformats.org/markup-compatibility/2006" xmlns:a14="http://schemas.microsoft.com/office/drawing/2010/main">
+        <mc:Choice Requires="a14">
+          <p:sp>
+            <p:nvSpPr>
+              <p:cNvPr id="10" name="TextBox 9">
+                <a:extLst>
+                  <a:ext uri="{FF2B5EF4-FFF2-40B4-BE49-F238E27FC236}">
+                    <a16:creationId xmlns:a16="http://schemas.microsoft.com/office/drawing/2014/main" id="{3B5927F6-B31B-4C7A-8A5E-AE249D296F75}"/>
+                  </a:ext>
+                </a:extLst>
+              </p:cNvPr>
+              <p:cNvSpPr txBox="1"/>
+              <p:nvPr/>
+            </p:nvSpPr>
+            <p:spPr>
+              <a:xfrm>
+                <a:off x="4058475" y="1544281"/>
+                <a:ext cx="226088" cy="215444"/>
+              </a:xfrm>
+              <a:prstGeom prst="rect">
+                <a:avLst/>
+              </a:prstGeom>
+              <a:noFill/>
+            </p:spPr>
+            <p:txBody>
+              <a:bodyPr wrap="none" lIns="0" tIns="0" rIns="0" bIns="0" rtlCol="0">
+                <a:spAutoFit/>
+              </a:bodyPr>
+              <a:lstStyle/>
+              <a:p>
+                <a:pPr/>
+                <a14:m>
+                  <m:oMathPara xmlns:m="http://schemas.openxmlformats.org/officeDocument/2006/math">
+                    <m:oMathParaPr>
+                      <m:jc m:val="centerGroup"/>
+                    </m:oMathParaPr>
+                    <m:oMath xmlns:m="http://schemas.openxmlformats.org/officeDocument/2006/math">
+                      <m:sSub>
+                        <m:sSubPr>
+                          <m:ctrlPr>
+                            <a:rPr lang="en-US" sz="1400" b="1" i="1">
+                              <a:latin typeface="Cambria Math" panose="02040503050406030204" pitchFamily="18" charset="0"/>
+                            </a:rPr>
+                          </m:ctrlPr>
+                        </m:sSubPr>
+                        <m:e>
+                          <m:r>
+                            <a:rPr lang="en-US" sz="1400" b="1" i="1">
+                              <a:latin typeface="Cambria Math" panose="02040503050406030204" pitchFamily="18" charset="0"/>
+                            </a:rPr>
+                            <m:t>𝒚</m:t>
+                          </m:r>
+                        </m:e>
+                        <m:sub>
+                          <m:r>
+                            <a:rPr lang="en-US" sz="1400" i="1">
+                              <a:latin typeface="Cambria Math" panose="02040503050406030204" pitchFamily="18" charset="0"/>
+                            </a:rPr>
+                            <m:t>1</m:t>
+                          </m:r>
+                        </m:sub>
+                      </m:sSub>
+                    </m:oMath>
+                  </m:oMathPara>
+                </a14:m>
+                <a:endParaRPr lang="en-DE" sz="1400" b="1" dirty="0"/>
+              </a:p>
+            </p:txBody>
+          </p:sp>
+        </mc:Choice>
+        <mc:Fallback xmlns="">
+          <p:sp>
+            <p:nvSpPr>
+              <p:cNvPr id="10" name="TextBox 9">
+                <a:extLst>
+                  <a:ext uri="{FF2B5EF4-FFF2-40B4-BE49-F238E27FC236}">
+                    <a16:creationId xmlns:a16="http://schemas.microsoft.com/office/drawing/2014/main" id="{3B5927F6-B31B-4C7A-8A5E-AE249D296F75}"/>
+                  </a:ext>
+                </a:extLst>
+              </p:cNvPr>
+              <p:cNvSpPr txBox="1">
+                <a:spLocks noRot="1" noChangeAspect="1" noMove="1" noResize="1" noEditPoints="1" noAdjustHandles="1" noChangeArrowheads="1" noChangeShapeType="1" noTextEdit="1"/>
+              </p:cNvSpPr>
+              <p:nvPr/>
+            </p:nvSpPr>
+            <p:spPr>
+              <a:xfrm>
+                <a:off x="4058475" y="1544281"/>
+                <a:ext cx="226088" cy="215444"/>
+              </a:xfrm>
+              <a:prstGeom prst="rect">
+                <a:avLst/>
+              </a:prstGeom>
+              <a:blipFill>
+                <a:blip r:embed="rId2"/>
+                <a:stretch>
+                  <a:fillRect l="-21053" r="-5263" b="-27778"/>
+                </a:stretch>
+              </a:blipFill>
+            </p:spPr>
+            <p:txBody>
+              <a:bodyPr/>
+              <a:lstStyle/>
+              <a:p>
+                <a:r>
+                  <a:rPr lang="en-DE">
+                    <a:noFill/>
+                  </a:rPr>
+                  <a:t> </a:t>
+                </a:r>
+              </a:p>
+            </p:txBody>
+          </p:sp>
+        </mc:Fallback>
+      </mc:AlternateContent>
+      <mc:AlternateContent xmlns:mc="http://schemas.openxmlformats.org/markup-compatibility/2006" xmlns:a14="http://schemas.microsoft.com/office/drawing/2010/main">
+        <mc:Choice Requires="a14">
+          <p:sp>
+            <p:nvSpPr>
+              <p:cNvPr id="47" name="TextBox 46">
+                <a:extLst>
+                  <a:ext uri="{FF2B5EF4-FFF2-40B4-BE49-F238E27FC236}">
+                    <a16:creationId xmlns:a16="http://schemas.microsoft.com/office/drawing/2014/main" id="{3B5927F6-B31B-4C7A-8A5E-AE249D296F75}"/>
+                  </a:ext>
+                </a:extLst>
+              </p:cNvPr>
+              <p:cNvSpPr txBox="1"/>
+              <p:nvPr/>
+            </p:nvSpPr>
+            <p:spPr>
+              <a:xfrm>
+                <a:off x="5084324" y="1544281"/>
+                <a:ext cx="230256" cy="215444"/>
+              </a:xfrm>
+              <a:prstGeom prst="rect">
+                <a:avLst/>
+              </a:prstGeom>
+              <a:noFill/>
+            </p:spPr>
+            <p:txBody>
+              <a:bodyPr wrap="none" lIns="0" tIns="0" rIns="0" bIns="0" rtlCol="0">
+                <a:spAutoFit/>
+              </a:bodyPr>
+              <a:lstStyle/>
+              <a:p>
+                <a:pPr/>
+                <a14:m>
+                  <m:oMathPara xmlns:m="http://schemas.openxmlformats.org/officeDocument/2006/math">
+                    <m:oMathParaPr>
+                      <m:jc m:val="centerGroup"/>
+                    </m:oMathParaPr>
+                    <m:oMath xmlns:m="http://schemas.openxmlformats.org/officeDocument/2006/math">
+                      <m:sSub>
+                        <m:sSubPr>
+                          <m:ctrlPr>
+                            <a:rPr lang="en-US" sz="1400" b="1" i="1">
+                              <a:latin typeface="Cambria Math" panose="02040503050406030204" pitchFamily="18" charset="0"/>
+                            </a:rPr>
+                          </m:ctrlPr>
+                        </m:sSubPr>
+                        <m:e>
+                          <m:r>
+                            <a:rPr lang="en-US" sz="1400" b="1" i="1">
+                              <a:latin typeface="Cambria Math" panose="02040503050406030204" pitchFamily="18" charset="0"/>
+                            </a:rPr>
+                            <m:t>𝒚</m:t>
+                          </m:r>
+                        </m:e>
+                        <m:sub>
+                          <m:r>
+                            <a:rPr lang="en-US" sz="1400" i="1">
+                              <a:latin typeface="Cambria Math" panose="02040503050406030204" pitchFamily="18" charset="0"/>
+                            </a:rPr>
+                            <m:t>2</m:t>
+                          </m:r>
+                        </m:sub>
+                      </m:sSub>
+                    </m:oMath>
+                  </m:oMathPara>
+                </a14:m>
+                <a:endParaRPr lang="en-DE" b="1" dirty="0"/>
+              </a:p>
+            </p:txBody>
+          </p:sp>
+        </mc:Choice>
+        <mc:Fallback xmlns="">
+          <p:sp>
+            <p:nvSpPr>
+              <p:cNvPr id="47" name="TextBox 46">
+                <a:extLst>
+                  <a:ext uri="{FF2B5EF4-FFF2-40B4-BE49-F238E27FC236}">
+                    <a16:creationId xmlns:a16="http://schemas.microsoft.com/office/drawing/2014/main" id="{3B5927F6-B31B-4C7A-8A5E-AE249D296F75}"/>
+                  </a:ext>
+                </a:extLst>
+              </p:cNvPr>
+              <p:cNvSpPr txBox="1">
+                <a:spLocks noRot="1" noChangeAspect="1" noMove="1" noResize="1" noEditPoints="1" noAdjustHandles="1" noChangeArrowheads="1" noChangeShapeType="1" noTextEdit="1"/>
+              </p:cNvSpPr>
+              <p:nvPr/>
+            </p:nvSpPr>
+            <p:spPr>
+              <a:xfrm>
+                <a:off x="5084324" y="1544281"/>
+                <a:ext cx="230256" cy="215444"/>
+              </a:xfrm>
+              <a:prstGeom prst="rect">
+                <a:avLst/>
+              </a:prstGeom>
+              <a:blipFill>
+                <a:blip r:embed="rId3"/>
+                <a:stretch>
+                  <a:fillRect l="-21053" r="-5263" b="-27778"/>
+                </a:stretch>
+              </a:blipFill>
+            </p:spPr>
+            <p:txBody>
+              <a:bodyPr/>
+              <a:lstStyle/>
+              <a:p>
+                <a:r>
+                  <a:rPr lang="en-DE">
+                    <a:noFill/>
+                  </a:rPr>
+                  <a:t> </a:t>
+                </a:r>
+              </a:p>
+            </p:txBody>
+          </p:sp>
+        </mc:Fallback>
+      </mc:AlternateContent>
+      <mc:AlternateContent xmlns:mc="http://schemas.openxmlformats.org/markup-compatibility/2006" xmlns:a14="http://schemas.microsoft.com/office/drawing/2010/main">
+        <mc:Choice Requires="a14">
+          <p:sp>
+            <p:nvSpPr>
+              <p:cNvPr id="49" name="TextBox 48">
+                <a:extLst>
+                  <a:ext uri="{FF2B5EF4-FFF2-40B4-BE49-F238E27FC236}">
+                    <a16:creationId xmlns:a16="http://schemas.microsoft.com/office/drawing/2014/main" id="{3B5927F6-B31B-4C7A-8A5E-AE249D296F75}"/>
+                  </a:ext>
+                </a:extLst>
+              </p:cNvPr>
+              <p:cNvSpPr txBox="1"/>
+              <p:nvPr/>
+            </p:nvSpPr>
+            <p:spPr>
+              <a:xfrm>
+                <a:off x="6751328" y="260228"/>
+                <a:ext cx="189860" cy="215444"/>
+              </a:xfrm>
+              <a:prstGeom prst="rect">
+                <a:avLst/>
+              </a:prstGeom>
+              <a:noFill/>
+            </p:spPr>
+            <p:txBody>
+              <a:bodyPr wrap="none" lIns="0" tIns="0" rIns="0" bIns="0" rtlCol="0">
+                <a:spAutoFit/>
+              </a:bodyPr>
+              <a:lstStyle/>
+              <a:p>
+                <a:pPr/>
+                <a14:m>
+                  <m:oMathPara xmlns:m="http://schemas.openxmlformats.org/officeDocument/2006/math">
+                    <m:oMathParaPr>
+                      <m:jc m:val="centerGroup"/>
+                    </m:oMathParaPr>
+                    <m:oMath xmlns:m="http://schemas.openxmlformats.org/officeDocument/2006/math">
+                      <m:sSub>
+                        <m:sSubPr>
+                          <m:ctrlPr>
+                            <a:rPr lang="en-US" sz="1400" b="1" i="1">
+                              <a:latin typeface="Cambria Math" panose="02040503050406030204" pitchFamily="18" charset="0"/>
+                            </a:rPr>
+                          </m:ctrlPr>
+                        </m:sSubPr>
+                        <m:e>
+                          <m:r>
+                            <a:rPr lang="en-US" sz="1400" b="1" i="1">
+                              <a:latin typeface="Cambria Math" panose="02040503050406030204" pitchFamily="18" charset="0"/>
+                            </a:rPr>
+                            <m:t>𝒄</m:t>
+                          </m:r>
+                        </m:e>
+                        <m:sub>
+                          <m:r>
+                            <a:rPr lang="en-US" sz="1400" i="1">
+                              <a:latin typeface="Cambria Math" panose="02040503050406030204" pitchFamily="18" charset="0"/>
+                            </a:rPr>
+                            <m:t>𝑖</m:t>
+                          </m:r>
+                        </m:sub>
+                      </m:sSub>
+                    </m:oMath>
+                  </m:oMathPara>
+                </a14:m>
+                <a:endParaRPr lang="en-DE" sz="1400" b="1" dirty="0"/>
+              </a:p>
+            </p:txBody>
+          </p:sp>
+        </mc:Choice>
+        <mc:Fallback xmlns="">
+          <p:sp>
+            <p:nvSpPr>
+              <p:cNvPr id="49" name="TextBox 48">
+                <a:extLst>
+                  <a:ext uri="{FF2B5EF4-FFF2-40B4-BE49-F238E27FC236}">
+                    <a16:creationId xmlns:a16="http://schemas.microsoft.com/office/drawing/2014/main" id="{3B5927F6-B31B-4C7A-8A5E-AE249D296F75}"/>
+                  </a:ext>
+                </a:extLst>
+              </p:cNvPr>
+              <p:cNvSpPr txBox="1">
+                <a:spLocks noRot="1" noChangeAspect="1" noMove="1" noResize="1" noEditPoints="1" noAdjustHandles="1" noChangeArrowheads="1" noChangeShapeType="1" noTextEdit="1"/>
+              </p:cNvSpPr>
+              <p:nvPr/>
+            </p:nvSpPr>
+            <p:spPr>
+              <a:xfrm>
+                <a:off x="6751328" y="260228"/>
+                <a:ext cx="189860" cy="215444"/>
+              </a:xfrm>
+              <a:prstGeom prst="rect">
+                <a:avLst/>
+              </a:prstGeom>
+              <a:blipFill>
+                <a:blip r:embed="rId4"/>
+                <a:stretch>
+                  <a:fillRect l="-12500" r="-6250" b="-16667"/>
+                </a:stretch>
+              </a:blipFill>
+            </p:spPr>
+            <p:txBody>
+              <a:bodyPr/>
+              <a:lstStyle/>
+              <a:p>
+                <a:r>
+                  <a:rPr lang="en-DE">
+                    <a:noFill/>
+                  </a:rPr>
+                  <a:t> </a:t>
+                </a:r>
+              </a:p>
+            </p:txBody>
+          </p:sp>
+        </mc:Fallback>
+      </mc:AlternateContent>
+      <p:sp>
+        <p:nvSpPr>
+          <p:cNvPr id="52" name="Rounded Rectangle 51"/>
           <p:cNvSpPr/>
           <p:nvPr/>
         </p:nvSpPr>
         <p:spPr>
           <a:xfrm>
-            <a:off x="6409984" y="3012687"/>
-            <a:ext cx="540000" cy="540000"/>
+            <a:off x="3991003" y="1270510"/>
+            <a:ext cx="2997978" cy="818605"/>
           </a:xfrm>
-          <a:prstGeom prst="plus">
-            <a:avLst>
-              <a:gd name="adj" fmla="val 33715"/>
-            </a:avLst>
+          <a:prstGeom prst="roundRect">
+            <a:avLst/>
           </a:prstGeom>
-          <a:solidFill>
-            <a:schemeClr val="accent2">
-              <a:lumMod val="60000"/>
-              <a:lumOff val="40000"/>
-            </a:schemeClr>
-          </a:solidFill>
-          <a:ln w="38100">
+          <a:noFill/>
+          <a:ln w="25400" cap="flat" cmpd="sng" algn="ctr">
             <a:solidFill>
-              <a:schemeClr val="tx1">
-                <a:lumMod val="65000"/>
-                <a:lumOff val="35000"/>
-              </a:schemeClr>
+              <a:schemeClr val="accent1"/>
             </a:solidFill>
+            <a:prstDash val="sysDash"/>
+            <a:round/>
+            <a:headEnd type="none" w="med" len="med"/>
+            <a:tailEnd type="none" w="med" len="med"/>
           </a:ln>
         </p:spPr>
         <p:style>
-          <a:lnRef idx="2">
-            <a:schemeClr val="accent1">
-              <a:shade val="50000"/>
-            </a:schemeClr>
+          <a:lnRef idx="0">
+            <a:scrgbClr r="0" g="0" b="0"/>
           </a:lnRef>
-          <a:fillRef idx="1">
-            <a:schemeClr val="accent1"/>
+          <a:fillRef idx="0">
+            <a:scrgbClr r="0" g="0" b="0"/>
           </a:fillRef>
           <a:effectRef idx="0">
-            <a:schemeClr val="accent1"/>
+            <a:scrgbClr r="0" g="0" b="0"/>
           </a:effectRef>
           <a:fontRef idx="minor">
-            <a:schemeClr val="lt1"/>
+            <a:schemeClr val="accent2"/>
           </a:fontRef>
         </p:style>
         <p:txBody>
@@ -21165,14 +21915,3055 @@
           <a:lstStyle/>
           <a:p>
             <a:pPr algn="ctr"/>
-            <a:endParaRPr lang="en-DE"/>
+            <a:endParaRPr lang="en-US"/>
+          </a:p>
+        </p:txBody>
+      </p:sp>
+      <p:cxnSp>
+        <p:nvCxnSpPr>
+          <p:cNvPr id="62" name="Straight Arrow Connector 61"/>
+          <p:cNvCxnSpPr>
+            <a:cxnSpLocks/>
+          </p:cNvCxnSpPr>
+          <p:nvPr/>
+        </p:nvCxnSpPr>
+        <p:spPr>
+          <a:xfrm flipH="1" flipV="1">
+            <a:off x="6842804" y="1915399"/>
+            <a:ext cx="1361" cy="277259"/>
+          </a:xfrm>
+          <a:prstGeom prst="straightConnector1">
+            <a:avLst/>
+          </a:prstGeom>
+          <a:ln w="19050">
+            <a:solidFill>
+              <a:schemeClr val="tx1">
+                <a:lumMod val="65000"/>
+                <a:lumOff val="35000"/>
+              </a:schemeClr>
+            </a:solidFill>
+            <a:tailEnd type="triangle"/>
+          </a:ln>
+        </p:spPr>
+        <p:style>
+          <a:lnRef idx="1">
+            <a:schemeClr val="accent1"/>
+          </a:lnRef>
+          <a:fillRef idx="0">
+            <a:schemeClr val="accent1"/>
+          </a:fillRef>
+          <a:effectRef idx="0">
+            <a:schemeClr val="accent1"/>
+          </a:effectRef>
+          <a:fontRef idx="minor">
+            <a:schemeClr val="tx1"/>
+          </a:fontRef>
+        </p:style>
+      </p:cxnSp>
+      <mc:AlternateContent xmlns:mc="http://schemas.openxmlformats.org/markup-compatibility/2006" xmlns:a14="http://schemas.microsoft.com/office/drawing/2010/main">
+        <mc:Choice Requires="a14">
+          <p:sp>
+            <p:nvSpPr>
+              <p:cNvPr id="63" name="TextBox 62">
+                <a:extLst>
+                  <a:ext uri="{FF2B5EF4-FFF2-40B4-BE49-F238E27FC236}">
+                    <a16:creationId xmlns:a16="http://schemas.microsoft.com/office/drawing/2014/main" id="{3B5927F6-B31B-4C7A-8A5E-AE249D296F75}"/>
+                  </a:ext>
+                </a:extLst>
+              </p:cNvPr>
+              <p:cNvSpPr txBox="1"/>
+              <p:nvPr/>
+            </p:nvSpPr>
+            <p:spPr>
+              <a:xfrm>
+                <a:off x="6343213" y="1544281"/>
+                <a:ext cx="375809" cy="215444"/>
+              </a:xfrm>
+              <a:prstGeom prst="rect">
+                <a:avLst/>
+              </a:prstGeom>
+              <a:noFill/>
+            </p:spPr>
+            <p:txBody>
+              <a:bodyPr wrap="none" lIns="0" tIns="0" rIns="0" bIns="0" rtlCol="0">
+                <a:spAutoFit/>
+              </a:bodyPr>
+              <a:lstStyle/>
+              <a:p>
+                <a:pPr/>
+                <a14:m>
+                  <m:oMathPara xmlns:m="http://schemas.openxmlformats.org/officeDocument/2006/math">
+                    <m:oMathParaPr>
+                      <m:jc m:val="centerGroup"/>
+                    </m:oMathParaPr>
+                    <m:oMath xmlns:m="http://schemas.openxmlformats.org/officeDocument/2006/math">
+                      <m:sSub>
+                        <m:sSubPr>
+                          <m:ctrlPr>
+                            <a:rPr lang="en-US" sz="1400" b="1" i="1">
+                              <a:latin typeface="Cambria Math" panose="02040503050406030204" pitchFamily="18" charset="0"/>
+                            </a:rPr>
+                          </m:ctrlPr>
+                        </m:sSubPr>
+                        <m:e>
+                          <m:r>
+                            <a:rPr lang="en-US" sz="1400" b="1" i="1">
+                              <a:latin typeface="Cambria Math" panose="02040503050406030204" pitchFamily="18" charset="0"/>
+                            </a:rPr>
+                            <m:t>𝒚</m:t>
+                          </m:r>
+                        </m:e>
+                        <m:sub>
+                          <m:r>
+                            <a:rPr lang="en-US" sz="1400" i="1">
+                              <a:latin typeface="Cambria Math" panose="02040503050406030204" pitchFamily="18" charset="0"/>
+                            </a:rPr>
+                            <m:t>𝑖</m:t>
+                          </m:r>
+                          <m:r>
+                            <a:rPr lang="en-US" sz="1400" i="1">
+                              <a:latin typeface="Cambria Math" panose="02040503050406030204" pitchFamily="18" charset="0"/>
+                            </a:rPr>
+                            <m:t>−1</m:t>
+                          </m:r>
+                        </m:sub>
+                      </m:sSub>
+                    </m:oMath>
+                  </m:oMathPara>
+                </a14:m>
+                <a:endParaRPr lang="en-DE" sz="1400" b="1" dirty="0"/>
+              </a:p>
+            </p:txBody>
+          </p:sp>
+        </mc:Choice>
+        <mc:Fallback xmlns="">
+          <p:sp>
+            <p:nvSpPr>
+              <p:cNvPr id="63" name="TextBox 62">
+                <a:extLst>
+                  <a:ext uri="{FF2B5EF4-FFF2-40B4-BE49-F238E27FC236}">
+                    <a16:creationId xmlns:a16="http://schemas.microsoft.com/office/drawing/2014/main" id="{3B5927F6-B31B-4C7A-8A5E-AE249D296F75}"/>
+                  </a:ext>
+                </a:extLst>
+              </p:cNvPr>
+              <p:cNvSpPr txBox="1">
+                <a:spLocks noRot="1" noChangeAspect="1" noMove="1" noResize="1" noEditPoints="1" noAdjustHandles="1" noChangeArrowheads="1" noChangeShapeType="1" noTextEdit="1"/>
+              </p:cNvSpPr>
+              <p:nvPr/>
+            </p:nvSpPr>
+            <p:spPr>
+              <a:xfrm>
+                <a:off x="6343213" y="1544281"/>
+                <a:ext cx="375809" cy="215444"/>
+              </a:xfrm>
+              <a:prstGeom prst="rect">
+                <a:avLst/>
+              </a:prstGeom>
+              <a:blipFill>
+                <a:blip r:embed="rId5"/>
+                <a:stretch>
+                  <a:fillRect l="-13333" r="-3333" b="-27778"/>
+                </a:stretch>
+              </a:blipFill>
+            </p:spPr>
+            <p:txBody>
+              <a:bodyPr/>
+              <a:lstStyle/>
+              <a:p>
+                <a:r>
+                  <a:rPr lang="en-DE">
+                    <a:noFill/>
+                  </a:rPr>
+                  <a:t> </a:t>
+                </a:r>
+              </a:p>
+            </p:txBody>
+          </p:sp>
+        </mc:Fallback>
+      </mc:AlternateContent>
+      <mc:AlternateContent xmlns:mc="http://schemas.openxmlformats.org/markup-compatibility/2006" xmlns:a14="http://schemas.microsoft.com/office/drawing/2010/main">
+        <mc:Choice Requires="a14">
+          <p:sp>
+            <p:nvSpPr>
+              <p:cNvPr id="64" name="TextBox 63"/>
+              <p:cNvSpPr txBox="1"/>
+              <p:nvPr/>
+            </p:nvSpPr>
+            <p:spPr>
+              <a:xfrm>
+                <a:off x="5689168" y="1485273"/>
+                <a:ext cx="479344" cy="369332"/>
+              </a:xfrm>
+              <a:prstGeom prst="rect">
+                <a:avLst/>
+              </a:prstGeom>
+              <a:noFill/>
+            </p:spPr>
+            <p:txBody>
+              <a:bodyPr wrap="square" rtlCol="0">
+                <a:spAutoFit/>
+              </a:bodyPr>
+              <a:lstStyle/>
+              <a:p>
+                <a:pPr/>
+                <a14:m>
+                  <m:oMathPara xmlns:m="http://schemas.openxmlformats.org/officeDocument/2006/math">
+                    <m:oMathParaPr>
+                      <m:jc m:val="centerGroup"/>
+                    </m:oMathParaPr>
+                    <m:oMath xmlns:m="http://schemas.openxmlformats.org/officeDocument/2006/math">
+                      <m:r>
+                        <a:rPr lang="en-US" i="1">
+                          <a:latin typeface="Cambria Math" panose="02040503050406030204" pitchFamily="18" charset="0"/>
+                        </a:rPr>
+                        <m:t>⋯</m:t>
+                      </m:r>
+                    </m:oMath>
+                  </m:oMathPara>
+                </a14:m>
+                <a:endParaRPr lang="en-US" dirty="0"/>
+              </a:p>
+            </p:txBody>
+          </p:sp>
+        </mc:Choice>
+        <mc:Fallback xmlns="">
+          <p:sp>
+            <p:nvSpPr>
+              <p:cNvPr id="64" name="TextBox 63"/>
+              <p:cNvSpPr txBox="1">
+                <a:spLocks noRot="1" noChangeAspect="1" noMove="1" noResize="1" noEditPoints="1" noAdjustHandles="1" noChangeArrowheads="1" noChangeShapeType="1" noTextEdit="1"/>
+              </p:cNvSpPr>
+              <p:nvPr/>
+            </p:nvSpPr>
+            <p:spPr>
+              <a:xfrm>
+                <a:off x="5689168" y="1485273"/>
+                <a:ext cx="479344" cy="369332"/>
+              </a:xfrm>
+              <a:prstGeom prst="rect">
+                <a:avLst/>
+              </a:prstGeom>
+              <a:blipFill>
+                <a:blip r:embed="rId6"/>
+                <a:stretch>
+                  <a:fillRect/>
+                </a:stretch>
+              </a:blipFill>
+            </p:spPr>
+            <p:txBody>
+              <a:bodyPr/>
+              <a:lstStyle/>
+              <a:p>
+                <a:r>
+                  <a:rPr lang="en-DE">
+                    <a:noFill/>
+                  </a:rPr>
+                  <a:t> </a:t>
+                </a:r>
+              </a:p>
+            </p:txBody>
+          </p:sp>
+        </mc:Fallback>
+      </mc:AlternateContent>
+      <p:cxnSp>
+        <p:nvCxnSpPr>
+          <p:cNvPr id="69" name="Straight Arrow Connector 68"/>
+          <p:cNvCxnSpPr/>
+          <p:nvPr/>
+        </p:nvCxnSpPr>
+        <p:spPr>
+          <a:xfrm flipV="1">
+            <a:off x="6839288" y="1030921"/>
+            <a:ext cx="0" cy="239588"/>
+          </a:xfrm>
+          <a:prstGeom prst="straightConnector1">
+            <a:avLst/>
+          </a:prstGeom>
+          <a:ln w="19050">
+            <a:solidFill>
+              <a:schemeClr val="accent1"/>
+            </a:solidFill>
+            <a:tailEnd type="triangle" w="med" len="med"/>
+          </a:ln>
+        </p:spPr>
+        <p:style>
+          <a:lnRef idx="1">
+            <a:schemeClr val="accent1"/>
+          </a:lnRef>
+          <a:fillRef idx="0">
+            <a:schemeClr val="accent1"/>
+          </a:fillRef>
+          <a:effectRef idx="0">
+            <a:schemeClr val="accent1"/>
+          </a:effectRef>
+          <a:fontRef idx="minor">
+            <a:schemeClr val="tx1"/>
+          </a:fontRef>
+        </p:style>
+      </p:cxnSp>
+      <p:cxnSp>
+        <p:nvCxnSpPr>
+          <p:cNvPr id="88" name="Straight Arrow Connector 87"/>
+          <p:cNvCxnSpPr>
+            <a:cxnSpLocks/>
+            <a:stCxn id="71" idx="3"/>
+          </p:cNvCxnSpPr>
+          <p:nvPr/>
+        </p:nvCxnSpPr>
+        <p:spPr>
+          <a:xfrm flipV="1">
+            <a:off x="6929250" y="775119"/>
+            <a:ext cx="401748" cy="2312"/>
+          </a:xfrm>
+          <a:prstGeom prst="straightConnector1">
+            <a:avLst/>
+          </a:prstGeom>
+          <a:ln w="19050">
+            <a:solidFill>
+              <a:schemeClr val="accent2"/>
+            </a:solidFill>
+            <a:tailEnd type="triangle" w="med" len="med"/>
+          </a:ln>
+        </p:spPr>
+        <p:style>
+          <a:lnRef idx="1">
+            <a:schemeClr val="accent1"/>
+          </a:lnRef>
+          <a:fillRef idx="0">
+            <a:schemeClr val="accent1"/>
+          </a:fillRef>
+          <a:effectRef idx="0">
+            <a:schemeClr val="accent1"/>
+          </a:effectRef>
+          <a:fontRef idx="minor">
+            <a:schemeClr val="tx1"/>
+          </a:fontRef>
+        </p:style>
+      </p:cxnSp>
+      <p:cxnSp>
+        <p:nvCxnSpPr>
+          <p:cNvPr id="111" name="Straight Connector 110">
+            <a:extLst>
+              <a:ext uri="{FF2B5EF4-FFF2-40B4-BE49-F238E27FC236}">
+                <a16:creationId xmlns:a16="http://schemas.microsoft.com/office/drawing/2014/main" id="{A52BBB51-764C-4A0D-A657-AE37AC887809}"/>
+              </a:ext>
+            </a:extLst>
+          </p:cNvPr>
+          <p:cNvCxnSpPr>
+            <a:cxnSpLocks/>
+          </p:cNvCxnSpPr>
+          <p:nvPr/>
+        </p:nvCxnSpPr>
+        <p:spPr>
+          <a:xfrm>
+            <a:off x="3576745" y="2197685"/>
+            <a:ext cx="0" cy="90054"/>
+          </a:xfrm>
+          <a:prstGeom prst="line">
+            <a:avLst/>
+          </a:prstGeom>
+          <a:ln w="19050"/>
+        </p:spPr>
+        <p:style>
+          <a:lnRef idx="1">
+            <a:schemeClr val="dk1"/>
+          </a:lnRef>
+          <a:fillRef idx="0">
+            <a:schemeClr val="dk1"/>
+          </a:fillRef>
+          <a:effectRef idx="0">
+            <a:schemeClr val="dk1"/>
+          </a:effectRef>
+          <a:fontRef idx="minor">
+            <a:schemeClr val="tx1"/>
+          </a:fontRef>
+        </p:style>
+      </p:cxnSp>
+      <p:cxnSp>
+        <p:nvCxnSpPr>
+          <p:cNvPr id="115" name="Straight Connector 114">
+            <a:extLst>
+              <a:ext uri="{FF2B5EF4-FFF2-40B4-BE49-F238E27FC236}">
+                <a16:creationId xmlns:a16="http://schemas.microsoft.com/office/drawing/2014/main" id="{A52BBB51-764C-4A0D-A657-AE37AC887809}"/>
+              </a:ext>
+            </a:extLst>
+          </p:cNvPr>
+          <p:cNvCxnSpPr>
+            <a:cxnSpLocks/>
+          </p:cNvCxnSpPr>
+          <p:nvPr/>
+        </p:nvCxnSpPr>
+        <p:spPr>
+          <a:xfrm>
+            <a:off x="9489757" y="2211263"/>
+            <a:ext cx="0" cy="90054"/>
+          </a:xfrm>
+          <a:prstGeom prst="line">
+            <a:avLst/>
+          </a:prstGeom>
+          <a:ln w="19050"/>
+        </p:spPr>
+        <p:style>
+          <a:lnRef idx="1">
+            <a:schemeClr val="dk1"/>
+          </a:lnRef>
+          <a:fillRef idx="0">
+            <a:schemeClr val="dk1"/>
+          </a:fillRef>
+          <a:effectRef idx="0">
+            <a:schemeClr val="dk1"/>
+          </a:effectRef>
+          <a:fontRef idx="minor">
+            <a:schemeClr val="tx1"/>
+          </a:fontRef>
+        </p:style>
+      </p:cxnSp>
+      <p:sp>
+        <p:nvSpPr>
+          <p:cNvPr id="19" name="TextBox 18">
+            <a:extLst>
+              <a:ext uri="{FF2B5EF4-FFF2-40B4-BE49-F238E27FC236}">
+                <a16:creationId xmlns:a16="http://schemas.microsoft.com/office/drawing/2014/main" id="{337299D2-69F3-DA48-8D42-C91DE99AF51E}"/>
+              </a:ext>
+            </a:extLst>
+          </p:cNvPr>
+          <p:cNvSpPr txBox="1"/>
+          <p:nvPr/>
+        </p:nvSpPr>
+        <p:spPr>
+          <a:xfrm>
+            <a:off x="9047928" y="494981"/>
+            <a:ext cx="1631732" cy="523220"/>
+          </a:xfrm>
+          <a:prstGeom prst="rect">
+            <a:avLst/>
+          </a:prstGeom>
+          <a:noFill/>
+        </p:spPr>
+        <p:txBody>
+          <a:bodyPr wrap="square" rtlCol="0">
+            <a:spAutoFit/>
+          </a:bodyPr>
+          <a:lstStyle/>
+          <a:p>
+            <a:pPr algn="ctr"/>
+            <a:r>
+              <a:rPr lang="en-DE" sz="1400" dirty="0">
+                <a:latin typeface="Roboto Light" panose="02000000000000000000" pitchFamily="2" charset="0"/>
+                <a:ea typeface="Roboto Light" panose="02000000000000000000" pitchFamily="2" charset="0"/>
+              </a:rPr>
+              <a:t>PDF of the next </a:t>
+            </a:r>
+          </a:p>
+          <a:p>
+            <a:pPr algn="ctr"/>
+            <a:r>
+              <a:rPr lang="en-DE" sz="1400" dirty="0">
+                <a:latin typeface="Roboto Light" panose="02000000000000000000" pitchFamily="2" charset="0"/>
+                <a:ea typeface="Roboto Light" panose="02000000000000000000" pitchFamily="2" charset="0"/>
+              </a:rPr>
+              <a:t>inter-event time</a:t>
+            </a:r>
+          </a:p>
+        </p:txBody>
+      </p:sp>
+      <p:graphicFrame>
+        <p:nvGraphicFramePr>
+          <p:cNvPr id="57" name="Table 4">
+            <a:extLst>
+              <a:ext uri="{FF2B5EF4-FFF2-40B4-BE49-F238E27FC236}">
+                <a16:creationId xmlns:a16="http://schemas.microsoft.com/office/drawing/2014/main" id="{F7920413-EA77-C94A-BF38-DE684BDD4182}"/>
+              </a:ext>
+            </a:extLst>
+          </p:cNvPr>
+          <p:cNvGraphicFramePr>
+            <a:graphicFrameLocks noGrp="1"/>
+          </p:cNvGraphicFramePr>
+          <p:nvPr/>
+        </p:nvGraphicFramePr>
+        <p:xfrm>
+          <a:off x="6744141" y="1400666"/>
+          <a:ext cx="177922" cy="502677"/>
+        </p:xfrm>
+        <a:graphic>
+          <a:graphicData uri="http://schemas.openxmlformats.org/drawingml/2006/table">
+            <a:tbl>
+              <a:tblPr firstRow="1" bandRow="1">
+                <a:tableStyleId>{2D5ABB26-0587-4C30-8999-92F81FD0307C}</a:tableStyleId>
+              </a:tblPr>
+              <a:tblGrid>
+                <a:gridCol w="177922">
+                  <a:extLst>
+                    <a:ext uri="{9D8B030D-6E8A-4147-A177-3AD203B41FA5}">
+                      <a16:colId xmlns:a16="http://schemas.microsoft.com/office/drawing/2014/main" val="3350277845"/>
+                    </a:ext>
+                  </a:extLst>
+                </a:gridCol>
+              </a:tblGrid>
+              <a:tr h="167559">
+                <a:tc>
+                  <a:txBody>
+                    <a:bodyPr/>
+                    <a:lstStyle/>
+                    <a:p>
+                      <a:pPr algn="r"/>
+                      <a:endParaRPr lang="en-DE" sz="300" dirty="0">
+                        <a:latin typeface="Monaco" pitchFamily="2" charset="77"/>
+                        <a:ea typeface="Menlo" panose="020B0609030804020204" pitchFamily="49" charset="0"/>
+                        <a:cs typeface="Menlo" panose="020B0609030804020204" pitchFamily="49" charset="0"/>
+                      </a:endParaRPr>
+                    </a:p>
+                  </a:txBody>
+                  <a:tcPr marL="41316" marR="41316" marT="20658" marB="20658" anchor="ctr">
+                    <a:lnL w="19050" cap="flat" cmpd="sng" algn="ctr">
+                      <a:solidFill>
+                        <a:schemeClr val="tx1">
+                          <a:lumMod val="65000"/>
+                          <a:lumOff val="35000"/>
+                        </a:schemeClr>
+                      </a:solidFill>
+                      <a:prstDash val="solid"/>
+                      <a:round/>
+                      <a:headEnd type="none" w="med" len="med"/>
+                      <a:tailEnd type="none" w="med" len="med"/>
+                    </a:lnL>
+                    <a:lnR w="19050" cap="flat" cmpd="sng" algn="ctr">
+                      <a:solidFill>
+                        <a:schemeClr val="tx1">
+                          <a:lumMod val="65000"/>
+                          <a:lumOff val="35000"/>
+                        </a:schemeClr>
+                      </a:solidFill>
+                      <a:prstDash val="solid"/>
+                      <a:round/>
+                      <a:headEnd type="none" w="med" len="med"/>
+                      <a:tailEnd type="none" w="med" len="med"/>
+                    </a:lnR>
+                    <a:lnT w="19050" cap="flat" cmpd="sng" algn="ctr">
+                      <a:solidFill>
+                        <a:schemeClr val="tx1">
+                          <a:lumMod val="65000"/>
+                          <a:lumOff val="35000"/>
+                        </a:schemeClr>
+                      </a:solidFill>
+                      <a:prstDash val="solid"/>
+                      <a:round/>
+                      <a:headEnd type="none" w="med" len="med"/>
+                      <a:tailEnd type="none" w="med" len="med"/>
+                    </a:lnT>
+                    <a:lnB w="19050" cap="flat" cmpd="sng" algn="ctr">
+                      <a:solidFill>
+                        <a:schemeClr val="tx1">
+                          <a:lumMod val="65000"/>
+                          <a:lumOff val="35000"/>
+                        </a:schemeClr>
+                      </a:solidFill>
+                      <a:prstDash val="solid"/>
+                      <a:round/>
+                      <a:headEnd type="none" w="med" len="med"/>
+                      <a:tailEnd type="none" w="med" len="med"/>
+                    </a:lnB>
+                    <a:noFill/>
+                  </a:tcPr>
+                </a:tc>
+                <a:extLst>
+                  <a:ext uri="{0D108BD9-81ED-4DB2-BD59-A6C34878D82A}">
+                    <a16:rowId xmlns:a16="http://schemas.microsoft.com/office/drawing/2014/main" val="2976503498"/>
+                  </a:ext>
+                </a:extLst>
+              </a:tr>
+              <a:tr h="167559">
+                <a:tc>
+                  <a:txBody>
+                    <a:bodyPr/>
+                    <a:lstStyle/>
+                    <a:p>
+                      <a:pPr algn="r"/>
+                      <a:endParaRPr lang="en-DE" sz="300" dirty="0">
+                        <a:latin typeface="Monaco" pitchFamily="2" charset="77"/>
+                      </a:endParaRPr>
+                    </a:p>
+                  </a:txBody>
+                  <a:tcPr marL="41316" marR="41316" marT="20658" marB="20658" anchor="ctr">
+                    <a:lnL w="19050" cap="flat" cmpd="sng" algn="ctr">
+                      <a:solidFill>
+                        <a:schemeClr val="tx1">
+                          <a:lumMod val="65000"/>
+                          <a:lumOff val="35000"/>
+                        </a:schemeClr>
+                      </a:solidFill>
+                      <a:prstDash val="solid"/>
+                      <a:round/>
+                      <a:headEnd type="none" w="med" len="med"/>
+                      <a:tailEnd type="none" w="med" len="med"/>
+                    </a:lnL>
+                    <a:lnR w="19050" cap="flat" cmpd="sng" algn="ctr">
+                      <a:solidFill>
+                        <a:schemeClr val="tx1">
+                          <a:lumMod val="65000"/>
+                          <a:lumOff val="35000"/>
+                        </a:schemeClr>
+                      </a:solidFill>
+                      <a:prstDash val="solid"/>
+                      <a:round/>
+                      <a:headEnd type="none" w="med" len="med"/>
+                      <a:tailEnd type="none" w="med" len="med"/>
+                    </a:lnR>
+                    <a:lnT w="19050" cap="flat" cmpd="sng" algn="ctr">
+                      <a:solidFill>
+                        <a:schemeClr val="tx1">
+                          <a:lumMod val="65000"/>
+                          <a:lumOff val="35000"/>
+                        </a:schemeClr>
+                      </a:solidFill>
+                      <a:prstDash val="solid"/>
+                      <a:round/>
+                      <a:headEnd type="none" w="med" len="med"/>
+                      <a:tailEnd type="none" w="med" len="med"/>
+                    </a:lnT>
+                    <a:lnB w="19050" cap="flat" cmpd="sng" algn="ctr">
+                      <a:solidFill>
+                        <a:schemeClr val="tx1">
+                          <a:lumMod val="65000"/>
+                          <a:lumOff val="35000"/>
+                        </a:schemeClr>
+                      </a:solidFill>
+                      <a:prstDash val="solid"/>
+                      <a:round/>
+                      <a:headEnd type="none" w="med" len="med"/>
+                      <a:tailEnd type="none" w="med" len="med"/>
+                    </a:lnB>
+                    <a:noFill/>
+                  </a:tcPr>
+                </a:tc>
+                <a:extLst>
+                  <a:ext uri="{0D108BD9-81ED-4DB2-BD59-A6C34878D82A}">
+                    <a16:rowId xmlns:a16="http://schemas.microsoft.com/office/drawing/2014/main" val="3711746142"/>
+                  </a:ext>
+                </a:extLst>
+              </a:tr>
+              <a:tr h="167559">
+                <a:tc>
+                  <a:txBody>
+                    <a:bodyPr/>
+                    <a:lstStyle/>
+                    <a:p>
+                      <a:pPr algn="r"/>
+                      <a:endParaRPr lang="en-DE" sz="300" dirty="0">
+                        <a:latin typeface="Monaco" pitchFamily="2" charset="77"/>
+                      </a:endParaRPr>
+                    </a:p>
+                  </a:txBody>
+                  <a:tcPr marL="41316" marR="41316" marT="20658" marB="20658" anchor="ctr">
+                    <a:lnL w="19050" cap="flat" cmpd="sng" algn="ctr">
+                      <a:solidFill>
+                        <a:schemeClr val="tx1">
+                          <a:lumMod val="65000"/>
+                          <a:lumOff val="35000"/>
+                        </a:schemeClr>
+                      </a:solidFill>
+                      <a:prstDash val="solid"/>
+                      <a:round/>
+                      <a:headEnd type="none" w="med" len="med"/>
+                      <a:tailEnd type="none" w="med" len="med"/>
+                    </a:lnL>
+                    <a:lnR w="19050" cap="flat" cmpd="sng" algn="ctr">
+                      <a:solidFill>
+                        <a:schemeClr val="tx1">
+                          <a:lumMod val="65000"/>
+                          <a:lumOff val="35000"/>
+                        </a:schemeClr>
+                      </a:solidFill>
+                      <a:prstDash val="solid"/>
+                      <a:round/>
+                      <a:headEnd type="none" w="med" len="med"/>
+                      <a:tailEnd type="none" w="med" len="med"/>
+                    </a:lnR>
+                    <a:lnT w="19050" cap="flat" cmpd="sng" algn="ctr">
+                      <a:solidFill>
+                        <a:schemeClr val="tx1">
+                          <a:lumMod val="65000"/>
+                          <a:lumOff val="35000"/>
+                        </a:schemeClr>
+                      </a:solidFill>
+                      <a:prstDash val="solid"/>
+                      <a:round/>
+                      <a:headEnd type="none" w="med" len="med"/>
+                      <a:tailEnd type="none" w="med" len="med"/>
+                    </a:lnT>
+                    <a:lnB w="19050" cap="flat" cmpd="sng" algn="ctr">
+                      <a:solidFill>
+                        <a:schemeClr val="tx1">
+                          <a:lumMod val="65000"/>
+                          <a:lumOff val="35000"/>
+                        </a:schemeClr>
+                      </a:solidFill>
+                      <a:prstDash val="solid"/>
+                      <a:round/>
+                      <a:headEnd type="none" w="med" len="med"/>
+                      <a:tailEnd type="none" w="med" len="med"/>
+                    </a:lnB>
+                    <a:noFill/>
+                  </a:tcPr>
+                </a:tc>
+                <a:extLst>
+                  <a:ext uri="{0D108BD9-81ED-4DB2-BD59-A6C34878D82A}">
+                    <a16:rowId xmlns:a16="http://schemas.microsoft.com/office/drawing/2014/main" val="1090502963"/>
+                  </a:ext>
+                </a:extLst>
+              </a:tr>
+            </a:tbl>
+          </a:graphicData>
+        </a:graphic>
+      </p:graphicFrame>
+      <p:cxnSp>
+        <p:nvCxnSpPr>
+          <p:cNvPr id="59" name="Straight Arrow Connector 58">
+            <a:extLst>
+              <a:ext uri="{FF2B5EF4-FFF2-40B4-BE49-F238E27FC236}">
+                <a16:creationId xmlns:a16="http://schemas.microsoft.com/office/drawing/2014/main" id="{0AA6885E-8322-EA4A-B17D-83FD4B040A5C}"/>
+              </a:ext>
+            </a:extLst>
+          </p:cNvPr>
+          <p:cNvCxnSpPr>
+            <a:cxnSpLocks/>
+          </p:cNvCxnSpPr>
+          <p:nvPr/>
+        </p:nvCxnSpPr>
+        <p:spPr>
+          <a:xfrm flipH="1" flipV="1">
+            <a:off x="5471619" y="1927455"/>
+            <a:ext cx="1361" cy="277259"/>
+          </a:xfrm>
+          <a:prstGeom prst="straightConnector1">
+            <a:avLst/>
+          </a:prstGeom>
+          <a:ln w="19050">
+            <a:solidFill>
+              <a:schemeClr val="tx1">
+                <a:lumMod val="65000"/>
+                <a:lumOff val="35000"/>
+              </a:schemeClr>
+            </a:solidFill>
+            <a:tailEnd type="triangle"/>
+          </a:ln>
+        </p:spPr>
+        <p:style>
+          <a:lnRef idx="1">
+            <a:schemeClr val="accent1"/>
+          </a:lnRef>
+          <a:fillRef idx="0">
+            <a:schemeClr val="accent1"/>
+          </a:fillRef>
+          <a:effectRef idx="0">
+            <a:schemeClr val="accent1"/>
+          </a:effectRef>
+          <a:fontRef idx="minor">
+            <a:schemeClr val="tx1"/>
+          </a:fontRef>
+        </p:style>
+      </p:cxnSp>
+      <p:graphicFrame>
+        <p:nvGraphicFramePr>
+          <p:cNvPr id="61" name="Table 4">
+            <a:extLst>
+              <a:ext uri="{FF2B5EF4-FFF2-40B4-BE49-F238E27FC236}">
+                <a16:creationId xmlns:a16="http://schemas.microsoft.com/office/drawing/2014/main" id="{66068A92-E460-004C-A1B5-6B88B901D1C1}"/>
+              </a:ext>
+            </a:extLst>
+          </p:cNvPr>
+          <p:cNvGraphicFramePr>
+            <a:graphicFrameLocks noGrp="1"/>
+          </p:cNvGraphicFramePr>
+          <p:nvPr/>
+        </p:nvGraphicFramePr>
+        <p:xfrm>
+          <a:off x="5372956" y="1412722"/>
+          <a:ext cx="177922" cy="502677"/>
+        </p:xfrm>
+        <a:graphic>
+          <a:graphicData uri="http://schemas.openxmlformats.org/drawingml/2006/table">
+            <a:tbl>
+              <a:tblPr firstRow="1" bandRow="1">
+                <a:tableStyleId>{2D5ABB26-0587-4C30-8999-92F81FD0307C}</a:tableStyleId>
+              </a:tblPr>
+              <a:tblGrid>
+                <a:gridCol w="177922">
+                  <a:extLst>
+                    <a:ext uri="{9D8B030D-6E8A-4147-A177-3AD203B41FA5}">
+                      <a16:colId xmlns:a16="http://schemas.microsoft.com/office/drawing/2014/main" val="3350277845"/>
+                    </a:ext>
+                  </a:extLst>
+                </a:gridCol>
+              </a:tblGrid>
+              <a:tr h="167559">
+                <a:tc>
+                  <a:txBody>
+                    <a:bodyPr/>
+                    <a:lstStyle/>
+                    <a:p>
+                      <a:pPr algn="r"/>
+                      <a:endParaRPr lang="en-DE" sz="300" dirty="0">
+                        <a:latin typeface="Monaco" pitchFamily="2" charset="77"/>
+                        <a:ea typeface="Menlo" panose="020B0609030804020204" pitchFamily="49" charset="0"/>
+                        <a:cs typeface="Menlo" panose="020B0609030804020204" pitchFamily="49" charset="0"/>
+                      </a:endParaRPr>
+                    </a:p>
+                  </a:txBody>
+                  <a:tcPr marL="41316" marR="41316" marT="20658" marB="20658" anchor="ctr">
+                    <a:lnL w="19050" cap="flat" cmpd="sng" algn="ctr">
+                      <a:solidFill>
+                        <a:schemeClr val="tx1">
+                          <a:lumMod val="65000"/>
+                          <a:lumOff val="35000"/>
+                        </a:schemeClr>
+                      </a:solidFill>
+                      <a:prstDash val="solid"/>
+                      <a:round/>
+                      <a:headEnd type="none" w="med" len="med"/>
+                      <a:tailEnd type="none" w="med" len="med"/>
+                    </a:lnL>
+                    <a:lnR w="19050" cap="flat" cmpd="sng" algn="ctr">
+                      <a:solidFill>
+                        <a:schemeClr val="tx1">
+                          <a:lumMod val="65000"/>
+                          <a:lumOff val="35000"/>
+                        </a:schemeClr>
+                      </a:solidFill>
+                      <a:prstDash val="solid"/>
+                      <a:round/>
+                      <a:headEnd type="none" w="med" len="med"/>
+                      <a:tailEnd type="none" w="med" len="med"/>
+                    </a:lnR>
+                    <a:lnT w="19050" cap="flat" cmpd="sng" algn="ctr">
+                      <a:solidFill>
+                        <a:schemeClr val="tx1">
+                          <a:lumMod val="65000"/>
+                          <a:lumOff val="35000"/>
+                        </a:schemeClr>
+                      </a:solidFill>
+                      <a:prstDash val="solid"/>
+                      <a:round/>
+                      <a:headEnd type="none" w="med" len="med"/>
+                      <a:tailEnd type="none" w="med" len="med"/>
+                    </a:lnT>
+                    <a:lnB w="19050" cap="flat" cmpd="sng" algn="ctr">
+                      <a:solidFill>
+                        <a:schemeClr val="tx1">
+                          <a:lumMod val="65000"/>
+                          <a:lumOff val="35000"/>
+                        </a:schemeClr>
+                      </a:solidFill>
+                      <a:prstDash val="solid"/>
+                      <a:round/>
+                      <a:headEnd type="none" w="med" len="med"/>
+                      <a:tailEnd type="none" w="med" len="med"/>
+                    </a:lnB>
+                    <a:noFill/>
+                  </a:tcPr>
+                </a:tc>
+                <a:extLst>
+                  <a:ext uri="{0D108BD9-81ED-4DB2-BD59-A6C34878D82A}">
+                    <a16:rowId xmlns:a16="http://schemas.microsoft.com/office/drawing/2014/main" val="2976503498"/>
+                  </a:ext>
+                </a:extLst>
+              </a:tr>
+              <a:tr h="167559">
+                <a:tc>
+                  <a:txBody>
+                    <a:bodyPr/>
+                    <a:lstStyle/>
+                    <a:p>
+                      <a:pPr algn="r"/>
+                      <a:endParaRPr lang="en-DE" sz="300" dirty="0">
+                        <a:latin typeface="Monaco" pitchFamily="2" charset="77"/>
+                      </a:endParaRPr>
+                    </a:p>
+                  </a:txBody>
+                  <a:tcPr marL="41316" marR="41316" marT="20658" marB="20658" anchor="ctr">
+                    <a:lnL w="19050" cap="flat" cmpd="sng" algn="ctr">
+                      <a:solidFill>
+                        <a:schemeClr val="tx1">
+                          <a:lumMod val="65000"/>
+                          <a:lumOff val="35000"/>
+                        </a:schemeClr>
+                      </a:solidFill>
+                      <a:prstDash val="solid"/>
+                      <a:round/>
+                      <a:headEnd type="none" w="med" len="med"/>
+                      <a:tailEnd type="none" w="med" len="med"/>
+                    </a:lnL>
+                    <a:lnR w="19050" cap="flat" cmpd="sng" algn="ctr">
+                      <a:solidFill>
+                        <a:schemeClr val="tx1">
+                          <a:lumMod val="65000"/>
+                          <a:lumOff val="35000"/>
+                        </a:schemeClr>
+                      </a:solidFill>
+                      <a:prstDash val="solid"/>
+                      <a:round/>
+                      <a:headEnd type="none" w="med" len="med"/>
+                      <a:tailEnd type="none" w="med" len="med"/>
+                    </a:lnR>
+                    <a:lnT w="19050" cap="flat" cmpd="sng" algn="ctr">
+                      <a:solidFill>
+                        <a:schemeClr val="tx1">
+                          <a:lumMod val="65000"/>
+                          <a:lumOff val="35000"/>
+                        </a:schemeClr>
+                      </a:solidFill>
+                      <a:prstDash val="solid"/>
+                      <a:round/>
+                      <a:headEnd type="none" w="med" len="med"/>
+                      <a:tailEnd type="none" w="med" len="med"/>
+                    </a:lnT>
+                    <a:lnB w="19050" cap="flat" cmpd="sng" algn="ctr">
+                      <a:solidFill>
+                        <a:schemeClr val="tx1">
+                          <a:lumMod val="65000"/>
+                          <a:lumOff val="35000"/>
+                        </a:schemeClr>
+                      </a:solidFill>
+                      <a:prstDash val="solid"/>
+                      <a:round/>
+                      <a:headEnd type="none" w="med" len="med"/>
+                      <a:tailEnd type="none" w="med" len="med"/>
+                    </a:lnB>
+                    <a:noFill/>
+                  </a:tcPr>
+                </a:tc>
+                <a:extLst>
+                  <a:ext uri="{0D108BD9-81ED-4DB2-BD59-A6C34878D82A}">
+                    <a16:rowId xmlns:a16="http://schemas.microsoft.com/office/drawing/2014/main" val="3711746142"/>
+                  </a:ext>
+                </a:extLst>
+              </a:tr>
+              <a:tr h="167559">
+                <a:tc>
+                  <a:txBody>
+                    <a:bodyPr/>
+                    <a:lstStyle/>
+                    <a:p>
+                      <a:pPr algn="r"/>
+                      <a:endParaRPr lang="en-DE" sz="300" dirty="0">
+                        <a:latin typeface="Monaco" pitchFamily="2" charset="77"/>
+                      </a:endParaRPr>
+                    </a:p>
+                  </a:txBody>
+                  <a:tcPr marL="41316" marR="41316" marT="20658" marB="20658" anchor="ctr">
+                    <a:lnL w="19050" cap="flat" cmpd="sng" algn="ctr">
+                      <a:solidFill>
+                        <a:schemeClr val="tx1">
+                          <a:lumMod val="65000"/>
+                          <a:lumOff val="35000"/>
+                        </a:schemeClr>
+                      </a:solidFill>
+                      <a:prstDash val="solid"/>
+                      <a:round/>
+                      <a:headEnd type="none" w="med" len="med"/>
+                      <a:tailEnd type="none" w="med" len="med"/>
+                    </a:lnL>
+                    <a:lnR w="19050" cap="flat" cmpd="sng" algn="ctr">
+                      <a:solidFill>
+                        <a:schemeClr val="tx1">
+                          <a:lumMod val="65000"/>
+                          <a:lumOff val="35000"/>
+                        </a:schemeClr>
+                      </a:solidFill>
+                      <a:prstDash val="solid"/>
+                      <a:round/>
+                      <a:headEnd type="none" w="med" len="med"/>
+                      <a:tailEnd type="none" w="med" len="med"/>
+                    </a:lnR>
+                    <a:lnT w="19050" cap="flat" cmpd="sng" algn="ctr">
+                      <a:solidFill>
+                        <a:schemeClr val="tx1">
+                          <a:lumMod val="65000"/>
+                          <a:lumOff val="35000"/>
+                        </a:schemeClr>
+                      </a:solidFill>
+                      <a:prstDash val="solid"/>
+                      <a:round/>
+                      <a:headEnd type="none" w="med" len="med"/>
+                      <a:tailEnd type="none" w="med" len="med"/>
+                    </a:lnT>
+                    <a:lnB w="19050" cap="flat" cmpd="sng" algn="ctr">
+                      <a:solidFill>
+                        <a:schemeClr val="tx1">
+                          <a:lumMod val="65000"/>
+                          <a:lumOff val="35000"/>
+                        </a:schemeClr>
+                      </a:solidFill>
+                      <a:prstDash val="solid"/>
+                      <a:round/>
+                      <a:headEnd type="none" w="med" len="med"/>
+                      <a:tailEnd type="none" w="med" len="med"/>
+                    </a:lnB>
+                    <a:noFill/>
+                  </a:tcPr>
+                </a:tc>
+                <a:extLst>
+                  <a:ext uri="{0D108BD9-81ED-4DB2-BD59-A6C34878D82A}">
+                    <a16:rowId xmlns:a16="http://schemas.microsoft.com/office/drawing/2014/main" val="1090502963"/>
+                  </a:ext>
+                </a:extLst>
+              </a:tr>
+            </a:tbl>
+          </a:graphicData>
+        </a:graphic>
+      </p:graphicFrame>
+      <p:cxnSp>
+        <p:nvCxnSpPr>
+          <p:cNvPr id="65" name="Straight Arrow Connector 64">
+            <a:extLst>
+              <a:ext uri="{FF2B5EF4-FFF2-40B4-BE49-F238E27FC236}">
+                <a16:creationId xmlns:a16="http://schemas.microsoft.com/office/drawing/2014/main" id="{041B6B66-EEDB-6546-B229-36CB0596992C}"/>
+              </a:ext>
+            </a:extLst>
+          </p:cNvPr>
+          <p:cNvCxnSpPr>
+            <a:cxnSpLocks/>
+          </p:cNvCxnSpPr>
+          <p:nvPr/>
+        </p:nvCxnSpPr>
+        <p:spPr>
+          <a:xfrm flipH="1" flipV="1">
+            <a:off x="4395572" y="1918783"/>
+            <a:ext cx="1361" cy="277259"/>
+          </a:xfrm>
+          <a:prstGeom prst="straightConnector1">
+            <a:avLst/>
+          </a:prstGeom>
+          <a:ln w="19050">
+            <a:solidFill>
+              <a:schemeClr val="tx1">
+                <a:lumMod val="65000"/>
+                <a:lumOff val="35000"/>
+              </a:schemeClr>
+            </a:solidFill>
+            <a:tailEnd type="triangle"/>
+          </a:ln>
+        </p:spPr>
+        <p:style>
+          <a:lnRef idx="1">
+            <a:schemeClr val="accent1"/>
+          </a:lnRef>
+          <a:fillRef idx="0">
+            <a:schemeClr val="accent1"/>
+          </a:fillRef>
+          <a:effectRef idx="0">
+            <a:schemeClr val="accent1"/>
+          </a:effectRef>
+          <a:fontRef idx="minor">
+            <a:schemeClr val="tx1"/>
+          </a:fontRef>
+        </p:style>
+      </p:cxnSp>
+      <p:graphicFrame>
+        <p:nvGraphicFramePr>
+          <p:cNvPr id="66" name="Table 4">
+            <a:extLst>
+              <a:ext uri="{FF2B5EF4-FFF2-40B4-BE49-F238E27FC236}">
+                <a16:creationId xmlns:a16="http://schemas.microsoft.com/office/drawing/2014/main" id="{E80DD7D0-948B-4D4C-95C8-33127872D4F8}"/>
+              </a:ext>
+            </a:extLst>
+          </p:cNvPr>
+          <p:cNvGraphicFramePr>
+            <a:graphicFrameLocks noGrp="1"/>
+          </p:cNvGraphicFramePr>
+          <p:nvPr/>
+        </p:nvGraphicFramePr>
+        <p:xfrm>
+          <a:off x="4296909" y="1404050"/>
+          <a:ext cx="177922" cy="502677"/>
+        </p:xfrm>
+        <a:graphic>
+          <a:graphicData uri="http://schemas.openxmlformats.org/drawingml/2006/table">
+            <a:tbl>
+              <a:tblPr firstRow="1" bandRow="1">
+                <a:tableStyleId>{2D5ABB26-0587-4C30-8999-92F81FD0307C}</a:tableStyleId>
+              </a:tblPr>
+              <a:tblGrid>
+                <a:gridCol w="177922">
+                  <a:extLst>
+                    <a:ext uri="{9D8B030D-6E8A-4147-A177-3AD203B41FA5}">
+                      <a16:colId xmlns:a16="http://schemas.microsoft.com/office/drawing/2014/main" val="3350277845"/>
+                    </a:ext>
+                  </a:extLst>
+                </a:gridCol>
+              </a:tblGrid>
+              <a:tr h="167559">
+                <a:tc>
+                  <a:txBody>
+                    <a:bodyPr/>
+                    <a:lstStyle/>
+                    <a:p>
+                      <a:pPr algn="r"/>
+                      <a:endParaRPr lang="en-DE" sz="300" dirty="0">
+                        <a:latin typeface="Monaco" pitchFamily="2" charset="77"/>
+                        <a:ea typeface="Menlo" panose="020B0609030804020204" pitchFamily="49" charset="0"/>
+                        <a:cs typeface="Menlo" panose="020B0609030804020204" pitchFamily="49" charset="0"/>
+                      </a:endParaRPr>
+                    </a:p>
+                  </a:txBody>
+                  <a:tcPr marL="41316" marR="41316" marT="20658" marB="20658" anchor="ctr">
+                    <a:lnL w="19050" cap="flat" cmpd="sng" algn="ctr">
+                      <a:solidFill>
+                        <a:schemeClr val="tx1">
+                          <a:lumMod val="65000"/>
+                          <a:lumOff val="35000"/>
+                        </a:schemeClr>
+                      </a:solidFill>
+                      <a:prstDash val="solid"/>
+                      <a:round/>
+                      <a:headEnd type="none" w="med" len="med"/>
+                      <a:tailEnd type="none" w="med" len="med"/>
+                    </a:lnL>
+                    <a:lnR w="19050" cap="flat" cmpd="sng" algn="ctr">
+                      <a:solidFill>
+                        <a:schemeClr val="tx1">
+                          <a:lumMod val="65000"/>
+                          <a:lumOff val="35000"/>
+                        </a:schemeClr>
+                      </a:solidFill>
+                      <a:prstDash val="solid"/>
+                      <a:round/>
+                      <a:headEnd type="none" w="med" len="med"/>
+                      <a:tailEnd type="none" w="med" len="med"/>
+                    </a:lnR>
+                    <a:lnT w="19050" cap="flat" cmpd="sng" algn="ctr">
+                      <a:solidFill>
+                        <a:schemeClr val="tx1">
+                          <a:lumMod val="65000"/>
+                          <a:lumOff val="35000"/>
+                        </a:schemeClr>
+                      </a:solidFill>
+                      <a:prstDash val="solid"/>
+                      <a:round/>
+                      <a:headEnd type="none" w="med" len="med"/>
+                      <a:tailEnd type="none" w="med" len="med"/>
+                    </a:lnT>
+                    <a:lnB w="19050" cap="flat" cmpd="sng" algn="ctr">
+                      <a:solidFill>
+                        <a:schemeClr val="tx1">
+                          <a:lumMod val="65000"/>
+                          <a:lumOff val="35000"/>
+                        </a:schemeClr>
+                      </a:solidFill>
+                      <a:prstDash val="solid"/>
+                      <a:round/>
+                      <a:headEnd type="none" w="med" len="med"/>
+                      <a:tailEnd type="none" w="med" len="med"/>
+                    </a:lnB>
+                    <a:noFill/>
+                  </a:tcPr>
+                </a:tc>
+                <a:extLst>
+                  <a:ext uri="{0D108BD9-81ED-4DB2-BD59-A6C34878D82A}">
+                    <a16:rowId xmlns:a16="http://schemas.microsoft.com/office/drawing/2014/main" val="2976503498"/>
+                  </a:ext>
+                </a:extLst>
+              </a:tr>
+              <a:tr h="167559">
+                <a:tc>
+                  <a:txBody>
+                    <a:bodyPr/>
+                    <a:lstStyle/>
+                    <a:p>
+                      <a:pPr algn="r"/>
+                      <a:endParaRPr lang="en-DE" sz="300" dirty="0">
+                        <a:latin typeface="Monaco" pitchFamily="2" charset="77"/>
+                      </a:endParaRPr>
+                    </a:p>
+                  </a:txBody>
+                  <a:tcPr marL="41316" marR="41316" marT="20658" marB="20658" anchor="ctr">
+                    <a:lnL w="19050" cap="flat" cmpd="sng" algn="ctr">
+                      <a:solidFill>
+                        <a:schemeClr val="tx1">
+                          <a:lumMod val="65000"/>
+                          <a:lumOff val="35000"/>
+                        </a:schemeClr>
+                      </a:solidFill>
+                      <a:prstDash val="solid"/>
+                      <a:round/>
+                      <a:headEnd type="none" w="med" len="med"/>
+                      <a:tailEnd type="none" w="med" len="med"/>
+                    </a:lnL>
+                    <a:lnR w="19050" cap="flat" cmpd="sng" algn="ctr">
+                      <a:solidFill>
+                        <a:schemeClr val="tx1">
+                          <a:lumMod val="65000"/>
+                          <a:lumOff val="35000"/>
+                        </a:schemeClr>
+                      </a:solidFill>
+                      <a:prstDash val="solid"/>
+                      <a:round/>
+                      <a:headEnd type="none" w="med" len="med"/>
+                      <a:tailEnd type="none" w="med" len="med"/>
+                    </a:lnR>
+                    <a:lnT w="19050" cap="flat" cmpd="sng" algn="ctr">
+                      <a:solidFill>
+                        <a:schemeClr val="tx1">
+                          <a:lumMod val="65000"/>
+                          <a:lumOff val="35000"/>
+                        </a:schemeClr>
+                      </a:solidFill>
+                      <a:prstDash val="solid"/>
+                      <a:round/>
+                      <a:headEnd type="none" w="med" len="med"/>
+                      <a:tailEnd type="none" w="med" len="med"/>
+                    </a:lnT>
+                    <a:lnB w="19050" cap="flat" cmpd="sng" algn="ctr">
+                      <a:solidFill>
+                        <a:schemeClr val="tx1">
+                          <a:lumMod val="65000"/>
+                          <a:lumOff val="35000"/>
+                        </a:schemeClr>
+                      </a:solidFill>
+                      <a:prstDash val="solid"/>
+                      <a:round/>
+                      <a:headEnd type="none" w="med" len="med"/>
+                      <a:tailEnd type="none" w="med" len="med"/>
+                    </a:lnB>
+                    <a:noFill/>
+                  </a:tcPr>
+                </a:tc>
+                <a:extLst>
+                  <a:ext uri="{0D108BD9-81ED-4DB2-BD59-A6C34878D82A}">
+                    <a16:rowId xmlns:a16="http://schemas.microsoft.com/office/drawing/2014/main" val="3711746142"/>
+                  </a:ext>
+                </a:extLst>
+              </a:tr>
+              <a:tr h="167559">
+                <a:tc>
+                  <a:txBody>
+                    <a:bodyPr/>
+                    <a:lstStyle/>
+                    <a:p>
+                      <a:pPr algn="r"/>
+                      <a:endParaRPr lang="en-DE" sz="300" dirty="0">
+                        <a:latin typeface="Monaco" pitchFamily="2" charset="77"/>
+                      </a:endParaRPr>
+                    </a:p>
+                  </a:txBody>
+                  <a:tcPr marL="41316" marR="41316" marT="20658" marB="20658" anchor="ctr">
+                    <a:lnL w="19050" cap="flat" cmpd="sng" algn="ctr">
+                      <a:solidFill>
+                        <a:schemeClr val="tx1">
+                          <a:lumMod val="65000"/>
+                          <a:lumOff val="35000"/>
+                        </a:schemeClr>
+                      </a:solidFill>
+                      <a:prstDash val="solid"/>
+                      <a:round/>
+                      <a:headEnd type="none" w="med" len="med"/>
+                      <a:tailEnd type="none" w="med" len="med"/>
+                    </a:lnL>
+                    <a:lnR w="19050" cap="flat" cmpd="sng" algn="ctr">
+                      <a:solidFill>
+                        <a:schemeClr val="tx1">
+                          <a:lumMod val="65000"/>
+                          <a:lumOff val="35000"/>
+                        </a:schemeClr>
+                      </a:solidFill>
+                      <a:prstDash val="solid"/>
+                      <a:round/>
+                      <a:headEnd type="none" w="med" len="med"/>
+                      <a:tailEnd type="none" w="med" len="med"/>
+                    </a:lnR>
+                    <a:lnT w="19050" cap="flat" cmpd="sng" algn="ctr">
+                      <a:solidFill>
+                        <a:schemeClr val="tx1">
+                          <a:lumMod val="65000"/>
+                          <a:lumOff val="35000"/>
+                        </a:schemeClr>
+                      </a:solidFill>
+                      <a:prstDash val="solid"/>
+                      <a:round/>
+                      <a:headEnd type="none" w="med" len="med"/>
+                      <a:tailEnd type="none" w="med" len="med"/>
+                    </a:lnT>
+                    <a:lnB w="19050" cap="flat" cmpd="sng" algn="ctr">
+                      <a:solidFill>
+                        <a:schemeClr val="tx1">
+                          <a:lumMod val="65000"/>
+                          <a:lumOff val="35000"/>
+                        </a:schemeClr>
+                      </a:solidFill>
+                      <a:prstDash val="solid"/>
+                      <a:round/>
+                      <a:headEnd type="none" w="med" len="med"/>
+                      <a:tailEnd type="none" w="med" len="med"/>
+                    </a:lnB>
+                    <a:noFill/>
+                  </a:tcPr>
+                </a:tc>
+                <a:extLst>
+                  <a:ext uri="{0D108BD9-81ED-4DB2-BD59-A6C34878D82A}">
+                    <a16:rowId xmlns:a16="http://schemas.microsoft.com/office/drawing/2014/main" val="1090502963"/>
+                  </a:ext>
+                </a:extLst>
+              </a:tr>
+            </a:tbl>
+          </a:graphicData>
+        </a:graphic>
+      </p:graphicFrame>
+      <p:graphicFrame>
+        <p:nvGraphicFramePr>
+          <p:cNvPr id="71" name="Table 4">
+            <a:extLst>
+              <a:ext uri="{FF2B5EF4-FFF2-40B4-BE49-F238E27FC236}">
+                <a16:creationId xmlns:a16="http://schemas.microsoft.com/office/drawing/2014/main" id="{16B5E31B-B5CB-1047-9237-9E4C0DFA51C3}"/>
+              </a:ext>
+            </a:extLst>
+          </p:cNvPr>
+          <p:cNvGraphicFramePr>
+            <a:graphicFrameLocks noGrp="1"/>
+          </p:cNvGraphicFramePr>
+          <p:nvPr/>
+        </p:nvGraphicFramePr>
+        <p:xfrm>
+          <a:off x="6751328" y="526094"/>
+          <a:ext cx="177922" cy="502677"/>
+        </p:xfrm>
+        <a:graphic>
+          <a:graphicData uri="http://schemas.openxmlformats.org/drawingml/2006/table">
+            <a:tbl>
+              <a:tblPr firstRow="1" bandRow="1">
+                <a:tableStyleId>{2D5ABB26-0587-4C30-8999-92F81FD0307C}</a:tableStyleId>
+              </a:tblPr>
+              <a:tblGrid>
+                <a:gridCol w="177922">
+                  <a:extLst>
+                    <a:ext uri="{9D8B030D-6E8A-4147-A177-3AD203B41FA5}">
+                      <a16:colId xmlns:a16="http://schemas.microsoft.com/office/drawing/2014/main" val="3350277845"/>
+                    </a:ext>
+                  </a:extLst>
+                </a:gridCol>
+              </a:tblGrid>
+              <a:tr h="167559">
+                <a:tc>
+                  <a:txBody>
+                    <a:bodyPr/>
+                    <a:lstStyle/>
+                    <a:p>
+                      <a:pPr algn="r"/>
+                      <a:endParaRPr lang="en-DE" sz="300" dirty="0">
+                        <a:latin typeface="Monaco" pitchFamily="2" charset="77"/>
+                        <a:ea typeface="Menlo" panose="020B0609030804020204" pitchFamily="49" charset="0"/>
+                        <a:cs typeface="Menlo" panose="020B0609030804020204" pitchFamily="49" charset="0"/>
+                      </a:endParaRPr>
+                    </a:p>
+                  </a:txBody>
+                  <a:tcPr marL="41316" marR="41316" marT="20658" marB="20658" anchor="ctr">
+                    <a:lnL w="19050" cap="flat" cmpd="sng" algn="ctr">
+                      <a:solidFill>
+                        <a:schemeClr val="accent1"/>
+                      </a:solidFill>
+                      <a:prstDash val="solid"/>
+                      <a:round/>
+                      <a:headEnd type="none" w="med" len="med"/>
+                      <a:tailEnd type="none" w="med" len="med"/>
+                    </a:lnL>
+                    <a:lnR w="19050" cap="flat" cmpd="sng" algn="ctr">
+                      <a:solidFill>
+                        <a:schemeClr val="accent1"/>
+                      </a:solidFill>
+                      <a:prstDash val="solid"/>
+                      <a:round/>
+                      <a:headEnd type="none" w="med" len="med"/>
+                      <a:tailEnd type="none" w="med" len="med"/>
+                    </a:lnR>
+                    <a:lnT w="19050" cap="flat" cmpd="sng" algn="ctr">
+                      <a:solidFill>
+                        <a:schemeClr val="accent1"/>
+                      </a:solidFill>
+                      <a:prstDash val="solid"/>
+                      <a:round/>
+                      <a:headEnd type="none" w="med" len="med"/>
+                      <a:tailEnd type="none" w="med" len="med"/>
+                    </a:lnT>
+                    <a:lnB w="19050" cap="flat" cmpd="sng" algn="ctr">
+                      <a:solidFill>
+                        <a:schemeClr val="accent1"/>
+                      </a:solidFill>
+                      <a:prstDash val="solid"/>
+                      <a:round/>
+                      <a:headEnd type="none" w="med" len="med"/>
+                      <a:tailEnd type="none" w="med" len="med"/>
+                    </a:lnB>
+                    <a:noFill/>
+                  </a:tcPr>
+                </a:tc>
+                <a:extLst>
+                  <a:ext uri="{0D108BD9-81ED-4DB2-BD59-A6C34878D82A}">
+                    <a16:rowId xmlns:a16="http://schemas.microsoft.com/office/drawing/2014/main" val="2976503498"/>
+                  </a:ext>
+                </a:extLst>
+              </a:tr>
+              <a:tr h="167559">
+                <a:tc>
+                  <a:txBody>
+                    <a:bodyPr/>
+                    <a:lstStyle/>
+                    <a:p>
+                      <a:pPr algn="r"/>
+                      <a:endParaRPr lang="en-DE" sz="300" dirty="0">
+                        <a:latin typeface="Monaco" pitchFamily="2" charset="77"/>
+                      </a:endParaRPr>
+                    </a:p>
+                  </a:txBody>
+                  <a:tcPr marL="41316" marR="41316" marT="20658" marB="20658" anchor="ctr">
+                    <a:lnL w="19050" cap="flat" cmpd="sng" algn="ctr">
+                      <a:solidFill>
+                        <a:schemeClr val="accent1"/>
+                      </a:solidFill>
+                      <a:prstDash val="solid"/>
+                      <a:round/>
+                      <a:headEnd type="none" w="med" len="med"/>
+                      <a:tailEnd type="none" w="med" len="med"/>
+                    </a:lnL>
+                    <a:lnR w="19050" cap="flat" cmpd="sng" algn="ctr">
+                      <a:solidFill>
+                        <a:schemeClr val="accent1"/>
+                      </a:solidFill>
+                      <a:prstDash val="solid"/>
+                      <a:round/>
+                      <a:headEnd type="none" w="med" len="med"/>
+                      <a:tailEnd type="none" w="med" len="med"/>
+                    </a:lnR>
+                    <a:lnT w="19050" cap="flat" cmpd="sng" algn="ctr">
+                      <a:solidFill>
+                        <a:schemeClr val="accent1"/>
+                      </a:solidFill>
+                      <a:prstDash val="solid"/>
+                      <a:round/>
+                      <a:headEnd type="none" w="med" len="med"/>
+                      <a:tailEnd type="none" w="med" len="med"/>
+                    </a:lnT>
+                    <a:lnB w="19050" cap="flat" cmpd="sng" algn="ctr">
+                      <a:solidFill>
+                        <a:schemeClr val="accent1"/>
+                      </a:solidFill>
+                      <a:prstDash val="solid"/>
+                      <a:round/>
+                      <a:headEnd type="none" w="med" len="med"/>
+                      <a:tailEnd type="none" w="med" len="med"/>
+                    </a:lnB>
+                    <a:noFill/>
+                  </a:tcPr>
+                </a:tc>
+                <a:extLst>
+                  <a:ext uri="{0D108BD9-81ED-4DB2-BD59-A6C34878D82A}">
+                    <a16:rowId xmlns:a16="http://schemas.microsoft.com/office/drawing/2014/main" val="3711746142"/>
+                  </a:ext>
+                </a:extLst>
+              </a:tr>
+              <a:tr h="167559">
+                <a:tc>
+                  <a:txBody>
+                    <a:bodyPr/>
+                    <a:lstStyle/>
+                    <a:p>
+                      <a:pPr algn="r"/>
+                      <a:endParaRPr lang="en-DE" sz="300" dirty="0">
+                        <a:latin typeface="Monaco" pitchFamily="2" charset="77"/>
+                      </a:endParaRPr>
+                    </a:p>
+                  </a:txBody>
+                  <a:tcPr marL="41316" marR="41316" marT="20658" marB="20658" anchor="ctr">
+                    <a:lnL w="19050" cap="flat" cmpd="sng" algn="ctr">
+                      <a:solidFill>
+                        <a:schemeClr val="accent1"/>
+                      </a:solidFill>
+                      <a:prstDash val="solid"/>
+                      <a:round/>
+                      <a:headEnd type="none" w="med" len="med"/>
+                      <a:tailEnd type="none" w="med" len="med"/>
+                    </a:lnL>
+                    <a:lnR w="19050" cap="flat" cmpd="sng" algn="ctr">
+                      <a:solidFill>
+                        <a:schemeClr val="accent1"/>
+                      </a:solidFill>
+                      <a:prstDash val="solid"/>
+                      <a:round/>
+                      <a:headEnd type="none" w="med" len="med"/>
+                      <a:tailEnd type="none" w="med" len="med"/>
+                    </a:lnR>
+                    <a:lnT w="19050" cap="flat" cmpd="sng" algn="ctr">
+                      <a:solidFill>
+                        <a:schemeClr val="accent1"/>
+                      </a:solidFill>
+                      <a:prstDash val="solid"/>
+                      <a:round/>
+                      <a:headEnd type="none" w="med" len="med"/>
+                      <a:tailEnd type="none" w="med" len="med"/>
+                    </a:lnT>
+                    <a:lnB w="19050" cap="flat" cmpd="sng" algn="ctr">
+                      <a:solidFill>
+                        <a:schemeClr val="accent1"/>
+                      </a:solidFill>
+                      <a:prstDash val="solid"/>
+                      <a:round/>
+                      <a:headEnd type="none" w="med" len="med"/>
+                      <a:tailEnd type="none" w="med" len="med"/>
+                    </a:lnB>
+                    <a:noFill/>
+                  </a:tcPr>
+                </a:tc>
+                <a:extLst>
+                  <a:ext uri="{0D108BD9-81ED-4DB2-BD59-A6C34878D82A}">
+                    <a16:rowId xmlns:a16="http://schemas.microsoft.com/office/drawing/2014/main" val="1090502963"/>
+                  </a:ext>
+                </a:extLst>
+              </a:tr>
+            </a:tbl>
+          </a:graphicData>
+        </a:graphic>
+      </p:graphicFrame>
+      <mc:AlternateContent xmlns:mc="http://schemas.openxmlformats.org/markup-compatibility/2006" xmlns:a14="http://schemas.microsoft.com/office/drawing/2010/main">
+        <mc:Choice Requires="a14">
+          <p:sp>
+            <p:nvSpPr>
+              <p:cNvPr id="72" name="TextBox 71">
+                <a:extLst>
+                  <a:ext uri="{FF2B5EF4-FFF2-40B4-BE49-F238E27FC236}">
+                    <a16:creationId xmlns:a16="http://schemas.microsoft.com/office/drawing/2014/main" id="{FBF1CD65-1952-DE44-8543-DDADF542A1AE}"/>
+                  </a:ext>
+                </a:extLst>
+              </p:cNvPr>
+              <p:cNvSpPr txBox="1"/>
+              <p:nvPr/>
+            </p:nvSpPr>
+            <p:spPr>
+              <a:xfrm>
+                <a:off x="4097265" y="376745"/>
+                <a:ext cx="2621757" cy="759695"/>
+              </a:xfrm>
+              <a:prstGeom prst="rect">
+                <a:avLst/>
+              </a:prstGeom>
+              <a:noFill/>
+            </p:spPr>
+            <p:txBody>
+              <a:bodyPr wrap="square" rtlCol="0">
+                <a:spAutoFit/>
+              </a:bodyPr>
+              <a:lstStyle/>
+              <a:p>
+                <a:pPr algn="ctr"/>
+                <a:r>
+                  <a:rPr lang="en-DE" sz="1400" dirty="0">
+                    <a:latin typeface="Roboto Light" panose="02000000000000000000" pitchFamily="2" charset="0"/>
+                    <a:ea typeface="Roboto Light" panose="02000000000000000000" pitchFamily="2" charset="0"/>
+                  </a:rPr>
+                  <a:t>Encode history </a:t>
+                </a:r>
+                <a:endParaRPr lang="en-US" sz="1400" i="1" dirty="0">
+                  <a:latin typeface="Cambria Math" panose="02040503050406030204" pitchFamily="18" charset="0"/>
+                  <a:ea typeface="Roboto Light" panose="02000000000000000000" pitchFamily="2" charset="0"/>
+                </a:endParaRPr>
+              </a:p>
+              <a:p>
+                <a:pPr algn="ctr"/>
+                <a14:m>
+                  <m:oMath xmlns:m="http://schemas.openxmlformats.org/officeDocument/2006/math">
+                    <m:sSub>
+                      <m:sSubPr>
+                        <m:ctrlPr>
+                          <a:rPr lang="en-US" sz="1400" i="1">
+                            <a:latin typeface="Cambria Math" panose="02040503050406030204" pitchFamily="18" charset="0"/>
+                            <a:ea typeface="Roboto Light" panose="02000000000000000000" pitchFamily="2" charset="0"/>
+                          </a:rPr>
+                        </m:ctrlPr>
+                      </m:sSubPr>
+                      <m:e>
+                        <m:r>
+                          <a:rPr lang="en-US" sz="1400" i="1">
+                            <a:latin typeface="Cambria Math" panose="02040503050406030204" pitchFamily="18" charset="0"/>
+                            <a:ea typeface="Roboto Light" panose="02000000000000000000" pitchFamily="2" charset="0"/>
+                          </a:rPr>
+                          <m:t>ℋ</m:t>
+                        </m:r>
+                      </m:e>
+                      <m:sub>
+                        <m:sSub>
+                          <m:sSubPr>
+                            <m:ctrlPr>
+                              <a:rPr lang="en-US" sz="1400" i="1">
+                                <a:latin typeface="Cambria Math" panose="02040503050406030204" pitchFamily="18" charset="0"/>
+                                <a:ea typeface="Roboto Light" panose="02000000000000000000" pitchFamily="2" charset="0"/>
+                              </a:rPr>
+                            </m:ctrlPr>
+                          </m:sSubPr>
+                          <m:e>
+                            <m:r>
+                              <a:rPr lang="en-US" sz="1400" i="1">
+                                <a:latin typeface="Cambria Math" panose="02040503050406030204" pitchFamily="18" charset="0"/>
+                                <a:ea typeface="Roboto Light" panose="02000000000000000000" pitchFamily="2" charset="0"/>
+                              </a:rPr>
+                              <m:t>𝑡</m:t>
+                            </m:r>
+                          </m:e>
+                          <m:sub>
+                            <m:r>
+                              <a:rPr lang="en-US" sz="1400" i="1">
+                                <a:latin typeface="Cambria Math" panose="02040503050406030204" pitchFamily="18" charset="0"/>
+                                <a:ea typeface="Roboto Light" panose="02000000000000000000" pitchFamily="2" charset="0"/>
+                              </a:rPr>
+                              <m:t>𝑖</m:t>
+                            </m:r>
+                          </m:sub>
+                        </m:sSub>
+                      </m:sub>
+                    </m:sSub>
+                    <m:r>
+                      <a:rPr lang="en-US" sz="1400" i="1">
+                        <a:latin typeface="Cambria Math" panose="02040503050406030204" pitchFamily="18" charset="0"/>
+                        <a:ea typeface="Roboto Light" panose="02000000000000000000" pitchFamily="2" charset="0"/>
+                      </a:rPr>
+                      <m:t>=</m:t>
+                    </m:r>
+                    <m:d>
+                      <m:dPr>
+                        <m:begChr m:val="{"/>
+                        <m:endChr m:val="}"/>
+                        <m:ctrlPr>
+                          <a:rPr lang="en-US" sz="1400" i="1">
+                            <a:latin typeface="Cambria Math" panose="02040503050406030204" pitchFamily="18" charset="0"/>
+                            <a:ea typeface="Roboto Light" panose="02000000000000000000" pitchFamily="2" charset="0"/>
+                          </a:rPr>
+                        </m:ctrlPr>
+                      </m:dPr>
+                      <m:e>
+                        <m:sSub>
+                          <m:sSubPr>
+                            <m:ctrlPr>
+                              <a:rPr lang="en-US" sz="1400" i="1">
+                                <a:latin typeface="Cambria Math" panose="02040503050406030204" pitchFamily="18" charset="0"/>
+                                <a:ea typeface="Roboto Light" panose="02000000000000000000" pitchFamily="2" charset="0"/>
+                              </a:rPr>
+                            </m:ctrlPr>
+                          </m:sSubPr>
+                          <m:e>
+                            <m:r>
+                              <a:rPr lang="en-US" sz="1400" i="1">
+                                <a:latin typeface="Cambria Math" panose="02040503050406030204" pitchFamily="18" charset="0"/>
+                                <a:ea typeface="Roboto Light" panose="02000000000000000000" pitchFamily="2" charset="0"/>
+                              </a:rPr>
+                              <m:t>𝑡</m:t>
+                            </m:r>
+                          </m:e>
+                          <m:sub>
+                            <m:r>
+                              <a:rPr lang="en-US" sz="1400" i="1">
+                                <a:latin typeface="Cambria Math" panose="02040503050406030204" pitchFamily="18" charset="0"/>
+                                <a:ea typeface="Roboto Light" panose="02000000000000000000" pitchFamily="2" charset="0"/>
+                              </a:rPr>
+                              <m:t>1</m:t>
+                            </m:r>
+                          </m:sub>
+                        </m:sSub>
+                        <m:r>
+                          <a:rPr lang="en-US" sz="1400" i="1">
+                            <a:latin typeface="Cambria Math" panose="02040503050406030204" pitchFamily="18" charset="0"/>
+                            <a:ea typeface="Roboto Light" panose="02000000000000000000" pitchFamily="2" charset="0"/>
+                          </a:rPr>
+                          <m:t>,…,</m:t>
+                        </m:r>
+                        <m:sSub>
+                          <m:sSubPr>
+                            <m:ctrlPr>
+                              <a:rPr lang="en-US" sz="1400" i="1">
+                                <a:latin typeface="Cambria Math" panose="02040503050406030204" pitchFamily="18" charset="0"/>
+                                <a:ea typeface="Roboto Light" panose="02000000000000000000" pitchFamily="2" charset="0"/>
+                              </a:rPr>
+                            </m:ctrlPr>
+                          </m:sSubPr>
+                          <m:e>
+                            <m:r>
+                              <a:rPr lang="en-US" sz="1400" i="1">
+                                <a:latin typeface="Cambria Math" panose="02040503050406030204" pitchFamily="18" charset="0"/>
+                                <a:ea typeface="Roboto Light" panose="02000000000000000000" pitchFamily="2" charset="0"/>
+                              </a:rPr>
+                              <m:t>𝑡</m:t>
+                            </m:r>
+                          </m:e>
+                          <m:sub>
+                            <m:r>
+                              <a:rPr lang="en-US" sz="1400" i="1">
+                                <a:latin typeface="Cambria Math" panose="02040503050406030204" pitchFamily="18" charset="0"/>
+                                <a:ea typeface="Roboto Light" panose="02000000000000000000" pitchFamily="2" charset="0"/>
+                              </a:rPr>
+                              <m:t>𝑖</m:t>
+                            </m:r>
+                            <m:r>
+                              <a:rPr lang="en-US" sz="1400" i="1">
+                                <a:latin typeface="Cambria Math" panose="02040503050406030204" pitchFamily="18" charset="0"/>
+                                <a:ea typeface="Roboto Light" panose="02000000000000000000" pitchFamily="2" charset="0"/>
+                              </a:rPr>
+                              <m:t>−1</m:t>
+                            </m:r>
+                          </m:sub>
+                        </m:sSub>
+                      </m:e>
+                    </m:d>
+                  </m:oMath>
+                </a14:m>
+                <a:r>
+                  <a:rPr lang="en-DE" sz="1400" dirty="0">
+                    <a:latin typeface="Roboto Light" panose="02000000000000000000" pitchFamily="2" charset="0"/>
+                    <a:ea typeface="Roboto Light" panose="02000000000000000000" pitchFamily="2" charset="0"/>
+                  </a:rPr>
+                  <a:t> </a:t>
+                </a:r>
+              </a:p>
+              <a:p>
+                <a:pPr algn="ctr"/>
+                <a:r>
+                  <a:rPr lang="en-DE" sz="1400" dirty="0">
+                    <a:latin typeface="Roboto Light" panose="02000000000000000000" pitchFamily="2" charset="0"/>
+                    <a:ea typeface="Roboto Light" panose="02000000000000000000" pitchFamily="2" charset="0"/>
+                  </a:rPr>
+                  <a:t>as a vector </a:t>
+                </a:r>
+                <a14:m>
+                  <m:oMath xmlns:m="http://schemas.openxmlformats.org/officeDocument/2006/math">
+                    <m:sSub>
+                      <m:sSubPr>
+                        <m:ctrlPr>
+                          <a:rPr lang="en-US" sz="1400" i="1">
+                            <a:latin typeface="Cambria Math" panose="02040503050406030204" pitchFamily="18" charset="0"/>
+                            <a:ea typeface="Roboto Light" panose="02000000000000000000" pitchFamily="2" charset="0"/>
+                          </a:rPr>
+                        </m:ctrlPr>
+                      </m:sSubPr>
+                      <m:e>
+                        <m:r>
+                          <a:rPr lang="en-US" sz="1400" b="1" i="1">
+                            <a:latin typeface="Cambria Math" panose="02040503050406030204" pitchFamily="18" charset="0"/>
+                            <a:ea typeface="Roboto Light" panose="02000000000000000000" pitchFamily="2" charset="0"/>
+                          </a:rPr>
+                          <m:t>𝒄</m:t>
+                        </m:r>
+                      </m:e>
+                      <m:sub>
+                        <m:r>
+                          <a:rPr lang="en-US" sz="1400" i="1">
+                            <a:latin typeface="Cambria Math" panose="02040503050406030204" pitchFamily="18" charset="0"/>
+                            <a:ea typeface="Roboto Light" panose="02000000000000000000" pitchFamily="2" charset="0"/>
+                          </a:rPr>
+                          <m:t>𝑖</m:t>
+                        </m:r>
+                      </m:sub>
+                    </m:sSub>
+                  </m:oMath>
+                </a14:m>
+                <a:endParaRPr lang="en-DE" sz="1400" dirty="0">
+                  <a:latin typeface="Roboto Light" panose="02000000000000000000" pitchFamily="2" charset="0"/>
+                  <a:ea typeface="Roboto Light" panose="02000000000000000000" pitchFamily="2" charset="0"/>
+                </a:endParaRPr>
+              </a:p>
+            </p:txBody>
+          </p:sp>
+        </mc:Choice>
+        <mc:Fallback xmlns="">
+          <p:sp>
+            <p:nvSpPr>
+              <p:cNvPr id="72" name="TextBox 71">
+                <a:extLst>
+                  <a:ext uri="{FF2B5EF4-FFF2-40B4-BE49-F238E27FC236}">
+                    <a16:creationId xmlns:a16="http://schemas.microsoft.com/office/drawing/2014/main" id="{FBF1CD65-1952-DE44-8543-DDADF542A1AE}"/>
+                  </a:ext>
+                </a:extLst>
+              </p:cNvPr>
+              <p:cNvSpPr txBox="1">
+                <a:spLocks noRot="1" noChangeAspect="1" noMove="1" noResize="1" noEditPoints="1" noAdjustHandles="1" noChangeArrowheads="1" noChangeShapeType="1" noTextEdit="1"/>
+              </p:cNvSpPr>
+              <p:nvPr/>
+            </p:nvSpPr>
+            <p:spPr>
+              <a:xfrm>
+                <a:off x="4097265" y="376745"/>
+                <a:ext cx="2621757" cy="759695"/>
+              </a:xfrm>
+              <a:prstGeom prst="rect">
+                <a:avLst/>
+              </a:prstGeom>
+              <a:blipFill>
+                <a:blip r:embed="rId7"/>
+                <a:stretch>
+                  <a:fillRect t="-1639" b="-8197"/>
+                </a:stretch>
+              </a:blipFill>
+            </p:spPr>
+            <p:txBody>
+              <a:bodyPr/>
+              <a:lstStyle/>
+              <a:p>
+                <a:r>
+                  <a:rPr lang="en-DE">
+                    <a:noFill/>
+                  </a:rPr>
+                  <a:t> </a:t>
+                </a:r>
+              </a:p>
+            </p:txBody>
+          </p:sp>
+        </mc:Fallback>
+      </mc:AlternateContent>
+      <p:graphicFrame>
+        <p:nvGraphicFramePr>
+          <p:cNvPr id="73" name="Table 4">
+            <a:extLst>
+              <a:ext uri="{FF2B5EF4-FFF2-40B4-BE49-F238E27FC236}">
+                <a16:creationId xmlns:a16="http://schemas.microsoft.com/office/drawing/2014/main" id="{F1651BE0-B48E-6441-B31C-026DF0ED10E4}"/>
+              </a:ext>
+            </a:extLst>
+          </p:cNvPr>
+          <p:cNvGraphicFramePr>
+            <a:graphicFrameLocks noGrp="1"/>
+          </p:cNvGraphicFramePr>
+          <p:nvPr/>
+        </p:nvGraphicFramePr>
+        <p:xfrm>
+          <a:off x="7333669" y="542126"/>
+          <a:ext cx="177922" cy="502677"/>
+        </p:xfrm>
+        <a:graphic>
+          <a:graphicData uri="http://schemas.openxmlformats.org/drawingml/2006/table">
+            <a:tbl>
+              <a:tblPr firstRow="1" bandRow="1">
+                <a:tableStyleId>{2D5ABB26-0587-4C30-8999-92F81FD0307C}</a:tableStyleId>
+              </a:tblPr>
+              <a:tblGrid>
+                <a:gridCol w="177922">
+                  <a:extLst>
+                    <a:ext uri="{9D8B030D-6E8A-4147-A177-3AD203B41FA5}">
+                      <a16:colId xmlns:a16="http://schemas.microsoft.com/office/drawing/2014/main" val="3350277845"/>
+                    </a:ext>
+                  </a:extLst>
+                </a:gridCol>
+              </a:tblGrid>
+              <a:tr h="167559">
+                <a:tc>
+                  <a:txBody>
+                    <a:bodyPr/>
+                    <a:lstStyle/>
+                    <a:p>
+                      <a:pPr algn="r"/>
+                      <a:endParaRPr lang="en-DE" sz="300" dirty="0">
+                        <a:latin typeface="Monaco" pitchFamily="2" charset="77"/>
+                        <a:ea typeface="Menlo" panose="020B0609030804020204" pitchFamily="49" charset="0"/>
+                        <a:cs typeface="Menlo" panose="020B0609030804020204" pitchFamily="49" charset="0"/>
+                      </a:endParaRPr>
+                    </a:p>
+                  </a:txBody>
+                  <a:tcPr marL="41316" marR="41316" marT="20658" marB="20658" anchor="ctr">
+                    <a:lnL w="19050" cap="flat" cmpd="sng" algn="ctr">
+                      <a:solidFill>
+                        <a:schemeClr val="accent2"/>
+                      </a:solidFill>
+                      <a:prstDash val="solid"/>
+                      <a:round/>
+                      <a:headEnd type="none" w="med" len="med"/>
+                      <a:tailEnd type="none" w="med" len="med"/>
+                    </a:lnL>
+                    <a:lnR w="19050" cap="flat" cmpd="sng" algn="ctr">
+                      <a:solidFill>
+                        <a:schemeClr val="accent2"/>
+                      </a:solidFill>
+                      <a:prstDash val="solid"/>
+                      <a:round/>
+                      <a:headEnd type="none" w="med" len="med"/>
+                      <a:tailEnd type="none" w="med" len="med"/>
+                    </a:lnR>
+                    <a:lnT w="19050" cap="flat" cmpd="sng" algn="ctr">
+                      <a:solidFill>
+                        <a:schemeClr val="accent2"/>
+                      </a:solidFill>
+                      <a:prstDash val="solid"/>
+                      <a:round/>
+                      <a:headEnd type="none" w="med" len="med"/>
+                      <a:tailEnd type="none" w="med" len="med"/>
+                    </a:lnT>
+                    <a:lnB w="19050" cap="flat" cmpd="sng" algn="ctr">
+                      <a:solidFill>
+                        <a:schemeClr val="accent2"/>
+                      </a:solidFill>
+                      <a:prstDash val="solid"/>
+                      <a:round/>
+                      <a:headEnd type="none" w="med" len="med"/>
+                      <a:tailEnd type="none" w="med" len="med"/>
+                    </a:lnB>
+                    <a:noFill/>
+                  </a:tcPr>
+                </a:tc>
+                <a:extLst>
+                  <a:ext uri="{0D108BD9-81ED-4DB2-BD59-A6C34878D82A}">
+                    <a16:rowId xmlns:a16="http://schemas.microsoft.com/office/drawing/2014/main" val="2976503498"/>
+                  </a:ext>
+                </a:extLst>
+              </a:tr>
+              <a:tr h="167559">
+                <a:tc>
+                  <a:txBody>
+                    <a:bodyPr/>
+                    <a:lstStyle/>
+                    <a:p>
+                      <a:pPr algn="r"/>
+                      <a:endParaRPr lang="en-DE" sz="300" dirty="0">
+                        <a:latin typeface="Monaco" pitchFamily="2" charset="77"/>
+                      </a:endParaRPr>
+                    </a:p>
+                  </a:txBody>
+                  <a:tcPr marL="41316" marR="41316" marT="20658" marB="20658" anchor="ctr">
+                    <a:lnL w="19050" cap="flat" cmpd="sng" algn="ctr">
+                      <a:solidFill>
+                        <a:schemeClr val="accent2"/>
+                      </a:solidFill>
+                      <a:prstDash val="solid"/>
+                      <a:round/>
+                      <a:headEnd type="none" w="med" len="med"/>
+                      <a:tailEnd type="none" w="med" len="med"/>
+                    </a:lnL>
+                    <a:lnR w="19050" cap="flat" cmpd="sng" algn="ctr">
+                      <a:solidFill>
+                        <a:schemeClr val="accent2"/>
+                      </a:solidFill>
+                      <a:prstDash val="solid"/>
+                      <a:round/>
+                      <a:headEnd type="none" w="med" len="med"/>
+                      <a:tailEnd type="none" w="med" len="med"/>
+                    </a:lnR>
+                    <a:lnT w="19050" cap="flat" cmpd="sng" algn="ctr">
+                      <a:solidFill>
+                        <a:schemeClr val="accent2"/>
+                      </a:solidFill>
+                      <a:prstDash val="solid"/>
+                      <a:round/>
+                      <a:headEnd type="none" w="med" len="med"/>
+                      <a:tailEnd type="none" w="med" len="med"/>
+                    </a:lnT>
+                    <a:lnB w="19050" cap="flat" cmpd="sng" algn="ctr">
+                      <a:solidFill>
+                        <a:schemeClr val="accent2"/>
+                      </a:solidFill>
+                      <a:prstDash val="solid"/>
+                      <a:round/>
+                      <a:headEnd type="none" w="med" len="med"/>
+                      <a:tailEnd type="none" w="med" len="med"/>
+                    </a:lnB>
+                    <a:noFill/>
+                  </a:tcPr>
+                </a:tc>
+                <a:extLst>
+                  <a:ext uri="{0D108BD9-81ED-4DB2-BD59-A6C34878D82A}">
+                    <a16:rowId xmlns:a16="http://schemas.microsoft.com/office/drawing/2014/main" val="3711746142"/>
+                  </a:ext>
+                </a:extLst>
+              </a:tr>
+              <a:tr h="167559">
+                <a:tc>
+                  <a:txBody>
+                    <a:bodyPr/>
+                    <a:lstStyle/>
+                    <a:p>
+                      <a:pPr algn="r"/>
+                      <a:endParaRPr lang="en-DE" sz="300" dirty="0">
+                        <a:latin typeface="Monaco" pitchFamily="2" charset="77"/>
+                      </a:endParaRPr>
+                    </a:p>
+                  </a:txBody>
+                  <a:tcPr marL="41316" marR="41316" marT="20658" marB="20658" anchor="ctr">
+                    <a:lnL w="19050" cap="flat" cmpd="sng" algn="ctr">
+                      <a:solidFill>
+                        <a:schemeClr val="accent2"/>
+                      </a:solidFill>
+                      <a:prstDash val="solid"/>
+                      <a:round/>
+                      <a:headEnd type="none" w="med" len="med"/>
+                      <a:tailEnd type="none" w="med" len="med"/>
+                    </a:lnL>
+                    <a:lnR w="19050" cap="flat" cmpd="sng" algn="ctr">
+                      <a:solidFill>
+                        <a:schemeClr val="accent2"/>
+                      </a:solidFill>
+                      <a:prstDash val="solid"/>
+                      <a:round/>
+                      <a:headEnd type="none" w="med" len="med"/>
+                      <a:tailEnd type="none" w="med" len="med"/>
+                    </a:lnR>
+                    <a:lnT w="19050" cap="flat" cmpd="sng" algn="ctr">
+                      <a:solidFill>
+                        <a:schemeClr val="accent2"/>
+                      </a:solidFill>
+                      <a:prstDash val="solid"/>
+                      <a:round/>
+                      <a:headEnd type="none" w="med" len="med"/>
+                      <a:tailEnd type="none" w="med" len="med"/>
+                    </a:lnT>
+                    <a:lnB w="19050" cap="flat" cmpd="sng" algn="ctr">
+                      <a:solidFill>
+                        <a:schemeClr val="accent2"/>
+                      </a:solidFill>
+                      <a:prstDash val="solid"/>
+                      <a:round/>
+                      <a:headEnd type="none" w="med" len="med"/>
+                      <a:tailEnd type="none" w="med" len="med"/>
+                    </a:lnB>
+                    <a:noFill/>
+                  </a:tcPr>
+                </a:tc>
+                <a:extLst>
+                  <a:ext uri="{0D108BD9-81ED-4DB2-BD59-A6C34878D82A}">
+                    <a16:rowId xmlns:a16="http://schemas.microsoft.com/office/drawing/2014/main" val="1090502963"/>
+                  </a:ext>
+                </a:extLst>
+              </a:tr>
+            </a:tbl>
+          </a:graphicData>
+        </a:graphic>
+      </p:graphicFrame>
+      <mc:AlternateContent xmlns:mc="http://schemas.openxmlformats.org/markup-compatibility/2006" xmlns:a14="http://schemas.microsoft.com/office/drawing/2010/main">
+        <mc:Choice Requires="a14">
+          <p:sp>
+            <p:nvSpPr>
+              <p:cNvPr id="74" name="TextBox 73">
+                <a:extLst>
+                  <a:ext uri="{FF2B5EF4-FFF2-40B4-BE49-F238E27FC236}">
+                    <a16:creationId xmlns:a16="http://schemas.microsoft.com/office/drawing/2014/main" id="{9E744588-5015-8B40-9275-BAC1B015AA8C}"/>
+                  </a:ext>
+                </a:extLst>
+              </p:cNvPr>
+              <p:cNvSpPr txBox="1"/>
+              <p:nvPr/>
+            </p:nvSpPr>
+            <p:spPr>
+              <a:xfrm>
+                <a:off x="7330999" y="270765"/>
+                <a:ext cx="210699" cy="215444"/>
+              </a:xfrm>
+              <a:prstGeom prst="rect">
+                <a:avLst/>
+              </a:prstGeom>
+              <a:noFill/>
+            </p:spPr>
+            <p:txBody>
+              <a:bodyPr wrap="none" lIns="0" tIns="0" rIns="0" bIns="0" rtlCol="0">
+                <a:spAutoFit/>
+              </a:bodyPr>
+              <a:lstStyle/>
+              <a:p>
+                <a:pPr/>
+                <a14:m>
+                  <m:oMathPara xmlns:m="http://schemas.openxmlformats.org/officeDocument/2006/math">
+                    <m:oMathParaPr>
+                      <m:jc m:val="centerGroup"/>
+                    </m:oMathParaPr>
+                    <m:oMath xmlns:m="http://schemas.openxmlformats.org/officeDocument/2006/math">
+                      <m:sSub>
+                        <m:sSubPr>
+                          <m:ctrlPr>
+                            <a:rPr lang="en-US" sz="1400" b="1" i="1">
+                              <a:latin typeface="Cambria Math" panose="02040503050406030204" pitchFamily="18" charset="0"/>
+                            </a:rPr>
+                          </m:ctrlPr>
+                        </m:sSubPr>
+                        <m:e>
+                          <m:r>
+                            <a:rPr lang="en-US" sz="1400" b="1" i="1">
+                              <a:latin typeface="Cambria Math" panose="02040503050406030204" pitchFamily="18" charset="0"/>
+                            </a:rPr>
+                            <m:t>𝜽</m:t>
+                          </m:r>
+                        </m:e>
+                        <m:sub>
+                          <m:r>
+                            <a:rPr lang="en-US" sz="1400" i="1">
+                              <a:latin typeface="Cambria Math" panose="02040503050406030204" pitchFamily="18" charset="0"/>
+                            </a:rPr>
+                            <m:t>𝑖</m:t>
+                          </m:r>
+                        </m:sub>
+                      </m:sSub>
+                    </m:oMath>
+                  </m:oMathPara>
+                </a14:m>
+                <a:endParaRPr lang="en-DE" sz="1400" b="1" dirty="0"/>
+              </a:p>
+            </p:txBody>
+          </p:sp>
+        </mc:Choice>
+        <mc:Fallback xmlns="">
+          <p:sp>
+            <p:nvSpPr>
+              <p:cNvPr id="74" name="TextBox 73">
+                <a:extLst>
+                  <a:ext uri="{FF2B5EF4-FFF2-40B4-BE49-F238E27FC236}">
+                    <a16:creationId xmlns:a16="http://schemas.microsoft.com/office/drawing/2014/main" id="{9E744588-5015-8B40-9275-BAC1B015AA8C}"/>
+                  </a:ext>
+                </a:extLst>
+              </p:cNvPr>
+              <p:cNvSpPr txBox="1">
+                <a:spLocks noRot="1" noChangeAspect="1" noMove="1" noResize="1" noEditPoints="1" noAdjustHandles="1" noChangeArrowheads="1" noChangeShapeType="1" noTextEdit="1"/>
+              </p:cNvSpPr>
+              <p:nvPr/>
+            </p:nvSpPr>
+            <p:spPr>
+              <a:xfrm>
+                <a:off x="7330999" y="270765"/>
+                <a:ext cx="210699" cy="215444"/>
+              </a:xfrm>
+              <a:prstGeom prst="rect">
+                <a:avLst/>
+              </a:prstGeom>
+              <a:blipFill>
+                <a:blip r:embed="rId8"/>
+                <a:stretch>
+                  <a:fillRect l="-23529" r="-5882" b="-11111"/>
+                </a:stretch>
+              </a:blipFill>
+            </p:spPr>
+            <p:txBody>
+              <a:bodyPr/>
+              <a:lstStyle/>
+              <a:p>
+                <a:r>
+                  <a:rPr lang="en-DE">
+                    <a:noFill/>
+                  </a:rPr>
+                  <a:t> </a:t>
+                </a:r>
+              </a:p>
+            </p:txBody>
+          </p:sp>
+        </mc:Fallback>
+      </mc:AlternateContent>
+      <mc:AlternateContent xmlns:mc="http://schemas.openxmlformats.org/markup-compatibility/2006" xmlns:a14="http://schemas.microsoft.com/office/drawing/2010/main">
+        <mc:Choice Requires="a14">
+          <p:sp>
+            <p:nvSpPr>
+              <p:cNvPr id="21" name="Rectangle 20">
+                <a:extLst>
+                  <a:ext uri="{FF2B5EF4-FFF2-40B4-BE49-F238E27FC236}">
+                    <a16:creationId xmlns:a16="http://schemas.microsoft.com/office/drawing/2014/main" id="{62888E4D-8613-8747-9678-479FA5EE7CE7}"/>
+                  </a:ext>
+                </a:extLst>
+              </p:cNvPr>
+              <p:cNvSpPr/>
+              <p:nvPr/>
+            </p:nvSpPr>
+            <p:spPr>
+              <a:xfrm>
+                <a:off x="7869756" y="1363705"/>
+                <a:ext cx="1553117" cy="307969"/>
+              </a:xfrm>
+              <a:prstGeom prst="rect">
+                <a:avLst/>
+              </a:prstGeom>
+            </p:spPr>
+            <p:txBody>
+              <a:bodyPr wrap="none">
+                <a:spAutoFit/>
+              </a:bodyPr>
+              <a:lstStyle/>
+              <a:p>
+                <a:pPr algn="ctr"/>
+                <a14:m>
+                  <m:oMath xmlns:m="http://schemas.openxmlformats.org/officeDocument/2006/math">
+                    <m:sSubSup>
+                      <m:sSubSupPr>
+                        <m:ctrlPr>
+                          <a:rPr lang="en-US" sz="1400" i="1">
+                            <a:latin typeface="Cambria Math" panose="02040503050406030204" pitchFamily="18" charset="0"/>
+                            <a:ea typeface="Roboto Light" panose="02000000000000000000" pitchFamily="2" charset="0"/>
+                          </a:rPr>
+                        </m:ctrlPr>
+                      </m:sSubSupPr>
+                      <m:e>
+                        <m:r>
+                          <a:rPr lang="en-US" sz="1400" i="1">
+                            <a:latin typeface="Cambria Math" panose="02040503050406030204" pitchFamily="18" charset="0"/>
+                            <a:ea typeface="Roboto Light" panose="02000000000000000000" pitchFamily="2" charset="0"/>
+                          </a:rPr>
+                          <m:t>𝑓</m:t>
+                        </m:r>
+                      </m:e>
+                      <m:sub>
+                        <m:r>
+                          <a:rPr lang="en-US" sz="1400" i="1">
+                            <a:latin typeface="Cambria Math" panose="02040503050406030204" pitchFamily="18" charset="0"/>
+                            <a:ea typeface="Roboto Light" panose="02000000000000000000" pitchFamily="2" charset="0"/>
+                          </a:rPr>
+                          <m:t>𝑖</m:t>
+                        </m:r>
+                      </m:sub>
+                      <m:sup>
+                        <m:r>
+                          <a:rPr lang="en-US" sz="1400" i="1">
+                            <a:latin typeface="Cambria Math" panose="02040503050406030204" pitchFamily="18" charset="0"/>
+                            <a:ea typeface="Roboto Light" panose="02000000000000000000" pitchFamily="2" charset="0"/>
+                          </a:rPr>
+                          <m:t>∗</m:t>
+                        </m:r>
+                      </m:sup>
+                    </m:sSubSup>
+                    <m:d>
+                      <m:dPr>
+                        <m:ctrlPr>
+                          <a:rPr lang="en-US" sz="1400" i="1">
+                            <a:latin typeface="Cambria Math" panose="02040503050406030204" pitchFamily="18" charset="0"/>
+                            <a:ea typeface="Roboto Light" panose="02000000000000000000" pitchFamily="2" charset="0"/>
+                          </a:rPr>
+                        </m:ctrlPr>
+                      </m:dPr>
+                      <m:e>
+                        <m:sSub>
+                          <m:sSubPr>
+                            <m:ctrlPr>
+                              <a:rPr lang="en-US" sz="1400" i="1">
+                                <a:latin typeface="Cambria Math" panose="02040503050406030204" pitchFamily="18" charset="0"/>
+                                <a:ea typeface="Roboto Light" panose="02000000000000000000" pitchFamily="2" charset="0"/>
+                              </a:rPr>
+                            </m:ctrlPr>
+                          </m:sSubPr>
+                          <m:e>
+                            <m:r>
+                              <a:rPr lang="en-US" sz="1400" i="1">
+                                <a:latin typeface="Cambria Math" panose="02040503050406030204" pitchFamily="18" charset="0"/>
+                                <a:ea typeface="Roboto Light" panose="02000000000000000000" pitchFamily="2" charset="0"/>
+                              </a:rPr>
+                              <m:t>𝜏</m:t>
+                            </m:r>
+                          </m:e>
+                          <m:sub>
+                            <m:r>
+                              <a:rPr lang="en-US" sz="1400" i="1">
+                                <a:latin typeface="Cambria Math" panose="02040503050406030204" pitchFamily="18" charset="0"/>
+                                <a:ea typeface="Roboto Light" panose="02000000000000000000" pitchFamily="2" charset="0"/>
+                              </a:rPr>
+                              <m:t>𝑖</m:t>
+                            </m:r>
+                          </m:sub>
+                        </m:sSub>
+                      </m:e>
+                    </m:d>
+                    <m:r>
+                      <a:rPr lang="en-US" sz="1400" i="1">
+                        <a:latin typeface="Cambria Math" panose="02040503050406030204" pitchFamily="18" charset="0"/>
+                        <a:ea typeface="Roboto Light" panose="02000000000000000000" pitchFamily="2" charset="0"/>
+                      </a:rPr>
+                      <m:t>=</m:t>
+                    </m:r>
+                    <m:r>
+                      <a:rPr lang="en-US" sz="1400" i="1">
+                        <a:latin typeface="Cambria Math" panose="02040503050406030204" pitchFamily="18" charset="0"/>
+                        <a:ea typeface="Roboto Light" panose="02000000000000000000" pitchFamily="2" charset="0"/>
+                      </a:rPr>
+                      <m:t>𝑓</m:t>
+                    </m:r>
+                    <m:d>
+                      <m:dPr>
+                        <m:ctrlPr>
+                          <a:rPr lang="en-US" sz="1400" i="1">
+                            <a:latin typeface="Cambria Math" panose="02040503050406030204" pitchFamily="18" charset="0"/>
+                            <a:ea typeface="Roboto Light" panose="02000000000000000000" pitchFamily="2" charset="0"/>
+                          </a:rPr>
+                        </m:ctrlPr>
+                      </m:dPr>
+                      <m:e>
+                        <m:sSub>
+                          <m:sSubPr>
+                            <m:ctrlPr>
+                              <a:rPr lang="en-US" sz="1400" i="1">
+                                <a:latin typeface="Cambria Math" panose="02040503050406030204" pitchFamily="18" charset="0"/>
+                                <a:ea typeface="Roboto Light" panose="02000000000000000000" pitchFamily="2" charset="0"/>
+                              </a:rPr>
+                            </m:ctrlPr>
+                          </m:sSubPr>
+                          <m:e>
+                            <m:r>
+                              <a:rPr lang="en-US" sz="1400" i="1">
+                                <a:latin typeface="Cambria Math" panose="02040503050406030204" pitchFamily="18" charset="0"/>
+                                <a:ea typeface="Roboto Light" panose="02000000000000000000" pitchFamily="2" charset="0"/>
+                              </a:rPr>
+                              <m:t>𝜏</m:t>
+                            </m:r>
+                          </m:e>
+                          <m:sub>
+                            <m:r>
+                              <a:rPr lang="en-US" sz="1400" i="1">
+                                <a:latin typeface="Cambria Math" panose="02040503050406030204" pitchFamily="18" charset="0"/>
+                                <a:ea typeface="Roboto Light" panose="02000000000000000000" pitchFamily="2" charset="0"/>
+                              </a:rPr>
+                              <m:t>𝑖</m:t>
+                            </m:r>
+                          </m:sub>
+                        </m:sSub>
+                      </m:e>
+                      <m:e>
+                        <m:sSub>
+                          <m:sSubPr>
+                            <m:ctrlPr>
+                              <a:rPr lang="en-US" sz="1400" i="1">
+                                <a:latin typeface="Cambria Math" panose="02040503050406030204" pitchFamily="18" charset="0"/>
+                                <a:ea typeface="Roboto Light" panose="02000000000000000000" pitchFamily="2" charset="0"/>
+                              </a:rPr>
+                            </m:ctrlPr>
+                          </m:sSubPr>
+                          <m:e>
+                            <m:r>
+                              <a:rPr lang="en-US" sz="1400" b="1" i="1">
+                                <a:latin typeface="Cambria Math" panose="02040503050406030204" pitchFamily="18" charset="0"/>
+                                <a:ea typeface="Roboto Light" panose="02000000000000000000" pitchFamily="2" charset="0"/>
+                              </a:rPr>
+                              <m:t>𝜽</m:t>
+                            </m:r>
+                          </m:e>
+                          <m:sub>
+                            <m:r>
+                              <a:rPr lang="en-US" sz="1400" i="1">
+                                <a:latin typeface="Cambria Math" panose="02040503050406030204" pitchFamily="18" charset="0"/>
+                                <a:ea typeface="Roboto Light" panose="02000000000000000000" pitchFamily="2" charset="0"/>
+                              </a:rPr>
+                              <m:t>𝑖</m:t>
+                            </m:r>
+                          </m:sub>
+                        </m:sSub>
+                      </m:e>
+                    </m:d>
+                  </m:oMath>
+                </a14:m>
+                <a:r>
+                  <a:rPr lang="en-DE" sz="1400" dirty="0">
+                    <a:latin typeface="Roboto Light" panose="02000000000000000000" pitchFamily="2" charset="0"/>
+                    <a:ea typeface="Roboto Light" panose="02000000000000000000" pitchFamily="2" charset="0"/>
+                  </a:rPr>
+                  <a:t> </a:t>
+                </a:r>
+              </a:p>
+            </p:txBody>
+          </p:sp>
+        </mc:Choice>
+        <mc:Fallback xmlns="">
+          <p:sp>
+            <p:nvSpPr>
+              <p:cNvPr id="21" name="Rectangle 20">
+                <a:extLst>
+                  <a:ext uri="{FF2B5EF4-FFF2-40B4-BE49-F238E27FC236}">
+                    <a16:creationId xmlns:a16="http://schemas.microsoft.com/office/drawing/2014/main" id="{62888E4D-8613-8747-9678-479FA5EE7CE7}"/>
+                  </a:ext>
+                </a:extLst>
+              </p:cNvPr>
+              <p:cNvSpPr>
+                <a:spLocks noRot="1" noChangeAspect="1" noMove="1" noResize="1" noEditPoints="1" noAdjustHandles="1" noChangeArrowheads="1" noChangeShapeType="1" noTextEdit="1"/>
+              </p:cNvSpPr>
+              <p:nvPr/>
+            </p:nvSpPr>
+            <p:spPr>
+              <a:xfrm>
+                <a:off x="7869756" y="1363705"/>
+                <a:ext cx="1553117" cy="307969"/>
+              </a:xfrm>
+              <a:prstGeom prst="rect">
+                <a:avLst/>
+              </a:prstGeom>
+              <a:blipFill>
+                <a:blip r:embed="rId9"/>
+                <a:stretch>
+                  <a:fillRect b="-8000"/>
+                </a:stretch>
+              </a:blipFill>
+            </p:spPr>
+            <p:txBody>
+              <a:bodyPr/>
+              <a:lstStyle/>
+              <a:p>
+                <a:r>
+                  <a:rPr lang="en-DE">
+                    <a:noFill/>
+                  </a:rPr>
+                  <a:t> </a:t>
+                </a:r>
+              </a:p>
+            </p:txBody>
+          </p:sp>
+        </mc:Fallback>
+      </mc:AlternateContent>
+      <p:cxnSp>
+        <p:nvCxnSpPr>
+          <p:cNvPr id="75" name="Straight Arrow Connector 74">
+            <a:extLst>
+              <a:ext uri="{FF2B5EF4-FFF2-40B4-BE49-F238E27FC236}">
+                <a16:creationId xmlns:a16="http://schemas.microsoft.com/office/drawing/2014/main" id="{B1CE7E13-171E-1341-A75B-2AC37B852F6A}"/>
+              </a:ext>
+            </a:extLst>
+          </p:cNvPr>
+          <p:cNvCxnSpPr>
+            <a:cxnSpLocks/>
+          </p:cNvCxnSpPr>
+          <p:nvPr/>
+        </p:nvCxnSpPr>
+        <p:spPr>
+          <a:xfrm>
+            <a:off x="7511591" y="774933"/>
+            <a:ext cx="1571204" cy="0"/>
+          </a:xfrm>
+          <a:prstGeom prst="straightConnector1">
+            <a:avLst/>
+          </a:prstGeom>
+          <a:ln w="19050">
+            <a:solidFill>
+              <a:schemeClr val="accent2"/>
+            </a:solidFill>
+            <a:tailEnd type="none" w="med" len="med"/>
+          </a:ln>
+        </p:spPr>
+        <p:style>
+          <a:lnRef idx="1">
+            <a:schemeClr val="accent1"/>
+          </a:lnRef>
+          <a:fillRef idx="0">
+            <a:schemeClr val="accent1"/>
+          </a:fillRef>
+          <a:effectRef idx="0">
+            <a:schemeClr val="accent1"/>
+          </a:effectRef>
+          <a:fontRef idx="minor">
+            <a:schemeClr val="tx1"/>
+          </a:fontRef>
+        </p:style>
+      </p:cxnSp>
+      <p:cxnSp>
+        <p:nvCxnSpPr>
+          <p:cNvPr id="77" name="Straight Arrow Connector 76">
+            <a:extLst>
+              <a:ext uri="{FF2B5EF4-FFF2-40B4-BE49-F238E27FC236}">
+                <a16:creationId xmlns:a16="http://schemas.microsoft.com/office/drawing/2014/main" id="{D012A893-BE30-674D-9230-23E2CEA5127D}"/>
+              </a:ext>
+            </a:extLst>
+          </p:cNvPr>
+          <p:cNvCxnSpPr>
+            <a:cxnSpLocks/>
+          </p:cNvCxnSpPr>
+          <p:nvPr/>
+        </p:nvCxnSpPr>
+        <p:spPr>
+          <a:xfrm>
+            <a:off x="9082795" y="778805"/>
+            <a:ext cx="0" cy="633916"/>
+          </a:xfrm>
+          <a:prstGeom prst="straightConnector1">
+            <a:avLst/>
+          </a:prstGeom>
+          <a:ln w="19050">
+            <a:solidFill>
+              <a:schemeClr val="accent2"/>
+            </a:solidFill>
+            <a:tailEnd type="triangle" w="med" len="med"/>
+          </a:ln>
+        </p:spPr>
+        <p:style>
+          <a:lnRef idx="1">
+            <a:schemeClr val="accent1"/>
+          </a:lnRef>
+          <a:fillRef idx="0">
+            <a:schemeClr val="accent1"/>
+          </a:fillRef>
+          <a:effectRef idx="0">
+            <a:schemeClr val="accent1"/>
+          </a:effectRef>
+          <a:fontRef idx="minor">
+            <a:schemeClr val="tx1"/>
+          </a:fontRef>
+        </p:style>
+      </p:cxnSp>
+      <mc:AlternateContent xmlns:mc="http://schemas.openxmlformats.org/markup-compatibility/2006" xmlns:a14="http://schemas.microsoft.com/office/drawing/2010/main">
+        <mc:Choice Requires="a14">
+          <p:sp>
+            <p:nvSpPr>
+              <p:cNvPr id="78" name="TextBox 77">
+                <a:extLst>
+                  <a:ext uri="{FF2B5EF4-FFF2-40B4-BE49-F238E27FC236}">
+                    <a16:creationId xmlns:a16="http://schemas.microsoft.com/office/drawing/2014/main" id="{6C8C6FB7-A17A-0D43-BCB0-CAA8E7C116F2}"/>
+                  </a:ext>
+                </a:extLst>
+              </p:cNvPr>
+              <p:cNvSpPr txBox="1"/>
+              <p:nvPr/>
+            </p:nvSpPr>
+            <p:spPr>
+              <a:xfrm>
+                <a:off x="4337415" y="2277725"/>
+                <a:ext cx="186590" cy="215444"/>
+              </a:xfrm>
+              <a:prstGeom prst="rect">
+                <a:avLst/>
+              </a:prstGeom>
+              <a:noFill/>
+            </p:spPr>
+            <p:txBody>
+              <a:bodyPr wrap="none" lIns="0" tIns="0" rIns="0" bIns="0" rtlCol="0">
+                <a:spAutoFit/>
+              </a:bodyPr>
+              <a:lstStyle/>
+              <a:p>
+                <a:pPr/>
+                <a14:m>
+                  <m:oMathPara xmlns:m="http://schemas.openxmlformats.org/officeDocument/2006/math">
+                    <m:oMathParaPr>
+                      <m:jc m:val="centerGroup"/>
+                    </m:oMathParaPr>
+                    <m:oMath xmlns:m="http://schemas.openxmlformats.org/officeDocument/2006/math">
+                      <m:sSub>
+                        <m:sSubPr>
+                          <m:ctrlPr>
+                            <a:rPr lang="en-US" sz="1400" i="1">
+                              <a:latin typeface="Cambria Math" panose="02040503050406030204" pitchFamily="18" charset="0"/>
+                            </a:rPr>
+                          </m:ctrlPr>
+                        </m:sSubPr>
+                        <m:e>
+                          <m:r>
+                            <a:rPr lang="en-US" sz="1400" i="1">
+                              <a:latin typeface="Cambria Math" panose="02040503050406030204" pitchFamily="18" charset="0"/>
+                            </a:rPr>
+                            <m:t>𝑡</m:t>
+                          </m:r>
+                        </m:e>
+                        <m:sub>
+                          <m:r>
+                            <a:rPr lang="en-US" sz="1400" i="1">
+                              <a:latin typeface="Cambria Math" panose="02040503050406030204" pitchFamily="18" charset="0"/>
+                            </a:rPr>
+                            <m:t>1</m:t>
+                          </m:r>
+                        </m:sub>
+                      </m:sSub>
+                    </m:oMath>
+                  </m:oMathPara>
+                </a14:m>
+                <a:endParaRPr lang="en-DE" sz="1400" dirty="0"/>
+              </a:p>
+            </p:txBody>
+          </p:sp>
+        </mc:Choice>
+        <mc:Fallback xmlns="">
+          <p:sp>
+            <p:nvSpPr>
+              <p:cNvPr id="78" name="TextBox 77">
+                <a:extLst>
+                  <a:ext uri="{FF2B5EF4-FFF2-40B4-BE49-F238E27FC236}">
+                    <a16:creationId xmlns:a16="http://schemas.microsoft.com/office/drawing/2014/main" id="{6C8C6FB7-A17A-0D43-BCB0-CAA8E7C116F2}"/>
+                  </a:ext>
+                </a:extLst>
+              </p:cNvPr>
+              <p:cNvSpPr txBox="1">
+                <a:spLocks noRot="1" noChangeAspect="1" noMove="1" noResize="1" noEditPoints="1" noAdjustHandles="1" noChangeArrowheads="1" noChangeShapeType="1" noTextEdit="1"/>
+              </p:cNvSpPr>
+              <p:nvPr/>
+            </p:nvSpPr>
+            <p:spPr>
+              <a:xfrm>
+                <a:off x="4337415" y="2277725"/>
+                <a:ext cx="186590" cy="215444"/>
+              </a:xfrm>
+              <a:prstGeom prst="rect">
+                <a:avLst/>
+              </a:prstGeom>
+              <a:blipFill>
+                <a:blip r:embed="rId10"/>
+                <a:stretch>
+                  <a:fillRect l="-18750" r="-6250" b="-11111"/>
+                </a:stretch>
+              </a:blipFill>
+            </p:spPr>
+            <p:txBody>
+              <a:bodyPr/>
+              <a:lstStyle/>
+              <a:p>
+                <a:r>
+                  <a:rPr lang="en-DE">
+                    <a:noFill/>
+                  </a:rPr>
+                  <a:t> </a:t>
+                </a:r>
+              </a:p>
+            </p:txBody>
+          </p:sp>
+        </mc:Fallback>
+      </mc:AlternateContent>
+      <mc:AlternateContent xmlns:mc="http://schemas.openxmlformats.org/markup-compatibility/2006" xmlns:a14="http://schemas.microsoft.com/office/drawing/2010/main">
+        <mc:Choice Requires="a14">
+          <p:sp>
+            <p:nvSpPr>
+              <p:cNvPr id="79" name="TextBox 78">
+                <a:extLst>
+                  <a:ext uri="{FF2B5EF4-FFF2-40B4-BE49-F238E27FC236}">
+                    <a16:creationId xmlns:a16="http://schemas.microsoft.com/office/drawing/2014/main" id="{46298C39-A554-834C-AEE2-BB4120D16BB0}"/>
+                  </a:ext>
+                </a:extLst>
+              </p:cNvPr>
+              <p:cNvSpPr txBox="1"/>
+              <p:nvPr/>
+            </p:nvSpPr>
+            <p:spPr>
+              <a:xfrm>
+                <a:off x="5393285" y="2285746"/>
+                <a:ext cx="190757" cy="215444"/>
+              </a:xfrm>
+              <a:prstGeom prst="rect">
+                <a:avLst/>
+              </a:prstGeom>
+              <a:noFill/>
+            </p:spPr>
+            <p:txBody>
+              <a:bodyPr wrap="none" lIns="0" tIns="0" rIns="0" bIns="0" rtlCol="0">
+                <a:spAutoFit/>
+              </a:bodyPr>
+              <a:lstStyle/>
+              <a:p>
+                <a:pPr/>
+                <a14:m>
+                  <m:oMathPara xmlns:m="http://schemas.openxmlformats.org/officeDocument/2006/math">
+                    <m:oMathParaPr>
+                      <m:jc m:val="centerGroup"/>
+                    </m:oMathParaPr>
+                    <m:oMath xmlns:m="http://schemas.openxmlformats.org/officeDocument/2006/math">
+                      <m:sSub>
+                        <m:sSubPr>
+                          <m:ctrlPr>
+                            <a:rPr lang="en-US" sz="1400" i="1">
+                              <a:latin typeface="Cambria Math" panose="02040503050406030204" pitchFamily="18" charset="0"/>
+                            </a:rPr>
+                          </m:ctrlPr>
+                        </m:sSubPr>
+                        <m:e>
+                          <m:r>
+                            <a:rPr lang="en-US" sz="1400" i="1">
+                              <a:latin typeface="Cambria Math" panose="02040503050406030204" pitchFamily="18" charset="0"/>
+                            </a:rPr>
+                            <m:t>𝑡</m:t>
+                          </m:r>
+                        </m:e>
+                        <m:sub>
+                          <m:r>
+                            <a:rPr lang="en-US" sz="1400" i="1">
+                              <a:latin typeface="Cambria Math" panose="02040503050406030204" pitchFamily="18" charset="0"/>
+                            </a:rPr>
+                            <m:t>2</m:t>
+                          </m:r>
+                        </m:sub>
+                      </m:sSub>
+                    </m:oMath>
+                  </m:oMathPara>
+                </a14:m>
+                <a:endParaRPr lang="en-DE" sz="1400" dirty="0"/>
+              </a:p>
+            </p:txBody>
+          </p:sp>
+        </mc:Choice>
+        <mc:Fallback xmlns="">
+          <p:sp>
+            <p:nvSpPr>
+              <p:cNvPr id="79" name="TextBox 78">
+                <a:extLst>
+                  <a:ext uri="{FF2B5EF4-FFF2-40B4-BE49-F238E27FC236}">
+                    <a16:creationId xmlns:a16="http://schemas.microsoft.com/office/drawing/2014/main" id="{46298C39-A554-834C-AEE2-BB4120D16BB0}"/>
+                  </a:ext>
+                </a:extLst>
+              </p:cNvPr>
+              <p:cNvSpPr txBox="1">
+                <a:spLocks noRot="1" noChangeAspect="1" noMove="1" noResize="1" noEditPoints="1" noAdjustHandles="1" noChangeArrowheads="1" noChangeShapeType="1" noTextEdit="1"/>
+              </p:cNvSpPr>
+              <p:nvPr/>
+            </p:nvSpPr>
+            <p:spPr>
+              <a:xfrm>
+                <a:off x="5393285" y="2285746"/>
+                <a:ext cx="190757" cy="215444"/>
+              </a:xfrm>
+              <a:prstGeom prst="rect">
+                <a:avLst/>
+              </a:prstGeom>
+              <a:blipFill>
+                <a:blip r:embed="rId11"/>
+                <a:stretch>
+                  <a:fillRect l="-18750" r="-6250" b="-17647"/>
+                </a:stretch>
+              </a:blipFill>
+            </p:spPr>
+            <p:txBody>
+              <a:bodyPr/>
+              <a:lstStyle/>
+              <a:p>
+                <a:r>
+                  <a:rPr lang="en-DE">
+                    <a:noFill/>
+                  </a:rPr>
+                  <a:t> </a:t>
+                </a:r>
+              </a:p>
+            </p:txBody>
+          </p:sp>
+        </mc:Fallback>
+      </mc:AlternateContent>
+      <mc:AlternateContent xmlns:mc="http://schemas.openxmlformats.org/markup-compatibility/2006" xmlns:a14="http://schemas.microsoft.com/office/drawing/2010/main">
+        <mc:Choice Requires="a14">
+          <p:sp>
+            <p:nvSpPr>
+              <p:cNvPr id="80" name="TextBox 79">
+                <a:extLst>
+                  <a:ext uri="{FF2B5EF4-FFF2-40B4-BE49-F238E27FC236}">
+                    <a16:creationId xmlns:a16="http://schemas.microsoft.com/office/drawing/2014/main" id="{A89F9492-5931-1041-B5B2-C3BF6B05D8D0}"/>
+                  </a:ext>
+                </a:extLst>
+              </p:cNvPr>
+              <p:cNvSpPr txBox="1"/>
+              <p:nvPr/>
+            </p:nvSpPr>
+            <p:spPr>
+              <a:xfrm>
+                <a:off x="6695196" y="2285746"/>
+                <a:ext cx="336311" cy="215444"/>
+              </a:xfrm>
+              <a:prstGeom prst="rect">
+                <a:avLst/>
+              </a:prstGeom>
+              <a:noFill/>
+            </p:spPr>
+            <p:txBody>
+              <a:bodyPr wrap="none" lIns="0" tIns="0" rIns="0" bIns="0" rtlCol="0">
+                <a:spAutoFit/>
+              </a:bodyPr>
+              <a:lstStyle/>
+              <a:p>
+                <a:pPr/>
+                <a14:m>
+                  <m:oMathPara xmlns:m="http://schemas.openxmlformats.org/officeDocument/2006/math">
+                    <m:oMathParaPr>
+                      <m:jc m:val="centerGroup"/>
+                    </m:oMathParaPr>
+                    <m:oMath xmlns:m="http://schemas.openxmlformats.org/officeDocument/2006/math">
+                      <m:sSub>
+                        <m:sSubPr>
+                          <m:ctrlPr>
+                            <a:rPr lang="en-US" sz="1400" i="1">
+                              <a:latin typeface="Cambria Math" panose="02040503050406030204" pitchFamily="18" charset="0"/>
+                            </a:rPr>
+                          </m:ctrlPr>
+                        </m:sSubPr>
+                        <m:e>
+                          <m:r>
+                            <a:rPr lang="en-US" sz="1400" i="1">
+                              <a:latin typeface="Cambria Math" panose="02040503050406030204" pitchFamily="18" charset="0"/>
+                            </a:rPr>
+                            <m:t>𝑡</m:t>
+                          </m:r>
+                        </m:e>
+                        <m:sub>
+                          <m:r>
+                            <a:rPr lang="en-US" sz="1400" i="1">
+                              <a:latin typeface="Cambria Math" panose="02040503050406030204" pitchFamily="18" charset="0"/>
+                            </a:rPr>
+                            <m:t>𝑖</m:t>
+                          </m:r>
+                          <m:r>
+                            <a:rPr lang="en-US" sz="1400" i="1">
+                              <a:latin typeface="Cambria Math" panose="02040503050406030204" pitchFamily="18" charset="0"/>
+                            </a:rPr>
+                            <m:t>−1</m:t>
+                          </m:r>
+                        </m:sub>
+                      </m:sSub>
+                    </m:oMath>
+                  </m:oMathPara>
+                </a14:m>
+                <a:endParaRPr lang="en-DE" sz="1400" dirty="0"/>
+              </a:p>
+            </p:txBody>
+          </p:sp>
+        </mc:Choice>
+        <mc:Fallback xmlns="">
+          <p:sp>
+            <p:nvSpPr>
+              <p:cNvPr id="80" name="TextBox 79">
+                <a:extLst>
+                  <a:ext uri="{FF2B5EF4-FFF2-40B4-BE49-F238E27FC236}">
+                    <a16:creationId xmlns:a16="http://schemas.microsoft.com/office/drawing/2014/main" id="{A89F9492-5931-1041-B5B2-C3BF6B05D8D0}"/>
+                  </a:ext>
+                </a:extLst>
+              </p:cNvPr>
+              <p:cNvSpPr txBox="1">
+                <a:spLocks noRot="1" noChangeAspect="1" noMove="1" noResize="1" noEditPoints="1" noAdjustHandles="1" noChangeArrowheads="1" noChangeShapeType="1" noTextEdit="1"/>
+              </p:cNvSpPr>
+              <p:nvPr/>
+            </p:nvSpPr>
+            <p:spPr>
+              <a:xfrm>
+                <a:off x="6695196" y="2285746"/>
+                <a:ext cx="336311" cy="215444"/>
+              </a:xfrm>
+              <a:prstGeom prst="rect">
+                <a:avLst/>
+              </a:prstGeom>
+              <a:blipFill>
+                <a:blip r:embed="rId12"/>
+                <a:stretch>
+                  <a:fillRect l="-11111" r="-3704" b="-17647"/>
+                </a:stretch>
+              </a:blipFill>
+            </p:spPr>
+            <p:txBody>
+              <a:bodyPr/>
+              <a:lstStyle/>
+              <a:p>
+                <a:r>
+                  <a:rPr lang="en-DE">
+                    <a:noFill/>
+                  </a:rPr>
+                  <a:t> </a:t>
+                </a:r>
+              </a:p>
+            </p:txBody>
+          </p:sp>
+        </mc:Fallback>
+      </mc:AlternateContent>
+      <mc:AlternateContent xmlns:mc="http://schemas.openxmlformats.org/markup-compatibility/2006" xmlns:a14="http://schemas.microsoft.com/office/drawing/2010/main">
+        <mc:Choice Requires="a14">
+          <p:sp>
+            <p:nvSpPr>
+              <p:cNvPr id="81" name="TextBox 80">
+                <a:extLst>
+                  <a:ext uri="{FF2B5EF4-FFF2-40B4-BE49-F238E27FC236}">
+                    <a16:creationId xmlns:a16="http://schemas.microsoft.com/office/drawing/2014/main" id="{6CA5F2B1-7626-3643-9417-5F95FB699380}"/>
+                  </a:ext>
+                </a:extLst>
+              </p:cNvPr>
+              <p:cNvSpPr txBox="1"/>
+              <p:nvPr/>
+            </p:nvSpPr>
+            <p:spPr>
+              <a:xfrm>
+                <a:off x="3519907" y="2285746"/>
+                <a:ext cx="139461" cy="215444"/>
+              </a:xfrm>
+              <a:prstGeom prst="rect">
+                <a:avLst/>
+              </a:prstGeom>
+              <a:noFill/>
+            </p:spPr>
+            <p:txBody>
+              <a:bodyPr wrap="none" lIns="0" tIns="0" rIns="0" bIns="0" rtlCol="0">
+                <a:spAutoFit/>
+              </a:bodyPr>
+              <a:lstStyle/>
+              <a:p>
+                <a:pPr/>
+                <a14:m>
+                  <m:oMathPara xmlns:m="http://schemas.openxmlformats.org/officeDocument/2006/math">
+                    <m:oMathParaPr>
+                      <m:jc m:val="centerGroup"/>
+                    </m:oMathParaPr>
+                    <m:oMath xmlns:m="http://schemas.openxmlformats.org/officeDocument/2006/math">
+                      <m:r>
+                        <a:rPr lang="en-US" sz="1400" i="1">
+                          <a:latin typeface="Cambria Math" panose="02040503050406030204" pitchFamily="18" charset="0"/>
+                        </a:rPr>
+                        <m:t>0</m:t>
+                      </m:r>
+                    </m:oMath>
+                  </m:oMathPara>
+                </a14:m>
+                <a:endParaRPr lang="en-DE" sz="1400" dirty="0"/>
+              </a:p>
+            </p:txBody>
+          </p:sp>
+        </mc:Choice>
+        <mc:Fallback xmlns="">
+          <p:sp>
+            <p:nvSpPr>
+              <p:cNvPr id="81" name="TextBox 80">
+                <a:extLst>
+                  <a:ext uri="{FF2B5EF4-FFF2-40B4-BE49-F238E27FC236}">
+                    <a16:creationId xmlns:a16="http://schemas.microsoft.com/office/drawing/2014/main" id="{6CA5F2B1-7626-3643-9417-5F95FB699380}"/>
+                  </a:ext>
+                </a:extLst>
+              </p:cNvPr>
+              <p:cNvSpPr txBox="1">
+                <a:spLocks noRot="1" noChangeAspect="1" noMove="1" noResize="1" noEditPoints="1" noAdjustHandles="1" noChangeArrowheads="1" noChangeShapeType="1" noTextEdit="1"/>
+              </p:cNvSpPr>
+              <p:nvPr/>
+            </p:nvSpPr>
+            <p:spPr>
+              <a:xfrm>
+                <a:off x="3519907" y="2285746"/>
+                <a:ext cx="139461" cy="215444"/>
+              </a:xfrm>
+              <a:prstGeom prst="rect">
+                <a:avLst/>
+              </a:prstGeom>
+              <a:blipFill>
+                <a:blip r:embed="rId13"/>
+                <a:stretch>
+                  <a:fillRect l="-16667" r="-33333" b="-5882"/>
+                </a:stretch>
+              </a:blipFill>
+            </p:spPr>
+            <p:txBody>
+              <a:bodyPr/>
+              <a:lstStyle/>
+              <a:p>
+                <a:r>
+                  <a:rPr lang="en-DE">
+                    <a:noFill/>
+                  </a:rPr>
+                  <a:t> </a:t>
+                </a:r>
+              </a:p>
+            </p:txBody>
+          </p:sp>
+        </mc:Fallback>
+      </mc:AlternateContent>
+      <mc:AlternateContent xmlns:mc="http://schemas.openxmlformats.org/markup-compatibility/2006" xmlns:a14="http://schemas.microsoft.com/office/drawing/2010/main">
+        <mc:Choice Requires="a14">
+          <p:sp>
+            <p:nvSpPr>
+              <p:cNvPr id="82" name="TextBox 81">
+                <a:extLst>
+                  <a:ext uri="{FF2B5EF4-FFF2-40B4-BE49-F238E27FC236}">
+                    <a16:creationId xmlns:a16="http://schemas.microsoft.com/office/drawing/2014/main" id="{02B61FB2-6787-5345-ADB7-404E5984FB69}"/>
+                  </a:ext>
+                </a:extLst>
+              </p:cNvPr>
+              <p:cNvSpPr txBox="1"/>
+              <p:nvPr/>
+            </p:nvSpPr>
+            <p:spPr>
+              <a:xfrm>
+                <a:off x="9417560" y="2285746"/>
+                <a:ext cx="151452" cy="215444"/>
+              </a:xfrm>
+              <a:prstGeom prst="rect">
+                <a:avLst/>
+              </a:prstGeom>
+              <a:noFill/>
+            </p:spPr>
+            <p:txBody>
+              <a:bodyPr wrap="none" lIns="0" tIns="0" rIns="0" bIns="0" rtlCol="0">
+                <a:spAutoFit/>
+              </a:bodyPr>
+              <a:lstStyle/>
+              <a:p>
+                <a:pPr/>
+                <a14:m>
+                  <m:oMathPara xmlns:m="http://schemas.openxmlformats.org/officeDocument/2006/math">
+                    <m:oMathParaPr>
+                      <m:jc m:val="centerGroup"/>
+                    </m:oMathParaPr>
+                    <m:oMath xmlns:m="http://schemas.openxmlformats.org/officeDocument/2006/math">
+                      <m:r>
+                        <a:rPr lang="en-US" sz="1400" i="1">
+                          <a:latin typeface="Cambria Math" panose="02040503050406030204" pitchFamily="18" charset="0"/>
+                        </a:rPr>
+                        <m:t>𝑇</m:t>
+                      </m:r>
+                    </m:oMath>
+                  </m:oMathPara>
+                </a14:m>
+                <a:endParaRPr lang="en-DE" sz="1400" dirty="0"/>
+              </a:p>
+            </p:txBody>
+          </p:sp>
+        </mc:Choice>
+        <mc:Fallback xmlns="">
+          <p:sp>
+            <p:nvSpPr>
+              <p:cNvPr id="82" name="TextBox 81">
+                <a:extLst>
+                  <a:ext uri="{FF2B5EF4-FFF2-40B4-BE49-F238E27FC236}">
+                    <a16:creationId xmlns:a16="http://schemas.microsoft.com/office/drawing/2014/main" id="{02B61FB2-6787-5345-ADB7-404E5984FB69}"/>
+                  </a:ext>
+                </a:extLst>
+              </p:cNvPr>
+              <p:cNvSpPr txBox="1">
+                <a:spLocks noRot="1" noChangeAspect="1" noMove="1" noResize="1" noEditPoints="1" noAdjustHandles="1" noChangeArrowheads="1" noChangeShapeType="1" noTextEdit="1"/>
+              </p:cNvSpPr>
+              <p:nvPr/>
+            </p:nvSpPr>
+            <p:spPr>
+              <a:xfrm>
+                <a:off x="9417560" y="2285746"/>
+                <a:ext cx="151452" cy="215444"/>
+              </a:xfrm>
+              <a:prstGeom prst="rect">
+                <a:avLst/>
+              </a:prstGeom>
+              <a:blipFill>
+                <a:blip r:embed="rId14"/>
+                <a:stretch>
+                  <a:fillRect l="-23077" r="-23077" b="-5882"/>
+                </a:stretch>
+              </a:blipFill>
+            </p:spPr>
+            <p:txBody>
+              <a:bodyPr/>
+              <a:lstStyle/>
+              <a:p>
+                <a:r>
+                  <a:rPr lang="en-DE">
+                    <a:noFill/>
+                  </a:rPr>
+                  <a:t> </a:t>
+                </a:r>
+              </a:p>
+            </p:txBody>
+          </p:sp>
+        </mc:Fallback>
+      </mc:AlternateContent>
+      <p:sp>
+        <p:nvSpPr>
+          <p:cNvPr id="83" name="TextBox 82">
+            <a:extLst>
+              <a:ext uri="{FF2B5EF4-FFF2-40B4-BE49-F238E27FC236}">
+                <a16:creationId xmlns:a16="http://schemas.microsoft.com/office/drawing/2014/main" id="{8441F766-7D4A-4540-B15B-88D04112E9D6}"/>
+              </a:ext>
+            </a:extLst>
+          </p:cNvPr>
+          <p:cNvSpPr txBox="1"/>
+          <p:nvPr/>
+        </p:nvSpPr>
+        <p:spPr>
+          <a:xfrm>
+            <a:off x="10211718" y="2285746"/>
+            <a:ext cx="349455" cy="215444"/>
+          </a:xfrm>
+          <a:prstGeom prst="rect">
+            <a:avLst/>
+          </a:prstGeom>
+          <a:noFill/>
+        </p:spPr>
+        <p:txBody>
+          <a:bodyPr wrap="none" lIns="0" tIns="0" rIns="0" bIns="0" rtlCol="0">
+            <a:spAutoFit/>
+          </a:bodyPr>
+          <a:lstStyle/>
+          <a:p>
+            <a:r>
+              <a:rPr lang="en-DE" sz="1400" dirty="0">
+                <a:latin typeface="Roboto Light" panose="02000000000000000000" pitchFamily="2" charset="0"/>
+                <a:ea typeface="Roboto Light" panose="02000000000000000000" pitchFamily="2" charset="0"/>
+              </a:rPr>
+              <a:t>time</a:t>
+            </a:r>
           </a:p>
         </p:txBody>
       </p:sp>
     </p:spTree>
     <p:extLst>
       <p:ext uri="{BB962C8B-B14F-4D97-AF65-F5344CB8AC3E}">
-        <p14:creationId xmlns:p14="http://schemas.microsoft.com/office/powerpoint/2010/main" val="3631316184"/>
+        <p14:creationId xmlns:p14="http://schemas.microsoft.com/office/powerpoint/2010/main" val="3091447427"/>
       </p:ext>
     </p:extLst>
   </p:cSld>
